--- a/barunjase_week4.pptx
+++ b/barunjase_week4.pptx
@@ -14,10 +14,9 @@
     <p:sldId id="262" r:id="rId8"/>
     <p:sldId id="263" r:id="rId9"/>
     <p:sldId id="264" r:id="rId10"/>
-    <p:sldId id="265" r:id="rId11"/>
   </p:sldIdLst>
   <p:notesMasterIdLst>
-    <p:notesMasterId r:id="rId12"/>
+    <p:notesMasterId r:id="rId11"/>
   </p:notesMasterIdLst>
   <p:sldSz cx="12192000" cy="6858000"/>
   <p:notesSz cx="6858000" cy="12192000"/>
@@ -535,94 +534,6 @@
             <a:fld id="{F7021451-1387-4CA6-816F-3879F97B5CBC}" type="slidenum">
               <a:rPr lang="en-US"/>
               <a:t>1</a:t>
-            </a:fld>
-            <a:endParaRPr lang="en-US"/>
-          </a:p>
-        </p:txBody>
-      </p:sp>
-    </p:spTree>
-    <p:extLst>
-      <p:ext uri="{BB962C8B-B14F-4D97-AF65-F5344CB8AC3E}">
-        <p14:creationId xmlns:p14="http://schemas.microsoft.com/office/powerpoint/2010/main" val="1024086991"/>
-      </p:ext>
-    </p:extLst>
-  </p:cSld>
-  <p:clrMapOvr>
-    <a:masterClrMapping/>
-  </p:clrMapOvr>
-</p:notes>
-</file>
-
-<file path=ppt/notesSlides/notesSlide10.xml><?xml version="1.0" encoding="utf-8"?>
-<p:notes xmlns:a="http://schemas.openxmlformats.org/drawingml/2006/main" xmlns:r="http://schemas.openxmlformats.org/officeDocument/2006/relationships" xmlns:p="http://schemas.openxmlformats.org/presentationml/2006/main">
-  <p:cSld>
-    <p:spTree>
-      <p:nvGrpSpPr>
-        <p:cNvPr id="1" name=""/>
-        <p:cNvGrpSpPr/>
-        <p:nvPr/>
-      </p:nvGrpSpPr>
-      <p:grpSpPr>
-        <a:xfrm>
-          <a:off x="0" y="0"/>
-          <a:ext cx="0" cy="0"/>
-          <a:chOff x="0" y="0"/>
-          <a:chExt cx="0" cy="0"/>
-        </a:xfrm>
-      </p:grpSpPr>
-      <p:sp>
-        <p:nvSpPr>
-          <p:cNvPr id="2" name="Slide Image Placeholder 1"/>
-          <p:cNvSpPr>
-            <a:spLocks noGrp="1" noRot="1" noChangeAspect="1"/>
-          </p:cNvSpPr>
-          <p:nvPr>
-            <p:ph type="sldImg"/>
-          </p:nvPr>
-        </p:nvSpPr>
-        <p:spPr/>
-      </p:sp>
-      <p:sp>
-        <p:nvSpPr>
-          <p:cNvPr id="3" name="Notes Placeholder 2"/>
-          <p:cNvSpPr>
-            <a:spLocks noGrp="1"/>
-          </p:cNvSpPr>
-          <p:nvPr>
-            <p:ph type="body" idx="1"/>
-          </p:nvPr>
-        </p:nvSpPr>
-        <p:spPr/>
-        <p:txBody>
-          <a:bodyPr/>
-          <a:lstStyle/>
-          <a:p>
-            <a:r>
-              <a:rPr lang="en-US" dirty="0"/>
-              <a:t/>
-            </a:r>
-            <a:endParaRPr lang="en-US" dirty="0"/>
-          </a:p>
-        </p:txBody>
-      </p:sp>
-      <p:sp>
-        <p:nvSpPr>
-          <p:cNvPr id="4" name="Slide Number Placeholder 3"/>
-          <p:cNvSpPr>
-            <a:spLocks noGrp="1"/>
-          </p:cNvSpPr>
-          <p:nvPr>
-            <p:ph type="sldNum" sz="quarter" idx="10"/>
-          </p:nvPr>
-        </p:nvSpPr>
-        <p:spPr/>
-        <p:txBody>
-          <a:bodyPr/>
-          <a:lstStyle/>
-          <a:p>
-            <a:fld id="{F7021451-1387-4CA6-816F-3879F97B5CBC}" type="slidenum">
-              <a:rPr lang="en-US"/>
-              <a:t>10</a:t>
             </a:fld>
             <a:endParaRPr lang="en-US"/>
           </a:p>
@@ -1991,933 +1902,6 @@
 </p:sld>
 </file>
 
-<file path=ppt/slides/slide10.xml><?xml version="1.0" encoding="utf-8"?>
-<p:sld xmlns:a="http://schemas.openxmlformats.org/drawingml/2006/main" xmlns:r="http://schemas.openxmlformats.org/officeDocument/2006/relationships" xmlns:p="http://schemas.openxmlformats.org/presentationml/2006/main">
-  <p:cSld name="Slide 10">
-    <p:bg>
-      <p:bgPr>
-        <a:blipFill dpi="0" rotWithShape="1">
-          <a:blip r:embed="rId1">
-            <a:lum/>
-          </a:blip>
-          <a:srcRect/>
-          <a:stretch>
-            <a:fillRect/>
-          </a:stretch>
-        </a:blipFill>
-        <a:effectLst/>
-      </p:bgPr>
-    </p:bg>
-    <p:spTree>
-      <p:nvGrpSpPr>
-        <p:cNvPr id="1" name=""/>
-        <p:cNvGrpSpPr/>
-        <p:nvPr/>
-      </p:nvGrpSpPr>
-      <p:grpSpPr>
-        <a:xfrm>
-          <a:off x="0" y="0"/>
-          <a:ext cx="0" cy="0"/>
-          <a:chOff x="0" y="0"/>
-          <a:chExt cx="0" cy="0"/>
-        </a:xfrm>
-      </p:grpSpPr>
-      <p:sp>
-        <p:nvSpPr>
-          <p:cNvPr id="2" name="Text 0"/>
-          <p:cNvSpPr txBox="1"/>
-          <p:nvPr/>
-        </p:nvSpPr>
-        <p:spPr>
-          <a:xfrm>
-            <a:off x="640080" y="384048"/>
-            <a:ext cx="8229600" cy="320040"/>
-          </a:xfrm>
-          <a:prstGeom prst="rect">
-            <a:avLst/>
-          </a:prstGeom>
-          <a:noFill/>
-          <a:ln/>
-        </p:spPr>
-        <p:txBody>
-          <a:bodyPr wrap="square" lIns="0" tIns="0" rIns="0" bIns="0" rtlCol="0" anchor="ctr"/>
-          <a:lstStyle/>
-          <a:p>
-            <a:pPr indent="0" marL="0">
-              <a:buNone/>
-            </a:pPr>
-            <a:r>
-              <a:rPr lang="en-US" sz="1200" b="1" spc="200" kern="0" dirty="0">
-                <a:solidFill>
-                  <a:srgbClr val="2FE0C4"/>
-                </a:solidFill>
-                <a:latin typeface="Calibri" pitchFamily="34" charset="0"/>
-                <a:ea typeface="Calibri" pitchFamily="34" charset="-122"/>
-                <a:cs typeface="Calibri" pitchFamily="34" charset="-120"/>
-              </a:rPr>
-              <a:t>SOURCES</a:t>
-            </a:r>
-            <a:endParaRPr lang="en-US" sz="1200" dirty="0"/>
-          </a:p>
-        </p:txBody>
-      </p:sp>
-      <p:sp>
-        <p:nvSpPr>
-          <p:cNvPr id="3" name="Text 1"/>
-          <p:cNvSpPr txBox="1"/>
-          <p:nvPr/>
-        </p:nvSpPr>
-        <p:spPr>
-          <a:xfrm>
-            <a:off x="640080" y="685800"/>
-            <a:ext cx="10881360" cy="822960"/>
-          </a:xfrm>
-          <a:prstGeom prst="rect">
-            <a:avLst/>
-          </a:prstGeom>
-          <a:noFill/>
-          <a:ln/>
-        </p:spPr>
-        <p:txBody>
-          <a:bodyPr wrap="square" lIns="0" tIns="0" rIns="0" bIns="0" rtlCol="0" anchor="ctr"/>
-          <a:lstStyle/>
-          <a:p>
-            <a:pPr indent="0" marL="0">
-              <a:buNone/>
-            </a:pPr>
-            <a:r>
-              <a:rPr lang="en-US" sz="2700" b="1" dirty="0">
-                <a:solidFill>
-                  <a:srgbClr val="EAF3F1"/>
-                </a:solidFill>
-                <a:latin typeface="Arial" pitchFamily="34" charset="0"/>
-                <a:ea typeface="Arial" pitchFamily="34" charset="-122"/>
-                <a:cs typeface="Arial" pitchFamily="34" charset="-120"/>
-              </a:rPr>
-              <a:t>참고 자료</a:t>
-            </a:r>
-            <a:endParaRPr lang="en-US" sz="2700" dirty="0"/>
-          </a:p>
-        </p:txBody>
-      </p:sp>
-      <p:sp>
-        <p:nvSpPr>
-          <p:cNvPr id="4" name="Shape 2"/>
-          <p:cNvSpPr/>
-          <p:nvPr/>
-        </p:nvSpPr>
-        <p:spPr>
-          <a:xfrm>
-            <a:off x="640080" y="1600200"/>
-            <a:ext cx="10908792" cy="594360"/>
-          </a:xfrm>
-          <a:prstGeom prst="roundRect">
-            <a:avLst>
-              <a:gd name="adj" fmla="val 12308"/>
-            </a:avLst>
-          </a:prstGeom>
-          <a:solidFill>
-            <a:srgbClr val="FFFFFF"/>
-          </a:solidFill>
-          <a:ln/>
-        </p:spPr>
-      </p:sp>
-      <p:sp>
-        <p:nvSpPr>
-          <p:cNvPr id="5" name="Shape 3"/>
-          <p:cNvSpPr/>
-          <p:nvPr/>
-        </p:nvSpPr>
-        <p:spPr>
-          <a:xfrm>
-            <a:off x="777240" y="1719072"/>
-            <a:ext cx="384048" cy="365760"/>
-          </a:xfrm>
-          <a:prstGeom prst="roundRect">
-            <a:avLst>
-              <a:gd name="adj" fmla="val 17500"/>
-            </a:avLst>
-          </a:prstGeom>
-          <a:solidFill>
-            <a:srgbClr val="E9FBF7"/>
-          </a:solidFill>
-          <a:ln/>
-        </p:spPr>
-      </p:sp>
-      <p:sp>
-        <p:nvSpPr>
-          <p:cNvPr id="6" name="Text 4"/>
-          <p:cNvSpPr txBox="1"/>
-          <p:nvPr/>
-        </p:nvSpPr>
-        <p:spPr>
-          <a:xfrm>
-            <a:off x="777240" y="1719072"/>
-            <a:ext cx="384048" cy="365760"/>
-          </a:xfrm>
-          <a:prstGeom prst="rect">
-            <a:avLst/>
-          </a:prstGeom>
-          <a:noFill/>
-          <a:ln/>
-        </p:spPr>
-        <p:txBody>
-          <a:bodyPr wrap="square" lIns="0" tIns="0" rIns="0" bIns="0" rtlCol="0" anchor="ctr"/>
-          <a:lstStyle/>
-          <a:p>
-            <a:pPr algn="ctr" indent="0" marL="0">
-              <a:buNone/>
-            </a:pPr>
-            <a:r>
-              <a:rPr lang="en-US" sz="1150" b="1" dirty="0">
-                <a:solidFill>
-                  <a:srgbClr val="12655A"/>
-                </a:solidFill>
-                <a:latin typeface="Calibri" pitchFamily="34" charset="0"/>
-                <a:ea typeface="Calibri" pitchFamily="34" charset="-122"/>
-                <a:cs typeface="Calibri" pitchFamily="34" charset="-120"/>
-              </a:rPr>
-              <a:t>01</a:t>
-            </a:r>
-            <a:endParaRPr lang="en-US" sz="1150" dirty="0"/>
-          </a:p>
-        </p:txBody>
-      </p:sp>
-      <p:sp>
-        <p:nvSpPr>
-          <p:cNvPr id="7" name="Text 5"/>
-          <p:cNvSpPr txBox="1"/>
-          <p:nvPr/>
-        </p:nvSpPr>
-        <p:spPr>
-          <a:xfrm>
-            <a:off x="1325880" y="1600200"/>
-            <a:ext cx="9966960" cy="594360"/>
-          </a:xfrm>
-          <a:prstGeom prst="rect">
-            <a:avLst/>
-          </a:prstGeom>
-          <a:noFill/>
-          <a:ln/>
-        </p:spPr>
-        <p:txBody>
-          <a:bodyPr wrap="square" lIns="0" tIns="0" rIns="0" bIns="0" rtlCol="0" anchor="ctr"/>
-          <a:lstStyle/>
-          <a:p>
-            <a:pPr indent="0" marL="0">
-              <a:buNone/>
-            </a:pPr>
-            <a:r>
-              <a:rPr lang="en-US" sz="1200" dirty="0">
-                <a:solidFill>
-                  <a:srgbClr val="16262E"/>
-                </a:solidFill>
-                <a:latin typeface="Calibri" pitchFamily="34" charset="0"/>
-                <a:ea typeface="Calibri" pitchFamily="34" charset="-122"/>
-                <a:cs typeface="Calibri" pitchFamily="34" charset="-120"/>
-              </a:rPr>
-              <a:t>project.md — 전체 프로젝트 계획 (이번 주 업데이트 반영 최신본)</a:t>
-            </a:r>
-            <a:endParaRPr lang="en-US" sz="1200" dirty="0"/>
-          </a:p>
-        </p:txBody>
-      </p:sp>
-      <p:sp>
-        <p:nvSpPr>
-          <p:cNvPr id="8" name="Shape 6"/>
-          <p:cNvSpPr/>
-          <p:nvPr/>
-        </p:nvSpPr>
-        <p:spPr>
-          <a:xfrm>
-            <a:off x="640080" y="2313432"/>
-            <a:ext cx="10908792" cy="594360"/>
-          </a:xfrm>
-          <a:prstGeom prst="roundRect">
-            <a:avLst>
-              <a:gd name="adj" fmla="val 12308"/>
-            </a:avLst>
-          </a:prstGeom>
-          <a:solidFill>
-            <a:srgbClr val="FFFFFF"/>
-          </a:solidFill>
-          <a:ln/>
-        </p:spPr>
-      </p:sp>
-      <p:sp>
-        <p:nvSpPr>
-          <p:cNvPr id="9" name="Shape 7"/>
-          <p:cNvSpPr/>
-          <p:nvPr/>
-        </p:nvSpPr>
-        <p:spPr>
-          <a:xfrm>
-            <a:off x="777240" y="2432304"/>
-            <a:ext cx="384048" cy="365760"/>
-          </a:xfrm>
-          <a:prstGeom prst="roundRect">
-            <a:avLst>
-              <a:gd name="adj" fmla="val 17500"/>
-            </a:avLst>
-          </a:prstGeom>
-          <a:solidFill>
-            <a:srgbClr val="E9FBF7"/>
-          </a:solidFill>
-          <a:ln/>
-        </p:spPr>
-      </p:sp>
-      <p:sp>
-        <p:nvSpPr>
-          <p:cNvPr id="10" name="Text 8"/>
-          <p:cNvSpPr txBox="1"/>
-          <p:nvPr/>
-        </p:nvSpPr>
-        <p:spPr>
-          <a:xfrm>
-            <a:off x="777240" y="2432304"/>
-            <a:ext cx="384048" cy="365760"/>
-          </a:xfrm>
-          <a:prstGeom prst="rect">
-            <a:avLst/>
-          </a:prstGeom>
-          <a:noFill/>
-          <a:ln/>
-        </p:spPr>
-        <p:txBody>
-          <a:bodyPr wrap="square" lIns="0" tIns="0" rIns="0" bIns="0" rtlCol="0" anchor="ctr"/>
-          <a:lstStyle/>
-          <a:p>
-            <a:pPr algn="ctr" indent="0" marL="0">
-              <a:buNone/>
-            </a:pPr>
-            <a:r>
-              <a:rPr lang="en-US" sz="1150" b="1" dirty="0">
-                <a:solidFill>
-                  <a:srgbClr val="12655A"/>
-                </a:solidFill>
-                <a:latin typeface="Calibri" pitchFamily="34" charset="0"/>
-                <a:ea typeface="Calibri" pitchFamily="34" charset="-122"/>
-                <a:cs typeface="Calibri" pitchFamily="34" charset="-120"/>
-              </a:rPr>
-              <a:t>02</a:t>
-            </a:r>
-            <a:endParaRPr lang="en-US" sz="1150" dirty="0"/>
-          </a:p>
-        </p:txBody>
-      </p:sp>
-      <p:sp>
-        <p:nvSpPr>
-          <p:cNvPr id="11" name="Text 9"/>
-          <p:cNvSpPr txBox="1"/>
-          <p:nvPr/>
-        </p:nvSpPr>
-        <p:spPr>
-          <a:xfrm>
-            <a:off x="1325880" y="2313432"/>
-            <a:ext cx="9966960" cy="594360"/>
-          </a:xfrm>
-          <a:prstGeom prst="rect">
-            <a:avLst/>
-          </a:prstGeom>
-          <a:noFill/>
-          <a:ln/>
-        </p:spPr>
-        <p:txBody>
-          <a:bodyPr wrap="square" lIns="0" tIns="0" rIns="0" bIns="0" rtlCol="0" anchor="ctr"/>
-          <a:lstStyle/>
-          <a:p>
-            <a:pPr indent="0" marL="0">
-              <a:buNone/>
-            </a:pPr>
-            <a:r>
-              <a:rPr lang="en-US" sz="1200" dirty="0">
-                <a:solidFill>
-                  <a:srgbClr val="16262E"/>
-                </a:solidFill>
-                <a:latin typeface="Calibri" pitchFamily="34" charset="0"/>
-                <a:ea typeface="Calibri" pitchFamily="34" charset="-122"/>
-                <a:cs typeface="Calibri" pitchFamily="34" charset="-120"/>
-              </a:rPr>
-              <a:t>data_collection_protocol.md — 자세 5종 정의·촬영/라벨링 절차</a:t>
-            </a:r>
-            <a:endParaRPr lang="en-US" sz="1200" dirty="0"/>
-          </a:p>
-        </p:txBody>
-      </p:sp>
-      <p:sp>
-        <p:nvSpPr>
-          <p:cNvPr id="12" name="Shape 10"/>
-          <p:cNvSpPr/>
-          <p:nvPr/>
-        </p:nvSpPr>
-        <p:spPr>
-          <a:xfrm>
-            <a:off x="640080" y="3026664"/>
-            <a:ext cx="10908792" cy="594360"/>
-          </a:xfrm>
-          <a:prstGeom prst="roundRect">
-            <a:avLst>
-              <a:gd name="adj" fmla="val 12308"/>
-            </a:avLst>
-          </a:prstGeom>
-          <a:solidFill>
-            <a:srgbClr val="FFFFFF"/>
-          </a:solidFill>
-          <a:ln/>
-        </p:spPr>
-      </p:sp>
-      <p:sp>
-        <p:nvSpPr>
-          <p:cNvPr id="13" name="Shape 11"/>
-          <p:cNvSpPr/>
-          <p:nvPr/>
-        </p:nvSpPr>
-        <p:spPr>
-          <a:xfrm>
-            <a:off x="777240" y="3145536"/>
-            <a:ext cx="384048" cy="365760"/>
-          </a:xfrm>
-          <a:prstGeom prst="roundRect">
-            <a:avLst>
-              <a:gd name="adj" fmla="val 17500"/>
-            </a:avLst>
-          </a:prstGeom>
-          <a:solidFill>
-            <a:srgbClr val="E9FBF7"/>
-          </a:solidFill>
-          <a:ln/>
-        </p:spPr>
-      </p:sp>
-      <p:sp>
-        <p:nvSpPr>
-          <p:cNvPr id="14" name="Text 12"/>
-          <p:cNvSpPr txBox="1"/>
-          <p:nvPr/>
-        </p:nvSpPr>
-        <p:spPr>
-          <a:xfrm>
-            <a:off x="777240" y="3145536"/>
-            <a:ext cx="384048" cy="365760"/>
-          </a:xfrm>
-          <a:prstGeom prst="rect">
-            <a:avLst/>
-          </a:prstGeom>
-          <a:noFill/>
-          <a:ln/>
-        </p:spPr>
-        <p:txBody>
-          <a:bodyPr wrap="square" lIns="0" tIns="0" rIns="0" bIns="0" rtlCol="0" anchor="ctr"/>
-          <a:lstStyle/>
-          <a:p>
-            <a:pPr algn="ctr" indent="0" marL="0">
-              <a:buNone/>
-            </a:pPr>
-            <a:r>
-              <a:rPr lang="en-US" sz="1150" b="1" dirty="0">
-                <a:solidFill>
-                  <a:srgbClr val="12655A"/>
-                </a:solidFill>
-                <a:latin typeface="Calibri" pitchFamily="34" charset="0"/>
-                <a:ea typeface="Calibri" pitchFamily="34" charset="-122"/>
-                <a:cs typeface="Calibri" pitchFamily="34" charset="-120"/>
-              </a:rPr>
-              <a:t>03</a:t>
-            </a:r>
-            <a:endParaRPr lang="en-US" sz="1150" dirty="0"/>
-          </a:p>
-        </p:txBody>
-      </p:sp>
-      <p:sp>
-        <p:nvSpPr>
-          <p:cNvPr id="15" name="Text 13"/>
-          <p:cNvSpPr txBox="1"/>
-          <p:nvPr/>
-        </p:nvSpPr>
-        <p:spPr>
-          <a:xfrm>
-            <a:off x="1325880" y="3026664"/>
-            <a:ext cx="9966960" cy="594360"/>
-          </a:xfrm>
-          <a:prstGeom prst="rect">
-            <a:avLst/>
-          </a:prstGeom>
-          <a:noFill/>
-          <a:ln/>
-        </p:spPr>
-        <p:txBody>
-          <a:bodyPr wrap="square" lIns="0" tIns="0" rIns="0" bIns="0" rtlCol="0" anchor="ctr"/>
-          <a:lstStyle/>
-          <a:p>
-            <a:pPr indent="0" marL="0">
-              <a:buNone/>
-            </a:pPr>
-            <a:r>
-              <a:rPr lang="en-US" sz="1200" dirty="0">
-                <a:solidFill>
-                  <a:srgbClr val="16262E"/>
-                </a:solidFill>
-                <a:latin typeface="Calibri" pitchFamily="34" charset="0"/>
-                <a:ea typeface="Calibri" pitchFamily="34" charset="-122"/>
-                <a:cs typeface="Calibri" pitchFamily="34" charset="-120"/>
-              </a:rPr>
-              <a:t>src/capture/realsense_capture.py — RealSense 캡처·게이트 측정 코드</a:t>
-            </a:r>
-            <a:endParaRPr lang="en-US" sz="1200" dirty="0"/>
-          </a:p>
-        </p:txBody>
-      </p:sp>
-      <p:sp>
-        <p:nvSpPr>
-          <p:cNvPr id="16" name="Shape 14"/>
-          <p:cNvSpPr/>
-          <p:nvPr/>
-        </p:nvSpPr>
-        <p:spPr>
-          <a:xfrm>
-            <a:off x="640080" y="3739896"/>
-            <a:ext cx="10908792" cy="594360"/>
-          </a:xfrm>
-          <a:prstGeom prst="roundRect">
-            <a:avLst>
-              <a:gd name="adj" fmla="val 12308"/>
-            </a:avLst>
-          </a:prstGeom>
-          <a:solidFill>
-            <a:srgbClr val="FFFFFF"/>
-          </a:solidFill>
-          <a:ln/>
-        </p:spPr>
-      </p:sp>
-      <p:sp>
-        <p:nvSpPr>
-          <p:cNvPr id="17" name="Shape 15"/>
-          <p:cNvSpPr/>
-          <p:nvPr/>
-        </p:nvSpPr>
-        <p:spPr>
-          <a:xfrm>
-            <a:off x="777240" y="3858768"/>
-            <a:ext cx="384048" cy="365760"/>
-          </a:xfrm>
-          <a:prstGeom prst="roundRect">
-            <a:avLst>
-              <a:gd name="adj" fmla="val 17500"/>
-            </a:avLst>
-          </a:prstGeom>
-          <a:solidFill>
-            <a:srgbClr val="E9FBF7"/>
-          </a:solidFill>
-          <a:ln/>
-        </p:spPr>
-      </p:sp>
-      <p:sp>
-        <p:nvSpPr>
-          <p:cNvPr id="18" name="Text 16"/>
-          <p:cNvSpPr txBox="1"/>
-          <p:nvPr/>
-        </p:nvSpPr>
-        <p:spPr>
-          <a:xfrm>
-            <a:off x="777240" y="3858768"/>
-            <a:ext cx="384048" cy="365760"/>
-          </a:xfrm>
-          <a:prstGeom prst="rect">
-            <a:avLst/>
-          </a:prstGeom>
-          <a:noFill/>
-          <a:ln/>
-        </p:spPr>
-        <p:txBody>
-          <a:bodyPr wrap="square" lIns="0" tIns="0" rIns="0" bIns="0" rtlCol="0" anchor="ctr"/>
-          <a:lstStyle/>
-          <a:p>
-            <a:pPr algn="ctr" indent="0" marL="0">
-              <a:buNone/>
-            </a:pPr>
-            <a:r>
-              <a:rPr lang="en-US" sz="1150" b="1" dirty="0">
-                <a:solidFill>
-                  <a:srgbClr val="12655A"/>
-                </a:solidFill>
-                <a:latin typeface="Calibri" pitchFamily="34" charset="0"/>
-                <a:ea typeface="Calibri" pitchFamily="34" charset="-122"/>
-                <a:cs typeface="Calibri" pitchFamily="34" charset="-120"/>
-              </a:rPr>
-              <a:t>04</a:t>
-            </a:r>
-            <a:endParaRPr lang="en-US" sz="1150" dirty="0"/>
-          </a:p>
-        </p:txBody>
-      </p:sp>
-      <p:sp>
-        <p:nvSpPr>
-          <p:cNvPr id="19" name="Text 17"/>
-          <p:cNvSpPr txBox="1"/>
-          <p:nvPr/>
-        </p:nvSpPr>
-        <p:spPr>
-          <a:xfrm>
-            <a:off x="1325880" y="3739896"/>
-            <a:ext cx="9966960" cy="594360"/>
-          </a:xfrm>
-          <a:prstGeom prst="rect">
-            <a:avLst/>
-          </a:prstGeom>
-          <a:noFill/>
-          <a:ln/>
-        </p:spPr>
-        <p:txBody>
-          <a:bodyPr wrap="square" lIns="0" tIns="0" rIns="0" bIns="0" rtlCol="0" anchor="ctr"/>
-          <a:lstStyle/>
-          <a:p>
-            <a:pPr indent="0" marL="0">
-              <a:buNone/>
-            </a:pPr>
-            <a:r>
-              <a:rPr lang="en-US" sz="1200" dirty="0">
-                <a:solidFill>
-                  <a:srgbClr val="16262E"/>
-                </a:solidFill>
-                <a:latin typeface="Calibri" pitchFamily="34" charset="0"/>
-                <a:ea typeface="Calibri" pitchFamily="34" charset="-122"/>
-                <a:cs typeface="Calibri" pitchFamily="34" charset="-120"/>
-              </a:rPr>
-              <a:t>src/logic/rf_baseline.py, tests/test_rf_baseline.py — RF 기준모델 스켈레톤</a:t>
-            </a:r>
-            <a:endParaRPr lang="en-US" sz="1200" dirty="0"/>
-          </a:p>
-        </p:txBody>
-      </p:sp>
-      <p:sp>
-        <p:nvSpPr>
-          <p:cNvPr id="20" name="Shape 18"/>
-          <p:cNvSpPr/>
-          <p:nvPr/>
-        </p:nvSpPr>
-        <p:spPr>
-          <a:xfrm>
-            <a:off x="640080" y="4453128"/>
-            <a:ext cx="10908792" cy="594360"/>
-          </a:xfrm>
-          <a:prstGeom prst="roundRect">
-            <a:avLst>
-              <a:gd name="adj" fmla="val 12308"/>
-            </a:avLst>
-          </a:prstGeom>
-          <a:solidFill>
-            <a:srgbClr val="FFFFFF"/>
-          </a:solidFill>
-          <a:ln/>
-        </p:spPr>
-      </p:sp>
-      <p:sp>
-        <p:nvSpPr>
-          <p:cNvPr id="21" name="Shape 19"/>
-          <p:cNvSpPr/>
-          <p:nvPr/>
-        </p:nvSpPr>
-        <p:spPr>
-          <a:xfrm>
-            <a:off x="777240" y="4572000"/>
-            <a:ext cx="384048" cy="365760"/>
-          </a:xfrm>
-          <a:prstGeom prst="roundRect">
-            <a:avLst>
-              <a:gd name="adj" fmla="val 17500"/>
-            </a:avLst>
-          </a:prstGeom>
-          <a:solidFill>
-            <a:srgbClr val="E9FBF7"/>
-          </a:solidFill>
-          <a:ln/>
-        </p:spPr>
-      </p:sp>
-      <p:sp>
-        <p:nvSpPr>
-          <p:cNvPr id="22" name="Text 20"/>
-          <p:cNvSpPr txBox="1"/>
-          <p:nvPr/>
-        </p:nvSpPr>
-        <p:spPr>
-          <a:xfrm>
-            <a:off x="777240" y="4572000"/>
-            <a:ext cx="384048" cy="365760"/>
-          </a:xfrm>
-          <a:prstGeom prst="rect">
-            <a:avLst/>
-          </a:prstGeom>
-          <a:noFill/>
-          <a:ln/>
-        </p:spPr>
-        <p:txBody>
-          <a:bodyPr wrap="square" lIns="0" tIns="0" rIns="0" bIns="0" rtlCol="0" anchor="ctr"/>
-          <a:lstStyle/>
-          <a:p>
-            <a:pPr algn="ctr" indent="0" marL="0">
-              <a:buNone/>
-            </a:pPr>
-            <a:r>
-              <a:rPr lang="en-US" sz="1150" b="1" dirty="0">
-                <a:solidFill>
-                  <a:srgbClr val="12655A"/>
-                </a:solidFill>
-                <a:latin typeface="Calibri" pitchFamily="34" charset="0"/>
-                <a:ea typeface="Calibri" pitchFamily="34" charset="-122"/>
-                <a:cs typeface="Calibri" pitchFamily="34" charset="-120"/>
-              </a:rPr>
-              <a:t>05</a:t>
-            </a:r>
-            <a:endParaRPr lang="en-US" sz="1150" dirty="0"/>
-          </a:p>
-        </p:txBody>
-      </p:sp>
-      <p:sp>
-        <p:nvSpPr>
-          <p:cNvPr id="23" name="Text 21"/>
-          <p:cNvSpPr txBox="1"/>
-          <p:nvPr/>
-        </p:nvSpPr>
-        <p:spPr>
-          <a:xfrm>
-            <a:off x="1325880" y="4453128"/>
-            <a:ext cx="9966960" cy="594360"/>
-          </a:xfrm>
-          <a:prstGeom prst="rect">
-            <a:avLst/>
-          </a:prstGeom>
-          <a:noFill/>
-          <a:ln/>
-        </p:spPr>
-        <p:txBody>
-          <a:bodyPr wrap="square" lIns="0" tIns="0" rIns="0" bIns="0" rtlCol="0" anchor="ctr"/>
-          <a:lstStyle/>
-          <a:p>
-            <a:pPr indent="0" marL="0">
-              <a:buNone/>
-            </a:pPr>
-            <a:r>
-              <a:rPr lang="en-US" sz="1200" dirty="0">
-                <a:solidFill>
-                  <a:srgbClr val="16262E"/>
-                </a:solidFill>
-                <a:latin typeface="Calibri" pitchFamily="34" charset="0"/>
-                <a:ea typeface="Calibri" pitchFamily="34" charset="-122"/>
-                <a:cs typeface="Calibri" pitchFamily="34" charset="-120"/>
-              </a:rPr>
-              <a:t>experiments/wrf_paper_replication.py — WRF 논문 데이터 파이프라인 검증</a:t>
-            </a:r>
-            <a:endParaRPr lang="en-US" sz="1200" dirty="0"/>
-          </a:p>
-        </p:txBody>
-      </p:sp>
-      <p:sp>
-        <p:nvSpPr>
-          <p:cNvPr id="24" name="Shape 22"/>
-          <p:cNvSpPr/>
-          <p:nvPr/>
-        </p:nvSpPr>
-        <p:spPr>
-          <a:xfrm>
-            <a:off x="640080" y="5166360"/>
-            <a:ext cx="10908792" cy="594360"/>
-          </a:xfrm>
-          <a:prstGeom prst="roundRect">
-            <a:avLst>
-              <a:gd name="adj" fmla="val 12308"/>
-            </a:avLst>
-          </a:prstGeom>
-          <a:solidFill>
-            <a:srgbClr val="FFFFFF"/>
-          </a:solidFill>
-          <a:ln/>
-        </p:spPr>
-      </p:sp>
-      <p:sp>
-        <p:nvSpPr>
-          <p:cNvPr id="25" name="Shape 23"/>
-          <p:cNvSpPr/>
-          <p:nvPr/>
-        </p:nvSpPr>
-        <p:spPr>
-          <a:xfrm>
-            <a:off x="777240" y="5285232"/>
-            <a:ext cx="384048" cy="365760"/>
-          </a:xfrm>
-          <a:prstGeom prst="roundRect">
-            <a:avLst>
-              <a:gd name="adj" fmla="val 17500"/>
-            </a:avLst>
-          </a:prstGeom>
-          <a:solidFill>
-            <a:srgbClr val="E9FBF7"/>
-          </a:solidFill>
-          <a:ln/>
-        </p:spPr>
-      </p:sp>
-      <p:sp>
-        <p:nvSpPr>
-          <p:cNvPr id="26" name="Text 24"/>
-          <p:cNvSpPr txBox="1"/>
-          <p:nvPr/>
-        </p:nvSpPr>
-        <p:spPr>
-          <a:xfrm>
-            <a:off x="777240" y="5285232"/>
-            <a:ext cx="384048" cy="365760"/>
-          </a:xfrm>
-          <a:prstGeom prst="rect">
-            <a:avLst/>
-          </a:prstGeom>
-          <a:noFill/>
-          <a:ln/>
-        </p:spPr>
-        <p:txBody>
-          <a:bodyPr wrap="square" lIns="0" tIns="0" rIns="0" bIns="0" rtlCol="0" anchor="ctr"/>
-          <a:lstStyle/>
-          <a:p>
-            <a:pPr algn="ctr" indent="0" marL="0">
-              <a:buNone/>
-            </a:pPr>
-            <a:r>
-              <a:rPr lang="en-US" sz="1150" b="1" dirty="0">
-                <a:solidFill>
-                  <a:srgbClr val="12655A"/>
-                </a:solidFill>
-                <a:latin typeface="Calibri" pitchFamily="34" charset="0"/>
-                <a:ea typeface="Calibri" pitchFamily="34" charset="-122"/>
-                <a:cs typeface="Calibri" pitchFamily="34" charset="-120"/>
-              </a:rPr>
-              <a:t>06</a:t>
-            </a:r>
-            <a:endParaRPr lang="en-US" sz="1150" dirty="0"/>
-          </a:p>
-        </p:txBody>
-      </p:sp>
-      <p:sp>
-        <p:nvSpPr>
-          <p:cNvPr id="27" name="Text 25"/>
-          <p:cNvSpPr txBox="1"/>
-          <p:nvPr/>
-        </p:nvSpPr>
-        <p:spPr>
-          <a:xfrm>
-            <a:off x="1325880" y="5166360"/>
-            <a:ext cx="9966960" cy="594360"/>
-          </a:xfrm>
-          <a:prstGeom prst="rect">
-            <a:avLst/>
-          </a:prstGeom>
-          <a:noFill/>
-          <a:ln/>
-        </p:spPr>
-        <p:txBody>
-          <a:bodyPr wrap="square" lIns="0" tIns="0" rIns="0" bIns="0" rtlCol="0" anchor="ctr"/>
-          <a:lstStyle/>
-          <a:p>
-            <a:pPr indent="0" marL="0">
-              <a:buNone/>
-            </a:pPr>
-            <a:r>
-              <a:rPr lang="en-US" sz="1200" dirty="0">
-                <a:solidFill>
-                  <a:srgbClr val="16262E"/>
-                </a:solidFill>
-                <a:latin typeface="Calibri" pitchFamily="34" charset="0"/>
-                <a:ea typeface="Calibri" pitchFamily="34" charset="-122"/>
-                <a:cs typeface="Calibri" pitchFamily="34" charset="-120"/>
-              </a:rPr>
-              <a:t>weekly_report_week4.md — 4주차 상세 진행보고서</a:t>
-            </a:r>
-            <a:endParaRPr lang="en-US" sz="1200" dirty="0"/>
-          </a:p>
-        </p:txBody>
-      </p:sp>
-      <p:sp>
-        <p:nvSpPr>
-          <p:cNvPr id="28" name="Text 26"/>
-          <p:cNvSpPr txBox="1"/>
-          <p:nvPr/>
-        </p:nvSpPr>
-        <p:spPr>
-          <a:xfrm>
-            <a:off x="640080" y="6108192"/>
-            <a:ext cx="10908792" cy="411480"/>
-          </a:xfrm>
-          <a:prstGeom prst="rect">
-            <a:avLst/>
-          </a:prstGeom>
-          <a:noFill/>
-          <a:ln/>
-        </p:spPr>
-        <p:txBody>
-          <a:bodyPr wrap="square" lIns="0" tIns="0" rIns="0" bIns="0" rtlCol="0" anchor="ctr"/>
-          <a:lstStyle/>
-          <a:p>
-            <a:pPr algn="ctr" indent="0" marL="0">
-              <a:buNone/>
-            </a:pPr>
-            <a:r>
-              <a:rPr lang="en-US" sz="1350" i="1" dirty="0">
-                <a:solidFill>
-                  <a:srgbClr val="9FB6BC"/>
-                </a:solidFill>
-                <a:latin typeface="Calibri" pitchFamily="34" charset="0"/>
-                <a:ea typeface="Calibri" pitchFamily="34" charset="-122"/>
-                <a:cs typeface="Calibri" pitchFamily="34" charset="-120"/>
-              </a:rPr>
-              <a:t>질문 받겠습니다</a:t>
-            </a:r>
-            <a:endParaRPr lang="en-US" sz="1350" dirty="0"/>
-          </a:p>
-        </p:txBody>
-      </p:sp>
-      <p:sp>
-        <p:nvSpPr>
-          <p:cNvPr id="29" name="Text 27"/>
-          <p:cNvSpPr txBox="1"/>
-          <p:nvPr/>
-        </p:nvSpPr>
-        <p:spPr>
-          <a:xfrm>
-            <a:off x="11365992" y="6355080"/>
-            <a:ext cx="548640" cy="320040"/>
-          </a:xfrm>
-          <a:prstGeom prst="rect">
-            <a:avLst/>
-          </a:prstGeom>
-          <a:noFill/>
-          <a:ln/>
-        </p:spPr>
-        <p:txBody>
-          <a:bodyPr wrap="square" lIns="0" tIns="0" rIns="0" bIns="0" rtlCol="0" anchor="ctr"/>
-          <a:lstStyle/>
-          <a:p>
-            <a:pPr algn="r" indent="0" marL="0">
-              <a:buNone/>
-            </a:pPr>
-            <a:r>
-              <a:rPr lang="en-US" sz="1100" dirty="0">
-                <a:solidFill>
-                  <a:srgbClr val="9FB6BC"/>
-                </a:solidFill>
-                <a:latin typeface="Calibri" pitchFamily="34" charset="0"/>
-                <a:ea typeface="Calibri" pitchFamily="34" charset="-122"/>
-                <a:cs typeface="Calibri" pitchFamily="34" charset="-120"/>
-              </a:rPr>
-              <a:t>10</a:t>
-            </a:r>
-            <a:endParaRPr lang="en-US" sz="1100" dirty="0"/>
-          </a:p>
-        </p:txBody>
-      </p:sp>
-    </p:spTree>
-  </p:cSld>
-  <p:clrMapOvr>
-    <a:masterClrMapping/>
-  </p:clrMapOvr>
-</p:sld>
-</file>
-
 <file path=ppt/slides/slide2.xml><?xml version="1.0" encoding="utf-8"?>
 <p:sld xmlns:a="http://schemas.openxmlformats.org/drawingml/2006/main" xmlns:r="http://schemas.openxmlformats.org/officeDocument/2006/relationships" xmlns:p="http://schemas.openxmlformats.org/presentationml/2006/main">
   <p:cSld name="Slide 2">
@@ -3143,7 +2127,7 @@
                 <a:ea typeface="Calibri" pitchFamily="34" charset="-122"/>
                 <a:cs typeface="Calibri" pitchFamily="34" charset="-120"/>
               </a:rPr>
-              <a:t>02   카메라 기종 확인과 환경 트러블슈팅</a:t>
+              <a:t>02   다음 주(5주차) 계획</a:t>
             </a:r>
             <a:endParaRPr lang="en-US" sz="1350" dirty="0"/>
           </a:p>
@@ -3334,36 +2318,14 @@
       </p:sp>
       <p:sp>
         <p:nvSpPr>
-          <p:cNvPr id="14" name="Shape 12"/>
-          <p:cNvSpPr/>
-          <p:nvPr/>
-        </p:nvSpPr>
-        <p:spPr>
-          <a:xfrm>
-            <a:off x="6172200" y="3566160"/>
-            <a:ext cx="5074920" cy="603504"/>
-          </a:xfrm>
-          <a:prstGeom prst="roundRect">
-            <a:avLst>
-              <a:gd name="adj" fmla="val 15152"/>
-            </a:avLst>
-          </a:prstGeom>
-          <a:solidFill>
-            <a:srgbClr val="12655A"/>
-          </a:solidFill>
-          <a:ln/>
-        </p:spPr>
-      </p:sp>
-      <p:sp>
-        <p:nvSpPr>
-          <p:cNvPr id="15" name="Text 13"/>
+          <p:cNvPr id="14" name="Text 12"/>
           <p:cNvSpPr txBox="1"/>
           <p:nvPr/>
         </p:nvSpPr>
         <p:spPr>
           <a:xfrm>
-            <a:off x="6400800" y="3566160"/>
-            <a:ext cx="4709160" cy="603504"/>
+            <a:off x="640080" y="4617720"/>
+            <a:ext cx="10908792" cy="457200"/>
           </a:xfrm>
           <a:prstGeom prst="rect">
             <a:avLst/>
@@ -3379,53 +2341,14 @@
               <a:buNone/>
             </a:pPr>
             <a:r>
-              <a:rPr lang="en-US" sz="1350" b="1" dirty="0">
-                <a:solidFill>
-                  <a:srgbClr val="EAF3F1"/>
+              <a:rPr lang="en-US" sz="1200" i="1" dirty="0">
+                <a:solidFill>
+                  <a:srgbClr val="9FB6BC"/>
                 </a:solidFill>
                 <a:latin typeface="Calibri" pitchFamily="34" charset="0"/>
                 <a:ea typeface="Calibri" pitchFamily="34" charset="-122"/>
                 <a:cs typeface="Calibri" pitchFamily="34" charset="-120"/>
               </a:rPr>
-              <a:t>06   다음 주(5주차) 계획</a:t>
-            </a:r>
-            <a:endParaRPr lang="en-US" sz="1350" dirty="0"/>
-          </a:p>
-        </p:txBody>
-      </p:sp>
-      <p:sp>
-        <p:nvSpPr>
-          <p:cNvPr id="16" name="Text 14"/>
-          <p:cNvSpPr txBox="1"/>
-          <p:nvPr/>
-        </p:nvSpPr>
-        <p:spPr>
-          <a:xfrm>
-            <a:off x="640080" y="4617720"/>
-            <a:ext cx="10908792" cy="457200"/>
-          </a:xfrm>
-          <a:prstGeom prst="rect">
-            <a:avLst/>
-          </a:prstGeom>
-          <a:noFill/>
-          <a:ln/>
-        </p:spPr>
-        <p:txBody>
-          <a:bodyPr wrap="square" lIns="0" tIns="0" rIns="0" bIns="0" rtlCol="0" anchor="ctr"/>
-          <a:lstStyle/>
-          <a:p>
-            <a:pPr indent="0" marL="0">
-              <a:buNone/>
-            </a:pPr>
-            <a:r>
-              <a:rPr lang="en-US" sz="1200" i="1" dirty="0">
-                <a:solidFill>
-                  <a:srgbClr val="9FB6BC"/>
-                </a:solidFill>
-                <a:latin typeface="Calibri" pitchFamily="34" charset="0"/>
-                <a:ea typeface="Calibri" pitchFamily="34" charset="-122"/>
-                <a:cs typeface="Calibri" pitchFamily="34" charset="-120"/>
-              </a:rPr>
               <a:t>지난주(3주차)는 알고리즘 비교 연구조사로 대체 진행 — 그만큼 밀린 캘리브레이션·게이트가 이번 주로 이월됐습니다.</a:t>
             </a:r>
             <a:endParaRPr lang="en-US" sz="1200" dirty="0"/>
@@ -3434,7 +2357,7 @@
       </p:sp>
       <p:sp>
         <p:nvSpPr>
-          <p:cNvPr id="17" name="Text 15"/>
+          <p:cNvPr id="15" name="Text 13"/>
           <p:cNvSpPr txBox="1"/>
           <p:nvPr/>
         </p:nvSpPr>
@@ -3635,12 +2558,12 @@
         </p:nvSpPr>
         <p:spPr>
           <a:xfrm>
-            <a:off x="640080" y="2286000"/>
-            <a:ext cx="5349240" cy="3749040"/>
+            <a:off x="640080" y="2194560"/>
+            <a:ext cx="5349240" cy="4114800"/>
           </a:xfrm>
           <a:prstGeom prst="roundRect">
             <a:avLst>
-              <a:gd name="adj" fmla="val 2927"/>
+              <a:gd name="adj" fmla="val 2667"/>
             </a:avLst>
           </a:prstGeom>
           <a:solidFill>
@@ -3657,7 +2580,7 @@
         </p:nvSpPr>
         <p:spPr>
           <a:xfrm>
-            <a:off x="914400" y="2560320"/>
+            <a:off x="914400" y="2468880"/>
             <a:ext cx="594360" cy="594360"/>
           </a:xfrm>
           <a:prstGeom prst="ellipse">
@@ -3685,7 +2608,7 @@
         </p:blipFill>
         <p:spPr>
           <a:xfrm>
-            <a:off x="1068934" y="2714854"/>
+            <a:off x="1068934" y="2623414"/>
             <a:ext cx="285293" cy="285293"/>
           </a:xfrm>
           <a:prstGeom prst="rect">
@@ -3701,7 +2624,7 @@
         </p:nvSpPr>
         <p:spPr>
           <a:xfrm>
-            <a:off x="1645920" y="2606040"/>
+            <a:off x="1645920" y="2514600"/>
             <a:ext cx="4069080" cy="502920"/>
           </a:xfrm>
           <a:prstGeom prst="rect">
@@ -3740,8 +2663,8 @@
         </p:nvSpPr>
         <p:spPr>
           <a:xfrm>
-            <a:off x="960120" y="3429000"/>
-            <a:ext cx="4709160" cy="2377440"/>
+            <a:off x="960120" y="3291840"/>
+            <a:ext cx="4709160" cy="2834640"/>
           </a:xfrm>
           <a:prstGeom prst="rect">
             <a:avLst/>
@@ -3755,15 +2678,15 @@
           <a:p>
             <a:pPr indent="0" marL="0">
               <a:lnSpc>
-                <a:spcPct val="120000"/>
+                <a:spcPct val="115000"/>
               </a:lnSpc>
               <a:spcAft>
-                <a:spcPts val="1000"/>
+                <a:spcPts val="800"/>
               </a:spcAft>
               <a:buNone/>
             </a:pPr>
             <a:r>
-              <a:rPr lang="en-US" sz="1250" dirty="0">
+              <a:rPr lang="en-US" sz="1100" dirty="0">
                 <a:solidFill>
                   <a:srgbClr val="3C4A50"/>
                 </a:solidFill>
@@ -3773,20 +2696,20 @@
               </a:rPr>
               <a:t>•  git 저장소 초기화, GitHub 원격 연결</a:t>
             </a:r>
-            <a:endParaRPr lang="en-US" sz="1250" dirty="0"/>
+            <a:endParaRPr lang="en-US" sz="1100" dirty="0"/>
           </a:p>
           <a:p>
             <a:pPr indent="0" marL="0">
               <a:lnSpc>
-                <a:spcPct val="120000"/>
+                <a:spcPct val="115000"/>
               </a:lnSpc>
               <a:spcAft>
-                <a:spcPts val="1000"/>
+                <a:spcPts val="800"/>
               </a:spcAft>
               <a:buNone/>
             </a:pPr>
             <a:r>
-              <a:rPr lang="en-US" sz="1250" dirty="0">
+              <a:rPr lang="en-US" sz="1100" dirty="0">
                 <a:solidFill>
                   <a:srgbClr val="3C4A50"/>
                 </a:solidFill>
@@ -3796,20 +2719,20 @@
               </a:rPr>
               <a:t>•  단일 파일이던 MoveNet 코드를 pose/features/capture/logic 4개 패키지로 분리</a:t>
             </a:r>
-            <a:endParaRPr lang="en-US" sz="1250" dirty="0"/>
+            <a:endParaRPr lang="en-US" sz="1100" dirty="0"/>
           </a:p>
           <a:p>
             <a:pPr indent="0" marL="0">
               <a:lnSpc>
-                <a:spcPct val="120000"/>
+                <a:spcPct val="115000"/>
               </a:lnSpc>
               <a:spcAft>
-                <a:spcPts val="1000"/>
+                <a:spcPts val="800"/>
               </a:spcAft>
               <a:buNone/>
             </a:pPr>
             <a:r>
-              <a:rPr lang="en-US" sz="1250" dirty="0">
+              <a:rPr lang="en-US" sz="1100" dirty="0">
                 <a:solidFill>
                   <a:srgbClr val="3C4A50"/>
                 </a:solidFill>
@@ -3819,7 +2742,30 @@
               </a:rPr>
               <a:t>•  합성 좌표 데이터 기반 단위테스트 도입 — 카메라·모델 없이도 로직 검증 가능</a:t>
             </a:r>
-            <a:endParaRPr lang="en-US" sz="1250" dirty="0"/>
+            <a:endParaRPr lang="en-US" sz="1100" dirty="0"/>
+          </a:p>
+          <a:p>
+            <a:pPr indent="0" marL="0">
+              <a:lnSpc>
+                <a:spcPct val="115000"/>
+              </a:lnSpc>
+              <a:spcAft>
+                <a:spcPts val="800"/>
+              </a:spcAft>
+              <a:buNone/>
+            </a:pPr>
+            <a:r>
+              <a:rPr lang="en-US" sz="1100" dirty="0">
+                <a:solidFill>
+                  <a:srgbClr val="3C4A50"/>
+                </a:solidFill>
+                <a:latin typeface="Calibri" pitchFamily="34" charset="0"/>
+                <a:ea typeface="Calibri" pitchFamily="34" charset="-122"/>
+                <a:cs typeface="Calibri" pitchFamily="34" charset="-120"/>
+              </a:rPr>
+              <a:t>•  MoveNet은 COCO 17개 키포인트를 전부 출력하지만, 실제 특징 계산은 코·양어깨·양엉덩이 등 상반신 5개만 사용 — 책상 카메라 특성상 무릎 이하는 프레임 밖이라 처음부터 미사용</a:t>
+            </a:r>
+            <a:endParaRPr lang="en-US" sz="1100" dirty="0"/>
           </a:p>
         </p:txBody>
       </p:sp>
@@ -3831,12 +2777,12 @@
         </p:nvSpPr>
         <p:spPr>
           <a:xfrm>
-            <a:off x="6199632" y="2286000"/>
-            <a:ext cx="5349240" cy="3749040"/>
+            <a:off x="6199632" y="2194560"/>
+            <a:ext cx="5349240" cy="4114800"/>
           </a:xfrm>
           <a:prstGeom prst="roundRect">
             <a:avLst>
-              <a:gd name="adj" fmla="val 2927"/>
+              <a:gd name="adj" fmla="val 2667"/>
             </a:avLst>
           </a:prstGeom>
           <a:solidFill>
@@ -3853,7 +2799,7 @@
         </p:nvSpPr>
         <p:spPr>
           <a:xfrm>
-            <a:off x="6473952" y="2560320"/>
+            <a:off x="6473952" y="2468880"/>
             <a:ext cx="594360" cy="594360"/>
           </a:xfrm>
           <a:prstGeom prst="ellipse">
@@ -3881,7 +2827,7 @@
         </p:blipFill>
         <p:spPr>
           <a:xfrm>
-            <a:off x="6628486" y="2714854"/>
+            <a:off x="6628486" y="2623414"/>
             <a:ext cx="285293" cy="285293"/>
           </a:xfrm>
           <a:prstGeom prst="rect">
@@ -3897,7 +2843,7 @@
         </p:nvSpPr>
         <p:spPr>
           <a:xfrm>
-            <a:off x="7205472" y="2606040"/>
+            <a:off x="7205472" y="2514600"/>
             <a:ext cx="4069080" cy="502920"/>
           </a:xfrm>
           <a:prstGeom prst="rect">
@@ -3936,8 +2882,8 @@
         </p:nvSpPr>
         <p:spPr>
           <a:xfrm>
-            <a:off x="6519672" y="3429000"/>
-            <a:ext cx="4709160" cy="2377440"/>
+            <a:off x="6519672" y="3291840"/>
+            <a:ext cx="4709160" cy="2834640"/>
           </a:xfrm>
           <a:prstGeom prst="rect">
             <a:avLst/>
@@ -3951,15 +2897,15 @@
           <a:p>
             <a:pPr indent="0" marL="0">
               <a:lnSpc>
-                <a:spcPct val="120000"/>
+                <a:spcPct val="115000"/>
               </a:lnSpc>
               <a:spcAft>
-                <a:spcPts val="1000"/>
+                <a:spcPts val="800"/>
               </a:spcAft>
               <a:buNone/>
             </a:pPr>
             <a:r>
-              <a:rPr lang="en-US" sz="1250" dirty="0">
+              <a:rPr lang="en-US" sz="1100" dirty="0">
                 <a:solidFill>
                   <a:srgbClr val="3C4A50"/>
                 </a:solidFill>
@@ -3967,22 +2913,22 @@
                 <a:ea typeface="Calibri" pitchFamily="34" charset="-122"/>
                 <a:cs typeface="Calibri" pitchFamily="34" charset="-120"/>
               </a:rPr>
-              <a:t>•  자세 5종 정의: 정상·숙임·기대기·좌측기울임·우측기울임</a:t>
-            </a:r>
-            <a:endParaRPr lang="en-US" sz="1250" dirty="0"/>
+              <a:t>•  왜: 촬영 조건이 한쪽으로 치우치면 실제 사용 환경에서 정확도가 떨어지고, 한 사람만 라벨링하면 결과를 신뢰하기 어려움</a:t>
+            </a:r>
+            <a:endParaRPr lang="en-US" sz="1100" dirty="0"/>
           </a:p>
           <a:p>
             <a:pPr indent="0" marL="0">
               <a:lnSpc>
-                <a:spcPct val="120000"/>
+                <a:spcPct val="115000"/>
               </a:lnSpc>
               <a:spcAft>
-                <a:spcPts val="1000"/>
+                <a:spcPts val="800"/>
               </a:spcAft>
               <a:buNone/>
             </a:pPr>
             <a:r>
-              <a:rPr lang="en-US" sz="1250" dirty="0">
+              <a:rPr lang="en-US" sz="1100" dirty="0">
                 <a:solidFill>
                   <a:srgbClr val="3C4A50"/>
                 </a:solidFill>
@@ -3990,22 +2936,22 @@
                 <a:ea typeface="Calibri" pitchFamily="34" charset="-122"/>
                 <a:cs typeface="Calibri" pitchFamily="34" charset="-120"/>
               </a:rPr>
-              <a:t>•  참가자/샷수 목표, 촬영조건(날짜·조명·복장 분산) 확정</a:t>
-            </a:r>
-            <a:endParaRPr lang="en-US" sz="1250" dirty="0"/>
+              <a:t>•  어떻게: 자세 5종 정의 후 참가자·샷수 목표 설정</a:t>
+            </a:r>
+            <a:endParaRPr lang="en-US" sz="1100" dirty="0"/>
           </a:p>
           <a:p>
             <a:pPr indent="0" marL="0">
               <a:lnSpc>
-                <a:spcPct val="120000"/>
+                <a:spcPct val="115000"/>
               </a:lnSpc>
               <a:spcAft>
-                <a:spcPts val="1000"/>
+                <a:spcPts val="800"/>
               </a:spcAft>
               <a:buNone/>
             </a:pPr>
             <a:r>
-              <a:rPr lang="en-US" sz="1250" dirty="0">
+              <a:rPr lang="en-US" sz="1100" dirty="0">
                 <a:solidFill>
                   <a:srgbClr val="3C4A50"/>
                 </a:solidFill>
@@ -4013,9 +2959,32 @@
                 <a:ea typeface="Calibri" pitchFamily="34" charset="-122"/>
                 <a:cs typeface="Calibri" pitchFamily="34" charset="-120"/>
               </a:rPr>
-              <a:t>•  팀원 2인 교차 라벨링 절차, labels.csv 스키마 정의</a:t>
-            </a:r>
-            <a:endParaRPr lang="en-US" sz="1250" dirty="0"/>
+              <a:t>•  날짜·조명·복장을 분산해 촬영 조건 다양화</a:t>
+            </a:r>
+            <a:endParaRPr lang="en-US" sz="1100" dirty="0"/>
+          </a:p>
+          <a:p>
+            <a:pPr indent="0" marL="0">
+              <a:lnSpc>
+                <a:spcPct val="115000"/>
+              </a:lnSpc>
+              <a:spcAft>
+                <a:spcPts val="800"/>
+              </a:spcAft>
+              <a:buNone/>
+            </a:pPr>
+            <a:r>
+              <a:rPr lang="en-US" sz="1100" dirty="0">
+                <a:solidFill>
+                  <a:srgbClr val="3C4A50"/>
+                </a:solidFill>
+                <a:latin typeface="Calibri" pitchFamily="34" charset="0"/>
+                <a:ea typeface="Calibri" pitchFamily="34" charset="-122"/>
+                <a:cs typeface="Calibri" pitchFamily="34" charset="-120"/>
+              </a:rPr>
+              <a:t>•  팀원 2인 교차 라벨링 — 10~20% 샘플 독립 재라벨링으로 일치도 확인</a:t>
+            </a:r>
+            <a:endParaRPr lang="en-US" sz="1100" dirty="0"/>
           </a:p>
         </p:txBody>
       </p:sp>
@@ -4130,7 +3099,7 @@
                 <a:ea typeface="Calibri" pitchFamily="34" charset="-122"/>
                 <a:cs typeface="Calibri" pitchFamily="34" charset="-120"/>
               </a:rPr>
-              <a:t>CAMERA &amp; TROUBLESHOOTING</a:t>
+              <a:t>NEXT WEEK</a:t>
             </a:r>
             <a:endParaRPr lang="en-US" sz="1200" dirty="0"/>
           </a:p>
@@ -4169,7 +3138,7 @@
                 <a:ea typeface="Arial" pitchFamily="34" charset="-122"/>
                 <a:cs typeface="Arial" pitchFamily="34" charset="-120"/>
               </a:rPr>
-              <a:t>카메라 기종 확인과 환경 트러블슈팅</a:t>
+              <a:t>다음 주(5주차) 계획</a:t>
             </a:r>
             <a:endParaRPr lang="en-US" sz="2700" dirty="0"/>
           </a:p>
@@ -4183,30 +3152,52 @@
         </p:nvSpPr>
         <p:spPr>
           <a:xfrm>
-            <a:off x="640080" y="1600200"/>
-            <a:ext cx="10908792" cy="1051560"/>
+            <a:off x="640080" y="1737360"/>
+            <a:ext cx="10908792" cy="731520"/>
           </a:xfrm>
           <a:prstGeom prst="roundRect">
             <a:avLst>
-              <a:gd name="adj" fmla="val 10435"/>
+              <a:gd name="adj" fmla="val 12500"/>
             </a:avLst>
           </a:prstGeom>
           <a:solidFill>
-            <a:srgbClr val="12655A"/>
+            <a:srgbClr val="FFFFFF"/>
           </a:solidFill>
           <a:ln/>
         </p:spPr>
       </p:sp>
       <p:sp>
         <p:nvSpPr>
-          <p:cNvPr id="5" name="Text 3"/>
+          <p:cNvPr id="5" name="Shape 3"/>
+          <p:cNvSpPr/>
+          <p:nvPr/>
+        </p:nvSpPr>
+        <p:spPr>
+          <a:xfrm>
+            <a:off x="822960" y="1920240"/>
+            <a:ext cx="457200" cy="365760"/>
+          </a:xfrm>
+          <a:prstGeom prst="roundRect">
+            <a:avLst>
+              <a:gd name="adj" fmla="val 20000"/>
+            </a:avLst>
+          </a:prstGeom>
+          <a:solidFill>
+            <a:srgbClr val="E9FBF7"/>
+          </a:solidFill>
+          <a:ln/>
+        </p:spPr>
+      </p:sp>
+      <p:sp>
+        <p:nvSpPr>
+          <p:cNvPr id="6" name="Text 4"/>
           <p:cNvSpPr txBox="1"/>
           <p:nvPr/>
         </p:nvSpPr>
         <p:spPr>
           <a:xfrm>
-            <a:off x="914400" y="1600200"/>
-            <a:ext cx="10424160" cy="1051560"/>
+            <a:off x="822960" y="1920240"/>
+            <a:ext cx="457200" cy="365760"/>
           </a:xfrm>
           <a:prstGeom prst="rect">
             <a:avLst/>
@@ -4218,102 +3209,21 @@
           <a:bodyPr wrap="square" lIns="0" tIns="0" rIns="0" bIns="0" rtlCol="0" anchor="ctr"/>
           <a:lstStyle/>
           <a:p>
-            <a:pPr indent="0" marL="0">
-              <a:buNone/>
-            </a:pPr>
-            <a:r>
-              <a:rPr lang="en-US" sz="1400" dirty="0">
-                <a:solidFill>
-                  <a:srgbClr val="9FB6BC"/>
+            <a:pPr algn="ctr" indent="0" marL="0">
+              <a:buNone/>
+            </a:pPr>
+            <a:r>
+              <a:rPr lang="en-US" sz="1300" b="1" dirty="0">
+                <a:solidFill>
+                  <a:srgbClr val="12655A"/>
                 </a:solidFill>
                 <a:latin typeface="Calibri" pitchFamily="34" charset="0"/>
                 <a:ea typeface="Calibri" pitchFamily="34" charset="-122"/>
                 <a:cs typeface="Calibri" pitchFamily="34" charset="-120"/>
               </a:rPr>
-              <a:t>계획:  </a:t>
-            </a:r>
-            <a:pPr indent="0" marL="0">
-              <a:buNone/>
-            </a:pPr>
-            <a:r>
-              <a:rPr lang="en-US" sz="1400" strike="sngStrike" dirty="0">
-                <a:solidFill>
-                  <a:srgbClr val="9FB6BC"/>
-                </a:solidFill>
-                <a:latin typeface="Calibri" pitchFamily="34" charset="0"/>
-                <a:ea typeface="Calibri" pitchFamily="34" charset="-122"/>
-                <a:cs typeface="Calibri" pitchFamily="34" charset="-120"/>
-              </a:rPr>
-              <a:t>위드로봇 oCamS-1CGN-U</a:t>
-            </a:r>
-            <a:pPr indent="0" marL="0">
-              <a:buNone/>
-            </a:pPr>
-            <a:r>
-              <a:rPr lang="en-US" sz="1400" dirty="0">
-                <a:solidFill>
-                  <a:srgbClr val="9FB6BC"/>
-                </a:solidFill>
-                <a:latin typeface="Calibri" pitchFamily="34" charset="0"/>
-                <a:ea typeface="Calibri" pitchFamily="34" charset="-122"/>
-                <a:cs typeface="Calibri" pitchFamily="34" charset="-120"/>
-              </a:rPr>
-              <a:t>      →      실제 수령:  </a:t>
-            </a:r>
-            <a:pPr indent="0" marL="0">
-              <a:buNone/>
-            </a:pPr>
-            <a:r>
-              <a:rPr lang="en-US" sz="1800" b="1" dirty="0">
-                <a:solidFill>
-                  <a:srgbClr val="2FE0C4"/>
-                </a:solidFill>
-                <a:latin typeface="Calibri" pitchFamily="34" charset="0"/>
-                <a:ea typeface="Calibri" pitchFamily="34" charset="-122"/>
-                <a:cs typeface="Calibri" pitchFamily="34" charset="-120"/>
-              </a:rPr>
-              <a:t>Intel RealSense D455</a:t>
-            </a:r>
-            <a:endParaRPr lang="en-US" sz="1400" dirty="0"/>
-          </a:p>
-        </p:txBody>
-      </p:sp>
-      <p:sp>
-        <p:nvSpPr>
-          <p:cNvPr id="6" name="Text 4"/>
-          <p:cNvSpPr txBox="1"/>
-          <p:nvPr/>
-        </p:nvSpPr>
-        <p:spPr>
-          <a:xfrm>
-            <a:off x="640080" y="2697480"/>
-            <a:ext cx="10908792" cy="365760"/>
-          </a:xfrm>
-          <a:prstGeom prst="rect">
-            <a:avLst/>
-          </a:prstGeom>
-          <a:noFill/>
-          <a:ln/>
-        </p:spPr>
-        <p:txBody>
-          <a:bodyPr wrap="square" lIns="0" tIns="0" rIns="0" bIns="0" rtlCol="0" anchor="ctr"/>
-          <a:lstStyle/>
-          <a:p>
-            <a:pPr indent="0" marL="0">
-              <a:buNone/>
-            </a:pPr>
-            <a:r>
-              <a:rPr lang="en-US" sz="1150" i="1" dirty="0">
-                <a:solidFill>
-                  <a:srgbClr val="9FB6BC"/>
-                </a:solidFill>
-                <a:latin typeface="Calibri" pitchFamily="34" charset="0"/>
-                <a:ea typeface="Calibri" pitchFamily="34" charset="-122"/>
-                <a:cs typeface="Calibri" pitchFamily="34" charset="-120"/>
-              </a:rPr>
-              <a:t>9/29 수령 당일 확인 → 시스템 구성·BOM·SDK(pyrealsense2) 전면 수정. RealSense는 출고 시 캘리브레이션 완료 — 체스보드 캘리브레이션 불필요해짐</a:t>
-            </a:r>
-            <a:endParaRPr lang="en-US" sz="1150" dirty="0"/>
+              <a:t>1</a:t>
+            </a:r>
+            <a:endParaRPr lang="en-US" sz="1300" dirty="0"/>
           </a:p>
         </p:txBody>
       </p:sp>
@@ -4325,155 +3235,8 @@
         </p:nvSpPr>
         <p:spPr>
           <a:xfrm>
-            <a:off x="640080" y="3246120"/>
-            <a:ext cx="10908792" cy="365760"/>
-          </a:xfrm>
-          <a:prstGeom prst="rect">
-            <a:avLst/>
-          </a:prstGeom>
-          <a:noFill/>
-          <a:ln/>
-        </p:spPr>
-        <p:txBody>
-          <a:bodyPr wrap="square" lIns="0" tIns="0" rIns="0" bIns="0" rtlCol="0" anchor="ctr"/>
-          <a:lstStyle/>
-          <a:p>
-            <a:pPr indent="0" marL="0">
-              <a:buNone/>
-            </a:pPr>
-            <a:r>
-              <a:rPr lang="en-US" sz="1400" b="1" dirty="0">
-                <a:solidFill>
-                  <a:srgbClr val="2FE0C4"/>
-                </a:solidFill>
-                <a:latin typeface="Arial" pitchFamily="34" charset="0"/>
-                <a:ea typeface="Arial" pitchFamily="34" charset="-122"/>
-                <a:cs typeface="Arial" pitchFamily="34" charset="-120"/>
-              </a:rPr>
-              <a:t>이어서 실제 연동 과정에서 순서대로 나온 문제들</a:t>
-            </a:r>
-            <a:endParaRPr lang="en-US" sz="1400" dirty="0"/>
-          </a:p>
-        </p:txBody>
-      </p:sp>
-      <p:sp>
-        <p:nvSpPr>
-          <p:cNvPr id="8" name="Shape 6"/>
-          <p:cNvSpPr/>
-          <p:nvPr/>
-        </p:nvSpPr>
-        <p:spPr>
-          <a:xfrm>
-            <a:off x="640080" y="3794760"/>
-            <a:ext cx="2587752" cy="2148840"/>
-          </a:xfrm>
-          <a:prstGeom prst="roundRect">
-            <a:avLst>
-              <a:gd name="adj" fmla="val 5106"/>
-            </a:avLst>
-          </a:prstGeom>
-          <a:solidFill>
-            <a:srgbClr val="FFFFFF"/>
-          </a:solidFill>
-          <a:ln/>
-        </p:spPr>
-      </p:sp>
-      <p:sp>
-        <p:nvSpPr>
-          <p:cNvPr id="9" name="Shape 7"/>
-          <p:cNvSpPr/>
-          <p:nvPr/>
-        </p:nvSpPr>
-        <p:spPr>
-          <a:xfrm>
-            <a:off x="859536" y="4014216"/>
-            <a:ext cx="530352" cy="530352"/>
-          </a:xfrm>
-          <a:prstGeom prst="ellipse">
-            <a:avLst/>
-          </a:prstGeom>
-          <a:solidFill>
-            <a:srgbClr val="12655A"/>
-          </a:solidFill>
-          <a:ln/>
-        </p:spPr>
-      </p:sp>
-      <p:pic>
-        <p:nvPicPr>
-          <p:cNvPr id="10" name="Image 0" descr="preencoded.png">    </p:cNvPr>
-          <p:cNvPicPr>
-            <a:picLocks noChangeAspect="1"/>
-          </p:cNvPicPr>
-          <p:nvPr/>
-        </p:nvPicPr>
-        <p:blipFill>
-          <a:blip r:embed="rId2"/>
-          <a:stretch>
-            <a:fillRect/>
-          </a:stretch>
-        </p:blipFill>
-        <p:spPr>
-          <a:xfrm>
-            <a:off x="997428" y="4152108"/>
-            <a:ext cx="254569" cy="254569"/>
-          </a:xfrm>
-          <a:prstGeom prst="rect">
-            <a:avLst/>
-          </a:prstGeom>
-        </p:spPr>
-      </p:pic>
-      <p:sp>
-        <p:nvSpPr>
-          <p:cNvPr id="11" name="Text 8"/>
-          <p:cNvSpPr txBox="1"/>
-          <p:nvPr/>
-        </p:nvSpPr>
-        <p:spPr>
-          <a:xfrm>
-            <a:off x="859536" y="4709160"/>
-            <a:ext cx="2148840" cy="548640"/>
-          </a:xfrm>
-          <a:prstGeom prst="rect">
-            <a:avLst/>
-          </a:prstGeom>
-          <a:noFill/>
-          <a:ln/>
-        </p:spPr>
-        <p:txBody>
-          <a:bodyPr wrap="square" lIns="0" tIns="0" rIns="0" bIns="0" rtlCol="0" anchor="ctr"/>
-          <a:lstStyle/>
-          <a:p>
-            <a:pPr indent="0" marL="0">
-              <a:lnSpc>
-                <a:spcPct val="110000"/>
-              </a:lnSpc>
-              <a:buNone/>
-            </a:pPr>
-            <a:r>
-              <a:rPr lang="en-US" sz="1200" b="1" dirty="0">
-                <a:solidFill>
-                  <a:srgbClr val="16262E"/>
-                </a:solidFill>
-                <a:latin typeface="Arial" pitchFamily="34" charset="0"/>
-                <a:ea typeface="Arial" pitchFamily="34" charset="-122"/>
-                <a:cs typeface="Arial" pitchFamily="34" charset="-120"/>
-              </a:rPr>
-              <a:t>Python 3.14 패키지 호환성</a:t>
-            </a:r>
-            <a:endParaRPr lang="en-US" sz="1200" dirty="0"/>
-          </a:p>
-        </p:txBody>
-      </p:sp>
-      <p:sp>
-        <p:nvSpPr>
-          <p:cNvPr id="12" name="Text 9"/>
-          <p:cNvSpPr txBox="1"/>
-          <p:nvPr/>
-        </p:nvSpPr>
-        <p:spPr>
-          <a:xfrm>
-            <a:off x="859536" y="5257800"/>
-            <a:ext cx="2148840" cy="502920"/>
+            <a:off x="1417320" y="1737360"/>
+            <a:ext cx="9875520" cy="731520"/>
           </a:xfrm>
           <a:prstGeom prst="rect">
             <a:avLst/>
@@ -4492,34 +3255,34 @@
               <a:buNone/>
             </a:pPr>
             <a:r>
-              <a:rPr lang="en-US" sz="1000" dirty="0">
-                <a:solidFill>
-                  <a:srgbClr val="3C4A50"/>
+              <a:rPr lang="en-US" sz="1350" dirty="0">
+                <a:solidFill>
+                  <a:srgbClr val="16262E"/>
                 </a:solidFill>
                 <a:latin typeface="Calibri" pitchFamily="34" charset="0"/>
                 <a:ea typeface="Calibri" pitchFamily="34" charset="-122"/>
                 <a:cs typeface="Calibri" pitchFamily="34" charset="-120"/>
               </a:rPr>
-              <a:t>tflite-runtime wheel 부재 → tensorflow로 대체</a:t>
-            </a:r>
-            <a:endParaRPr lang="en-US" sz="1000" dirty="0"/>
-          </a:p>
-        </p:txBody>
-      </p:sp>
-      <p:sp>
-        <p:nvSpPr>
-          <p:cNvPr id="13" name="Shape 10"/>
+              <a:t>RealSense depth 프리셋·필터 튜닝, 줄자 확보해 거리 정확도 정밀 재검증</a:t>
+            </a:r>
+            <a:endParaRPr lang="en-US" sz="1350" dirty="0"/>
+          </a:p>
+        </p:txBody>
+      </p:sp>
+      <p:sp>
+        <p:nvSpPr>
+          <p:cNvPr id="8" name="Shape 6"/>
           <p:cNvSpPr/>
           <p:nvPr/>
         </p:nvSpPr>
         <p:spPr>
           <a:xfrm>
-            <a:off x="3410712" y="3794760"/>
-            <a:ext cx="2587752" cy="2148840"/>
+            <a:off x="640080" y="2578608"/>
+            <a:ext cx="10908792" cy="731520"/>
           </a:xfrm>
           <a:prstGeom prst="roundRect">
             <a:avLst>
-              <a:gd name="adj" fmla="val 5106"/>
+              <a:gd name="adj" fmla="val 12500"/>
             </a:avLst>
           </a:prstGeom>
           <a:solidFill>
@@ -4530,58 +3293,36 @@
       </p:sp>
       <p:sp>
         <p:nvSpPr>
-          <p:cNvPr id="14" name="Shape 11"/>
+          <p:cNvPr id="9" name="Shape 7"/>
           <p:cNvSpPr/>
           <p:nvPr/>
         </p:nvSpPr>
         <p:spPr>
           <a:xfrm>
-            <a:off x="3630168" y="4014216"/>
-            <a:ext cx="530352" cy="530352"/>
-          </a:xfrm>
-          <a:prstGeom prst="ellipse">
-            <a:avLst/>
+            <a:off x="822960" y="2761488"/>
+            <a:ext cx="457200" cy="365760"/>
+          </a:xfrm>
+          <a:prstGeom prst="roundRect">
+            <a:avLst>
+              <a:gd name="adj" fmla="val 20000"/>
+            </a:avLst>
           </a:prstGeom>
           <a:solidFill>
-            <a:srgbClr val="12655A"/>
+            <a:srgbClr val="E9FBF7"/>
           </a:solidFill>
           <a:ln/>
         </p:spPr>
       </p:sp>
-      <p:pic>
-        <p:nvPicPr>
-          <p:cNvPr id="15" name="Image 1" descr="preencoded.png">    </p:cNvPr>
-          <p:cNvPicPr>
-            <a:picLocks noChangeAspect="1"/>
-          </p:cNvPicPr>
-          <p:nvPr/>
-        </p:nvPicPr>
-        <p:blipFill>
-          <a:blip r:embed="rId3"/>
-          <a:stretch>
-            <a:fillRect/>
-          </a:stretch>
-        </p:blipFill>
-        <p:spPr>
-          <a:xfrm>
-            <a:off x="3768060" y="4152108"/>
-            <a:ext cx="254569" cy="254569"/>
-          </a:xfrm>
-          <a:prstGeom prst="rect">
-            <a:avLst/>
-          </a:prstGeom>
-        </p:spPr>
-      </p:pic>
-      <p:sp>
-        <p:nvSpPr>
-          <p:cNvPr id="16" name="Text 12"/>
+      <p:sp>
+        <p:nvSpPr>
+          <p:cNvPr id="10" name="Text 8"/>
           <p:cNvSpPr txBox="1"/>
           <p:nvPr/>
         </p:nvSpPr>
         <p:spPr>
           <a:xfrm>
-            <a:off x="3630168" y="4709160"/>
-            <a:ext cx="2148840" cy="548640"/>
+            <a:off x="822960" y="2761488"/>
+            <a:ext cx="457200" cy="365760"/>
           </a:xfrm>
           <a:prstGeom prst="rect">
             <a:avLst/>
@@ -4593,37 +3334,34 @@
           <a:bodyPr wrap="square" lIns="0" tIns="0" rIns="0" bIns="0" rtlCol="0" anchor="ctr"/>
           <a:lstStyle/>
           <a:p>
-            <a:pPr indent="0" marL="0">
-              <a:lnSpc>
-                <a:spcPct val="110000"/>
-              </a:lnSpc>
-              <a:buNone/>
-            </a:pPr>
-            <a:r>
-              <a:rPr lang="en-US" sz="1200" b="1" dirty="0">
-                <a:solidFill>
-                  <a:srgbClr val="16262E"/>
-                </a:solidFill>
-                <a:latin typeface="Arial" pitchFamily="34" charset="0"/>
-                <a:ea typeface="Arial" pitchFamily="34" charset="-122"/>
-                <a:cs typeface="Arial" pitchFamily="34" charset="-120"/>
-              </a:rPr>
-              <a:t>Windows 스마트 앱 제어</a:t>
-            </a:r>
-            <a:endParaRPr lang="en-US" sz="1200" dirty="0"/>
-          </a:p>
-        </p:txBody>
-      </p:sp>
-      <p:sp>
-        <p:nvSpPr>
-          <p:cNvPr id="17" name="Text 13"/>
+            <a:pPr algn="ctr" indent="0" marL="0">
+              <a:buNone/>
+            </a:pPr>
+            <a:r>
+              <a:rPr lang="en-US" sz="1300" b="1" dirty="0">
+                <a:solidFill>
+                  <a:srgbClr val="12655A"/>
+                </a:solidFill>
+                <a:latin typeface="Calibri" pitchFamily="34" charset="0"/>
+                <a:ea typeface="Calibri" pitchFamily="34" charset="-122"/>
+                <a:cs typeface="Calibri" pitchFamily="34" charset="-120"/>
+              </a:rPr>
+              <a:t>2</a:t>
+            </a:r>
+            <a:endParaRPr lang="en-US" sz="1300" dirty="0"/>
+          </a:p>
+        </p:txBody>
+      </p:sp>
+      <p:sp>
+        <p:nvSpPr>
+          <p:cNvPr id="11" name="Text 9"/>
           <p:cNvSpPr txBox="1"/>
           <p:nvPr/>
         </p:nvSpPr>
         <p:spPr>
           <a:xfrm>
-            <a:off x="3630168" y="5257800"/>
-            <a:ext cx="2148840" cy="502920"/>
+            <a:off x="1417320" y="2578608"/>
+            <a:ext cx="9875520" cy="731520"/>
           </a:xfrm>
           <a:prstGeom prst="rect">
             <a:avLst/>
@@ -4642,34 +3380,34 @@
               <a:buNone/>
             </a:pPr>
             <a:r>
-              <a:rPr lang="en-US" sz="1000" dirty="0">
-                <a:solidFill>
-                  <a:srgbClr val="3C4A50"/>
+              <a:rPr lang="en-US" sz="1350" dirty="0">
+                <a:solidFill>
+                  <a:srgbClr val="16262E"/>
                 </a:solidFill>
                 <a:latin typeface="Calibri" pitchFamily="34" charset="0"/>
                 <a:ea typeface="Calibri" pitchFamily="34" charset="-122"/>
                 <a:cs typeface="Calibri" pitchFamily="34" charset="-120"/>
               </a:rPr>
-              <a:t>tensorflow DLL 차단 → 기능 비활성화로 해결</a:t>
-            </a:r>
-            <a:endParaRPr lang="en-US" sz="1000" dirty="0"/>
-          </a:p>
-        </p:txBody>
-      </p:sp>
-      <p:sp>
-        <p:nvSpPr>
-          <p:cNvPr id="18" name="Shape 14"/>
+              <a:t>근접 사각지대 보완 — 얼굴·어깨 면적비 기반 근접 판정 실제 구현</a:t>
+            </a:r>
+            <a:endParaRPr lang="en-US" sz="1350" dirty="0"/>
+          </a:p>
+        </p:txBody>
+      </p:sp>
+      <p:sp>
+        <p:nvSpPr>
+          <p:cNvPr id="12" name="Shape 10"/>
           <p:cNvSpPr/>
           <p:nvPr/>
         </p:nvSpPr>
         <p:spPr>
           <a:xfrm>
-            <a:off x="6181344" y="3794760"/>
-            <a:ext cx="2587752" cy="2148840"/>
+            <a:off x="640080" y="3419856"/>
+            <a:ext cx="10908792" cy="731520"/>
           </a:xfrm>
           <a:prstGeom prst="roundRect">
             <a:avLst>
-              <a:gd name="adj" fmla="val 5106"/>
+              <a:gd name="adj" fmla="val 12500"/>
             </a:avLst>
           </a:prstGeom>
           <a:solidFill>
@@ -4680,58 +3418,36 @@
       </p:sp>
       <p:sp>
         <p:nvSpPr>
-          <p:cNvPr id="19" name="Shape 15"/>
+          <p:cNvPr id="13" name="Shape 11"/>
           <p:cNvSpPr/>
           <p:nvPr/>
         </p:nvSpPr>
         <p:spPr>
           <a:xfrm>
-            <a:off x="6400800" y="4014216"/>
-            <a:ext cx="530352" cy="530352"/>
-          </a:xfrm>
-          <a:prstGeom prst="ellipse">
-            <a:avLst/>
+            <a:off x="822960" y="3602736"/>
+            <a:ext cx="457200" cy="365760"/>
+          </a:xfrm>
+          <a:prstGeom prst="roundRect">
+            <a:avLst>
+              <a:gd name="adj" fmla="val 20000"/>
+            </a:avLst>
           </a:prstGeom>
           <a:solidFill>
-            <a:srgbClr val="12655A"/>
+            <a:srgbClr val="E9FBF7"/>
           </a:solidFill>
           <a:ln/>
         </p:spPr>
       </p:sp>
-      <p:pic>
-        <p:nvPicPr>
-          <p:cNvPr id="20" name="Image 2" descr="preencoded.png">    </p:cNvPr>
-          <p:cNvPicPr>
-            <a:picLocks noChangeAspect="1"/>
-          </p:cNvPicPr>
-          <p:nvPr/>
-        </p:nvPicPr>
-        <p:blipFill>
-          <a:blip r:embed="rId4"/>
-          <a:stretch>
-            <a:fillRect/>
-          </a:stretch>
-        </p:blipFill>
-        <p:spPr>
-          <a:xfrm>
-            <a:off x="6538692" y="4152108"/>
-            <a:ext cx="254569" cy="254569"/>
-          </a:xfrm>
-          <a:prstGeom prst="rect">
-            <a:avLst/>
-          </a:prstGeom>
-        </p:spPr>
-      </p:pic>
-      <p:sp>
-        <p:nvSpPr>
-          <p:cNvPr id="21" name="Text 16"/>
+      <p:sp>
+        <p:nvSpPr>
+          <p:cNvPr id="14" name="Text 12"/>
           <p:cNvSpPr txBox="1"/>
           <p:nvPr/>
         </p:nvSpPr>
         <p:spPr>
           <a:xfrm>
-            <a:off x="6400800" y="4709160"/>
-            <a:ext cx="2148840" cy="548640"/>
+            <a:off x="822960" y="3602736"/>
+            <a:ext cx="457200" cy="365760"/>
           </a:xfrm>
           <a:prstGeom prst="rect">
             <a:avLst/>
@@ -4743,37 +3459,34 @@
           <a:bodyPr wrap="square" lIns="0" tIns="0" rIns="0" bIns="0" rtlCol="0" anchor="ctr"/>
           <a:lstStyle/>
           <a:p>
-            <a:pPr indent="0" marL="0">
-              <a:lnSpc>
-                <a:spcPct val="110000"/>
-              </a:lnSpc>
-              <a:buNone/>
-            </a:pPr>
-            <a:r>
-              <a:rPr lang="en-US" sz="1200" b="1" dirty="0">
-                <a:solidFill>
-                  <a:srgbClr val="16262E"/>
-                </a:solidFill>
-                <a:latin typeface="Arial" pitchFamily="34" charset="0"/>
-                <a:ea typeface="Arial" pitchFamily="34" charset="-122"/>
-                <a:cs typeface="Arial" pitchFamily="34" charset="-120"/>
-              </a:rPr>
-              <a:t>USB 인식 속도</a:t>
-            </a:r>
-            <a:endParaRPr lang="en-US" sz="1200" dirty="0"/>
-          </a:p>
-        </p:txBody>
-      </p:sp>
-      <p:sp>
-        <p:nvSpPr>
-          <p:cNvPr id="22" name="Text 17"/>
+            <a:pPr algn="ctr" indent="0" marL="0">
+              <a:buNone/>
+            </a:pPr>
+            <a:r>
+              <a:rPr lang="en-US" sz="1300" b="1" dirty="0">
+                <a:solidFill>
+                  <a:srgbClr val="12655A"/>
+                </a:solidFill>
+                <a:latin typeface="Calibri" pitchFamily="34" charset="0"/>
+                <a:ea typeface="Calibri" pitchFamily="34" charset="-122"/>
+                <a:cs typeface="Calibri" pitchFamily="34" charset="-120"/>
+              </a:rPr>
+              <a:t>3</a:t>
+            </a:r>
+            <a:endParaRPr lang="en-US" sz="1300" dirty="0"/>
+          </a:p>
+        </p:txBody>
+      </p:sp>
+      <p:sp>
+        <p:nvSpPr>
+          <p:cNvPr id="15" name="Text 13"/>
           <p:cNvSpPr txBox="1"/>
           <p:nvPr/>
         </p:nvSpPr>
         <p:spPr>
           <a:xfrm>
-            <a:off x="6400800" y="5257800"/>
-            <a:ext cx="2148840" cy="502920"/>
+            <a:off x="1417320" y="3419856"/>
+            <a:ext cx="9875520" cy="731520"/>
           </a:xfrm>
           <a:prstGeom prst="rect">
             <a:avLst/>
@@ -4792,34 +3505,34 @@
               <a:buNone/>
             </a:pPr>
             <a:r>
-              <a:rPr lang="en-US" sz="1000" dirty="0">
-                <a:solidFill>
-                  <a:srgbClr val="3C4A50"/>
+              <a:rPr lang="en-US" sz="1350" dirty="0">
+                <a:solidFill>
+                  <a:srgbClr val="16262E"/>
                 </a:solidFill>
                 <a:latin typeface="Calibri" pitchFamily="34" charset="0"/>
                 <a:ea typeface="Calibri" pitchFamily="34" charset="-122"/>
                 <a:cs typeface="Calibri" pitchFamily="34" charset="-120"/>
               </a:rPr>
-              <a:t>2.1(USB2)로 인식 → 포트 재연결로 3.2 정상화</a:t>
-            </a:r>
-            <a:endParaRPr lang="en-US" sz="1000" dirty="0"/>
-          </a:p>
-        </p:txBody>
-      </p:sp>
-      <p:sp>
-        <p:nvSpPr>
-          <p:cNvPr id="23" name="Shape 18"/>
+              <a:t>판정 로직과 스테레오+포즈 파이프라인 1차 통합</a:t>
+            </a:r>
+            <a:endParaRPr lang="en-US" sz="1350" dirty="0"/>
+          </a:p>
+        </p:txBody>
+      </p:sp>
+      <p:sp>
+        <p:nvSpPr>
+          <p:cNvPr id="16" name="Shape 14"/>
           <p:cNvSpPr/>
           <p:nvPr/>
         </p:nvSpPr>
         <p:spPr>
           <a:xfrm>
-            <a:off x="8951976" y="3794760"/>
-            <a:ext cx="2587752" cy="2148840"/>
+            <a:off x="640080" y="4261104"/>
+            <a:ext cx="10908792" cy="731520"/>
           </a:xfrm>
           <a:prstGeom prst="roundRect">
             <a:avLst>
-              <a:gd name="adj" fmla="val 5106"/>
+              <a:gd name="adj" fmla="val 12500"/>
             </a:avLst>
           </a:prstGeom>
           <a:solidFill>
@@ -4830,58 +3543,36 @@
       </p:sp>
       <p:sp>
         <p:nvSpPr>
-          <p:cNvPr id="24" name="Shape 19"/>
+          <p:cNvPr id="17" name="Shape 15"/>
           <p:cNvSpPr/>
           <p:nvPr/>
         </p:nvSpPr>
         <p:spPr>
           <a:xfrm>
-            <a:off x="9171432" y="4014216"/>
-            <a:ext cx="530352" cy="530352"/>
-          </a:xfrm>
-          <a:prstGeom prst="ellipse">
-            <a:avLst/>
+            <a:off x="822960" y="4443984"/>
+            <a:ext cx="457200" cy="365760"/>
+          </a:xfrm>
+          <a:prstGeom prst="roundRect">
+            <a:avLst>
+              <a:gd name="adj" fmla="val 20000"/>
+            </a:avLst>
           </a:prstGeom>
           <a:solidFill>
-            <a:srgbClr val="12655A"/>
+            <a:srgbClr val="E9FBF7"/>
           </a:solidFill>
           <a:ln/>
         </p:spPr>
       </p:sp>
-      <p:pic>
-        <p:nvPicPr>
-          <p:cNvPr id="25" name="Image 3" descr="preencoded.png">    </p:cNvPr>
-          <p:cNvPicPr>
-            <a:picLocks noChangeAspect="1"/>
-          </p:cNvPicPr>
-          <p:nvPr/>
-        </p:nvPicPr>
-        <p:blipFill>
-          <a:blip r:embed="rId5"/>
-          <a:stretch>
-            <a:fillRect/>
-          </a:stretch>
-        </p:blipFill>
-        <p:spPr>
-          <a:xfrm>
-            <a:off x="9309324" y="4152108"/>
-            <a:ext cx="254569" cy="254569"/>
-          </a:xfrm>
-          <a:prstGeom prst="rect">
-            <a:avLst/>
-          </a:prstGeom>
-        </p:spPr>
-      </p:pic>
-      <p:sp>
-        <p:nvSpPr>
-          <p:cNvPr id="26" name="Text 20"/>
+      <p:sp>
+        <p:nvSpPr>
+          <p:cNvPr id="18" name="Text 16"/>
           <p:cNvSpPr txBox="1"/>
           <p:nvPr/>
         </p:nvSpPr>
         <p:spPr>
           <a:xfrm>
-            <a:off x="9171432" y="4709160"/>
-            <a:ext cx="2148840" cy="548640"/>
+            <a:off x="822960" y="4443984"/>
+            <a:ext cx="457200" cy="365760"/>
           </a:xfrm>
           <a:prstGeom prst="rect">
             <a:avLst/>
@@ -4893,37 +3584,34 @@
           <a:bodyPr wrap="square" lIns="0" tIns="0" rIns="0" bIns="0" rtlCol="0" anchor="ctr"/>
           <a:lstStyle/>
           <a:p>
-            <a:pPr indent="0" marL="0">
-              <a:lnSpc>
-                <a:spcPct val="110000"/>
-              </a:lnSpc>
-              <a:buNone/>
-            </a:pPr>
-            <a:r>
-              <a:rPr lang="en-US" sz="1200" b="1" dirty="0">
-                <a:solidFill>
-                  <a:srgbClr val="16262E"/>
-                </a:solidFill>
-                <a:latin typeface="Arial" pitchFamily="34" charset="0"/>
-                <a:ea typeface="Arial" pitchFamily="34" charset="-122"/>
-                <a:cs typeface="Arial" pitchFamily="34" charset="-120"/>
-              </a:rPr>
-              <a:t>프레임 미수신</a:t>
-            </a:r>
-            <a:endParaRPr lang="en-US" sz="1200" dirty="0"/>
-          </a:p>
-        </p:txBody>
-      </p:sp>
-      <p:sp>
-        <p:nvSpPr>
-          <p:cNvPr id="27" name="Text 21"/>
+            <a:pPr algn="ctr" indent="0" marL="0">
+              <a:buNone/>
+            </a:pPr>
+            <a:r>
+              <a:rPr lang="en-US" sz="1300" b="1" dirty="0">
+                <a:solidFill>
+                  <a:srgbClr val="12655A"/>
+                </a:solidFill>
+                <a:latin typeface="Calibri" pitchFamily="34" charset="0"/>
+                <a:ea typeface="Calibri" pitchFamily="34" charset="-122"/>
+                <a:cs typeface="Calibri" pitchFamily="34" charset="-120"/>
+              </a:rPr>
+              <a:t>4</a:t>
+            </a:r>
+            <a:endParaRPr lang="en-US" sz="1300" dirty="0"/>
+          </a:p>
+        </p:txBody>
+      </p:sp>
+      <p:sp>
+        <p:nvSpPr>
+          <p:cNvPr id="19" name="Text 17"/>
           <p:cNvSpPr txBox="1"/>
           <p:nvPr/>
         </p:nvSpPr>
         <p:spPr>
           <a:xfrm>
-            <a:off x="9171432" y="5257800"/>
-            <a:ext cx="2148840" cy="502920"/>
+            <a:off x="1417320" y="4261104"/>
+            <a:ext cx="9875520" cy="731520"/>
           </a:xfrm>
           <a:prstGeom prst="rect">
             <a:avLst/>
@@ -4942,23 +3630,148 @@
               <a:buNone/>
             </a:pPr>
             <a:r>
-              <a:rPr lang="en-US" sz="1000" dirty="0">
-                <a:solidFill>
-                  <a:srgbClr val="3C4A50"/>
+              <a:rPr lang="en-US" sz="1350" dirty="0">
+                <a:solidFill>
+                  <a:srgbClr val="16262E"/>
                 </a:solidFill>
                 <a:latin typeface="Calibri" pitchFamily="34" charset="0"/>
                 <a:ea typeface="Calibri" pitchFamily="34" charset="-122"/>
                 <a:cs typeface="Calibri" pitchFamily="34" charset="-120"/>
               </a:rPr>
-              <a:t>RealSense Viewer가 장치 점유 중 → 종료로 해결</a:t>
-            </a:r>
-            <a:endParaRPr lang="en-US" sz="1000" dirty="0"/>
-          </a:p>
-        </p:txBody>
-      </p:sp>
-      <p:sp>
-        <p:nvSpPr>
-          <p:cNvPr id="28" name="Text 22"/>
+              <a:t>데이터 수집 프로토콜에 따라 실제 촬영 착수</a:t>
+            </a:r>
+            <a:endParaRPr lang="en-US" sz="1350" dirty="0"/>
+          </a:p>
+        </p:txBody>
+      </p:sp>
+      <p:sp>
+        <p:nvSpPr>
+          <p:cNvPr id="20" name="Shape 18"/>
+          <p:cNvSpPr/>
+          <p:nvPr/>
+        </p:nvSpPr>
+        <p:spPr>
+          <a:xfrm>
+            <a:off x="640080" y="5102352"/>
+            <a:ext cx="10908792" cy="731520"/>
+          </a:xfrm>
+          <a:prstGeom prst="roundRect">
+            <a:avLst>
+              <a:gd name="adj" fmla="val 12500"/>
+            </a:avLst>
+          </a:prstGeom>
+          <a:solidFill>
+            <a:srgbClr val="FFFFFF"/>
+          </a:solidFill>
+          <a:ln/>
+        </p:spPr>
+      </p:sp>
+      <p:sp>
+        <p:nvSpPr>
+          <p:cNvPr id="21" name="Shape 19"/>
+          <p:cNvSpPr/>
+          <p:nvPr/>
+        </p:nvSpPr>
+        <p:spPr>
+          <a:xfrm>
+            <a:off x="822960" y="5285232"/>
+            <a:ext cx="457200" cy="365760"/>
+          </a:xfrm>
+          <a:prstGeom prst="roundRect">
+            <a:avLst>
+              <a:gd name="adj" fmla="val 20000"/>
+            </a:avLst>
+          </a:prstGeom>
+          <a:solidFill>
+            <a:srgbClr val="E9FBF7"/>
+          </a:solidFill>
+          <a:ln/>
+        </p:spPr>
+      </p:sp>
+      <p:sp>
+        <p:nvSpPr>
+          <p:cNvPr id="22" name="Text 20"/>
+          <p:cNvSpPr txBox="1"/>
+          <p:nvPr/>
+        </p:nvSpPr>
+        <p:spPr>
+          <a:xfrm>
+            <a:off x="822960" y="5285232"/>
+            <a:ext cx="457200" cy="365760"/>
+          </a:xfrm>
+          <a:prstGeom prst="rect">
+            <a:avLst/>
+          </a:prstGeom>
+          <a:noFill/>
+          <a:ln/>
+        </p:spPr>
+        <p:txBody>
+          <a:bodyPr wrap="square" lIns="0" tIns="0" rIns="0" bIns="0" rtlCol="0" anchor="ctr"/>
+          <a:lstStyle/>
+          <a:p>
+            <a:pPr algn="ctr" indent="0" marL="0">
+              <a:buNone/>
+            </a:pPr>
+            <a:r>
+              <a:rPr lang="en-US" sz="1300" b="1" dirty="0">
+                <a:solidFill>
+                  <a:srgbClr val="12655A"/>
+                </a:solidFill>
+                <a:latin typeface="Calibri" pitchFamily="34" charset="0"/>
+                <a:ea typeface="Calibri" pitchFamily="34" charset="-122"/>
+                <a:cs typeface="Calibri" pitchFamily="34" charset="-120"/>
+              </a:rPr>
+              <a:t>5</a:t>
+            </a:r>
+            <a:endParaRPr lang="en-US" sz="1300" dirty="0"/>
+          </a:p>
+        </p:txBody>
+      </p:sp>
+      <p:sp>
+        <p:nvSpPr>
+          <p:cNvPr id="23" name="Text 21"/>
+          <p:cNvSpPr txBox="1"/>
+          <p:nvPr/>
+        </p:nvSpPr>
+        <p:spPr>
+          <a:xfrm>
+            <a:off x="1417320" y="5102352"/>
+            <a:ext cx="9875520" cy="731520"/>
+          </a:xfrm>
+          <a:prstGeom prst="rect">
+            <a:avLst/>
+          </a:prstGeom>
+          <a:noFill/>
+          <a:ln/>
+        </p:spPr>
+        <p:txBody>
+          <a:bodyPr wrap="square" lIns="0" tIns="0" rIns="0" bIns="0" rtlCol="0" anchor="ctr"/>
+          <a:lstStyle/>
+          <a:p>
+            <a:pPr indent="0" marL="0">
+              <a:lnSpc>
+                <a:spcPct val="115000"/>
+              </a:lnSpc>
+              <a:buNone/>
+            </a:pPr>
+            <a:r>
+              <a:rPr lang="en-US" sz="1350" dirty="0">
+                <a:solidFill>
+                  <a:srgbClr val="16262E"/>
+                </a:solidFill>
+                <a:latin typeface="Calibri" pitchFamily="34" charset="0"/>
+                <a:ea typeface="Calibri" pitchFamily="34" charset="-122"/>
+                <a:cs typeface="Calibri" pitchFamily="34" charset="-120"/>
+              </a:rPr>
+              <a:t>논문 Introduction · Related Work 초안 (이번 주 이월분)</a:t>
+            </a:r>
+            <a:endParaRPr lang="en-US" sz="1350" dirty="0"/>
+          </a:p>
+        </p:txBody>
+      </p:sp>
+      <p:sp>
+        <p:nvSpPr>
+          <p:cNvPr id="24" name="Text 22"/>
           <p:cNvSpPr txBox="1"/>
           <p:nvPr/>
         </p:nvSpPr>
@@ -6420,14 +5233,275 @@
       </p:sp>
       <p:sp>
         <p:nvSpPr>
-          <p:cNvPr id="6" name="Text 3"/>
+          <p:cNvPr id="6" name="Shape 3"/>
+          <p:cNvSpPr/>
+          <p:nvPr/>
+        </p:nvSpPr>
+        <p:spPr>
+          <a:xfrm>
+            <a:off x="7909560" y="1691640"/>
+            <a:ext cx="3639312" cy="3977640"/>
+          </a:xfrm>
+          <a:prstGeom prst="roundRect">
+            <a:avLst>
+              <a:gd name="adj" fmla="val 3015"/>
+            </a:avLst>
+          </a:prstGeom>
+          <a:solidFill>
+            <a:srgbClr val="12655A"/>
+          </a:solidFill>
+          <a:ln/>
+        </p:spPr>
+      </p:sp>
+      <p:sp>
+        <p:nvSpPr>
+          <p:cNvPr id="7" name="Text 4"/>
           <p:cNvSpPr txBox="1"/>
           <p:nvPr/>
         </p:nvSpPr>
         <p:spPr>
           <a:xfrm>
-            <a:off x="640080" y="4937760"/>
-            <a:ext cx="6949440" cy="731520"/>
+            <a:off x="7909560" y="2011680"/>
+            <a:ext cx="3639312" cy="1005840"/>
+          </a:xfrm>
+          <a:prstGeom prst="rect">
+            <a:avLst/>
+          </a:prstGeom>
+          <a:noFill/>
+          <a:ln/>
+        </p:spPr>
+        <p:txBody>
+          <a:bodyPr wrap="square" lIns="0" tIns="0" rIns="0" bIns="0" rtlCol="0" anchor="ctr"/>
+          <a:lstStyle/>
+          <a:p>
+            <a:pPr algn="ctr" indent="0" marL="0">
+              <a:buNone/>
+            </a:pPr>
+            <a:r>
+              <a:rPr lang="en-US" sz="5600" b="1" dirty="0">
+                <a:solidFill>
+                  <a:srgbClr val="2FE0C4"/>
+                </a:solidFill>
+                <a:latin typeface="Arial" pitchFamily="34" charset="0"/>
+                <a:ea typeface="Arial" pitchFamily="34" charset="-122"/>
+                <a:cs typeface="Arial" pitchFamily="34" charset="-120"/>
+              </a:rPr>
+              <a:t>29.43</a:t>
+            </a:r>
+            <a:endParaRPr lang="en-US" sz="5600" dirty="0"/>
+          </a:p>
+        </p:txBody>
+      </p:sp>
+      <p:sp>
+        <p:nvSpPr>
+          <p:cNvPr id="8" name="Text 5"/>
+          <p:cNvSpPr txBox="1"/>
+          <p:nvPr/>
+        </p:nvSpPr>
+        <p:spPr>
+          <a:xfrm>
+            <a:off x="7909560" y="2971800"/>
+            <a:ext cx="3639312" cy="320040"/>
+          </a:xfrm>
+          <a:prstGeom prst="rect">
+            <a:avLst/>
+          </a:prstGeom>
+          <a:noFill/>
+          <a:ln/>
+        </p:spPr>
+        <p:txBody>
+          <a:bodyPr wrap="square" lIns="0" tIns="0" rIns="0" bIns="0" rtlCol="0" anchor="ctr"/>
+          <a:lstStyle/>
+          <a:p>
+            <a:pPr algn="ctr" indent="0" marL="0">
+              <a:buNone/>
+            </a:pPr>
+            <a:r>
+              <a:rPr lang="en-US" sz="1300" dirty="0">
+                <a:solidFill>
+                  <a:srgbClr val="9FB6BC"/>
+                </a:solidFill>
+                <a:latin typeface="Calibri" pitchFamily="34" charset="0"/>
+                <a:ea typeface="Calibri" pitchFamily="34" charset="-122"/>
+                <a:cs typeface="Calibri" pitchFamily="34" charset="-120"/>
+              </a:rPr>
+              <a:t>fps (평균)</a:t>
+            </a:r>
+            <a:endParaRPr lang="en-US" sz="1300" dirty="0"/>
+          </a:p>
+        </p:txBody>
+      </p:sp>
+      <p:sp>
+        <p:nvSpPr>
+          <p:cNvPr id="9" name="Text 6"/>
+          <p:cNvSpPr txBox="1"/>
+          <p:nvPr/>
+        </p:nvSpPr>
+        <p:spPr>
+          <a:xfrm>
+            <a:off x="8138160" y="3364992"/>
+            <a:ext cx="3182112" cy="320040"/>
+          </a:xfrm>
+          <a:prstGeom prst="rect">
+            <a:avLst/>
+          </a:prstGeom>
+          <a:noFill/>
+          <a:ln/>
+        </p:spPr>
+        <p:txBody>
+          <a:bodyPr wrap="square" lIns="0" tIns="0" rIns="0" bIns="0" rtlCol="0" anchor="ctr"/>
+          <a:lstStyle/>
+          <a:p>
+            <a:pPr algn="ctr" indent="0" marL="0">
+              <a:buNone/>
+            </a:pPr>
+            <a:r>
+              <a:rPr lang="en-US" sz="1150" i="1" dirty="0">
+                <a:solidFill>
+                  <a:srgbClr val="C9F4EA"/>
+                </a:solidFill>
+                <a:latin typeface="Calibri" pitchFamily="34" charset="0"/>
+                <a:ea typeface="Calibri" pitchFamily="34" charset="-122"/>
+                <a:cs typeface="Calibri" pitchFamily="34" charset="-120"/>
+              </a:rPr>
+              <a:t>목표(최소 5fps) 대비 약 5.9배</a:t>
+            </a:r>
+            <a:endParaRPr lang="en-US" sz="1150" dirty="0"/>
+          </a:p>
+        </p:txBody>
+      </p:sp>
+      <p:sp>
+        <p:nvSpPr>
+          <p:cNvPr id="10" name="Shape 7"/>
+          <p:cNvSpPr/>
+          <p:nvPr/>
+        </p:nvSpPr>
+        <p:spPr>
+          <a:xfrm>
+            <a:off x="9253728" y="3794760"/>
+            <a:ext cx="950976" cy="310896"/>
+          </a:xfrm>
+          <a:prstGeom prst="roundRect">
+            <a:avLst>
+              <a:gd name="adj" fmla="val 50000"/>
+            </a:avLst>
+          </a:prstGeom>
+          <a:solidFill>
+            <a:srgbClr val="12432F"/>
+          </a:solidFill>
+          <a:ln/>
+        </p:spPr>
+      </p:sp>
+      <p:sp>
+        <p:nvSpPr>
+          <p:cNvPr id="11" name="Text 8"/>
+          <p:cNvSpPr txBox="1"/>
+          <p:nvPr/>
+        </p:nvSpPr>
+        <p:spPr>
+          <a:xfrm>
+            <a:off x="9253728" y="3794760"/>
+            <a:ext cx="950976" cy="310896"/>
+          </a:xfrm>
+          <a:prstGeom prst="rect">
+            <a:avLst/>
+          </a:prstGeom>
+          <a:noFill/>
+          <a:ln/>
+        </p:spPr>
+        <p:txBody>
+          <a:bodyPr wrap="square" lIns="0" tIns="0" rIns="0" bIns="0" rtlCol="0" anchor="ctr"/>
+          <a:lstStyle/>
+          <a:p>
+            <a:pPr algn="ctr" indent="0" marL="0">
+              <a:buNone/>
+            </a:pPr>
+            <a:r>
+              <a:rPr lang="en-US" sz="1050" b="1" dirty="0">
+                <a:solidFill>
+                  <a:srgbClr val="3FD48C"/>
+                </a:solidFill>
+                <a:latin typeface="Calibri" pitchFamily="34" charset="0"/>
+                <a:ea typeface="Calibri" pitchFamily="34" charset="-122"/>
+                <a:cs typeface="Calibri" pitchFamily="34" charset="-120"/>
+              </a:rPr>
+              <a:t>게이트 통과</a:t>
+            </a:r>
+            <a:endParaRPr lang="en-US" sz="1050" dirty="0"/>
+          </a:p>
+        </p:txBody>
+      </p:sp>
+      <p:sp>
+        <p:nvSpPr>
+          <p:cNvPr id="12" name="Shape 9"/>
+          <p:cNvSpPr/>
+          <p:nvPr/>
+        </p:nvSpPr>
+        <p:spPr>
+          <a:xfrm>
+            <a:off x="8138160" y="4343400"/>
+            <a:ext cx="3182112" cy="1188720"/>
+          </a:xfrm>
+          <a:prstGeom prst="roundRect">
+            <a:avLst>
+              <a:gd name="adj" fmla="val 7692"/>
+            </a:avLst>
+          </a:prstGeom>
+          <a:solidFill>
+            <a:srgbClr val="0E2A22"/>
+          </a:solidFill>
+          <a:ln/>
+        </p:spPr>
+      </p:sp>
+      <p:sp>
+        <p:nvSpPr>
+          <p:cNvPr id="13" name="Text 10"/>
+          <p:cNvSpPr txBox="1"/>
+          <p:nvPr/>
+        </p:nvSpPr>
+        <p:spPr>
+          <a:xfrm>
+            <a:off x="8321040" y="4453128"/>
+            <a:ext cx="2816352" cy="274320"/>
+          </a:xfrm>
+          <a:prstGeom prst="rect">
+            <a:avLst/>
+          </a:prstGeom>
+          <a:noFill/>
+          <a:ln/>
+        </p:spPr>
+        <p:txBody>
+          <a:bodyPr wrap="square" lIns="0" tIns="0" rIns="0" bIns="0" rtlCol="0" anchor="ctr"/>
+          <a:lstStyle/>
+          <a:p>
+            <a:pPr indent="0" marL="0">
+              <a:buNone/>
+            </a:pPr>
+            <a:r>
+              <a:rPr lang="en-US" sz="1050" b="1" dirty="0">
+                <a:solidFill>
+                  <a:srgbClr val="E8734A"/>
+                </a:solidFill>
+                <a:latin typeface="Calibri" pitchFamily="34" charset="0"/>
+                <a:ea typeface="Calibri" pitchFamily="34" charset="-122"/>
+                <a:cs typeface="Calibri" pitchFamily="34" charset="-120"/>
+              </a:rPr>
+              <a:t>주의</a:t>
+            </a:r>
+            <a:endParaRPr lang="en-US" sz="1050" dirty="0"/>
+          </a:p>
+        </p:txBody>
+      </p:sp>
+      <p:sp>
+        <p:nvSpPr>
+          <p:cNvPr id="14" name="Text 11"/>
+          <p:cNvSpPr txBox="1"/>
+          <p:nvPr/>
+        </p:nvSpPr>
+        <p:spPr>
+          <a:xfrm>
+            <a:off x="8321040" y="4727448"/>
+            <a:ext cx="2816352" cy="749808"/>
           </a:xfrm>
           <a:prstGeom prst="rect">
             <a:avLst/>
@@ -6446,7 +5520,7 @@
               <a:buNone/>
             </a:pPr>
             <a:r>
-              <a:rPr lang="en-US" sz="1100" dirty="0">
+              <a:rPr lang="en-US" sz="1000" dirty="0">
                 <a:solidFill>
                   <a:srgbClr val="EAF3F1"/>
                 </a:solidFill>
@@ -6454,215 +5528,15 @@
                 <a:ea typeface="Calibri" pitchFamily="34" charset="-122"/>
                 <a:cs typeface="Calibri" pitchFamily="34" charset="-120"/>
               </a:rPr>
-              <a:t>주의: 카메라 캡처 단독 수치 — MoveNet 추론 통합 후 재측정 필요. 거리 정밀 오차값은 줄자 미확보로 다음 주로 이월</a:t>
-            </a:r>
-            <a:endParaRPr lang="en-US" sz="1100" dirty="0"/>
-          </a:p>
-        </p:txBody>
-      </p:sp>
-      <p:sp>
-        <p:nvSpPr>
-          <p:cNvPr id="7" name="Shape 4"/>
-          <p:cNvSpPr/>
-          <p:nvPr/>
-        </p:nvSpPr>
-        <p:spPr>
-          <a:xfrm>
-            <a:off x="7909560" y="1691640"/>
-            <a:ext cx="3639312" cy="3977640"/>
-          </a:xfrm>
-          <a:prstGeom prst="roundRect">
-            <a:avLst>
-              <a:gd name="adj" fmla="val 3015"/>
-            </a:avLst>
-          </a:prstGeom>
-          <a:solidFill>
-            <a:srgbClr val="12655A"/>
-          </a:solidFill>
-          <a:ln/>
-        </p:spPr>
-      </p:sp>
-      <p:sp>
-        <p:nvSpPr>
-          <p:cNvPr id="8" name="Text 5"/>
-          <p:cNvSpPr txBox="1"/>
-          <p:nvPr/>
-        </p:nvSpPr>
-        <p:spPr>
-          <a:xfrm>
-            <a:off x="7909560" y="2286000"/>
-            <a:ext cx="3639312" cy="1097280"/>
-          </a:xfrm>
-          <a:prstGeom prst="rect">
-            <a:avLst/>
-          </a:prstGeom>
-          <a:noFill/>
-          <a:ln/>
-        </p:spPr>
-        <p:txBody>
-          <a:bodyPr wrap="square" lIns="0" tIns="0" rIns="0" bIns="0" rtlCol="0" anchor="ctr"/>
-          <a:lstStyle/>
-          <a:p>
-            <a:pPr algn="ctr" indent="0" marL="0">
-              <a:buNone/>
-            </a:pPr>
-            <a:r>
-              <a:rPr lang="en-US" sz="5600" b="1" dirty="0">
-                <a:solidFill>
-                  <a:srgbClr val="2FE0C4"/>
-                </a:solidFill>
-                <a:latin typeface="Arial" pitchFamily="34" charset="0"/>
-                <a:ea typeface="Arial" pitchFamily="34" charset="-122"/>
-                <a:cs typeface="Arial" pitchFamily="34" charset="-120"/>
-              </a:rPr>
-              <a:t>29.43</a:t>
-            </a:r>
-            <a:endParaRPr lang="en-US" sz="5600" dirty="0"/>
-          </a:p>
-        </p:txBody>
-      </p:sp>
-      <p:sp>
-        <p:nvSpPr>
-          <p:cNvPr id="9" name="Text 6"/>
-          <p:cNvSpPr txBox="1"/>
-          <p:nvPr/>
-        </p:nvSpPr>
-        <p:spPr>
-          <a:xfrm>
-            <a:off x="7909560" y="3291840"/>
-            <a:ext cx="3639312" cy="365760"/>
-          </a:xfrm>
-          <a:prstGeom prst="rect">
-            <a:avLst/>
-          </a:prstGeom>
-          <a:noFill/>
-          <a:ln/>
-        </p:spPr>
-        <p:txBody>
-          <a:bodyPr wrap="square" lIns="0" tIns="0" rIns="0" bIns="0" rtlCol="0" anchor="ctr"/>
-          <a:lstStyle/>
-          <a:p>
-            <a:pPr algn="ctr" indent="0" marL="0">
-              <a:buNone/>
-            </a:pPr>
-            <a:r>
-              <a:rPr lang="en-US" sz="1300" dirty="0">
-                <a:solidFill>
-                  <a:srgbClr val="9FB6BC"/>
-                </a:solidFill>
-                <a:latin typeface="Calibri" pitchFamily="34" charset="0"/>
-                <a:ea typeface="Calibri" pitchFamily="34" charset="-122"/>
-                <a:cs typeface="Calibri" pitchFamily="34" charset="-120"/>
-              </a:rPr>
-              <a:t>fps (평균)</a:t>
-            </a:r>
-            <a:endParaRPr lang="en-US" sz="1300" dirty="0"/>
-          </a:p>
-        </p:txBody>
-      </p:sp>
-      <p:sp>
-        <p:nvSpPr>
-          <p:cNvPr id="10" name="Text 7"/>
-          <p:cNvSpPr txBox="1"/>
-          <p:nvPr/>
-        </p:nvSpPr>
-        <p:spPr>
-          <a:xfrm>
-            <a:off x="8138160" y="3977640"/>
-            <a:ext cx="3182112" cy="365760"/>
-          </a:xfrm>
-          <a:prstGeom prst="rect">
-            <a:avLst/>
-          </a:prstGeom>
-          <a:noFill/>
-          <a:ln/>
-        </p:spPr>
-        <p:txBody>
-          <a:bodyPr wrap="square" lIns="0" tIns="0" rIns="0" bIns="0" rtlCol="0" anchor="ctr"/>
-          <a:lstStyle/>
-          <a:p>
-            <a:pPr algn="ctr" indent="0" marL="0">
-              <a:buNone/>
-            </a:pPr>
-            <a:r>
-              <a:rPr lang="en-US" sz="1150" i="1" dirty="0">
-                <a:solidFill>
-                  <a:srgbClr val="C9F4EA"/>
-                </a:solidFill>
-                <a:latin typeface="Calibri" pitchFamily="34" charset="0"/>
-                <a:ea typeface="Calibri" pitchFamily="34" charset="-122"/>
-                <a:cs typeface="Calibri" pitchFamily="34" charset="-120"/>
-              </a:rPr>
-              <a:t>목표(최소 5fps) 대비 약 5.9배</a:t>
-            </a:r>
-            <a:endParaRPr lang="en-US" sz="1150" dirty="0"/>
-          </a:p>
-        </p:txBody>
-      </p:sp>
-      <p:sp>
-        <p:nvSpPr>
-          <p:cNvPr id="11" name="Shape 8"/>
-          <p:cNvSpPr/>
-          <p:nvPr/>
-        </p:nvSpPr>
-        <p:spPr>
-          <a:xfrm>
-            <a:off x="6917436" y="4937760"/>
-            <a:ext cx="950976" cy="310896"/>
-          </a:xfrm>
-          <a:prstGeom prst="roundRect">
-            <a:avLst>
-              <a:gd name="adj" fmla="val 50000"/>
-            </a:avLst>
-          </a:prstGeom>
-          <a:solidFill>
-            <a:srgbClr val="12432F"/>
-          </a:solidFill>
-          <a:ln/>
-        </p:spPr>
-      </p:sp>
-      <p:sp>
-        <p:nvSpPr>
-          <p:cNvPr id="12" name="Text 9"/>
-          <p:cNvSpPr txBox="1"/>
-          <p:nvPr/>
-        </p:nvSpPr>
-        <p:spPr>
-          <a:xfrm>
-            <a:off x="6917436" y="4937760"/>
-            <a:ext cx="950976" cy="310896"/>
-          </a:xfrm>
-          <a:prstGeom prst="rect">
-            <a:avLst/>
-          </a:prstGeom>
-          <a:noFill/>
-          <a:ln/>
-        </p:spPr>
-        <p:txBody>
-          <a:bodyPr wrap="square" lIns="0" tIns="0" rIns="0" bIns="0" rtlCol="0" anchor="ctr"/>
-          <a:lstStyle/>
-          <a:p>
-            <a:pPr algn="ctr" indent="0" marL="0">
-              <a:buNone/>
-            </a:pPr>
-            <a:r>
-              <a:rPr lang="en-US" sz="1050" b="1" dirty="0">
-                <a:solidFill>
-                  <a:srgbClr val="3FD48C"/>
-                </a:solidFill>
-                <a:latin typeface="Calibri" pitchFamily="34" charset="0"/>
-                <a:ea typeface="Calibri" pitchFamily="34" charset="-122"/>
-                <a:cs typeface="Calibri" pitchFamily="34" charset="-120"/>
-              </a:rPr>
-              <a:t>게이트 통과</a:t>
-            </a:r>
-            <a:endParaRPr lang="en-US" sz="1050" dirty="0"/>
-          </a:p>
-        </p:txBody>
-      </p:sp>
-      <p:sp>
-        <p:nvSpPr>
-          <p:cNvPr id="13" name="Text 10"/>
+              <a:t>카메라 캡처 단독 수치 — MoveNet 추론 통합 후 재측정 필요. 거리 정밀 오차값은 줄자 미확보로 다음 주로 이월</a:t>
+            </a:r>
+            <a:endParaRPr lang="en-US" sz="1000" dirty="0"/>
+          </a:p>
+        </p:txBody>
+      </p:sp>
+      <p:sp>
+        <p:nvSpPr>
+          <p:cNvPr id="15" name="Text 12"/>
           <p:cNvSpPr txBox="1"/>
           <p:nvPr/>
         </p:nvSpPr>
@@ -8727,7 +7601,7 @@
                 <a:ea typeface="Calibri" pitchFamily="34" charset="-122"/>
                 <a:cs typeface="Calibri" pitchFamily="34" charset="-120"/>
               </a:rPr>
-              <a:t>NEXT WEEK</a:t>
+              <a:t>CONCLUSION</a:t>
             </a:r>
             <a:endParaRPr lang="en-US" sz="1200" dirty="0"/>
           </a:p>
@@ -8766,7 +7640,7 @@
                 <a:ea typeface="Arial" pitchFamily="34" charset="-122"/>
                 <a:cs typeface="Arial" pitchFamily="34" charset="-120"/>
               </a:rPr>
-              <a:t>다음 주(5주차) 계획</a:t>
+              <a:t>마무리</a:t>
             </a:r>
             <a:endParaRPr lang="en-US" sz="2700" dirty="0"/>
           </a:p>
@@ -8841,7 +7715,7 @@
               <a:buNone/>
             </a:pPr>
             <a:r>
-              <a:rPr lang="en-US" sz="1300" b="1" dirty="0">
+              <a:rPr lang="en-US" sz="1500" b="1" dirty="0">
                 <a:solidFill>
                   <a:srgbClr val="12655A"/>
                 </a:solidFill>
@@ -8849,9 +7723,9 @@
                 <a:ea typeface="Calibri" pitchFamily="34" charset="-122"/>
                 <a:cs typeface="Calibri" pitchFamily="34" charset="-120"/>
               </a:rPr>
-              <a:t>1</a:t>
-            </a:r>
-            <a:endParaRPr lang="en-US" sz="1300" dirty="0"/>
+              <a:t>✓</a:t>
+            </a:r>
+            <a:endParaRPr lang="en-US" sz="1500" dirty="0"/>
           </a:p>
         </p:txBody>
       </p:sp>
@@ -8883,7 +7757,7 @@
               <a:buNone/>
             </a:pPr>
             <a:r>
-              <a:rPr lang="en-US" sz="1350" dirty="0">
+              <a:rPr lang="en-US" sz="1300" dirty="0">
                 <a:solidFill>
                   <a:srgbClr val="16262E"/>
                 </a:solidFill>
@@ -8891,9 +7765,9 @@
                 <a:ea typeface="Calibri" pitchFamily="34" charset="-122"/>
                 <a:cs typeface="Calibri" pitchFamily="34" charset="-120"/>
               </a:rPr>
-              <a:t>RealSense depth 프리셋·필터 튜닝, 줄자 확보해 거리 정확도 정밀 재검증</a:t>
-            </a:r>
-            <a:endParaRPr lang="en-US" sz="1350" dirty="0"/>
+              <a:t>4주차 게이트 통과 — 평균 29.43fps, 스파이크 0회, 목표치(최소 5fps) 대폭 상회</a:t>
+            </a:r>
+            <a:endParaRPr lang="en-US" sz="1300" dirty="0"/>
           </a:p>
         </p:txBody>
       </p:sp>
@@ -8966,7 +7840,7 @@
               <a:buNone/>
             </a:pPr>
             <a:r>
-              <a:rPr lang="en-US" sz="1300" b="1" dirty="0">
+              <a:rPr lang="en-US" sz="1500" b="1" dirty="0">
                 <a:solidFill>
                   <a:srgbClr val="12655A"/>
                 </a:solidFill>
@@ -8974,9 +7848,9 @@
                 <a:ea typeface="Calibri" pitchFamily="34" charset="-122"/>
                 <a:cs typeface="Calibri" pitchFamily="34" charset="-120"/>
               </a:rPr>
-              <a:t>2</a:t>
-            </a:r>
-            <a:endParaRPr lang="en-US" sz="1300" dirty="0"/>
+              <a:t>✓</a:t>
+            </a:r>
+            <a:endParaRPr lang="en-US" sz="1500" dirty="0"/>
           </a:p>
         </p:txBody>
       </p:sp>
@@ -9008,7 +7882,7 @@
               <a:buNone/>
             </a:pPr>
             <a:r>
-              <a:rPr lang="en-US" sz="1350" dirty="0">
+              <a:rPr lang="en-US" sz="1300" dirty="0">
                 <a:solidFill>
                   <a:srgbClr val="16262E"/>
                 </a:solidFill>
@@ -9016,9 +7890,9 @@
                 <a:ea typeface="Calibri" pitchFamily="34" charset="-122"/>
                 <a:cs typeface="Calibri" pitchFamily="34" charset="-120"/>
               </a:rPr>
-              <a:t>근접 사각지대 보완 — 얼굴·어깨 면적비 기반 근접 판정 실제 구현</a:t>
-            </a:r>
-            <a:endParaRPr lang="en-US" sz="1350" dirty="0"/>
+              <a:t>계획(oCamS)과 실제(D455)가 다르다는 걸 발견 즉시 문서 전체를 바로잡음</a:t>
+            </a:r>
+            <a:endParaRPr lang="en-US" sz="1300" dirty="0"/>
           </a:p>
         </p:txBody>
       </p:sp>
@@ -9091,7 +7965,7 @@
               <a:buNone/>
             </a:pPr>
             <a:r>
-              <a:rPr lang="en-US" sz="1300" b="1" dirty="0">
+              <a:rPr lang="en-US" sz="1500" b="1" dirty="0">
                 <a:solidFill>
                   <a:srgbClr val="12655A"/>
                 </a:solidFill>
@@ -9099,9 +7973,9 @@
                 <a:ea typeface="Calibri" pitchFamily="34" charset="-122"/>
                 <a:cs typeface="Calibri" pitchFamily="34" charset="-120"/>
               </a:rPr>
-              <a:t>3</a:t>
-            </a:r>
-            <a:endParaRPr lang="en-US" sz="1300" dirty="0"/>
+              <a:t>✓</a:t>
+            </a:r>
+            <a:endParaRPr lang="en-US" sz="1500" dirty="0"/>
           </a:p>
         </p:txBody>
       </p:sp>
@@ -9133,7 +8007,7 @@
               <a:buNone/>
             </a:pPr>
             <a:r>
-              <a:rPr lang="en-US" sz="1350" dirty="0">
+              <a:rPr lang="en-US" sz="1300" dirty="0">
                 <a:solidFill>
                   <a:srgbClr val="16262E"/>
                 </a:solidFill>
@@ -9141,9 +8015,9 @@
                 <a:ea typeface="Calibri" pitchFamily="34" charset="-122"/>
                 <a:cs typeface="Calibri" pitchFamily="34" charset="-120"/>
               </a:rPr>
-              <a:t>판정 로직과 스테레오+포즈 파이프라인 1차 통합</a:t>
-            </a:r>
-            <a:endParaRPr lang="en-US" sz="1350" dirty="0"/>
+              <a:t>측정 중 depth 근접 사각지대 리스크를 발견해 해결책 없이 넘기지 않고 문서화</a:t>
+            </a:r>
+            <a:endParaRPr lang="en-US" sz="1300" dirty="0"/>
           </a:p>
         </p:txBody>
       </p:sp>
@@ -9216,7 +8090,7 @@
               <a:buNone/>
             </a:pPr>
             <a:r>
-              <a:rPr lang="en-US" sz="1300" b="1" dirty="0">
+              <a:rPr lang="en-US" sz="1500" b="1" dirty="0">
                 <a:solidFill>
                   <a:srgbClr val="12655A"/>
                 </a:solidFill>
@@ -9224,9 +8098,9 @@
                 <a:ea typeface="Calibri" pitchFamily="34" charset="-122"/>
                 <a:cs typeface="Calibri" pitchFamily="34" charset="-120"/>
               </a:rPr>
-              <a:t>4</a:t>
-            </a:r>
-            <a:endParaRPr lang="en-US" sz="1300" dirty="0"/>
+              <a:t>✓</a:t>
+            </a:r>
+            <a:endParaRPr lang="en-US" sz="1500" dirty="0"/>
           </a:p>
         </p:txBody>
       </p:sp>
@@ -9258,7 +8132,7 @@
               <a:buNone/>
             </a:pPr>
             <a:r>
-              <a:rPr lang="en-US" sz="1350" dirty="0">
+              <a:rPr lang="en-US" sz="1300" dirty="0">
                 <a:solidFill>
                   <a:srgbClr val="16262E"/>
                 </a:solidFill>
@@ -9266,9 +8140,9 @@
                 <a:ea typeface="Calibri" pitchFamily="34" charset="-122"/>
                 <a:cs typeface="Calibri" pitchFamily="34" charset="-120"/>
               </a:rPr>
-              <a:t>데이터 수집 프로토콜에 따라 실제 촬영 착수</a:t>
-            </a:r>
-            <a:endParaRPr lang="en-US" sz="1350" dirty="0"/>
+              <a:t>실데이터 없이도 RF/WRF 학습 파이프라인이 정상 동작함을 미리 검증</a:t>
+            </a:r>
+            <a:endParaRPr lang="en-US" sz="1300" dirty="0"/>
           </a:p>
         </p:txBody>
       </p:sp>
@@ -9289,7 +8163,7 @@
             </a:avLst>
           </a:prstGeom>
           <a:solidFill>
-            <a:srgbClr val="FFFFFF"/>
+            <a:srgbClr val="12655A"/>
           </a:solidFill>
           <a:ln/>
         </p:spPr>
@@ -9311,7 +8185,7 @@
             </a:avLst>
           </a:prstGeom>
           <a:solidFill>
-            <a:srgbClr val="E9FBF7"/>
+            <a:srgbClr val="0E5348"/>
           </a:solidFill>
           <a:ln/>
         </p:spPr>
@@ -9341,17 +8215,17 @@
               <a:buNone/>
             </a:pPr>
             <a:r>
-              <a:rPr lang="en-US" sz="1300" b="1" dirty="0">
-                <a:solidFill>
-                  <a:srgbClr val="12655A"/>
+              <a:rPr lang="en-US" sz="900" b="1" dirty="0">
+                <a:solidFill>
+                  <a:srgbClr val="2FE0C4"/>
                 </a:solidFill>
                 <a:latin typeface="Calibri" pitchFamily="34" charset="0"/>
                 <a:ea typeface="Calibri" pitchFamily="34" charset="-122"/>
                 <a:cs typeface="Calibri" pitchFamily="34" charset="-120"/>
               </a:rPr>
-              <a:t>5</a:t>
-            </a:r>
-            <a:endParaRPr lang="en-US" sz="1300" dirty="0"/>
+              <a:t>남음</a:t>
+            </a:r>
+            <a:endParaRPr lang="en-US" sz="900" dirty="0"/>
           </a:p>
         </p:txBody>
       </p:sp>
@@ -9383,17 +8257,17 @@
               <a:buNone/>
             </a:pPr>
             <a:r>
-              <a:rPr lang="en-US" sz="1350" dirty="0">
-                <a:solidFill>
-                  <a:srgbClr val="16262E"/>
+              <a:rPr lang="en-US" sz="1300" dirty="0">
+                <a:solidFill>
+                  <a:srgbClr val="EAF3F1"/>
                 </a:solidFill>
                 <a:latin typeface="Calibri" pitchFamily="34" charset="0"/>
                 <a:ea typeface="Calibri" pitchFamily="34" charset="-122"/>
                 <a:cs typeface="Calibri" pitchFamily="34" charset="-120"/>
               </a:rPr>
-              <a:t>논문 Introduction · Related Work 초안 (이번 주 이월분)</a:t>
-            </a:r>
-            <a:endParaRPr lang="en-US" sz="1350" dirty="0"/>
+              <a:t>거리 정밀 오차 측정, 근접 사각지대 실제 구현, 논문 Introduction/Related Work 초안</a:t>
+            </a:r>
+            <a:endParaRPr lang="en-US" sz="1300" dirty="0"/>
           </a:p>
         </p:txBody>
       </p:sp>
@@ -9508,7 +8382,7 @@
                 <a:ea typeface="Calibri" pitchFamily="34" charset="-122"/>
                 <a:cs typeface="Calibri" pitchFamily="34" charset="-120"/>
               </a:rPr>
-              <a:t>CONCLUSION</a:t>
+              <a:t>SOURCES</a:t>
             </a:r>
             <a:endParaRPr lang="en-US" sz="1200" dirty="0"/>
           </a:p>
@@ -9547,7 +8421,7 @@
                 <a:ea typeface="Arial" pitchFamily="34" charset="-122"/>
                 <a:cs typeface="Arial" pitchFamily="34" charset="-120"/>
               </a:rPr>
-              <a:t>마무리</a:t>
+              <a:t>참고 자료</a:t>
             </a:r>
             <a:endParaRPr lang="en-US" sz="2700" dirty="0"/>
           </a:p>
@@ -9561,12 +8435,12 @@
         </p:nvSpPr>
         <p:spPr>
           <a:xfrm>
-            <a:off x="640080" y="1737360"/>
-            <a:ext cx="10908792" cy="731520"/>
+            <a:off x="640080" y="1600200"/>
+            <a:ext cx="10908792" cy="594360"/>
           </a:xfrm>
           <a:prstGeom prst="roundRect">
             <a:avLst>
-              <a:gd name="adj" fmla="val 12500"/>
+              <a:gd name="adj" fmla="val 12308"/>
             </a:avLst>
           </a:prstGeom>
           <a:solidFill>
@@ -9583,12 +8457,12 @@
         </p:nvSpPr>
         <p:spPr>
           <a:xfrm>
-            <a:off x="822960" y="1920240"/>
-            <a:ext cx="457200" cy="365760"/>
+            <a:off x="777240" y="1719072"/>
+            <a:ext cx="384048" cy="365760"/>
           </a:xfrm>
           <a:prstGeom prst="roundRect">
             <a:avLst>
-              <a:gd name="adj" fmla="val 20000"/>
+              <a:gd name="adj" fmla="val 17500"/>
             </a:avLst>
           </a:prstGeom>
           <a:solidFill>
@@ -9605,8 +8479,8 @@
         </p:nvSpPr>
         <p:spPr>
           <a:xfrm>
-            <a:off x="822960" y="1920240"/>
-            <a:ext cx="457200" cy="365760"/>
+            <a:off x="777240" y="1719072"/>
+            <a:ext cx="384048" cy="365760"/>
           </a:xfrm>
           <a:prstGeom prst="rect">
             <a:avLst/>
@@ -9622,7 +8496,7 @@
               <a:buNone/>
             </a:pPr>
             <a:r>
-              <a:rPr lang="en-US" sz="1500" b="1" dirty="0">
+              <a:rPr lang="en-US" sz="1150" b="1" dirty="0">
                 <a:solidFill>
                   <a:srgbClr val="12655A"/>
                 </a:solidFill>
@@ -9630,9 +8504,9 @@
                 <a:ea typeface="Calibri" pitchFamily="34" charset="-122"/>
                 <a:cs typeface="Calibri" pitchFamily="34" charset="-120"/>
               </a:rPr>
-              <a:t>✓</a:t>
-            </a:r>
-            <a:endParaRPr lang="en-US" sz="1500" dirty="0"/>
+              <a:t>01</a:t>
+            </a:r>
+            <a:endParaRPr lang="en-US" sz="1150" dirty="0"/>
           </a:p>
         </p:txBody>
       </p:sp>
@@ -9644,8 +8518,8 @@
         </p:nvSpPr>
         <p:spPr>
           <a:xfrm>
-            <a:off x="1417320" y="1737360"/>
-            <a:ext cx="9875520" cy="731520"/>
+            <a:off x="1325880" y="1600200"/>
+            <a:ext cx="9966960" cy="594360"/>
           </a:xfrm>
           <a:prstGeom prst="rect">
             <a:avLst/>
@@ -9658,13 +8532,10 @@
           <a:lstStyle/>
           <a:p>
             <a:pPr indent="0" marL="0">
-              <a:lnSpc>
-                <a:spcPct val="115000"/>
-              </a:lnSpc>
-              <a:buNone/>
-            </a:pPr>
-            <a:r>
-              <a:rPr lang="en-US" sz="1300" dirty="0">
+              <a:buNone/>
+            </a:pPr>
+            <a:r>
+              <a:rPr lang="en-US" sz="1200" dirty="0">
                 <a:solidFill>
                   <a:srgbClr val="16262E"/>
                 </a:solidFill>
@@ -9672,9 +8543,9 @@
                 <a:ea typeface="Calibri" pitchFamily="34" charset="-122"/>
                 <a:cs typeface="Calibri" pitchFamily="34" charset="-120"/>
               </a:rPr>
-              <a:t>4주차 게이트 통과 — 평균 29.43fps, 스파이크 0회, 목표치(최소 5fps) 대폭 상회</a:t>
-            </a:r>
-            <a:endParaRPr lang="en-US" sz="1300" dirty="0"/>
+              <a:t>project.md — 전체 프로젝트 계획 (이번 주 업데이트 반영 최신본)</a:t>
+            </a:r>
+            <a:endParaRPr lang="en-US" sz="1200" dirty="0"/>
           </a:p>
         </p:txBody>
       </p:sp>
@@ -9686,12 +8557,12 @@
         </p:nvSpPr>
         <p:spPr>
           <a:xfrm>
-            <a:off x="640080" y="2578608"/>
-            <a:ext cx="10908792" cy="731520"/>
+            <a:off x="640080" y="2313432"/>
+            <a:ext cx="10908792" cy="594360"/>
           </a:xfrm>
           <a:prstGeom prst="roundRect">
             <a:avLst>
-              <a:gd name="adj" fmla="val 12500"/>
+              <a:gd name="adj" fmla="val 12308"/>
             </a:avLst>
           </a:prstGeom>
           <a:solidFill>
@@ -9708,12 +8579,12 @@
         </p:nvSpPr>
         <p:spPr>
           <a:xfrm>
-            <a:off x="822960" y="2761488"/>
-            <a:ext cx="457200" cy="365760"/>
+            <a:off x="777240" y="2432304"/>
+            <a:ext cx="384048" cy="365760"/>
           </a:xfrm>
           <a:prstGeom prst="roundRect">
             <a:avLst>
-              <a:gd name="adj" fmla="val 20000"/>
+              <a:gd name="adj" fmla="val 17500"/>
             </a:avLst>
           </a:prstGeom>
           <a:solidFill>
@@ -9730,8 +8601,8 @@
         </p:nvSpPr>
         <p:spPr>
           <a:xfrm>
-            <a:off x="822960" y="2761488"/>
-            <a:ext cx="457200" cy="365760"/>
+            <a:off x="777240" y="2432304"/>
+            <a:ext cx="384048" cy="365760"/>
           </a:xfrm>
           <a:prstGeom prst="rect">
             <a:avLst/>
@@ -9747,7 +8618,7 @@
               <a:buNone/>
             </a:pPr>
             <a:r>
-              <a:rPr lang="en-US" sz="1500" b="1" dirty="0">
+              <a:rPr lang="en-US" sz="1150" b="1" dirty="0">
                 <a:solidFill>
                   <a:srgbClr val="12655A"/>
                 </a:solidFill>
@@ -9755,9 +8626,9 @@
                 <a:ea typeface="Calibri" pitchFamily="34" charset="-122"/>
                 <a:cs typeface="Calibri" pitchFamily="34" charset="-120"/>
               </a:rPr>
-              <a:t>✓</a:t>
-            </a:r>
-            <a:endParaRPr lang="en-US" sz="1500" dirty="0"/>
+              <a:t>02</a:t>
+            </a:r>
+            <a:endParaRPr lang="en-US" sz="1150" dirty="0"/>
           </a:p>
         </p:txBody>
       </p:sp>
@@ -9769,8 +8640,8 @@
         </p:nvSpPr>
         <p:spPr>
           <a:xfrm>
-            <a:off x="1417320" y="2578608"/>
-            <a:ext cx="9875520" cy="731520"/>
+            <a:off x="1325880" y="2313432"/>
+            <a:ext cx="9966960" cy="594360"/>
           </a:xfrm>
           <a:prstGeom prst="rect">
             <a:avLst/>
@@ -9783,13 +8654,10 @@
           <a:lstStyle/>
           <a:p>
             <a:pPr indent="0" marL="0">
-              <a:lnSpc>
-                <a:spcPct val="115000"/>
-              </a:lnSpc>
-              <a:buNone/>
-            </a:pPr>
-            <a:r>
-              <a:rPr lang="en-US" sz="1300" dirty="0">
+              <a:buNone/>
+            </a:pPr>
+            <a:r>
+              <a:rPr lang="en-US" sz="1200" dirty="0">
                 <a:solidFill>
                   <a:srgbClr val="16262E"/>
                 </a:solidFill>
@@ -9797,9 +8665,9 @@
                 <a:ea typeface="Calibri" pitchFamily="34" charset="-122"/>
                 <a:cs typeface="Calibri" pitchFamily="34" charset="-120"/>
               </a:rPr>
-              <a:t>계획(oCamS)과 실제(D455)가 다르다는 걸 발견 즉시 문서 전체를 바로잡음</a:t>
-            </a:r>
-            <a:endParaRPr lang="en-US" sz="1300" dirty="0"/>
+              <a:t>data_collection_protocol.md — 자세 5종 정의·촬영/라벨링 절차</a:t>
+            </a:r>
+            <a:endParaRPr lang="en-US" sz="1200" dirty="0"/>
           </a:p>
         </p:txBody>
       </p:sp>
@@ -9811,12 +8679,12 @@
         </p:nvSpPr>
         <p:spPr>
           <a:xfrm>
-            <a:off x="640080" y="3419856"/>
-            <a:ext cx="10908792" cy="731520"/>
+            <a:off x="640080" y="3026664"/>
+            <a:ext cx="10908792" cy="594360"/>
           </a:xfrm>
           <a:prstGeom prst="roundRect">
             <a:avLst>
-              <a:gd name="adj" fmla="val 12500"/>
+              <a:gd name="adj" fmla="val 12308"/>
             </a:avLst>
           </a:prstGeom>
           <a:solidFill>
@@ -9833,12 +8701,12 @@
         </p:nvSpPr>
         <p:spPr>
           <a:xfrm>
-            <a:off x="822960" y="3602736"/>
-            <a:ext cx="457200" cy="365760"/>
+            <a:off x="777240" y="3145536"/>
+            <a:ext cx="384048" cy="365760"/>
           </a:xfrm>
           <a:prstGeom prst="roundRect">
             <a:avLst>
-              <a:gd name="adj" fmla="val 20000"/>
+              <a:gd name="adj" fmla="val 17500"/>
             </a:avLst>
           </a:prstGeom>
           <a:solidFill>
@@ -9855,8 +8723,8 @@
         </p:nvSpPr>
         <p:spPr>
           <a:xfrm>
-            <a:off x="822960" y="3602736"/>
-            <a:ext cx="457200" cy="365760"/>
+            <a:off x="777240" y="3145536"/>
+            <a:ext cx="384048" cy="365760"/>
           </a:xfrm>
           <a:prstGeom prst="rect">
             <a:avLst/>
@@ -9872,7 +8740,7 @@
               <a:buNone/>
             </a:pPr>
             <a:r>
-              <a:rPr lang="en-US" sz="1500" b="1" dirty="0">
+              <a:rPr lang="en-US" sz="1150" b="1" dirty="0">
                 <a:solidFill>
                   <a:srgbClr val="12655A"/>
                 </a:solidFill>
@@ -9880,9 +8748,9 @@
                 <a:ea typeface="Calibri" pitchFamily="34" charset="-122"/>
                 <a:cs typeface="Calibri" pitchFamily="34" charset="-120"/>
               </a:rPr>
-              <a:t>✓</a:t>
-            </a:r>
-            <a:endParaRPr lang="en-US" sz="1500" dirty="0"/>
+              <a:t>03</a:t>
+            </a:r>
+            <a:endParaRPr lang="en-US" sz="1150" dirty="0"/>
           </a:p>
         </p:txBody>
       </p:sp>
@@ -9894,8 +8762,8 @@
         </p:nvSpPr>
         <p:spPr>
           <a:xfrm>
-            <a:off x="1417320" y="3419856"/>
-            <a:ext cx="9875520" cy="731520"/>
+            <a:off x="1325880" y="3026664"/>
+            <a:ext cx="9966960" cy="594360"/>
           </a:xfrm>
           <a:prstGeom prst="rect">
             <a:avLst/>
@@ -9908,13 +8776,10 @@
           <a:lstStyle/>
           <a:p>
             <a:pPr indent="0" marL="0">
-              <a:lnSpc>
-                <a:spcPct val="115000"/>
-              </a:lnSpc>
-              <a:buNone/>
-            </a:pPr>
-            <a:r>
-              <a:rPr lang="en-US" sz="1300" dirty="0">
+              <a:buNone/>
+            </a:pPr>
+            <a:r>
+              <a:rPr lang="en-US" sz="1200" dirty="0">
                 <a:solidFill>
                   <a:srgbClr val="16262E"/>
                 </a:solidFill>
@@ -9922,9 +8787,9 @@
                 <a:ea typeface="Calibri" pitchFamily="34" charset="-122"/>
                 <a:cs typeface="Calibri" pitchFamily="34" charset="-120"/>
               </a:rPr>
-              <a:t>측정 중 depth 근접 사각지대 리스크를 발견해 해결책 없이 넘기지 않고 문서화</a:t>
-            </a:r>
-            <a:endParaRPr lang="en-US" sz="1300" dirty="0"/>
+              <a:t>src/capture/realsense_capture.py — RealSense 캡처·게이트 측정 코드</a:t>
+            </a:r>
+            <a:endParaRPr lang="en-US" sz="1200" dirty="0"/>
           </a:p>
         </p:txBody>
       </p:sp>
@@ -9936,12 +8801,12 @@
         </p:nvSpPr>
         <p:spPr>
           <a:xfrm>
-            <a:off x="640080" y="4261104"/>
-            <a:ext cx="10908792" cy="731520"/>
+            <a:off x="640080" y="3739896"/>
+            <a:ext cx="10908792" cy="594360"/>
           </a:xfrm>
           <a:prstGeom prst="roundRect">
             <a:avLst>
-              <a:gd name="adj" fmla="val 12500"/>
+              <a:gd name="adj" fmla="val 12308"/>
             </a:avLst>
           </a:prstGeom>
           <a:solidFill>
@@ -9958,12 +8823,12 @@
         </p:nvSpPr>
         <p:spPr>
           <a:xfrm>
-            <a:off x="822960" y="4443984"/>
-            <a:ext cx="457200" cy="365760"/>
+            <a:off x="777240" y="3858768"/>
+            <a:ext cx="384048" cy="365760"/>
           </a:xfrm>
           <a:prstGeom prst="roundRect">
             <a:avLst>
-              <a:gd name="adj" fmla="val 20000"/>
+              <a:gd name="adj" fmla="val 17500"/>
             </a:avLst>
           </a:prstGeom>
           <a:solidFill>
@@ -9980,8 +8845,8 @@
         </p:nvSpPr>
         <p:spPr>
           <a:xfrm>
-            <a:off x="822960" y="4443984"/>
-            <a:ext cx="457200" cy="365760"/>
+            <a:off x="777240" y="3858768"/>
+            <a:ext cx="384048" cy="365760"/>
           </a:xfrm>
           <a:prstGeom prst="rect">
             <a:avLst/>
@@ -9997,7 +8862,7 @@
               <a:buNone/>
             </a:pPr>
             <a:r>
-              <a:rPr lang="en-US" sz="1500" b="1" dirty="0">
+              <a:rPr lang="en-US" sz="1150" b="1" dirty="0">
                 <a:solidFill>
                   <a:srgbClr val="12655A"/>
                 </a:solidFill>
@@ -10005,9 +8870,9 @@
                 <a:ea typeface="Calibri" pitchFamily="34" charset="-122"/>
                 <a:cs typeface="Calibri" pitchFamily="34" charset="-120"/>
               </a:rPr>
-              <a:t>✓</a:t>
-            </a:r>
-            <a:endParaRPr lang="en-US" sz="1500" dirty="0"/>
+              <a:t>04</a:t>
+            </a:r>
+            <a:endParaRPr lang="en-US" sz="1150" dirty="0"/>
           </a:p>
         </p:txBody>
       </p:sp>
@@ -10019,8 +8884,8 @@
         </p:nvSpPr>
         <p:spPr>
           <a:xfrm>
-            <a:off x="1417320" y="4261104"/>
-            <a:ext cx="9875520" cy="731520"/>
+            <a:off x="1325880" y="3739896"/>
+            <a:ext cx="9966960" cy="594360"/>
           </a:xfrm>
           <a:prstGeom prst="rect">
             <a:avLst/>
@@ -10033,13 +8898,10 @@
           <a:lstStyle/>
           <a:p>
             <a:pPr indent="0" marL="0">
-              <a:lnSpc>
-                <a:spcPct val="115000"/>
-              </a:lnSpc>
-              <a:buNone/>
-            </a:pPr>
-            <a:r>
-              <a:rPr lang="en-US" sz="1300" dirty="0">
+              <a:buNone/>
+            </a:pPr>
+            <a:r>
+              <a:rPr lang="en-US" sz="1200" dirty="0">
                 <a:solidFill>
                   <a:srgbClr val="16262E"/>
                 </a:solidFill>
@@ -10047,9 +8909,9 @@
                 <a:ea typeface="Calibri" pitchFamily="34" charset="-122"/>
                 <a:cs typeface="Calibri" pitchFamily="34" charset="-120"/>
               </a:rPr>
-              <a:t>실데이터 없이도 RF/WRF 학습 파이프라인이 정상 동작함을 미리 검증</a:t>
-            </a:r>
-            <a:endParaRPr lang="en-US" sz="1300" dirty="0"/>
+              <a:t>src/logic/rf_baseline.py, tests/test_rf_baseline.py — RF 기준모델 스켈레톤</a:t>
+            </a:r>
+            <a:endParaRPr lang="en-US" sz="1200" dirty="0"/>
           </a:p>
         </p:txBody>
       </p:sp>
@@ -10061,16 +8923,16 @@
         </p:nvSpPr>
         <p:spPr>
           <a:xfrm>
-            <a:off x="640080" y="5102352"/>
-            <a:ext cx="10908792" cy="731520"/>
+            <a:off x="640080" y="4453128"/>
+            <a:ext cx="10908792" cy="594360"/>
           </a:xfrm>
           <a:prstGeom prst="roundRect">
             <a:avLst>
-              <a:gd name="adj" fmla="val 12500"/>
+              <a:gd name="adj" fmla="val 12308"/>
             </a:avLst>
           </a:prstGeom>
           <a:solidFill>
-            <a:srgbClr val="12655A"/>
+            <a:srgbClr val="FFFFFF"/>
           </a:solidFill>
           <a:ln/>
         </p:spPr>
@@ -10083,16 +8945,16 @@
         </p:nvSpPr>
         <p:spPr>
           <a:xfrm>
-            <a:off x="822960" y="5285232"/>
-            <a:ext cx="457200" cy="365760"/>
+            <a:off x="777240" y="4572000"/>
+            <a:ext cx="384048" cy="365760"/>
           </a:xfrm>
           <a:prstGeom prst="roundRect">
             <a:avLst>
-              <a:gd name="adj" fmla="val 20000"/>
+              <a:gd name="adj" fmla="val 17500"/>
             </a:avLst>
           </a:prstGeom>
           <a:solidFill>
-            <a:srgbClr val="0E5348"/>
+            <a:srgbClr val="E9FBF7"/>
           </a:solidFill>
           <a:ln/>
         </p:spPr>
@@ -10105,8 +8967,8 @@
         </p:nvSpPr>
         <p:spPr>
           <a:xfrm>
-            <a:off x="822960" y="5285232"/>
-            <a:ext cx="457200" cy="365760"/>
+            <a:off x="777240" y="4572000"/>
+            <a:ext cx="384048" cy="365760"/>
           </a:xfrm>
           <a:prstGeom prst="rect">
             <a:avLst/>
@@ -10122,17 +8984,17 @@
               <a:buNone/>
             </a:pPr>
             <a:r>
-              <a:rPr lang="en-US" sz="900" b="1" dirty="0">
-                <a:solidFill>
-                  <a:srgbClr val="2FE0C4"/>
+              <a:rPr lang="en-US" sz="1150" b="1" dirty="0">
+                <a:solidFill>
+                  <a:srgbClr val="12655A"/>
                 </a:solidFill>
                 <a:latin typeface="Calibri" pitchFamily="34" charset="0"/>
                 <a:ea typeface="Calibri" pitchFamily="34" charset="-122"/>
                 <a:cs typeface="Calibri" pitchFamily="34" charset="-120"/>
               </a:rPr>
-              <a:t>남음</a:t>
-            </a:r>
-            <a:endParaRPr lang="en-US" sz="900" dirty="0"/>
+              <a:t>05</a:t>
+            </a:r>
+            <a:endParaRPr lang="en-US" sz="1150" dirty="0"/>
           </a:p>
         </p:txBody>
       </p:sp>
@@ -10144,8 +9006,8 @@
         </p:nvSpPr>
         <p:spPr>
           <a:xfrm>
-            <a:off x="1417320" y="5102352"/>
-            <a:ext cx="9875520" cy="731520"/>
+            <a:off x="1325880" y="4453128"/>
+            <a:ext cx="9966960" cy="594360"/>
           </a:xfrm>
           <a:prstGeom prst="rect">
             <a:avLst/>
@@ -10158,29 +9020,187 @@
           <a:lstStyle/>
           <a:p>
             <a:pPr indent="0" marL="0">
-              <a:lnSpc>
-                <a:spcPct val="115000"/>
-              </a:lnSpc>
-              <a:buNone/>
-            </a:pPr>
-            <a:r>
-              <a:rPr lang="en-US" sz="1300" dirty="0">
-                <a:solidFill>
-                  <a:srgbClr val="EAF3F1"/>
+              <a:buNone/>
+            </a:pPr>
+            <a:r>
+              <a:rPr lang="en-US" sz="1200" dirty="0">
+                <a:solidFill>
+                  <a:srgbClr val="16262E"/>
                 </a:solidFill>
                 <a:latin typeface="Calibri" pitchFamily="34" charset="0"/>
                 <a:ea typeface="Calibri" pitchFamily="34" charset="-122"/>
                 <a:cs typeface="Calibri" pitchFamily="34" charset="-120"/>
               </a:rPr>
-              <a:t>거리 정밀 오차 측정, 근접 사각지대 실제 구현, 논문 Introduction/Related Work 초안</a:t>
-            </a:r>
-            <a:endParaRPr lang="en-US" sz="1300" dirty="0"/>
-          </a:p>
-        </p:txBody>
-      </p:sp>
-      <p:sp>
-        <p:nvSpPr>
-          <p:cNvPr id="24" name="Text 22"/>
+              <a:t>experiments/wrf_paper_replication.py — WRF 논문 데이터 파이프라인 검증</a:t>
+            </a:r>
+            <a:endParaRPr lang="en-US" sz="1200" dirty="0"/>
+          </a:p>
+        </p:txBody>
+      </p:sp>
+      <p:sp>
+        <p:nvSpPr>
+          <p:cNvPr id="24" name="Shape 22"/>
+          <p:cNvSpPr/>
+          <p:nvPr/>
+        </p:nvSpPr>
+        <p:spPr>
+          <a:xfrm>
+            <a:off x="640080" y="5166360"/>
+            <a:ext cx="10908792" cy="594360"/>
+          </a:xfrm>
+          <a:prstGeom prst="roundRect">
+            <a:avLst>
+              <a:gd name="adj" fmla="val 12308"/>
+            </a:avLst>
+          </a:prstGeom>
+          <a:solidFill>
+            <a:srgbClr val="FFFFFF"/>
+          </a:solidFill>
+          <a:ln/>
+        </p:spPr>
+      </p:sp>
+      <p:sp>
+        <p:nvSpPr>
+          <p:cNvPr id="25" name="Shape 23"/>
+          <p:cNvSpPr/>
+          <p:nvPr/>
+        </p:nvSpPr>
+        <p:spPr>
+          <a:xfrm>
+            <a:off x="777240" y="5285232"/>
+            <a:ext cx="384048" cy="365760"/>
+          </a:xfrm>
+          <a:prstGeom prst="roundRect">
+            <a:avLst>
+              <a:gd name="adj" fmla="val 17500"/>
+            </a:avLst>
+          </a:prstGeom>
+          <a:solidFill>
+            <a:srgbClr val="E9FBF7"/>
+          </a:solidFill>
+          <a:ln/>
+        </p:spPr>
+      </p:sp>
+      <p:sp>
+        <p:nvSpPr>
+          <p:cNvPr id="26" name="Text 24"/>
+          <p:cNvSpPr txBox="1"/>
+          <p:nvPr/>
+        </p:nvSpPr>
+        <p:spPr>
+          <a:xfrm>
+            <a:off x="777240" y="5285232"/>
+            <a:ext cx="384048" cy="365760"/>
+          </a:xfrm>
+          <a:prstGeom prst="rect">
+            <a:avLst/>
+          </a:prstGeom>
+          <a:noFill/>
+          <a:ln/>
+        </p:spPr>
+        <p:txBody>
+          <a:bodyPr wrap="square" lIns="0" tIns="0" rIns="0" bIns="0" rtlCol="0" anchor="ctr"/>
+          <a:lstStyle/>
+          <a:p>
+            <a:pPr algn="ctr" indent="0" marL="0">
+              <a:buNone/>
+            </a:pPr>
+            <a:r>
+              <a:rPr lang="en-US" sz="1150" b="1" dirty="0">
+                <a:solidFill>
+                  <a:srgbClr val="12655A"/>
+                </a:solidFill>
+                <a:latin typeface="Calibri" pitchFamily="34" charset="0"/>
+                <a:ea typeface="Calibri" pitchFamily="34" charset="-122"/>
+                <a:cs typeface="Calibri" pitchFamily="34" charset="-120"/>
+              </a:rPr>
+              <a:t>06</a:t>
+            </a:r>
+            <a:endParaRPr lang="en-US" sz="1150" dirty="0"/>
+          </a:p>
+        </p:txBody>
+      </p:sp>
+      <p:sp>
+        <p:nvSpPr>
+          <p:cNvPr id="27" name="Text 25"/>
+          <p:cNvSpPr txBox="1"/>
+          <p:nvPr/>
+        </p:nvSpPr>
+        <p:spPr>
+          <a:xfrm>
+            <a:off x="1325880" y="5166360"/>
+            <a:ext cx="9966960" cy="594360"/>
+          </a:xfrm>
+          <a:prstGeom prst="rect">
+            <a:avLst/>
+          </a:prstGeom>
+          <a:noFill/>
+          <a:ln/>
+        </p:spPr>
+        <p:txBody>
+          <a:bodyPr wrap="square" lIns="0" tIns="0" rIns="0" bIns="0" rtlCol="0" anchor="ctr"/>
+          <a:lstStyle/>
+          <a:p>
+            <a:pPr indent="0" marL="0">
+              <a:buNone/>
+            </a:pPr>
+            <a:r>
+              <a:rPr lang="en-US" sz="1200" dirty="0">
+                <a:solidFill>
+                  <a:srgbClr val="16262E"/>
+                </a:solidFill>
+                <a:latin typeface="Calibri" pitchFamily="34" charset="0"/>
+                <a:ea typeface="Calibri" pitchFamily="34" charset="-122"/>
+                <a:cs typeface="Calibri" pitchFamily="34" charset="-120"/>
+              </a:rPr>
+              <a:t>weekly_report_week4.md — 4주차 상세 진행보고서</a:t>
+            </a:r>
+            <a:endParaRPr lang="en-US" sz="1200" dirty="0"/>
+          </a:p>
+        </p:txBody>
+      </p:sp>
+      <p:sp>
+        <p:nvSpPr>
+          <p:cNvPr id="28" name="Text 26"/>
+          <p:cNvSpPr txBox="1"/>
+          <p:nvPr/>
+        </p:nvSpPr>
+        <p:spPr>
+          <a:xfrm>
+            <a:off x="640080" y="6108192"/>
+            <a:ext cx="10908792" cy="411480"/>
+          </a:xfrm>
+          <a:prstGeom prst="rect">
+            <a:avLst/>
+          </a:prstGeom>
+          <a:noFill/>
+          <a:ln/>
+        </p:spPr>
+        <p:txBody>
+          <a:bodyPr wrap="square" lIns="0" tIns="0" rIns="0" bIns="0" rtlCol="0" anchor="ctr"/>
+          <a:lstStyle/>
+          <a:p>
+            <a:pPr algn="ctr" indent="0" marL="0">
+              <a:buNone/>
+            </a:pPr>
+            <a:r>
+              <a:rPr lang="en-US" sz="1350" i="1" dirty="0">
+                <a:solidFill>
+                  <a:srgbClr val="9FB6BC"/>
+                </a:solidFill>
+                <a:latin typeface="Calibri" pitchFamily="34" charset="0"/>
+                <a:ea typeface="Calibri" pitchFamily="34" charset="-122"/>
+                <a:cs typeface="Calibri" pitchFamily="34" charset="-120"/>
+              </a:rPr>
+              <a:t>질문 받겠습니다</a:t>
+            </a:r>
+            <a:endParaRPr lang="en-US" sz="1350" dirty="0"/>
+          </a:p>
+        </p:txBody>
+      </p:sp>
+      <p:sp>
+        <p:nvSpPr>
+          <p:cNvPr id="29" name="Text 27"/>
           <p:cNvSpPr txBox="1"/>
           <p:nvPr/>
         </p:nvSpPr>

--- a/barunjase_week4.pptx
+++ b/barunjase_week4.pptx
@@ -2767,6 +2767,29 @@
             </a:r>
             <a:endParaRPr lang="en-US" sz="1100" dirty="0"/>
           </a:p>
+          <a:p>
+            <a:pPr indent="0" marL="0">
+              <a:lnSpc>
+                <a:spcPct val="115000"/>
+              </a:lnSpc>
+              <a:spcAft>
+                <a:spcPts val="800"/>
+              </a:spcAft>
+              <a:buNone/>
+            </a:pPr>
+            <a:r>
+              <a:rPr lang="en-US" sz="1100" dirty="0">
+                <a:solidFill>
+                  <a:srgbClr val="3C4A50"/>
+                </a:solidFill>
+                <a:latin typeface="Calibri" pitchFamily="34" charset="0"/>
+                <a:ea typeface="Calibri" pitchFamily="34" charset="-122"/>
+                <a:cs typeface="Calibri" pitchFamily="34" charset="-120"/>
+              </a:rPr>
+              <a:t>•  스켈레톤(관절 연결선) 코드는 외부 저장소를 그대로 가져온 게 아니라, TensorFlow 공식 MoveNet 튜토리얼이 정의한 표준 COCO-17 연결 방식을 직접 구현</a:t>
+            </a:r>
+            <a:endParaRPr lang="en-US" sz="1100" dirty="0"/>
+          </a:p>
         </p:txBody>
       </p:sp>
       <p:sp>

--- a/barunjase_week4.pptx
+++ b/barunjase_week4.pptx
@@ -13,10 +13,9 @@
     <p:sldId id="261" r:id="rId7"/>
     <p:sldId id="262" r:id="rId8"/>
     <p:sldId id="263" r:id="rId9"/>
-    <p:sldId id="264" r:id="rId10"/>
   </p:sldIdLst>
   <p:notesMasterIdLst>
-    <p:notesMasterId r:id="rId11"/>
+    <p:notesMasterId r:id="rId10"/>
   </p:notesMasterIdLst>
   <p:sldSz cx="12192000" cy="6858000"/>
   <p:notesSz cx="6858000" cy="12192000"/>
@@ -1150,94 +1149,6 @@
             <a:fld id="{F7021451-1387-4CA6-816F-3879F97B5CBC}" type="slidenum">
               <a:rPr lang="en-US"/>
               <a:t>8</a:t>
-            </a:fld>
-            <a:endParaRPr lang="en-US"/>
-          </a:p>
-        </p:txBody>
-      </p:sp>
-    </p:spTree>
-    <p:extLst>
-      <p:ext uri="{BB962C8B-B14F-4D97-AF65-F5344CB8AC3E}">
-        <p14:creationId xmlns:p14="http://schemas.microsoft.com/office/powerpoint/2010/main" val="1024086991"/>
-      </p:ext>
-    </p:extLst>
-  </p:cSld>
-  <p:clrMapOvr>
-    <a:masterClrMapping/>
-  </p:clrMapOvr>
-</p:notes>
-</file>
-
-<file path=ppt/notesSlides/notesSlide9.xml><?xml version="1.0" encoding="utf-8"?>
-<p:notes xmlns:a="http://schemas.openxmlformats.org/drawingml/2006/main" xmlns:r="http://schemas.openxmlformats.org/officeDocument/2006/relationships" xmlns:p="http://schemas.openxmlformats.org/presentationml/2006/main">
-  <p:cSld>
-    <p:spTree>
-      <p:nvGrpSpPr>
-        <p:cNvPr id="1" name=""/>
-        <p:cNvGrpSpPr/>
-        <p:nvPr/>
-      </p:nvGrpSpPr>
-      <p:grpSpPr>
-        <a:xfrm>
-          <a:off x="0" y="0"/>
-          <a:ext cx="0" cy="0"/>
-          <a:chOff x="0" y="0"/>
-          <a:chExt cx="0" cy="0"/>
-        </a:xfrm>
-      </p:grpSpPr>
-      <p:sp>
-        <p:nvSpPr>
-          <p:cNvPr id="2" name="Slide Image Placeholder 1"/>
-          <p:cNvSpPr>
-            <a:spLocks noGrp="1" noRot="1" noChangeAspect="1"/>
-          </p:cNvSpPr>
-          <p:nvPr>
-            <p:ph type="sldImg"/>
-          </p:nvPr>
-        </p:nvSpPr>
-        <p:spPr/>
-      </p:sp>
-      <p:sp>
-        <p:nvSpPr>
-          <p:cNvPr id="3" name="Notes Placeholder 2"/>
-          <p:cNvSpPr>
-            <a:spLocks noGrp="1"/>
-          </p:cNvSpPr>
-          <p:nvPr>
-            <p:ph type="body" idx="1"/>
-          </p:nvPr>
-        </p:nvSpPr>
-        <p:spPr/>
-        <p:txBody>
-          <a:bodyPr/>
-          <a:lstStyle/>
-          <a:p>
-            <a:r>
-              <a:rPr lang="en-US" dirty="0"/>
-              <a:t/>
-            </a:r>
-            <a:endParaRPr lang="en-US" dirty="0"/>
-          </a:p>
-        </p:txBody>
-      </p:sp>
-      <p:sp>
-        <p:nvSpPr>
-          <p:cNvPr id="4" name="Slide Number Placeholder 3"/>
-          <p:cNvSpPr>
-            <a:spLocks noGrp="1"/>
-          </p:cNvSpPr>
-          <p:nvPr>
-            <p:ph type="sldNum" sz="quarter" idx="10"/>
-          </p:nvPr>
-        </p:nvSpPr>
-        <p:spPr/>
-        <p:txBody>
-          <a:bodyPr/>
-          <a:lstStyle/>
-          <a:p>
-            <a:fld id="{F7021451-1387-4CA6-816F-3879F97B5CBC}" type="slidenum">
-              <a:rPr lang="en-US"/>
-              <a:t>9</a:t>
             </a:fld>
             <a:endParaRPr lang="en-US"/>
           </a:p>
@@ -2127,7 +2038,7 @@
                 <a:ea typeface="Calibri" pitchFamily="34" charset="-122"/>
                 <a:cs typeface="Calibri" pitchFamily="34" charset="-120"/>
               </a:rPr>
-              <a:t>02   다음 주(5주차) 계획</a:t>
+              <a:t>02   4주차 게이트 측정 결과</a:t>
             </a:r>
             <a:endParaRPr lang="en-US" sz="1350" dirty="0"/>
           </a:p>
@@ -2188,7 +2099,7 @@
                 <a:ea typeface="Calibri" pitchFamily="34" charset="-122"/>
                 <a:cs typeface="Calibri" pitchFamily="34" charset="-120"/>
               </a:rPr>
-              <a:t>03   4주차 게이트 측정 결과</a:t>
+              <a:t>03   발견한 설계 리스크: depth 근접 사각지대</a:t>
             </a:r>
             <a:endParaRPr lang="en-US" sz="1350" dirty="0"/>
           </a:p>
@@ -2249,7 +2160,7 @@
                 <a:ea typeface="Calibri" pitchFamily="34" charset="-122"/>
                 <a:cs typeface="Calibri" pitchFamily="34" charset="-120"/>
               </a:rPr>
-              <a:t>04   발견한 설계 리스크: depth 근접 사각지대</a:t>
+              <a:t>04   선행 논문 데이터로 파이프라인 사전 검증</a:t>
             </a:r>
             <a:endParaRPr lang="en-US" sz="1350" dirty="0"/>
           </a:p>
@@ -2310,7 +2221,7 @@
                 <a:ea typeface="Calibri" pitchFamily="34" charset="-122"/>
                 <a:cs typeface="Calibri" pitchFamily="34" charset="-120"/>
               </a:rPr>
-              <a:t>05   선행 논문 데이터로 파이프라인 사전 검증</a:t>
+              <a:t>05   다음 주(5주차) 계획</a:t>
             </a:r>
             <a:endParaRPr lang="en-US" sz="1350" dirty="0"/>
           </a:p>
@@ -3122,7 +3033,7 @@
                 <a:ea typeface="Calibri" pitchFamily="34" charset="-122"/>
                 <a:cs typeface="Calibri" pitchFamily="34" charset="-120"/>
               </a:rPr>
-              <a:t>NEXT WEEK</a:t>
+              <a:t>GATE RESULTS</a:t>
             </a:r>
             <a:endParaRPr lang="en-US" sz="1200" dirty="0"/>
           </a:p>
@@ -3161,787 +3072,6 @@
                 <a:ea typeface="Arial" pitchFamily="34" charset="-122"/>
                 <a:cs typeface="Arial" pitchFamily="34" charset="-120"/>
               </a:rPr>
-              <a:t>다음 주(5주차) 계획</a:t>
-            </a:r>
-            <a:endParaRPr lang="en-US" sz="2700" dirty="0"/>
-          </a:p>
-        </p:txBody>
-      </p:sp>
-      <p:sp>
-        <p:nvSpPr>
-          <p:cNvPr id="4" name="Shape 2"/>
-          <p:cNvSpPr/>
-          <p:nvPr/>
-        </p:nvSpPr>
-        <p:spPr>
-          <a:xfrm>
-            <a:off x="640080" y="1737360"/>
-            <a:ext cx="10908792" cy="731520"/>
-          </a:xfrm>
-          <a:prstGeom prst="roundRect">
-            <a:avLst>
-              <a:gd name="adj" fmla="val 12500"/>
-            </a:avLst>
-          </a:prstGeom>
-          <a:solidFill>
-            <a:srgbClr val="FFFFFF"/>
-          </a:solidFill>
-          <a:ln/>
-        </p:spPr>
-      </p:sp>
-      <p:sp>
-        <p:nvSpPr>
-          <p:cNvPr id="5" name="Shape 3"/>
-          <p:cNvSpPr/>
-          <p:nvPr/>
-        </p:nvSpPr>
-        <p:spPr>
-          <a:xfrm>
-            <a:off x="822960" y="1920240"/>
-            <a:ext cx="457200" cy="365760"/>
-          </a:xfrm>
-          <a:prstGeom prst="roundRect">
-            <a:avLst>
-              <a:gd name="adj" fmla="val 20000"/>
-            </a:avLst>
-          </a:prstGeom>
-          <a:solidFill>
-            <a:srgbClr val="E9FBF7"/>
-          </a:solidFill>
-          <a:ln/>
-        </p:spPr>
-      </p:sp>
-      <p:sp>
-        <p:nvSpPr>
-          <p:cNvPr id="6" name="Text 4"/>
-          <p:cNvSpPr txBox="1"/>
-          <p:nvPr/>
-        </p:nvSpPr>
-        <p:spPr>
-          <a:xfrm>
-            <a:off x="822960" y="1920240"/>
-            <a:ext cx="457200" cy="365760"/>
-          </a:xfrm>
-          <a:prstGeom prst="rect">
-            <a:avLst/>
-          </a:prstGeom>
-          <a:noFill/>
-          <a:ln/>
-        </p:spPr>
-        <p:txBody>
-          <a:bodyPr wrap="square" lIns="0" tIns="0" rIns="0" bIns="0" rtlCol="0" anchor="ctr"/>
-          <a:lstStyle/>
-          <a:p>
-            <a:pPr algn="ctr" indent="0" marL="0">
-              <a:buNone/>
-            </a:pPr>
-            <a:r>
-              <a:rPr lang="en-US" sz="1300" b="1" dirty="0">
-                <a:solidFill>
-                  <a:srgbClr val="12655A"/>
-                </a:solidFill>
-                <a:latin typeface="Calibri" pitchFamily="34" charset="0"/>
-                <a:ea typeface="Calibri" pitchFamily="34" charset="-122"/>
-                <a:cs typeface="Calibri" pitchFamily="34" charset="-120"/>
-              </a:rPr>
-              <a:t>1</a:t>
-            </a:r>
-            <a:endParaRPr lang="en-US" sz="1300" dirty="0"/>
-          </a:p>
-        </p:txBody>
-      </p:sp>
-      <p:sp>
-        <p:nvSpPr>
-          <p:cNvPr id="7" name="Text 5"/>
-          <p:cNvSpPr txBox="1"/>
-          <p:nvPr/>
-        </p:nvSpPr>
-        <p:spPr>
-          <a:xfrm>
-            <a:off x="1417320" y="1737360"/>
-            <a:ext cx="9875520" cy="731520"/>
-          </a:xfrm>
-          <a:prstGeom prst="rect">
-            <a:avLst/>
-          </a:prstGeom>
-          <a:noFill/>
-          <a:ln/>
-        </p:spPr>
-        <p:txBody>
-          <a:bodyPr wrap="square" lIns="0" tIns="0" rIns="0" bIns="0" rtlCol="0" anchor="ctr"/>
-          <a:lstStyle/>
-          <a:p>
-            <a:pPr indent="0" marL="0">
-              <a:lnSpc>
-                <a:spcPct val="115000"/>
-              </a:lnSpc>
-              <a:buNone/>
-            </a:pPr>
-            <a:r>
-              <a:rPr lang="en-US" sz="1350" dirty="0">
-                <a:solidFill>
-                  <a:srgbClr val="16262E"/>
-                </a:solidFill>
-                <a:latin typeface="Calibri" pitchFamily="34" charset="0"/>
-                <a:ea typeface="Calibri" pitchFamily="34" charset="-122"/>
-                <a:cs typeface="Calibri" pitchFamily="34" charset="-120"/>
-              </a:rPr>
-              <a:t>RealSense depth 프리셋·필터 튜닝, 줄자 확보해 거리 정확도 정밀 재검증</a:t>
-            </a:r>
-            <a:endParaRPr lang="en-US" sz="1350" dirty="0"/>
-          </a:p>
-        </p:txBody>
-      </p:sp>
-      <p:sp>
-        <p:nvSpPr>
-          <p:cNvPr id="8" name="Shape 6"/>
-          <p:cNvSpPr/>
-          <p:nvPr/>
-        </p:nvSpPr>
-        <p:spPr>
-          <a:xfrm>
-            <a:off x="640080" y="2578608"/>
-            <a:ext cx="10908792" cy="731520"/>
-          </a:xfrm>
-          <a:prstGeom prst="roundRect">
-            <a:avLst>
-              <a:gd name="adj" fmla="val 12500"/>
-            </a:avLst>
-          </a:prstGeom>
-          <a:solidFill>
-            <a:srgbClr val="FFFFFF"/>
-          </a:solidFill>
-          <a:ln/>
-        </p:spPr>
-      </p:sp>
-      <p:sp>
-        <p:nvSpPr>
-          <p:cNvPr id="9" name="Shape 7"/>
-          <p:cNvSpPr/>
-          <p:nvPr/>
-        </p:nvSpPr>
-        <p:spPr>
-          <a:xfrm>
-            <a:off x="822960" y="2761488"/>
-            <a:ext cx="457200" cy="365760"/>
-          </a:xfrm>
-          <a:prstGeom prst="roundRect">
-            <a:avLst>
-              <a:gd name="adj" fmla="val 20000"/>
-            </a:avLst>
-          </a:prstGeom>
-          <a:solidFill>
-            <a:srgbClr val="E9FBF7"/>
-          </a:solidFill>
-          <a:ln/>
-        </p:spPr>
-      </p:sp>
-      <p:sp>
-        <p:nvSpPr>
-          <p:cNvPr id="10" name="Text 8"/>
-          <p:cNvSpPr txBox="1"/>
-          <p:nvPr/>
-        </p:nvSpPr>
-        <p:spPr>
-          <a:xfrm>
-            <a:off x="822960" y="2761488"/>
-            <a:ext cx="457200" cy="365760"/>
-          </a:xfrm>
-          <a:prstGeom prst="rect">
-            <a:avLst/>
-          </a:prstGeom>
-          <a:noFill/>
-          <a:ln/>
-        </p:spPr>
-        <p:txBody>
-          <a:bodyPr wrap="square" lIns="0" tIns="0" rIns="0" bIns="0" rtlCol="0" anchor="ctr"/>
-          <a:lstStyle/>
-          <a:p>
-            <a:pPr algn="ctr" indent="0" marL="0">
-              <a:buNone/>
-            </a:pPr>
-            <a:r>
-              <a:rPr lang="en-US" sz="1300" b="1" dirty="0">
-                <a:solidFill>
-                  <a:srgbClr val="12655A"/>
-                </a:solidFill>
-                <a:latin typeface="Calibri" pitchFamily="34" charset="0"/>
-                <a:ea typeface="Calibri" pitchFamily="34" charset="-122"/>
-                <a:cs typeface="Calibri" pitchFamily="34" charset="-120"/>
-              </a:rPr>
-              <a:t>2</a:t>
-            </a:r>
-            <a:endParaRPr lang="en-US" sz="1300" dirty="0"/>
-          </a:p>
-        </p:txBody>
-      </p:sp>
-      <p:sp>
-        <p:nvSpPr>
-          <p:cNvPr id="11" name="Text 9"/>
-          <p:cNvSpPr txBox="1"/>
-          <p:nvPr/>
-        </p:nvSpPr>
-        <p:spPr>
-          <a:xfrm>
-            <a:off x="1417320" y="2578608"/>
-            <a:ext cx="9875520" cy="731520"/>
-          </a:xfrm>
-          <a:prstGeom prst="rect">
-            <a:avLst/>
-          </a:prstGeom>
-          <a:noFill/>
-          <a:ln/>
-        </p:spPr>
-        <p:txBody>
-          <a:bodyPr wrap="square" lIns="0" tIns="0" rIns="0" bIns="0" rtlCol="0" anchor="ctr"/>
-          <a:lstStyle/>
-          <a:p>
-            <a:pPr indent="0" marL="0">
-              <a:lnSpc>
-                <a:spcPct val="115000"/>
-              </a:lnSpc>
-              <a:buNone/>
-            </a:pPr>
-            <a:r>
-              <a:rPr lang="en-US" sz="1350" dirty="0">
-                <a:solidFill>
-                  <a:srgbClr val="16262E"/>
-                </a:solidFill>
-                <a:latin typeface="Calibri" pitchFamily="34" charset="0"/>
-                <a:ea typeface="Calibri" pitchFamily="34" charset="-122"/>
-                <a:cs typeface="Calibri" pitchFamily="34" charset="-120"/>
-              </a:rPr>
-              <a:t>근접 사각지대 보완 — 얼굴·어깨 면적비 기반 근접 판정 실제 구현</a:t>
-            </a:r>
-            <a:endParaRPr lang="en-US" sz="1350" dirty="0"/>
-          </a:p>
-        </p:txBody>
-      </p:sp>
-      <p:sp>
-        <p:nvSpPr>
-          <p:cNvPr id="12" name="Shape 10"/>
-          <p:cNvSpPr/>
-          <p:nvPr/>
-        </p:nvSpPr>
-        <p:spPr>
-          <a:xfrm>
-            <a:off x="640080" y="3419856"/>
-            <a:ext cx="10908792" cy="731520"/>
-          </a:xfrm>
-          <a:prstGeom prst="roundRect">
-            <a:avLst>
-              <a:gd name="adj" fmla="val 12500"/>
-            </a:avLst>
-          </a:prstGeom>
-          <a:solidFill>
-            <a:srgbClr val="FFFFFF"/>
-          </a:solidFill>
-          <a:ln/>
-        </p:spPr>
-      </p:sp>
-      <p:sp>
-        <p:nvSpPr>
-          <p:cNvPr id="13" name="Shape 11"/>
-          <p:cNvSpPr/>
-          <p:nvPr/>
-        </p:nvSpPr>
-        <p:spPr>
-          <a:xfrm>
-            <a:off x="822960" y="3602736"/>
-            <a:ext cx="457200" cy="365760"/>
-          </a:xfrm>
-          <a:prstGeom prst="roundRect">
-            <a:avLst>
-              <a:gd name="adj" fmla="val 20000"/>
-            </a:avLst>
-          </a:prstGeom>
-          <a:solidFill>
-            <a:srgbClr val="E9FBF7"/>
-          </a:solidFill>
-          <a:ln/>
-        </p:spPr>
-      </p:sp>
-      <p:sp>
-        <p:nvSpPr>
-          <p:cNvPr id="14" name="Text 12"/>
-          <p:cNvSpPr txBox="1"/>
-          <p:nvPr/>
-        </p:nvSpPr>
-        <p:spPr>
-          <a:xfrm>
-            <a:off x="822960" y="3602736"/>
-            <a:ext cx="457200" cy="365760"/>
-          </a:xfrm>
-          <a:prstGeom prst="rect">
-            <a:avLst/>
-          </a:prstGeom>
-          <a:noFill/>
-          <a:ln/>
-        </p:spPr>
-        <p:txBody>
-          <a:bodyPr wrap="square" lIns="0" tIns="0" rIns="0" bIns="0" rtlCol="0" anchor="ctr"/>
-          <a:lstStyle/>
-          <a:p>
-            <a:pPr algn="ctr" indent="0" marL="0">
-              <a:buNone/>
-            </a:pPr>
-            <a:r>
-              <a:rPr lang="en-US" sz="1300" b="1" dirty="0">
-                <a:solidFill>
-                  <a:srgbClr val="12655A"/>
-                </a:solidFill>
-                <a:latin typeface="Calibri" pitchFamily="34" charset="0"/>
-                <a:ea typeface="Calibri" pitchFamily="34" charset="-122"/>
-                <a:cs typeface="Calibri" pitchFamily="34" charset="-120"/>
-              </a:rPr>
-              <a:t>3</a:t>
-            </a:r>
-            <a:endParaRPr lang="en-US" sz="1300" dirty="0"/>
-          </a:p>
-        </p:txBody>
-      </p:sp>
-      <p:sp>
-        <p:nvSpPr>
-          <p:cNvPr id="15" name="Text 13"/>
-          <p:cNvSpPr txBox="1"/>
-          <p:nvPr/>
-        </p:nvSpPr>
-        <p:spPr>
-          <a:xfrm>
-            <a:off x="1417320" y="3419856"/>
-            <a:ext cx="9875520" cy="731520"/>
-          </a:xfrm>
-          <a:prstGeom prst="rect">
-            <a:avLst/>
-          </a:prstGeom>
-          <a:noFill/>
-          <a:ln/>
-        </p:spPr>
-        <p:txBody>
-          <a:bodyPr wrap="square" lIns="0" tIns="0" rIns="0" bIns="0" rtlCol="0" anchor="ctr"/>
-          <a:lstStyle/>
-          <a:p>
-            <a:pPr indent="0" marL="0">
-              <a:lnSpc>
-                <a:spcPct val="115000"/>
-              </a:lnSpc>
-              <a:buNone/>
-            </a:pPr>
-            <a:r>
-              <a:rPr lang="en-US" sz="1350" dirty="0">
-                <a:solidFill>
-                  <a:srgbClr val="16262E"/>
-                </a:solidFill>
-                <a:latin typeface="Calibri" pitchFamily="34" charset="0"/>
-                <a:ea typeface="Calibri" pitchFamily="34" charset="-122"/>
-                <a:cs typeface="Calibri" pitchFamily="34" charset="-120"/>
-              </a:rPr>
-              <a:t>판정 로직과 스테레오+포즈 파이프라인 1차 통합</a:t>
-            </a:r>
-            <a:endParaRPr lang="en-US" sz="1350" dirty="0"/>
-          </a:p>
-        </p:txBody>
-      </p:sp>
-      <p:sp>
-        <p:nvSpPr>
-          <p:cNvPr id="16" name="Shape 14"/>
-          <p:cNvSpPr/>
-          <p:nvPr/>
-        </p:nvSpPr>
-        <p:spPr>
-          <a:xfrm>
-            <a:off x="640080" y="4261104"/>
-            <a:ext cx="10908792" cy="731520"/>
-          </a:xfrm>
-          <a:prstGeom prst="roundRect">
-            <a:avLst>
-              <a:gd name="adj" fmla="val 12500"/>
-            </a:avLst>
-          </a:prstGeom>
-          <a:solidFill>
-            <a:srgbClr val="FFFFFF"/>
-          </a:solidFill>
-          <a:ln/>
-        </p:spPr>
-      </p:sp>
-      <p:sp>
-        <p:nvSpPr>
-          <p:cNvPr id="17" name="Shape 15"/>
-          <p:cNvSpPr/>
-          <p:nvPr/>
-        </p:nvSpPr>
-        <p:spPr>
-          <a:xfrm>
-            <a:off x="822960" y="4443984"/>
-            <a:ext cx="457200" cy="365760"/>
-          </a:xfrm>
-          <a:prstGeom prst="roundRect">
-            <a:avLst>
-              <a:gd name="adj" fmla="val 20000"/>
-            </a:avLst>
-          </a:prstGeom>
-          <a:solidFill>
-            <a:srgbClr val="E9FBF7"/>
-          </a:solidFill>
-          <a:ln/>
-        </p:spPr>
-      </p:sp>
-      <p:sp>
-        <p:nvSpPr>
-          <p:cNvPr id="18" name="Text 16"/>
-          <p:cNvSpPr txBox="1"/>
-          <p:nvPr/>
-        </p:nvSpPr>
-        <p:spPr>
-          <a:xfrm>
-            <a:off x="822960" y="4443984"/>
-            <a:ext cx="457200" cy="365760"/>
-          </a:xfrm>
-          <a:prstGeom prst="rect">
-            <a:avLst/>
-          </a:prstGeom>
-          <a:noFill/>
-          <a:ln/>
-        </p:spPr>
-        <p:txBody>
-          <a:bodyPr wrap="square" lIns="0" tIns="0" rIns="0" bIns="0" rtlCol="0" anchor="ctr"/>
-          <a:lstStyle/>
-          <a:p>
-            <a:pPr algn="ctr" indent="0" marL="0">
-              <a:buNone/>
-            </a:pPr>
-            <a:r>
-              <a:rPr lang="en-US" sz="1300" b="1" dirty="0">
-                <a:solidFill>
-                  <a:srgbClr val="12655A"/>
-                </a:solidFill>
-                <a:latin typeface="Calibri" pitchFamily="34" charset="0"/>
-                <a:ea typeface="Calibri" pitchFamily="34" charset="-122"/>
-                <a:cs typeface="Calibri" pitchFamily="34" charset="-120"/>
-              </a:rPr>
-              <a:t>4</a:t>
-            </a:r>
-            <a:endParaRPr lang="en-US" sz="1300" dirty="0"/>
-          </a:p>
-        </p:txBody>
-      </p:sp>
-      <p:sp>
-        <p:nvSpPr>
-          <p:cNvPr id="19" name="Text 17"/>
-          <p:cNvSpPr txBox="1"/>
-          <p:nvPr/>
-        </p:nvSpPr>
-        <p:spPr>
-          <a:xfrm>
-            <a:off x="1417320" y="4261104"/>
-            <a:ext cx="9875520" cy="731520"/>
-          </a:xfrm>
-          <a:prstGeom prst="rect">
-            <a:avLst/>
-          </a:prstGeom>
-          <a:noFill/>
-          <a:ln/>
-        </p:spPr>
-        <p:txBody>
-          <a:bodyPr wrap="square" lIns="0" tIns="0" rIns="0" bIns="0" rtlCol="0" anchor="ctr"/>
-          <a:lstStyle/>
-          <a:p>
-            <a:pPr indent="0" marL="0">
-              <a:lnSpc>
-                <a:spcPct val="115000"/>
-              </a:lnSpc>
-              <a:buNone/>
-            </a:pPr>
-            <a:r>
-              <a:rPr lang="en-US" sz="1350" dirty="0">
-                <a:solidFill>
-                  <a:srgbClr val="16262E"/>
-                </a:solidFill>
-                <a:latin typeface="Calibri" pitchFamily="34" charset="0"/>
-                <a:ea typeface="Calibri" pitchFamily="34" charset="-122"/>
-                <a:cs typeface="Calibri" pitchFamily="34" charset="-120"/>
-              </a:rPr>
-              <a:t>데이터 수집 프로토콜에 따라 실제 촬영 착수</a:t>
-            </a:r>
-            <a:endParaRPr lang="en-US" sz="1350" dirty="0"/>
-          </a:p>
-        </p:txBody>
-      </p:sp>
-      <p:sp>
-        <p:nvSpPr>
-          <p:cNvPr id="20" name="Shape 18"/>
-          <p:cNvSpPr/>
-          <p:nvPr/>
-        </p:nvSpPr>
-        <p:spPr>
-          <a:xfrm>
-            <a:off x="640080" y="5102352"/>
-            <a:ext cx="10908792" cy="731520"/>
-          </a:xfrm>
-          <a:prstGeom prst="roundRect">
-            <a:avLst>
-              <a:gd name="adj" fmla="val 12500"/>
-            </a:avLst>
-          </a:prstGeom>
-          <a:solidFill>
-            <a:srgbClr val="FFFFFF"/>
-          </a:solidFill>
-          <a:ln/>
-        </p:spPr>
-      </p:sp>
-      <p:sp>
-        <p:nvSpPr>
-          <p:cNvPr id="21" name="Shape 19"/>
-          <p:cNvSpPr/>
-          <p:nvPr/>
-        </p:nvSpPr>
-        <p:spPr>
-          <a:xfrm>
-            <a:off x="822960" y="5285232"/>
-            <a:ext cx="457200" cy="365760"/>
-          </a:xfrm>
-          <a:prstGeom prst="roundRect">
-            <a:avLst>
-              <a:gd name="adj" fmla="val 20000"/>
-            </a:avLst>
-          </a:prstGeom>
-          <a:solidFill>
-            <a:srgbClr val="E9FBF7"/>
-          </a:solidFill>
-          <a:ln/>
-        </p:spPr>
-      </p:sp>
-      <p:sp>
-        <p:nvSpPr>
-          <p:cNvPr id="22" name="Text 20"/>
-          <p:cNvSpPr txBox="1"/>
-          <p:nvPr/>
-        </p:nvSpPr>
-        <p:spPr>
-          <a:xfrm>
-            <a:off x="822960" y="5285232"/>
-            <a:ext cx="457200" cy="365760"/>
-          </a:xfrm>
-          <a:prstGeom prst="rect">
-            <a:avLst/>
-          </a:prstGeom>
-          <a:noFill/>
-          <a:ln/>
-        </p:spPr>
-        <p:txBody>
-          <a:bodyPr wrap="square" lIns="0" tIns="0" rIns="0" bIns="0" rtlCol="0" anchor="ctr"/>
-          <a:lstStyle/>
-          <a:p>
-            <a:pPr algn="ctr" indent="0" marL="0">
-              <a:buNone/>
-            </a:pPr>
-            <a:r>
-              <a:rPr lang="en-US" sz="1300" b="1" dirty="0">
-                <a:solidFill>
-                  <a:srgbClr val="12655A"/>
-                </a:solidFill>
-                <a:latin typeface="Calibri" pitchFamily="34" charset="0"/>
-                <a:ea typeface="Calibri" pitchFamily="34" charset="-122"/>
-                <a:cs typeface="Calibri" pitchFamily="34" charset="-120"/>
-              </a:rPr>
-              <a:t>5</a:t>
-            </a:r>
-            <a:endParaRPr lang="en-US" sz="1300" dirty="0"/>
-          </a:p>
-        </p:txBody>
-      </p:sp>
-      <p:sp>
-        <p:nvSpPr>
-          <p:cNvPr id="23" name="Text 21"/>
-          <p:cNvSpPr txBox="1"/>
-          <p:nvPr/>
-        </p:nvSpPr>
-        <p:spPr>
-          <a:xfrm>
-            <a:off x="1417320" y="5102352"/>
-            <a:ext cx="9875520" cy="731520"/>
-          </a:xfrm>
-          <a:prstGeom prst="rect">
-            <a:avLst/>
-          </a:prstGeom>
-          <a:noFill/>
-          <a:ln/>
-        </p:spPr>
-        <p:txBody>
-          <a:bodyPr wrap="square" lIns="0" tIns="0" rIns="0" bIns="0" rtlCol="0" anchor="ctr"/>
-          <a:lstStyle/>
-          <a:p>
-            <a:pPr indent="0" marL="0">
-              <a:lnSpc>
-                <a:spcPct val="115000"/>
-              </a:lnSpc>
-              <a:buNone/>
-            </a:pPr>
-            <a:r>
-              <a:rPr lang="en-US" sz="1350" dirty="0">
-                <a:solidFill>
-                  <a:srgbClr val="16262E"/>
-                </a:solidFill>
-                <a:latin typeface="Calibri" pitchFamily="34" charset="0"/>
-                <a:ea typeface="Calibri" pitchFamily="34" charset="-122"/>
-                <a:cs typeface="Calibri" pitchFamily="34" charset="-120"/>
-              </a:rPr>
-              <a:t>논문 Introduction · Related Work 초안 (이번 주 이월분)</a:t>
-            </a:r>
-            <a:endParaRPr lang="en-US" sz="1350" dirty="0"/>
-          </a:p>
-        </p:txBody>
-      </p:sp>
-      <p:sp>
-        <p:nvSpPr>
-          <p:cNvPr id="24" name="Text 22"/>
-          <p:cNvSpPr txBox="1"/>
-          <p:nvPr/>
-        </p:nvSpPr>
-        <p:spPr>
-          <a:xfrm>
-            <a:off x="11365992" y="6355080"/>
-            <a:ext cx="548640" cy="320040"/>
-          </a:xfrm>
-          <a:prstGeom prst="rect">
-            <a:avLst/>
-          </a:prstGeom>
-          <a:noFill/>
-          <a:ln/>
-        </p:spPr>
-        <p:txBody>
-          <a:bodyPr wrap="square" lIns="0" tIns="0" rIns="0" bIns="0" rtlCol="0" anchor="ctr"/>
-          <a:lstStyle/>
-          <a:p>
-            <a:pPr algn="r" indent="0" marL="0">
-              <a:buNone/>
-            </a:pPr>
-            <a:r>
-              <a:rPr lang="en-US" sz="1100" dirty="0">
-                <a:solidFill>
-                  <a:srgbClr val="9FB6BC"/>
-                </a:solidFill>
-                <a:latin typeface="Calibri" pitchFamily="34" charset="0"/>
-                <a:ea typeface="Calibri" pitchFamily="34" charset="-122"/>
-                <a:cs typeface="Calibri" pitchFamily="34" charset="-120"/>
-              </a:rPr>
-              <a:t>04</a:t>
-            </a:r>
-            <a:endParaRPr lang="en-US" sz="1100" dirty="0"/>
-          </a:p>
-        </p:txBody>
-      </p:sp>
-    </p:spTree>
-  </p:cSld>
-  <p:clrMapOvr>
-    <a:masterClrMapping/>
-  </p:clrMapOvr>
-</p:sld>
-</file>
-
-<file path=ppt/slides/slide5.xml><?xml version="1.0" encoding="utf-8"?>
-<p:sld xmlns:a="http://schemas.openxmlformats.org/drawingml/2006/main" xmlns:r="http://schemas.openxmlformats.org/officeDocument/2006/relationships" xmlns:p="http://schemas.openxmlformats.org/presentationml/2006/main">
-  <p:cSld name="Slide 5">
-    <p:bg>
-      <p:bgPr>
-        <a:blipFill dpi="0" rotWithShape="1">
-          <a:blip r:embed="rId1">
-            <a:lum/>
-          </a:blip>
-          <a:srcRect/>
-          <a:stretch>
-            <a:fillRect/>
-          </a:stretch>
-        </a:blipFill>
-        <a:effectLst/>
-      </p:bgPr>
-    </p:bg>
-    <p:spTree>
-      <p:nvGrpSpPr>
-        <p:cNvPr id="1" name=""/>
-        <p:cNvGrpSpPr/>
-        <p:nvPr/>
-      </p:nvGrpSpPr>
-      <p:grpSpPr>
-        <a:xfrm>
-          <a:off x="0" y="0"/>
-          <a:ext cx="0" cy="0"/>
-          <a:chOff x="0" y="0"/>
-          <a:chExt cx="0" cy="0"/>
-        </a:xfrm>
-      </p:grpSpPr>
-      <p:sp>
-        <p:nvSpPr>
-          <p:cNvPr id="2" name="Text 0"/>
-          <p:cNvSpPr txBox="1"/>
-          <p:nvPr/>
-        </p:nvSpPr>
-        <p:spPr>
-          <a:xfrm>
-            <a:off x="640080" y="384048"/>
-            <a:ext cx="8229600" cy="320040"/>
-          </a:xfrm>
-          <a:prstGeom prst="rect">
-            <a:avLst/>
-          </a:prstGeom>
-          <a:noFill/>
-          <a:ln/>
-        </p:spPr>
-        <p:txBody>
-          <a:bodyPr wrap="square" lIns="0" tIns="0" rIns="0" bIns="0" rtlCol="0" anchor="ctr"/>
-          <a:lstStyle/>
-          <a:p>
-            <a:pPr indent="0" marL="0">
-              <a:buNone/>
-            </a:pPr>
-            <a:r>
-              <a:rPr lang="en-US" sz="1200" b="1" spc="200" kern="0" dirty="0">
-                <a:solidFill>
-                  <a:srgbClr val="2FE0C4"/>
-                </a:solidFill>
-                <a:latin typeface="Calibri" pitchFamily="34" charset="0"/>
-                <a:ea typeface="Calibri" pitchFamily="34" charset="-122"/>
-                <a:cs typeface="Calibri" pitchFamily="34" charset="-120"/>
-              </a:rPr>
-              <a:t>GATE RESULTS</a:t>
-            </a:r>
-            <a:endParaRPr lang="en-US" sz="1200" dirty="0"/>
-          </a:p>
-        </p:txBody>
-      </p:sp>
-      <p:sp>
-        <p:nvSpPr>
-          <p:cNvPr id="3" name="Text 1"/>
-          <p:cNvSpPr txBox="1"/>
-          <p:nvPr/>
-        </p:nvSpPr>
-        <p:spPr>
-          <a:xfrm>
-            <a:off x="640080" y="685800"/>
-            <a:ext cx="10881360" cy="822960"/>
-          </a:xfrm>
-          <a:prstGeom prst="rect">
-            <a:avLst/>
-          </a:prstGeom>
-          <a:noFill/>
-          <a:ln/>
-        </p:spPr>
-        <p:txBody>
-          <a:bodyPr wrap="square" lIns="0" tIns="0" rIns="0" bIns="0" rtlCol="0" anchor="ctr"/>
-          <a:lstStyle/>
-          <a:p>
-            <a:pPr indent="0" marL="0">
-              <a:buNone/>
-            </a:pPr>
-            <a:r>
-              <a:rPr lang="en-US" sz="2700" b="1" dirty="0">
-                <a:solidFill>
-                  <a:srgbClr val="EAF3F1"/>
-                </a:solidFill>
-                <a:latin typeface="Arial" pitchFamily="34" charset="0"/>
-                <a:ea typeface="Arial" pitchFamily="34" charset="-122"/>
-                <a:cs typeface="Arial" pitchFamily="34" charset="-120"/>
-              </a:rPr>
               <a:t>4주차 게이트 측정 결과</a:t>
             </a:r>
             <a:endParaRPr lang="en-US" sz="2700" dirty="0"/>
@@ -3950,7 +3080,7 @@
       </p:sp>
       <p:graphicFrame>
         <p:nvGraphicFramePr>
-          <p:cNvPr id="6" name="Table 0"/>
+          <p:cNvPr id="5" name="Table 0"/>
           <p:cNvGraphicFramePr>
             <a:graphicFrameLocks noGrp="1"/>
           </p:cNvGraphicFramePr>
@@ -5590,6 +4720,625 @@
                 <a:ea typeface="Calibri" pitchFamily="34" charset="-122"/>
                 <a:cs typeface="Calibri" pitchFamily="34" charset="-120"/>
               </a:rPr>
+              <a:t>04</a:t>
+            </a:r>
+            <a:endParaRPr lang="en-US" sz="1100" dirty="0"/>
+          </a:p>
+        </p:txBody>
+      </p:sp>
+    </p:spTree>
+  </p:cSld>
+  <p:clrMapOvr>
+    <a:masterClrMapping/>
+  </p:clrMapOvr>
+</p:sld>
+</file>
+
+<file path=ppt/slides/slide5.xml><?xml version="1.0" encoding="utf-8"?>
+<p:sld xmlns:a="http://schemas.openxmlformats.org/drawingml/2006/main" xmlns:r="http://schemas.openxmlformats.org/officeDocument/2006/relationships" xmlns:p="http://schemas.openxmlformats.org/presentationml/2006/main">
+  <p:cSld name="Slide 5">
+    <p:bg>
+      <p:bgPr>
+        <a:blipFill dpi="0" rotWithShape="1">
+          <a:blip r:embed="rId1">
+            <a:lum/>
+          </a:blip>
+          <a:srcRect/>
+          <a:stretch>
+            <a:fillRect/>
+          </a:stretch>
+        </a:blipFill>
+        <a:effectLst/>
+      </p:bgPr>
+    </p:bg>
+    <p:spTree>
+      <p:nvGrpSpPr>
+        <p:cNvPr id="1" name=""/>
+        <p:cNvGrpSpPr/>
+        <p:nvPr/>
+      </p:nvGrpSpPr>
+      <p:grpSpPr>
+        <a:xfrm>
+          <a:off x="0" y="0"/>
+          <a:ext cx="0" cy="0"/>
+          <a:chOff x="0" y="0"/>
+          <a:chExt cx="0" cy="0"/>
+        </a:xfrm>
+      </p:grpSpPr>
+      <p:sp>
+        <p:nvSpPr>
+          <p:cNvPr id="2" name="Text 0"/>
+          <p:cNvSpPr txBox="1"/>
+          <p:nvPr/>
+        </p:nvSpPr>
+        <p:spPr>
+          <a:xfrm>
+            <a:off x="640080" y="384048"/>
+            <a:ext cx="8229600" cy="320040"/>
+          </a:xfrm>
+          <a:prstGeom prst="rect">
+            <a:avLst/>
+          </a:prstGeom>
+          <a:noFill/>
+          <a:ln/>
+        </p:spPr>
+        <p:txBody>
+          <a:bodyPr wrap="square" lIns="0" tIns="0" rIns="0" bIns="0" rtlCol="0" anchor="ctr"/>
+          <a:lstStyle/>
+          <a:p>
+            <a:pPr indent="0" marL="0">
+              <a:buNone/>
+            </a:pPr>
+            <a:r>
+              <a:rPr lang="en-US" sz="1200" b="1" spc="200" kern="0" dirty="0">
+                <a:solidFill>
+                  <a:srgbClr val="2FE0C4"/>
+                </a:solidFill>
+                <a:latin typeface="Calibri" pitchFamily="34" charset="0"/>
+                <a:ea typeface="Calibri" pitchFamily="34" charset="-122"/>
+                <a:cs typeface="Calibri" pitchFamily="34" charset="-120"/>
+              </a:rPr>
+              <a:t>DESIGN RISK</a:t>
+            </a:r>
+            <a:endParaRPr lang="en-US" sz="1200" dirty="0"/>
+          </a:p>
+        </p:txBody>
+      </p:sp>
+      <p:sp>
+        <p:nvSpPr>
+          <p:cNvPr id="3" name="Text 1"/>
+          <p:cNvSpPr txBox="1"/>
+          <p:nvPr/>
+        </p:nvSpPr>
+        <p:spPr>
+          <a:xfrm>
+            <a:off x="640080" y="685800"/>
+            <a:ext cx="10881360" cy="822960"/>
+          </a:xfrm>
+          <a:prstGeom prst="rect">
+            <a:avLst/>
+          </a:prstGeom>
+          <a:noFill/>
+          <a:ln/>
+        </p:spPr>
+        <p:txBody>
+          <a:bodyPr wrap="square" lIns="0" tIns="0" rIns="0" bIns="0" rtlCol="0" anchor="ctr"/>
+          <a:lstStyle/>
+          <a:p>
+            <a:pPr indent="0" marL="0">
+              <a:buNone/>
+            </a:pPr>
+            <a:r>
+              <a:rPr lang="en-US" sz="2700" b="1" dirty="0">
+                <a:solidFill>
+                  <a:srgbClr val="EAF3F1"/>
+                </a:solidFill>
+                <a:latin typeface="Arial" pitchFamily="34" charset="0"/>
+                <a:ea typeface="Arial" pitchFamily="34" charset="-122"/>
+                <a:cs typeface="Arial" pitchFamily="34" charset="-120"/>
+              </a:rPr>
+              <a:t>발견한 설계 리스크: depth 근접 사각지대</a:t>
+            </a:r>
+            <a:endParaRPr lang="en-US" sz="2700" dirty="0"/>
+          </a:p>
+        </p:txBody>
+      </p:sp>
+      <p:sp>
+        <p:nvSpPr>
+          <p:cNvPr id="4" name="Shape 2"/>
+          <p:cNvSpPr/>
+          <p:nvPr/>
+        </p:nvSpPr>
+        <p:spPr>
+          <a:xfrm>
+            <a:off x="640080" y="1600200"/>
+            <a:ext cx="10908792" cy="1554480"/>
+          </a:xfrm>
+          <a:prstGeom prst="roundRect">
+            <a:avLst>
+              <a:gd name="adj" fmla="val 7059"/>
+            </a:avLst>
+          </a:prstGeom>
+          <a:solidFill>
+            <a:srgbClr val="3A2A22"/>
+          </a:solidFill>
+          <a:ln/>
+        </p:spPr>
+      </p:sp>
+      <p:sp>
+        <p:nvSpPr>
+          <p:cNvPr id="5" name="Shape 3"/>
+          <p:cNvSpPr/>
+          <p:nvPr/>
+        </p:nvSpPr>
+        <p:spPr>
+          <a:xfrm>
+            <a:off x="914400" y="1828800"/>
+            <a:ext cx="640080" cy="640080"/>
+          </a:xfrm>
+          <a:prstGeom prst="ellipse">
+            <a:avLst/>
+          </a:prstGeom>
+          <a:solidFill>
+            <a:srgbClr val="5A2E1F"/>
+          </a:solidFill>
+          <a:ln/>
+        </p:spPr>
+      </p:sp>
+      <p:pic>
+        <p:nvPicPr>
+          <p:cNvPr id="6" name="Image 0" descr="preencoded.png">    </p:cNvPr>
+          <p:cNvPicPr>
+            <a:picLocks noChangeAspect="1"/>
+          </p:cNvPicPr>
+          <p:nvPr/>
+        </p:nvPicPr>
+        <p:blipFill>
+          <a:blip r:embed="rId2"/>
+          <a:stretch>
+            <a:fillRect/>
+          </a:stretch>
+        </p:blipFill>
+        <p:spPr>
+          <a:xfrm>
+            <a:off x="1080821" y="1995221"/>
+            <a:ext cx="307238" cy="307238"/>
+          </a:xfrm>
+          <a:prstGeom prst="rect">
+            <a:avLst/>
+          </a:prstGeom>
+        </p:spPr>
+      </p:pic>
+      <p:sp>
+        <p:nvSpPr>
+          <p:cNvPr id="7" name="Text 4"/>
+          <p:cNvSpPr txBox="1"/>
+          <p:nvPr/>
+        </p:nvSpPr>
+        <p:spPr>
+          <a:xfrm>
+            <a:off x="1737360" y="1783080"/>
+            <a:ext cx="9601200" cy="1188720"/>
+          </a:xfrm>
+          <a:prstGeom prst="rect">
+            <a:avLst/>
+          </a:prstGeom>
+          <a:noFill/>
+          <a:ln/>
+        </p:spPr>
+        <p:txBody>
+          <a:bodyPr wrap="square" lIns="0" tIns="0" rIns="0" bIns="0" rtlCol="0" anchor="ctr"/>
+          <a:lstStyle/>
+          <a:p>
+            <a:pPr indent="0" marL="0">
+              <a:lnSpc>
+                <a:spcPct val="125000"/>
+              </a:lnSpc>
+              <a:buNone/>
+            </a:pPr>
+            <a:r>
+              <a:rPr lang="en-US" sz="1350" dirty="0">
+                <a:solidFill>
+                  <a:srgbClr val="EAF3F1"/>
+                </a:solidFill>
+                <a:latin typeface="Calibri" pitchFamily="34" charset="0"/>
+                <a:ea typeface="Calibri" pitchFamily="34" charset="-122"/>
+                <a:cs typeface="Calibri" pitchFamily="34" charset="-120"/>
+              </a:rPr>
+              <a:t>D455 depth는 약 40cm 미만에서 무효값을 반환한다 — 그런데 저희가 감지하려는 상황 "화면에 너무 가까워짐"이 하필 이 무효 구간과 겹친다. 정작 감지하고 싶은 순간에 센서가 먹통이 되는 셈.</a:t>
+            </a:r>
+            <a:endParaRPr lang="en-US" sz="1350" dirty="0"/>
+          </a:p>
+        </p:txBody>
+      </p:sp>
+      <p:sp>
+        <p:nvSpPr>
+          <p:cNvPr id="8" name="Shape 5"/>
+          <p:cNvSpPr/>
+          <p:nvPr/>
+        </p:nvSpPr>
+        <p:spPr>
+          <a:xfrm>
+            <a:off x="640080" y="3429000"/>
+            <a:ext cx="5349240" cy="2606040"/>
+          </a:xfrm>
+          <a:prstGeom prst="roundRect">
+            <a:avLst>
+              <a:gd name="adj" fmla="val 4211"/>
+            </a:avLst>
+          </a:prstGeom>
+          <a:solidFill>
+            <a:srgbClr val="FFFFFF"/>
+          </a:solidFill>
+          <a:ln/>
+        </p:spPr>
+      </p:sp>
+      <p:sp>
+        <p:nvSpPr>
+          <p:cNvPr id="9" name="Shape 6"/>
+          <p:cNvSpPr/>
+          <p:nvPr/>
+        </p:nvSpPr>
+        <p:spPr>
+          <a:xfrm>
+            <a:off x="914400" y="3703320"/>
+            <a:ext cx="548640" cy="548640"/>
+          </a:xfrm>
+          <a:prstGeom prst="ellipse">
+            <a:avLst/>
+          </a:prstGeom>
+          <a:solidFill>
+            <a:srgbClr val="12655A"/>
+          </a:solidFill>
+          <a:ln/>
+        </p:spPr>
+      </p:sp>
+      <p:pic>
+        <p:nvPicPr>
+          <p:cNvPr id="10" name="Image 1" descr="preencoded.png">    </p:cNvPr>
+          <p:cNvPicPr>
+            <a:picLocks noChangeAspect="1"/>
+          </p:cNvPicPr>
+          <p:nvPr/>
+        </p:nvPicPr>
+        <p:blipFill>
+          <a:blip r:embed="rId3"/>
+          <a:stretch>
+            <a:fillRect/>
+          </a:stretch>
+        </p:blipFill>
+        <p:spPr>
+          <a:xfrm>
+            <a:off x="1057046" y="3845966"/>
+            <a:ext cx="263347" cy="263347"/>
+          </a:xfrm>
+          <a:prstGeom prst="rect">
+            <a:avLst/>
+          </a:prstGeom>
+        </p:spPr>
+      </p:pic>
+      <p:sp>
+        <p:nvSpPr>
+          <p:cNvPr id="11" name="Text 7"/>
+          <p:cNvSpPr txBox="1"/>
+          <p:nvPr/>
+        </p:nvSpPr>
+        <p:spPr>
+          <a:xfrm>
+            <a:off x="1600200" y="3749040"/>
+            <a:ext cx="4114800" cy="502920"/>
+          </a:xfrm>
+          <a:prstGeom prst="rect">
+            <a:avLst/>
+          </a:prstGeom>
+          <a:noFill/>
+          <a:ln/>
+        </p:spPr>
+        <p:txBody>
+          <a:bodyPr wrap="square" lIns="0" tIns="0" rIns="0" bIns="0" rtlCol="0" anchor="ctr"/>
+          <a:lstStyle/>
+          <a:p>
+            <a:pPr indent="0" marL="0">
+              <a:buNone/>
+            </a:pPr>
+            <a:r>
+              <a:rPr lang="en-US" sz="1400" b="1" dirty="0">
+                <a:solidFill>
+                  <a:srgbClr val="16262E"/>
+                </a:solidFill>
+                <a:latin typeface="Arial" pitchFamily="34" charset="0"/>
+                <a:ea typeface="Arial" pitchFamily="34" charset="-122"/>
+                <a:cs typeface="Arial" pitchFamily="34" charset="-120"/>
+              </a:rPr>
+              <a:t>완화 방안: 이중화 판정</a:t>
+            </a:r>
+            <a:endParaRPr lang="en-US" sz="1400" dirty="0"/>
+          </a:p>
+        </p:txBody>
+      </p:sp>
+      <p:sp>
+        <p:nvSpPr>
+          <p:cNvPr id="12" name="Text 8"/>
+          <p:cNvSpPr txBox="1"/>
+          <p:nvPr/>
+        </p:nvSpPr>
+        <p:spPr>
+          <a:xfrm>
+            <a:off x="914400" y="4480560"/>
+            <a:ext cx="4800600" cy="1371600"/>
+          </a:xfrm>
+          <a:prstGeom prst="rect">
+            <a:avLst/>
+          </a:prstGeom>
+          <a:noFill/>
+          <a:ln/>
+        </p:spPr>
+        <p:txBody>
+          <a:bodyPr wrap="square" lIns="0" tIns="0" rIns="0" bIns="0" rtlCol="0" anchor="ctr"/>
+          <a:lstStyle/>
+          <a:p>
+            <a:pPr indent="0" marL="0">
+              <a:lnSpc>
+                <a:spcPct val="125000"/>
+              </a:lnSpc>
+              <a:buNone/>
+            </a:pPr>
+            <a:r>
+              <a:rPr lang="en-US" sz="1200" dirty="0">
+                <a:solidFill>
+                  <a:srgbClr val="3C4A50"/>
+                </a:solidFill>
+                <a:latin typeface="Calibri" pitchFamily="34" charset="0"/>
+                <a:ea typeface="Calibri" pitchFamily="34" charset="-122"/>
+                <a:cs typeface="Calibri" pitchFamily="34" charset="-120"/>
+              </a:rPr>
+              <a:t>depth 유효 구간(40cm~)은 정확한 거리값을 그대로 사용. 그 이하 근접 구간은 RGB 화면 속 얼굴·어깨 면적 비율로 "더 가까워짐"만 이분류 판정.</a:t>
+            </a:r>
+            <a:endParaRPr lang="en-US" sz="1200" dirty="0"/>
+          </a:p>
+        </p:txBody>
+      </p:sp>
+      <p:sp>
+        <p:nvSpPr>
+          <p:cNvPr id="13" name="Shape 9"/>
+          <p:cNvSpPr/>
+          <p:nvPr/>
+        </p:nvSpPr>
+        <p:spPr>
+          <a:xfrm>
+            <a:off x="6199632" y="3429000"/>
+            <a:ext cx="5349240" cy="2606040"/>
+          </a:xfrm>
+          <a:prstGeom prst="roundRect">
+            <a:avLst>
+              <a:gd name="adj" fmla="val 4211"/>
+            </a:avLst>
+          </a:prstGeom>
+          <a:solidFill>
+            <a:srgbClr val="FFFFFF"/>
+          </a:solidFill>
+          <a:ln/>
+        </p:spPr>
+      </p:sp>
+      <p:sp>
+        <p:nvSpPr>
+          <p:cNvPr id="14" name="Shape 10"/>
+          <p:cNvSpPr/>
+          <p:nvPr/>
+        </p:nvSpPr>
+        <p:spPr>
+          <a:xfrm>
+            <a:off x="6473952" y="3703320"/>
+            <a:ext cx="548640" cy="548640"/>
+          </a:xfrm>
+          <a:prstGeom prst="ellipse">
+            <a:avLst/>
+          </a:prstGeom>
+          <a:solidFill>
+            <a:srgbClr val="12655A"/>
+          </a:solidFill>
+          <a:ln/>
+        </p:spPr>
+      </p:sp>
+      <p:pic>
+        <p:nvPicPr>
+          <p:cNvPr id="15" name="Image 2" descr="preencoded.png">    </p:cNvPr>
+          <p:cNvPicPr>
+            <a:picLocks noChangeAspect="1"/>
+          </p:cNvPicPr>
+          <p:nvPr/>
+        </p:nvPicPr>
+        <p:blipFill>
+          <a:blip r:embed="rId4"/>
+          <a:stretch>
+            <a:fillRect/>
+          </a:stretch>
+        </p:blipFill>
+        <p:spPr>
+          <a:xfrm>
+            <a:off x="6616598" y="3845966"/>
+            <a:ext cx="263347" cy="263347"/>
+          </a:xfrm>
+          <a:prstGeom prst="rect">
+            <a:avLst/>
+          </a:prstGeom>
+        </p:spPr>
+      </p:pic>
+      <p:sp>
+        <p:nvSpPr>
+          <p:cNvPr id="16" name="Text 11"/>
+          <p:cNvSpPr txBox="1"/>
+          <p:nvPr/>
+        </p:nvSpPr>
+        <p:spPr>
+          <a:xfrm>
+            <a:off x="7159752" y="3749040"/>
+            <a:ext cx="4114800" cy="502920"/>
+          </a:xfrm>
+          <a:prstGeom prst="rect">
+            <a:avLst/>
+          </a:prstGeom>
+          <a:noFill/>
+          <a:ln/>
+        </p:spPr>
+        <p:txBody>
+          <a:bodyPr wrap="square" lIns="0" tIns="0" rIns="0" bIns="0" rtlCol="0" anchor="ctr"/>
+          <a:lstStyle/>
+          <a:p>
+            <a:pPr indent="0" marL="0">
+              <a:buNone/>
+            </a:pPr>
+            <a:r>
+              <a:rPr lang="en-US" sz="1400" b="1" dirty="0">
+                <a:solidFill>
+                  <a:srgbClr val="16262E"/>
+                </a:solidFill>
+                <a:latin typeface="Arial" pitchFamily="34" charset="0"/>
+                <a:ea typeface="Arial" pitchFamily="34" charset="-122"/>
+                <a:cs typeface="Arial" pitchFamily="34" charset="-120"/>
+              </a:rPr>
+              <a:t>선행 연구와의 접점</a:t>
+            </a:r>
+            <a:endParaRPr lang="en-US" sz="1400" dirty="0"/>
+          </a:p>
+        </p:txBody>
+      </p:sp>
+      <p:sp>
+        <p:nvSpPr>
+          <p:cNvPr id="17" name="Text 12"/>
+          <p:cNvSpPr txBox="1"/>
+          <p:nvPr/>
+        </p:nvSpPr>
+        <p:spPr>
+          <a:xfrm>
+            <a:off x="6473952" y="4480560"/>
+            <a:ext cx="4800600" cy="1371600"/>
+          </a:xfrm>
+          <a:prstGeom prst="rect">
+            <a:avLst/>
+          </a:prstGeom>
+          <a:noFill/>
+          <a:ln/>
+        </p:spPr>
+        <p:txBody>
+          <a:bodyPr wrap="square" lIns="0" tIns="0" rIns="0" bIns="0" rtlCol="0" anchor="ctr"/>
+          <a:lstStyle/>
+          <a:p>
+            <a:pPr indent="0" marL="0">
+              <a:lnSpc>
+                <a:spcPct val="125000"/>
+              </a:lnSpc>
+              <a:buNone/>
+            </a:pPr>
+            <a:r>
+              <a:rPr lang="en-US" sz="1200" dirty="0">
+                <a:solidFill>
+                  <a:srgbClr val="3C4A50"/>
+                </a:solidFill>
+                <a:latin typeface="Calibri" pitchFamily="34" charset="0"/>
+                <a:ea typeface="Calibri" pitchFamily="34" charset="-122"/>
+                <a:cs typeface="Calibri" pitchFamily="34" charset="-120"/>
+              </a:rPr>
+              <a:t>이 방법은 WRF 논문(3주차 조사)이 깊이 카메라 없이 쓰던 방식과 동일한 아이디어 — 선행 연구의 한계를 우리 설계의 보완책으로 재활용.</a:t>
+            </a:r>
+            <a:endParaRPr lang="en-US" sz="1200" dirty="0"/>
+          </a:p>
+        </p:txBody>
+      </p:sp>
+      <p:sp>
+        <p:nvSpPr>
+          <p:cNvPr id="18" name="Shape 13"/>
+          <p:cNvSpPr/>
+          <p:nvPr/>
+        </p:nvSpPr>
+        <p:spPr>
+          <a:xfrm>
+            <a:off x="640080" y="6172200"/>
+            <a:ext cx="3054096" cy="310896"/>
+          </a:xfrm>
+          <a:prstGeom prst="roundRect">
+            <a:avLst>
+              <a:gd name="adj" fmla="val 50000"/>
+            </a:avLst>
+          </a:prstGeom>
+          <a:solidFill>
+            <a:srgbClr val="3A2A22"/>
+          </a:solidFill>
+          <a:ln/>
+        </p:spPr>
+      </p:sp>
+      <p:sp>
+        <p:nvSpPr>
+          <p:cNvPr id="19" name="Text 14"/>
+          <p:cNvSpPr txBox="1"/>
+          <p:nvPr/>
+        </p:nvSpPr>
+        <p:spPr>
+          <a:xfrm>
+            <a:off x="640080" y="6172200"/>
+            <a:ext cx="3054096" cy="310896"/>
+          </a:xfrm>
+          <a:prstGeom prst="rect">
+            <a:avLst/>
+          </a:prstGeom>
+          <a:noFill/>
+          <a:ln/>
+        </p:spPr>
+        <p:txBody>
+          <a:bodyPr wrap="square" lIns="0" tIns="0" rIns="0" bIns="0" rtlCol="0" anchor="ctr"/>
+          <a:lstStyle/>
+          <a:p>
+            <a:pPr algn="ctr" indent="0" marL="0">
+              <a:buNone/>
+            </a:pPr>
+            <a:r>
+              <a:rPr lang="en-US" sz="1050" b="1" dirty="0">
+                <a:solidFill>
+                  <a:srgbClr val="E8734A"/>
+                </a:solidFill>
+                <a:latin typeface="Calibri" pitchFamily="34" charset="0"/>
+                <a:ea typeface="Calibri" pitchFamily="34" charset="-122"/>
+                <a:cs typeface="Calibri" pitchFamily="34" charset="-120"/>
+              </a:rPr>
+              <a:t>구현 전 — 5주차 필터 튜닝과 함께 진행 예정</a:t>
+            </a:r>
+            <a:endParaRPr lang="en-US" sz="1050" dirty="0"/>
+          </a:p>
+        </p:txBody>
+      </p:sp>
+      <p:sp>
+        <p:nvSpPr>
+          <p:cNvPr id="20" name="Text 15"/>
+          <p:cNvSpPr txBox="1"/>
+          <p:nvPr/>
+        </p:nvSpPr>
+        <p:spPr>
+          <a:xfrm>
+            <a:off x="11365992" y="6355080"/>
+            <a:ext cx="548640" cy="320040"/>
+          </a:xfrm>
+          <a:prstGeom prst="rect">
+            <a:avLst/>
+          </a:prstGeom>
+          <a:noFill/>
+          <a:ln/>
+        </p:spPr>
+        <p:txBody>
+          <a:bodyPr wrap="square" lIns="0" tIns="0" rIns="0" bIns="0" rtlCol="0" anchor="ctr"/>
+          <a:lstStyle/>
+          <a:p>
+            <a:pPr algn="r" indent="0" marL="0">
+              <a:buNone/>
+            </a:pPr>
+            <a:r>
+              <a:rPr lang="en-US" sz="1100" dirty="0">
+                <a:solidFill>
+                  <a:srgbClr val="9FB6BC"/>
+                </a:solidFill>
+                <a:latin typeface="Calibri" pitchFamily="34" charset="0"/>
+                <a:ea typeface="Calibri" pitchFamily="34" charset="-122"/>
+                <a:cs typeface="Calibri" pitchFamily="34" charset="-120"/>
+              </a:rPr>
               <a:t>05</a:t>
             </a:r>
             <a:endParaRPr lang="en-US" sz="1100" dirty="0"/>
@@ -5668,7 +5417,7 @@
                 <a:ea typeface="Calibri" pitchFamily="34" charset="-122"/>
                 <a:cs typeface="Calibri" pitchFamily="34" charset="-120"/>
               </a:rPr>
-              <a:t>DESIGN RISK</a:t>
+              <a:t>PIPELINE PRE-VALIDATION</a:t>
             </a:r>
             <a:endParaRPr lang="en-US" sz="1200" dirty="0"/>
           </a:p>
@@ -5707,7 +5456,7 @@
                 <a:ea typeface="Arial" pitchFamily="34" charset="-122"/>
                 <a:cs typeface="Arial" pitchFamily="34" charset="-120"/>
               </a:rPr>
-              <a:t>발견한 설계 리스크: depth 근접 사각지대</a:t>
+              <a:t>선행 논문 데이터로 파이프라인 사전 검증</a:t>
             </a:r>
             <a:endParaRPr lang="en-US" sz="2700" dirty="0"/>
           </a:p>
@@ -5715,49 +5464,88 @@
       </p:sp>
       <p:sp>
         <p:nvSpPr>
-          <p:cNvPr id="4" name="Shape 2"/>
+          <p:cNvPr id="4" name="Text 2"/>
+          <p:cNvSpPr txBox="1"/>
+          <p:nvPr/>
+        </p:nvSpPr>
+        <p:spPr>
+          <a:xfrm>
+            <a:off x="640080" y="1554480"/>
+            <a:ext cx="10908792" cy="411480"/>
+          </a:xfrm>
+          <a:prstGeom prst="rect">
+            <a:avLst/>
+          </a:prstGeom>
+          <a:noFill/>
+          <a:ln/>
+        </p:spPr>
+        <p:txBody>
+          <a:bodyPr wrap="square" lIns="0" tIns="0" rIns="0" bIns="0" rtlCol="0" anchor="ctr"/>
+          <a:lstStyle/>
+          <a:p>
+            <a:pPr indent="0" marL="0">
+              <a:buNone/>
+            </a:pPr>
+            <a:r>
+              <a:rPr lang="en-US" sz="1350" dirty="0">
+                <a:solidFill>
+                  <a:srgbClr val="EAF3F1"/>
+                </a:solidFill>
+                <a:latin typeface="Calibri" pitchFamily="34" charset="0"/>
+                <a:ea typeface="Calibri" pitchFamily="34" charset="-122"/>
+                <a:cs typeface="Calibri" pitchFamily="34" charset="-120"/>
+              </a:rPr>
+              <a:t>아직 우리 자세 데이터가 없어서, 6주차부터 쓸 학습 파이프라인 코드가 실제로 동작하는지 먼저 확인했습니다.</a:t>
+            </a:r>
+            <a:endParaRPr lang="en-US" sz="1350" dirty="0"/>
+          </a:p>
+        </p:txBody>
+      </p:sp>
+      <p:sp>
+        <p:nvSpPr>
+          <p:cNvPr id="5" name="Shape 3"/>
           <p:cNvSpPr/>
           <p:nvPr/>
         </p:nvSpPr>
         <p:spPr>
           <a:xfrm>
-            <a:off x="640080" y="1600200"/>
-            <a:ext cx="10908792" cy="1554480"/>
+            <a:off x="640080" y="2148840"/>
+            <a:ext cx="5349240" cy="3886200"/>
           </a:xfrm>
           <a:prstGeom prst="roundRect">
             <a:avLst>
-              <a:gd name="adj" fmla="val 7059"/>
+              <a:gd name="adj" fmla="val 2824"/>
             </a:avLst>
           </a:prstGeom>
           <a:solidFill>
-            <a:srgbClr val="3A2A22"/>
+            <a:srgbClr val="FFFFFF"/>
           </a:solidFill>
           <a:ln/>
         </p:spPr>
       </p:sp>
       <p:sp>
         <p:nvSpPr>
-          <p:cNvPr id="5" name="Shape 3"/>
+          <p:cNvPr id="6" name="Shape 4"/>
           <p:cNvSpPr/>
           <p:nvPr/>
         </p:nvSpPr>
         <p:spPr>
           <a:xfrm>
-            <a:off x="914400" y="1828800"/>
-            <a:ext cx="640080" cy="640080"/>
+            <a:off x="914400" y="2423160"/>
+            <a:ext cx="548640" cy="548640"/>
           </a:xfrm>
           <a:prstGeom prst="ellipse">
             <a:avLst/>
           </a:prstGeom>
           <a:solidFill>
-            <a:srgbClr val="5A2E1F"/>
+            <a:srgbClr val="12655A"/>
           </a:solidFill>
           <a:ln/>
         </p:spPr>
       </p:sp>
       <p:pic>
         <p:nvPicPr>
-          <p:cNvPr id="6" name="Image 0" descr="preencoded.png">    </p:cNvPr>
+          <p:cNvPr id="7" name="Image 0" descr="preencoded.png">    </p:cNvPr>
           <p:cNvPicPr>
             <a:picLocks noChangeAspect="1"/>
           </p:cNvPicPr>
@@ -5771,8 +5559,8 @@
         </p:blipFill>
         <p:spPr>
           <a:xfrm>
-            <a:off x="1080821" y="1995221"/>
-            <a:ext cx="307238" cy="307238"/>
+            <a:off x="1057046" y="2565806"/>
+            <a:ext cx="263347" cy="263347"/>
           </a:xfrm>
           <a:prstGeom prst="rect">
             <a:avLst/>
@@ -5781,122 +5569,14 @@
       </p:pic>
       <p:sp>
         <p:nvSpPr>
-          <p:cNvPr id="7" name="Text 4"/>
+          <p:cNvPr id="8" name="Text 5"/>
           <p:cNvSpPr txBox="1"/>
           <p:nvPr/>
         </p:nvSpPr>
         <p:spPr>
           <a:xfrm>
-            <a:off x="1737360" y="1783080"/>
-            <a:ext cx="9601200" cy="1188720"/>
-          </a:xfrm>
-          <a:prstGeom prst="rect">
-            <a:avLst/>
-          </a:prstGeom>
-          <a:noFill/>
-          <a:ln/>
-        </p:spPr>
-        <p:txBody>
-          <a:bodyPr wrap="square" lIns="0" tIns="0" rIns="0" bIns="0" rtlCol="0" anchor="ctr"/>
-          <a:lstStyle/>
-          <a:p>
-            <a:pPr indent="0" marL="0">
-              <a:lnSpc>
-                <a:spcPct val="125000"/>
-              </a:lnSpc>
-              <a:buNone/>
-            </a:pPr>
-            <a:r>
-              <a:rPr lang="en-US" sz="1350" dirty="0">
-                <a:solidFill>
-                  <a:srgbClr val="EAF3F1"/>
-                </a:solidFill>
-                <a:latin typeface="Calibri" pitchFamily="34" charset="0"/>
-                <a:ea typeface="Calibri" pitchFamily="34" charset="-122"/>
-                <a:cs typeface="Calibri" pitchFamily="34" charset="-120"/>
-              </a:rPr>
-              <a:t>D455 depth는 약 40cm 미만에서 무효값을 반환한다 — 그런데 저희가 감지하려는 상황 "화면에 너무 가까워짐"이 하필 이 무효 구간과 겹친다. 정작 감지하고 싶은 순간에 센서가 먹통이 되는 셈.</a:t>
-            </a:r>
-            <a:endParaRPr lang="en-US" sz="1350" dirty="0"/>
-          </a:p>
-        </p:txBody>
-      </p:sp>
-      <p:sp>
-        <p:nvSpPr>
-          <p:cNvPr id="8" name="Shape 5"/>
-          <p:cNvSpPr/>
-          <p:nvPr/>
-        </p:nvSpPr>
-        <p:spPr>
-          <a:xfrm>
-            <a:off x="640080" y="3429000"/>
-            <a:ext cx="5349240" cy="2606040"/>
-          </a:xfrm>
-          <a:prstGeom prst="roundRect">
-            <a:avLst>
-              <a:gd name="adj" fmla="val 4211"/>
-            </a:avLst>
-          </a:prstGeom>
-          <a:solidFill>
-            <a:srgbClr val="FFFFFF"/>
-          </a:solidFill>
-          <a:ln/>
-        </p:spPr>
-      </p:sp>
-      <p:sp>
-        <p:nvSpPr>
-          <p:cNvPr id="9" name="Shape 6"/>
-          <p:cNvSpPr/>
-          <p:nvPr/>
-        </p:nvSpPr>
-        <p:spPr>
-          <a:xfrm>
-            <a:off x="914400" y="3703320"/>
-            <a:ext cx="548640" cy="548640"/>
-          </a:xfrm>
-          <a:prstGeom prst="ellipse">
-            <a:avLst/>
-          </a:prstGeom>
-          <a:solidFill>
-            <a:srgbClr val="12655A"/>
-          </a:solidFill>
-          <a:ln/>
-        </p:spPr>
-      </p:sp>
-      <p:pic>
-        <p:nvPicPr>
-          <p:cNvPr id="10" name="Image 1" descr="preencoded.png">    </p:cNvPr>
-          <p:cNvPicPr>
-            <a:picLocks noChangeAspect="1"/>
-          </p:cNvPicPr>
-          <p:nvPr/>
-        </p:nvPicPr>
-        <p:blipFill>
-          <a:blip r:embed="rId3"/>
-          <a:stretch>
-            <a:fillRect/>
-          </a:stretch>
-        </p:blipFill>
-        <p:spPr>
-          <a:xfrm>
-            <a:off x="1057046" y="3845966"/>
-            <a:ext cx="263347" cy="263347"/>
-          </a:xfrm>
-          <a:prstGeom prst="rect">
-            <a:avLst/>
-          </a:prstGeom>
-        </p:spPr>
-      </p:pic>
-      <p:sp>
-        <p:nvSpPr>
-          <p:cNvPr id="11" name="Text 7"/>
-          <p:cNvSpPr txBox="1"/>
-          <p:nvPr/>
-        </p:nvSpPr>
-        <p:spPr>
-          <a:xfrm>
-            <a:off x="1600200" y="3749040"/>
-            <a:ext cx="4114800" cy="502920"/>
+            <a:off x="1600200" y="2468880"/>
+            <a:ext cx="4206240" cy="457200"/>
           </a:xfrm>
           <a:prstGeom prst="rect">
             <a:avLst/>
@@ -5920,556 +5600,6 @@
                 <a:ea typeface="Arial" pitchFamily="34" charset="-122"/>
                 <a:cs typeface="Arial" pitchFamily="34" charset="-120"/>
               </a:rPr>
-              <a:t>완화 방안: 이중화 판정</a:t>
-            </a:r>
-            <a:endParaRPr lang="en-US" sz="1400" dirty="0"/>
-          </a:p>
-        </p:txBody>
-      </p:sp>
-      <p:sp>
-        <p:nvSpPr>
-          <p:cNvPr id="12" name="Text 8"/>
-          <p:cNvSpPr txBox="1"/>
-          <p:nvPr/>
-        </p:nvSpPr>
-        <p:spPr>
-          <a:xfrm>
-            <a:off x="914400" y="4480560"/>
-            <a:ext cx="4800600" cy="1371600"/>
-          </a:xfrm>
-          <a:prstGeom prst="rect">
-            <a:avLst/>
-          </a:prstGeom>
-          <a:noFill/>
-          <a:ln/>
-        </p:spPr>
-        <p:txBody>
-          <a:bodyPr wrap="square" lIns="0" tIns="0" rIns="0" bIns="0" rtlCol="0" anchor="ctr"/>
-          <a:lstStyle/>
-          <a:p>
-            <a:pPr indent="0" marL="0">
-              <a:lnSpc>
-                <a:spcPct val="125000"/>
-              </a:lnSpc>
-              <a:buNone/>
-            </a:pPr>
-            <a:r>
-              <a:rPr lang="en-US" sz="1200" dirty="0">
-                <a:solidFill>
-                  <a:srgbClr val="3C4A50"/>
-                </a:solidFill>
-                <a:latin typeface="Calibri" pitchFamily="34" charset="0"/>
-                <a:ea typeface="Calibri" pitchFamily="34" charset="-122"/>
-                <a:cs typeface="Calibri" pitchFamily="34" charset="-120"/>
-              </a:rPr>
-              <a:t>depth 유효 구간(40cm~)은 정확한 거리값을 그대로 사용. 그 이하 근접 구간은 RGB 화면 속 얼굴·어깨 면적 비율로 "더 가까워짐"만 이분류 판정.</a:t>
-            </a:r>
-            <a:endParaRPr lang="en-US" sz="1200" dirty="0"/>
-          </a:p>
-        </p:txBody>
-      </p:sp>
-      <p:sp>
-        <p:nvSpPr>
-          <p:cNvPr id="13" name="Shape 9"/>
-          <p:cNvSpPr/>
-          <p:nvPr/>
-        </p:nvSpPr>
-        <p:spPr>
-          <a:xfrm>
-            <a:off x="6199632" y="3429000"/>
-            <a:ext cx="5349240" cy="2606040"/>
-          </a:xfrm>
-          <a:prstGeom prst="roundRect">
-            <a:avLst>
-              <a:gd name="adj" fmla="val 4211"/>
-            </a:avLst>
-          </a:prstGeom>
-          <a:solidFill>
-            <a:srgbClr val="FFFFFF"/>
-          </a:solidFill>
-          <a:ln/>
-        </p:spPr>
-      </p:sp>
-      <p:sp>
-        <p:nvSpPr>
-          <p:cNvPr id="14" name="Shape 10"/>
-          <p:cNvSpPr/>
-          <p:nvPr/>
-        </p:nvSpPr>
-        <p:spPr>
-          <a:xfrm>
-            <a:off x="6473952" y="3703320"/>
-            <a:ext cx="548640" cy="548640"/>
-          </a:xfrm>
-          <a:prstGeom prst="ellipse">
-            <a:avLst/>
-          </a:prstGeom>
-          <a:solidFill>
-            <a:srgbClr val="12655A"/>
-          </a:solidFill>
-          <a:ln/>
-        </p:spPr>
-      </p:sp>
-      <p:pic>
-        <p:nvPicPr>
-          <p:cNvPr id="15" name="Image 2" descr="preencoded.png">    </p:cNvPr>
-          <p:cNvPicPr>
-            <a:picLocks noChangeAspect="1"/>
-          </p:cNvPicPr>
-          <p:nvPr/>
-        </p:nvPicPr>
-        <p:blipFill>
-          <a:blip r:embed="rId4"/>
-          <a:stretch>
-            <a:fillRect/>
-          </a:stretch>
-        </p:blipFill>
-        <p:spPr>
-          <a:xfrm>
-            <a:off x="6616598" y="3845966"/>
-            <a:ext cx="263347" cy="263347"/>
-          </a:xfrm>
-          <a:prstGeom prst="rect">
-            <a:avLst/>
-          </a:prstGeom>
-        </p:spPr>
-      </p:pic>
-      <p:sp>
-        <p:nvSpPr>
-          <p:cNvPr id="16" name="Text 11"/>
-          <p:cNvSpPr txBox="1"/>
-          <p:nvPr/>
-        </p:nvSpPr>
-        <p:spPr>
-          <a:xfrm>
-            <a:off x="7159752" y="3749040"/>
-            <a:ext cx="4114800" cy="502920"/>
-          </a:xfrm>
-          <a:prstGeom prst="rect">
-            <a:avLst/>
-          </a:prstGeom>
-          <a:noFill/>
-          <a:ln/>
-        </p:spPr>
-        <p:txBody>
-          <a:bodyPr wrap="square" lIns="0" tIns="0" rIns="0" bIns="0" rtlCol="0" anchor="ctr"/>
-          <a:lstStyle/>
-          <a:p>
-            <a:pPr indent="0" marL="0">
-              <a:buNone/>
-            </a:pPr>
-            <a:r>
-              <a:rPr lang="en-US" sz="1400" b="1" dirty="0">
-                <a:solidFill>
-                  <a:srgbClr val="16262E"/>
-                </a:solidFill>
-                <a:latin typeface="Arial" pitchFamily="34" charset="0"/>
-                <a:ea typeface="Arial" pitchFamily="34" charset="-122"/>
-                <a:cs typeface="Arial" pitchFamily="34" charset="-120"/>
-              </a:rPr>
-              <a:t>선행 연구와의 접점</a:t>
-            </a:r>
-            <a:endParaRPr lang="en-US" sz="1400" dirty="0"/>
-          </a:p>
-        </p:txBody>
-      </p:sp>
-      <p:sp>
-        <p:nvSpPr>
-          <p:cNvPr id="17" name="Text 12"/>
-          <p:cNvSpPr txBox="1"/>
-          <p:nvPr/>
-        </p:nvSpPr>
-        <p:spPr>
-          <a:xfrm>
-            <a:off x="6473952" y="4480560"/>
-            <a:ext cx="4800600" cy="1371600"/>
-          </a:xfrm>
-          <a:prstGeom prst="rect">
-            <a:avLst/>
-          </a:prstGeom>
-          <a:noFill/>
-          <a:ln/>
-        </p:spPr>
-        <p:txBody>
-          <a:bodyPr wrap="square" lIns="0" tIns="0" rIns="0" bIns="0" rtlCol="0" anchor="ctr"/>
-          <a:lstStyle/>
-          <a:p>
-            <a:pPr indent="0" marL="0">
-              <a:lnSpc>
-                <a:spcPct val="125000"/>
-              </a:lnSpc>
-              <a:buNone/>
-            </a:pPr>
-            <a:r>
-              <a:rPr lang="en-US" sz="1200" dirty="0">
-                <a:solidFill>
-                  <a:srgbClr val="3C4A50"/>
-                </a:solidFill>
-                <a:latin typeface="Calibri" pitchFamily="34" charset="0"/>
-                <a:ea typeface="Calibri" pitchFamily="34" charset="-122"/>
-                <a:cs typeface="Calibri" pitchFamily="34" charset="-120"/>
-              </a:rPr>
-              <a:t>이 방법은 WRF 논문(3주차 조사)이 깊이 카메라 없이 쓰던 방식과 동일한 아이디어 — 선행 연구의 한계를 우리 설계의 보완책으로 재활용.</a:t>
-            </a:r>
-            <a:endParaRPr lang="en-US" sz="1200" dirty="0"/>
-          </a:p>
-        </p:txBody>
-      </p:sp>
-      <p:sp>
-        <p:nvSpPr>
-          <p:cNvPr id="18" name="Shape 13"/>
-          <p:cNvSpPr/>
-          <p:nvPr/>
-        </p:nvSpPr>
-        <p:spPr>
-          <a:xfrm>
-            <a:off x="640080" y="6172200"/>
-            <a:ext cx="3054096" cy="310896"/>
-          </a:xfrm>
-          <a:prstGeom prst="roundRect">
-            <a:avLst>
-              <a:gd name="adj" fmla="val 50000"/>
-            </a:avLst>
-          </a:prstGeom>
-          <a:solidFill>
-            <a:srgbClr val="3A2A22"/>
-          </a:solidFill>
-          <a:ln/>
-        </p:spPr>
-      </p:sp>
-      <p:sp>
-        <p:nvSpPr>
-          <p:cNvPr id="19" name="Text 14"/>
-          <p:cNvSpPr txBox="1"/>
-          <p:nvPr/>
-        </p:nvSpPr>
-        <p:spPr>
-          <a:xfrm>
-            <a:off x="640080" y="6172200"/>
-            <a:ext cx="3054096" cy="310896"/>
-          </a:xfrm>
-          <a:prstGeom prst="rect">
-            <a:avLst/>
-          </a:prstGeom>
-          <a:noFill/>
-          <a:ln/>
-        </p:spPr>
-        <p:txBody>
-          <a:bodyPr wrap="square" lIns="0" tIns="0" rIns="0" bIns="0" rtlCol="0" anchor="ctr"/>
-          <a:lstStyle/>
-          <a:p>
-            <a:pPr algn="ctr" indent="0" marL="0">
-              <a:buNone/>
-            </a:pPr>
-            <a:r>
-              <a:rPr lang="en-US" sz="1050" b="1" dirty="0">
-                <a:solidFill>
-                  <a:srgbClr val="E8734A"/>
-                </a:solidFill>
-                <a:latin typeface="Calibri" pitchFamily="34" charset="0"/>
-                <a:ea typeface="Calibri" pitchFamily="34" charset="-122"/>
-                <a:cs typeface="Calibri" pitchFamily="34" charset="-120"/>
-              </a:rPr>
-              <a:t>구현 전 — 5주차 필터 튜닝과 함께 진행 예정</a:t>
-            </a:r>
-            <a:endParaRPr lang="en-US" sz="1050" dirty="0"/>
-          </a:p>
-        </p:txBody>
-      </p:sp>
-      <p:sp>
-        <p:nvSpPr>
-          <p:cNvPr id="20" name="Text 15"/>
-          <p:cNvSpPr txBox="1"/>
-          <p:nvPr/>
-        </p:nvSpPr>
-        <p:spPr>
-          <a:xfrm>
-            <a:off x="11365992" y="6355080"/>
-            <a:ext cx="548640" cy="320040"/>
-          </a:xfrm>
-          <a:prstGeom prst="rect">
-            <a:avLst/>
-          </a:prstGeom>
-          <a:noFill/>
-          <a:ln/>
-        </p:spPr>
-        <p:txBody>
-          <a:bodyPr wrap="square" lIns="0" tIns="0" rIns="0" bIns="0" rtlCol="0" anchor="ctr"/>
-          <a:lstStyle/>
-          <a:p>
-            <a:pPr algn="r" indent="0" marL="0">
-              <a:buNone/>
-            </a:pPr>
-            <a:r>
-              <a:rPr lang="en-US" sz="1100" dirty="0">
-                <a:solidFill>
-                  <a:srgbClr val="9FB6BC"/>
-                </a:solidFill>
-                <a:latin typeface="Calibri" pitchFamily="34" charset="0"/>
-                <a:ea typeface="Calibri" pitchFamily="34" charset="-122"/>
-                <a:cs typeface="Calibri" pitchFamily="34" charset="-120"/>
-              </a:rPr>
-              <a:t>06</a:t>
-            </a:r>
-            <a:endParaRPr lang="en-US" sz="1100" dirty="0"/>
-          </a:p>
-        </p:txBody>
-      </p:sp>
-    </p:spTree>
-  </p:cSld>
-  <p:clrMapOvr>
-    <a:masterClrMapping/>
-  </p:clrMapOvr>
-</p:sld>
-</file>
-
-<file path=ppt/slides/slide7.xml><?xml version="1.0" encoding="utf-8"?>
-<p:sld xmlns:a="http://schemas.openxmlformats.org/drawingml/2006/main" xmlns:r="http://schemas.openxmlformats.org/officeDocument/2006/relationships" xmlns:p="http://schemas.openxmlformats.org/presentationml/2006/main">
-  <p:cSld name="Slide 7">
-    <p:bg>
-      <p:bgPr>
-        <a:blipFill dpi="0" rotWithShape="1">
-          <a:blip r:embed="rId1">
-            <a:lum/>
-          </a:blip>
-          <a:srcRect/>
-          <a:stretch>
-            <a:fillRect/>
-          </a:stretch>
-        </a:blipFill>
-        <a:effectLst/>
-      </p:bgPr>
-    </p:bg>
-    <p:spTree>
-      <p:nvGrpSpPr>
-        <p:cNvPr id="1" name=""/>
-        <p:cNvGrpSpPr/>
-        <p:nvPr/>
-      </p:nvGrpSpPr>
-      <p:grpSpPr>
-        <a:xfrm>
-          <a:off x="0" y="0"/>
-          <a:ext cx="0" cy="0"/>
-          <a:chOff x="0" y="0"/>
-          <a:chExt cx="0" cy="0"/>
-        </a:xfrm>
-      </p:grpSpPr>
-      <p:sp>
-        <p:nvSpPr>
-          <p:cNvPr id="2" name="Text 0"/>
-          <p:cNvSpPr txBox="1"/>
-          <p:nvPr/>
-        </p:nvSpPr>
-        <p:spPr>
-          <a:xfrm>
-            <a:off x="640080" y="384048"/>
-            <a:ext cx="8229600" cy="320040"/>
-          </a:xfrm>
-          <a:prstGeom prst="rect">
-            <a:avLst/>
-          </a:prstGeom>
-          <a:noFill/>
-          <a:ln/>
-        </p:spPr>
-        <p:txBody>
-          <a:bodyPr wrap="square" lIns="0" tIns="0" rIns="0" bIns="0" rtlCol="0" anchor="ctr"/>
-          <a:lstStyle/>
-          <a:p>
-            <a:pPr indent="0" marL="0">
-              <a:buNone/>
-            </a:pPr>
-            <a:r>
-              <a:rPr lang="en-US" sz="1200" b="1" spc="200" kern="0" dirty="0">
-                <a:solidFill>
-                  <a:srgbClr val="2FE0C4"/>
-                </a:solidFill>
-                <a:latin typeface="Calibri" pitchFamily="34" charset="0"/>
-                <a:ea typeface="Calibri" pitchFamily="34" charset="-122"/>
-                <a:cs typeface="Calibri" pitchFamily="34" charset="-120"/>
-              </a:rPr>
-              <a:t>PIPELINE PRE-VALIDATION</a:t>
-            </a:r>
-            <a:endParaRPr lang="en-US" sz="1200" dirty="0"/>
-          </a:p>
-        </p:txBody>
-      </p:sp>
-      <p:sp>
-        <p:nvSpPr>
-          <p:cNvPr id="3" name="Text 1"/>
-          <p:cNvSpPr txBox="1"/>
-          <p:nvPr/>
-        </p:nvSpPr>
-        <p:spPr>
-          <a:xfrm>
-            <a:off x="640080" y="685800"/>
-            <a:ext cx="10881360" cy="822960"/>
-          </a:xfrm>
-          <a:prstGeom prst="rect">
-            <a:avLst/>
-          </a:prstGeom>
-          <a:noFill/>
-          <a:ln/>
-        </p:spPr>
-        <p:txBody>
-          <a:bodyPr wrap="square" lIns="0" tIns="0" rIns="0" bIns="0" rtlCol="0" anchor="ctr"/>
-          <a:lstStyle/>
-          <a:p>
-            <a:pPr indent="0" marL="0">
-              <a:buNone/>
-            </a:pPr>
-            <a:r>
-              <a:rPr lang="en-US" sz="2700" b="1" dirty="0">
-                <a:solidFill>
-                  <a:srgbClr val="EAF3F1"/>
-                </a:solidFill>
-                <a:latin typeface="Arial" pitchFamily="34" charset="0"/>
-                <a:ea typeface="Arial" pitchFamily="34" charset="-122"/>
-                <a:cs typeface="Arial" pitchFamily="34" charset="-120"/>
-              </a:rPr>
-              <a:t>선행 논문 데이터로 파이프라인 사전 검증</a:t>
-            </a:r>
-            <a:endParaRPr lang="en-US" sz="2700" dirty="0"/>
-          </a:p>
-        </p:txBody>
-      </p:sp>
-      <p:sp>
-        <p:nvSpPr>
-          <p:cNvPr id="4" name="Text 2"/>
-          <p:cNvSpPr txBox="1"/>
-          <p:nvPr/>
-        </p:nvSpPr>
-        <p:spPr>
-          <a:xfrm>
-            <a:off x="640080" y="1554480"/>
-            <a:ext cx="10908792" cy="411480"/>
-          </a:xfrm>
-          <a:prstGeom prst="rect">
-            <a:avLst/>
-          </a:prstGeom>
-          <a:noFill/>
-          <a:ln/>
-        </p:spPr>
-        <p:txBody>
-          <a:bodyPr wrap="square" lIns="0" tIns="0" rIns="0" bIns="0" rtlCol="0" anchor="ctr"/>
-          <a:lstStyle/>
-          <a:p>
-            <a:pPr indent="0" marL="0">
-              <a:buNone/>
-            </a:pPr>
-            <a:r>
-              <a:rPr lang="en-US" sz="1350" dirty="0">
-                <a:solidFill>
-                  <a:srgbClr val="EAF3F1"/>
-                </a:solidFill>
-                <a:latin typeface="Calibri" pitchFamily="34" charset="0"/>
-                <a:ea typeface="Calibri" pitchFamily="34" charset="-122"/>
-                <a:cs typeface="Calibri" pitchFamily="34" charset="-120"/>
-              </a:rPr>
-              <a:t>아직 우리 자세 데이터가 없어서, 6주차부터 쓸 학습 파이프라인 코드가 실제로 동작하는지 먼저 확인했습니다.</a:t>
-            </a:r>
-            <a:endParaRPr lang="en-US" sz="1350" dirty="0"/>
-          </a:p>
-        </p:txBody>
-      </p:sp>
-      <p:sp>
-        <p:nvSpPr>
-          <p:cNvPr id="5" name="Shape 3"/>
-          <p:cNvSpPr/>
-          <p:nvPr/>
-        </p:nvSpPr>
-        <p:spPr>
-          <a:xfrm>
-            <a:off x="640080" y="2148840"/>
-            <a:ext cx="5349240" cy="3886200"/>
-          </a:xfrm>
-          <a:prstGeom prst="roundRect">
-            <a:avLst>
-              <a:gd name="adj" fmla="val 2824"/>
-            </a:avLst>
-          </a:prstGeom>
-          <a:solidFill>
-            <a:srgbClr val="FFFFFF"/>
-          </a:solidFill>
-          <a:ln/>
-        </p:spPr>
-      </p:sp>
-      <p:sp>
-        <p:nvSpPr>
-          <p:cNvPr id="6" name="Shape 4"/>
-          <p:cNvSpPr/>
-          <p:nvPr/>
-        </p:nvSpPr>
-        <p:spPr>
-          <a:xfrm>
-            <a:off x="914400" y="2423160"/>
-            <a:ext cx="548640" cy="548640"/>
-          </a:xfrm>
-          <a:prstGeom prst="ellipse">
-            <a:avLst/>
-          </a:prstGeom>
-          <a:solidFill>
-            <a:srgbClr val="12655A"/>
-          </a:solidFill>
-          <a:ln/>
-        </p:spPr>
-      </p:sp>
-      <p:pic>
-        <p:nvPicPr>
-          <p:cNvPr id="7" name="Image 0" descr="preencoded.png">    </p:cNvPr>
-          <p:cNvPicPr>
-            <a:picLocks noChangeAspect="1"/>
-          </p:cNvPicPr>
-          <p:nvPr/>
-        </p:nvPicPr>
-        <p:blipFill>
-          <a:blip r:embed="rId2"/>
-          <a:stretch>
-            <a:fillRect/>
-          </a:stretch>
-        </p:blipFill>
-        <p:spPr>
-          <a:xfrm>
-            <a:off x="1057046" y="2565806"/>
-            <a:ext cx="263347" cy="263347"/>
-          </a:xfrm>
-          <a:prstGeom prst="rect">
-            <a:avLst/>
-          </a:prstGeom>
-        </p:spPr>
-      </p:pic>
-      <p:sp>
-        <p:nvSpPr>
-          <p:cNvPr id="8" name="Text 5"/>
-          <p:cNvSpPr txBox="1"/>
-          <p:nvPr/>
-        </p:nvSpPr>
-        <p:spPr>
-          <a:xfrm>
-            <a:off x="1600200" y="2468880"/>
-            <a:ext cx="4206240" cy="457200"/>
-          </a:xfrm>
-          <a:prstGeom prst="rect">
-            <a:avLst/>
-          </a:prstGeom>
-          <a:noFill/>
-          <a:ln/>
-        </p:spPr>
-        <p:txBody>
-          <a:bodyPr wrap="square" lIns="0" tIns="0" rIns="0" bIns="0" rtlCol="0" anchor="ctr"/>
-          <a:lstStyle/>
-          <a:p>
-            <a:pPr indent="0" marL="0">
-              <a:buNone/>
-            </a:pPr>
-            <a:r>
-              <a:rPr lang="en-US" sz="1400" b="1" dirty="0">
-                <a:solidFill>
-                  <a:srgbClr val="16262E"/>
-                </a:solidFill>
-                <a:latin typeface="Arial" pitchFamily="34" charset="0"/>
-                <a:ea typeface="Arial" pitchFamily="34" charset="-122"/>
-                <a:cs typeface="Arial" pitchFamily="34" charset="-120"/>
-              </a:rPr>
               <a:t>WRF 논문 공개 데이터 검증</a:t>
             </a:r>
             <a:endParaRPr lang="en-US" sz="1400" dirty="0"/>
@@ -6478,7 +5608,7 @@
       </p:sp>
       <p:graphicFrame>
         <p:nvGraphicFramePr>
-          <p:cNvPr id="8" name="Table 0"/>
+          <p:cNvPr id="7" name="Table 0"/>
           <p:cNvGraphicFramePr>
             <a:graphicFrameLocks noGrp="1"/>
           </p:cNvGraphicFramePr>
@@ -7546,6 +6676,787 @@
                 <a:ea typeface="Calibri" pitchFamily="34" charset="-122"/>
                 <a:cs typeface="Calibri" pitchFamily="34" charset="-120"/>
               </a:rPr>
+              <a:t>06</a:t>
+            </a:r>
+            <a:endParaRPr lang="en-US" sz="1100" dirty="0"/>
+          </a:p>
+        </p:txBody>
+      </p:sp>
+    </p:spTree>
+  </p:cSld>
+  <p:clrMapOvr>
+    <a:masterClrMapping/>
+  </p:clrMapOvr>
+</p:sld>
+</file>
+
+<file path=ppt/slides/slide7.xml><?xml version="1.0" encoding="utf-8"?>
+<p:sld xmlns:a="http://schemas.openxmlformats.org/drawingml/2006/main" xmlns:r="http://schemas.openxmlformats.org/officeDocument/2006/relationships" xmlns:p="http://schemas.openxmlformats.org/presentationml/2006/main">
+  <p:cSld name="Slide 7">
+    <p:bg>
+      <p:bgPr>
+        <a:blipFill dpi="0" rotWithShape="1">
+          <a:blip r:embed="rId1">
+            <a:lum/>
+          </a:blip>
+          <a:srcRect/>
+          <a:stretch>
+            <a:fillRect/>
+          </a:stretch>
+        </a:blipFill>
+        <a:effectLst/>
+      </p:bgPr>
+    </p:bg>
+    <p:spTree>
+      <p:nvGrpSpPr>
+        <p:cNvPr id="1" name=""/>
+        <p:cNvGrpSpPr/>
+        <p:nvPr/>
+      </p:nvGrpSpPr>
+      <p:grpSpPr>
+        <a:xfrm>
+          <a:off x="0" y="0"/>
+          <a:ext cx="0" cy="0"/>
+          <a:chOff x="0" y="0"/>
+          <a:chExt cx="0" cy="0"/>
+        </a:xfrm>
+      </p:grpSpPr>
+      <p:sp>
+        <p:nvSpPr>
+          <p:cNvPr id="2" name="Text 0"/>
+          <p:cNvSpPr txBox="1"/>
+          <p:nvPr/>
+        </p:nvSpPr>
+        <p:spPr>
+          <a:xfrm>
+            <a:off x="640080" y="384048"/>
+            <a:ext cx="8229600" cy="320040"/>
+          </a:xfrm>
+          <a:prstGeom prst="rect">
+            <a:avLst/>
+          </a:prstGeom>
+          <a:noFill/>
+          <a:ln/>
+        </p:spPr>
+        <p:txBody>
+          <a:bodyPr wrap="square" lIns="0" tIns="0" rIns="0" bIns="0" rtlCol="0" anchor="ctr"/>
+          <a:lstStyle/>
+          <a:p>
+            <a:pPr indent="0" marL="0">
+              <a:buNone/>
+            </a:pPr>
+            <a:r>
+              <a:rPr lang="en-US" sz="1200" b="1" spc="200" kern="0" dirty="0">
+                <a:solidFill>
+                  <a:srgbClr val="2FE0C4"/>
+                </a:solidFill>
+                <a:latin typeface="Calibri" pitchFamily="34" charset="0"/>
+                <a:ea typeface="Calibri" pitchFamily="34" charset="-122"/>
+                <a:cs typeface="Calibri" pitchFamily="34" charset="-120"/>
+              </a:rPr>
+              <a:t>CONCLUSION</a:t>
+            </a:r>
+            <a:endParaRPr lang="en-US" sz="1200" dirty="0"/>
+          </a:p>
+        </p:txBody>
+      </p:sp>
+      <p:sp>
+        <p:nvSpPr>
+          <p:cNvPr id="3" name="Text 1"/>
+          <p:cNvSpPr txBox="1"/>
+          <p:nvPr/>
+        </p:nvSpPr>
+        <p:spPr>
+          <a:xfrm>
+            <a:off x="640080" y="685800"/>
+            <a:ext cx="10881360" cy="822960"/>
+          </a:xfrm>
+          <a:prstGeom prst="rect">
+            <a:avLst/>
+          </a:prstGeom>
+          <a:noFill/>
+          <a:ln/>
+        </p:spPr>
+        <p:txBody>
+          <a:bodyPr wrap="square" lIns="0" tIns="0" rIns="0" bIns="0" rtlCol="0" anchor="ctr"/>
+          <a:lstStyle/>
+          <a:p>
+            <a:pPr indent="0" marL="0">
+              <a:buNone/>
+            </a:pPr>
+            <a:r>
+              <a:rPr lang="en-US" sz="2700" b="1" dirty="0">
+                <a:solidFill>
+                  <a:srgbClr val="EAF3F1"/>
+                </a:solidFill>
+                <a:latin typeface="Arial" pitchFamily="34" charset="0"/>
+                <a:ea typeface="Arial" pitchFamily="34" charset="-122"/>
+                <a:cs typeface="Arial" pitchFamily="34" charset="-120"/>
+              </a:rPr>
+              <a:t>마무리</a:t>
+            </a:r>
+            <a:endParaRPr lang="en-US" sz="2700" dirty="0"/>
+          </a:p>
+        </p:txBody>
+      </p:sp>
+      <p:sp>
+        <p:nvSpPr>
+          <p:cNvPr id="4" name="Shape 2"/>
+          <p:cNvSpPr/>
+          <p:nvPr/>
+        </p:nvSpPr>
+        <p:spPr>
+          <a:xfrm>
+            <a:off x="640080" y="1737360"/>
+            <a:ext cx="10908792" cy="731520"/>
+          </a:xfrm>
+          <a:prstGeom prst="roundRect">
+            <a:avLst>
+              <a:gd name="adj" fmla="val 12500"/>
+            </a:avLst>
+          </a:prstGeom>
+          <a:solidFill>
+            <a:srgbClr val="FFFFFF"/>
+          </a:solidFill>
+          <a:ln/>
+        </p:spPr>
+      </p:sp>
+      <p:sp>
+        <p:nvSpPr>
+          <p:cNvPr id="5" name="Shape 3"/>
+          <p:cNvSpPr/>
+          <p:nvPr/>
+        </p:nvSpPr>
+        <p:spPr>
+          <a:xfrm>
+            <a:off x="822960" y="1920240"/>
+            <a:ext cx="457200" cy="365760"/>
+          </a:xfrm>
+          <a:prstGeom prst="roundRect">
+            <a:avLst>
+              <a:gd name="adj" fmla="val 20000"/>
+            </a:avLst>
+          </a:prstGeom>
+          <a:solidFill>
+            <a:srgbClr val="E9FBF7"/>
+          </a:solidFill>
+          <a:ln/>
+        </p:spPr>
+      </p:sp>
+      <p:sp>
+        <p:nvSpPr>
+          <p:cNvPr id="6" name="Text 4"/>
+          <p:cNvSpPr txBox="1"/>
+          <p:nvPr/>
+        </p:nvSpPr>
+        <p:spPr>
+          <a:xfrm>
+            <a:off x="822960" y="1920240"/>
+            <a:ext cx="457200" cy="365760"/>
+          </a:xfrm>
+          <a:prstGeom prst="rect">
+            <a:avLst/>
+          </a:prstGeom>
+          <a:noFill/>
+          <a:ln/>
+        </p:spPr>
+        <p:txBody>
+          <a:bodyPr wrap="square" lIns="0" tIns="0" rIns="0" bIns="0" rtlCol="0" anchor="ctr"/>
+          <a:lstStyle/>
+          <a:p>
+            <a:pPr algn="ctr" indent="0" marL="0">
+              <a:buNone/>
+            </a:pPr>
+            <a:r>
+              <a:rPr lang="en-US" sz="1500" b="1" dirty="0">
+                <a:solidFill>
+                  <a:srgbClr val="12655A"/>
+                </a:solidFill>
+                <a:latin typeface="Calibri" pitchFamily="34" charset="0"/>
+                <a:ea typeface="Calibri" pitchFamily="34" charset="-122"/>
+                <a:cs typeface="Calibri" pitchFamily="34" charset="-120"/>
+              </a:rPr>
+              <a:t>✓</a:t>
+            </a:r>
+            <a:endParaRPr lang="en-US" sz="1500" dirty="0"/>
+          </a:p>
+        </p:txBody>
+      </p:sp>
+      <p:sp>
+        <p:nvSpPr>
+          <p:cNvPr id="7" name="Text 5"/>
+          <p:cNvSpPr txBox="1"/>
+          <p:nvPr/>
+        </p:nvSpPr>
+        <p:spPr>
+          <a:xfrm>
+            <a:off x="1417320" y="1737360"/>
+            <a:ext cx="9875520" cy="731520"/>
+          </a:xfrm>
+          <a:prstGeom prst="rect">
+            <a:avLst/>
+          </a:prstGeom>
+          <a:noFill/>
+          <a:ln/>
+        </p:spPr>
+        <p:txBody>
+          <a:bodyPr wrap="square" lIns="0" tIns="0" rIns="0" bIns="0" rtlCol="0" anchor="ctr"/>
+          <a:lstStyle/>
+          <a:p>
+            <a:pPr indent="0" marL="0">
+              <a:lnSpc>
+                <a:spcPct val="115000"/>
+              </a:lnSpc>
+              <a:buNone/>
+            </a:pPr>
+            <a:r>
+              <a:rPr lang="en-US" sz="1300" dirty="0">
+                <a:solidFill>
+                  <a:srgbClr val="16262E"/>
+                </a:solidFill>
+                <a:latin typeface="Calibri" pitchFamily="34" charset="0"/>
+                <a:ea typeface="Calibri" pitchFamily="34" charset="-122"/>
+                <a:cs typeface="Calibri" pitchFamily="34" charset="-120"/>
+              </a:rPr>
+              <a:t>4주차 게이트 통과 — 평균 29.43fps, 스파이크 0회, 목표치(최소 5fps) 대폭 상회</a:t>
+            </a:r>
+            <a:endParaRPr lang="en-US" sz="1300" dirty="0"/>
+          </a:p>
+        </p:txBody>
+      </p:sp>
+      <p:sp>
+        <p:nvSpPr>
+          <p:cNvPr id="8" name="Shape 6"/>
+          <p:cNvSpPr/>
+          <p:nvPr/>
+        </p:nvSpPr>
+        <p:spPr>
+          <a:xfrm>
+            <a:off x="640080" y="2578608"/>
+            <a:ext cx="10908792" cy="731520"/>
+          </a:xfrm>
+          <a:prstGeom prst="roundRect">
+            <a:avLst>
+              <a:gd name="adj" fmla="val 12500"/>
+            </a:avLst>
+          </a:prstGeom>
+          <a:solidFill>
+            <a:srgbClr val="FFFFFF"/>
+          </a:solidFill>
+          <a:ln/>
+        </p:spPr>
+      </p:sp>
+      <p:sp>
+        <p:nvSpPr>
+          <p:cNvPr id="9" name="Shape 7"/>
+          <p:cNvSpPr/>
+          <p:nvPr/>
+        </p:nvSpPr>
+        <p:spPr>
+          <a:xfrm>
+            <a:off x="822960" y="2761488"/>
+            <a:ext cx="457200" cy="365760"/>
+          </a:xfrm>
+          <a:prstGeom prst="roundRect">
+            <a:avLst>
+              <a:gd name="adj" fmla="val 20000"/>
+            </a:avLst>
+          </a:prstGeom>
+          <a:solidFill>
+            <a:srgbClr val="E9FBF7"/>
+          </a:solidFill>
+          <a:ln/>
+        </p:spPr>
+      </p:sp>
+      <p:sp>
+        <p:nvSpPr>
+          <p:cNvPr id="10" name="Text 8"/>
+          <p:cNvSpPr txBox="1"/>
+          <p:nvPr/>
+        </p:nvSpPr>
+        <p:spPr>
+          <a:xfrm>
+            <a:off x="822960" y="2761488"/>
+            <a:ext cx="457200" cy="365760"/>
+          </a:xfrm>
+          <a:prstGeom prst="rect">
+            <a:avLst/>
+          </a:prstGeom>
+          <a:noFill/>
+          <a:ln/>
+        </p:spPr>
+        <p:txBody>
+          <a:bodyPr wrap="square" lIns="0" tIns="0" rIns="0" bIns="0" rtlCol="0" anchor="ctr"/>
+          <a:lstStyle/>
+          <a:p>
+            <a:pPr algn="ctr" indent="0" marL="0">
+              <a:buNone/>
+            </a:pPr>
+            <a:r>
+              <a:rPr lang="en-US" sz="1500" b="1" dirty="0">
+                <a:solidFill>
+                  <a:srgbClr val="12655A"/>
+                </a:solidFill>
+                <a:latin typeface="Calibri" pitchFamily="34" charset="0"/>
+                <a:ea typeface="Calibri" pitchFamily="34" charset="-122"/>
+                <a:cs typeface="Calibri" pitchFamily="34" charset="-120"/>
+              </a:rPr>
+              <a:t>✓</a:t>
+            </a:r>
+            <a:endParaRPr lang="en-US" sz="1500" dirty="0"/>
+          </a:p>
+        </p:txBody>
+      </p:sp>
+      <p:sp>
+        <p:nvSpPr>
+          <p:cNvPr id="11" name="Text 9"/>
+          <p:cNvSpPr txBox="1"/>
+          <p:nvPr/>
+        </p:nvSpPr>
+        <p:spPr>
+          <a:xfrm>
+            <a:off x="1417320" y="2578608"/>
+            <a:ext cx="9875520" cy="731520"/>
+          </a:xfrm>
+          <a:prstGeom prst="rect">
+            <a:avLst/>
+          </a:prstGeom>
+          <a:noFill/>
+          <a:ln/>
+        </p:spPr>
+        <p:txBody>
+          <a:bodyPr wrap="square" lIns="0" tIns="0" rIns="0" bIns="0" rtlCol="0" anchor="ctr"/>
+          <a:lstStyle/>
+          <a:p>
+            <a:pPr indent="0" marL="0">
+              <a:lnSpc>
+                <a:spcPct val="115000"/>
+              </a:lnSpc>
+              <a:buNone/>
+            </a:pPr>
+            <a:r>
+              <a:rPr lang="en-US" sz="1300" dirty="0">
+                <a:solidFill>
+                  <a:srgbClr val="16262E"/>
+                </a:solidFill>
+                <a:latin typeface="Calibri" pitchFamily="34" charset="0"/>
+                <a:ea typeface="Calibri" pitchFamily="34" charset="-122"/>
+                <a:cs typeface="Calibri" pitchFamily="34" charset="-120"/>
+              </a:rPr>
+              <a:t>계획(oCamS)과 실제(D455)가 다르다는 걸 발견 즉시 문서 전체를 바로잡음</a:t>
+            </a:r>
+            <a:endParaRPr lang="en-US" sz="1300" dirty="0"/>
+          </a:p>
+        </p:txBody>
+      </p:sp>
+      <p:sp>
+        <p:nvSpPr>
+          <p:cNvPr id="12" name="Shape 10"/>
+          <p:cNvSpPr/>
+          <p:nvPr/>
+        </p:nvSpPr>
+        <p:spPr>
+          <a:xfrm>
+            <a:off x="640080" y="3419856"/>
+            <a:ext cx="10908792" cy="731520"/>
+          </a:xfrm>
+          <a:prstGeom prst="roundRect">
+            <a:avLst>
+              <a:gd name="adj" fmla="val 12500"/>
+            </a:avLst>
+          </a:prstGeom>
+          <a:solidFill>
+            <a:srgbClr val="FFFFFF"/>
+          </a:solidFill>
+          <a:ln/>
+        </p:spPr>
+      </p:sp>
+      <p:sp>
+        <p:nvSpPr>
+          <p:cNvPr id="13" name="Shape 11"/>
+          <p:cNvSpPr/>
+          <p:nvPr/>
+        </p:nvSpPr>
+        <p:spPr>
+          <a:xfrm>
+            <a:off x="822960" y="3602736"/>
+            <a:ext cx="457200" cy="365760"/>
+          </a:xfrm>
+          <a:prstGeom prst="roundRect">
+            <a:avLst>
+              <a:gd name="adj" fmla="val 20000"/>
+            </a:avLst>
+          </a:prstGeom>
+          <a:solidFill>
+            <a:srgbClr val="E9FBF7"/>
+          </a:solidFill>
+          <a:ln/>
+        </p:spPr>
+      </p:sp>
+      <p:sp>
+        <p:nvSpPr>
+          <p:cNvPr id="14" name="Text 12"/>
+          <p:cNvSpPr txBox="1"/>
+          <p:nvPr/>
+        </p:nvSpPr>
+        <p:spPr>
+          <a:xfrm>
+            <a:off x="822960" y="3602736"/>
+            <a:ext cx="457200" cy="365760"/>
+          </a:xfrm>
+          <a:prstGeom prst="rect">
+            <a:avLst/>
+          </a:prstGeom>
+          <a:noFill/>
+          <a:ln/>
+        </p:spPr>
+        <p:txBody>
+          <a:bodyPr wrap="square" lIns="0" tIns="0" rIns="0" bIns="0" rtlCol="0" anchor="ctr"/>
+          <a:lstStyle/>
+          <a:p>
+            <a:pPr algn="ctr" indent="0" marL="0">
+              <a:buNone/>
+            </a:pPr>
+            <a:r>
+              <a:rPr lang="en-US" sz="1500" b="1" dirty="0">
+                <a:solidFill>
+                  <a:srgbClr val="12655A"/>
+                </a:solidFill>
+                <a:latin typeface="Calibri" pitchFamily="34" charset="0"/>
+                <a:ea typeface="Calibri" pitchFamily="34" charset="-122"/>
+                <a:cs typeface="Calibri" pitchFamily="34" charset="-120"/>
+              </a:rPr>
+              <a:t>✓</a:t>
+            </a:r>
+            <a:endParaRPr lang="en-US" sz="1500" dirty="0"/>
+          </a:p>
+        </p:txBody>
+      </p:sp>
+      <p:sp>
+        <p:nvSpPr>
+          <p:cNvPr id="15" name="Text 13"/>
+          <p:cNvSpPr txBox="1"/>
+          <p:nvPr/>
+        </p:nvSpPr>
+        <p:spPr>
+          <a:xfrm>
+            <a:off x="1417320" y="3419856"/>
+            <a:ext cx="9875520" cy="731520"/>
+          </a:xfrm>
+          <a:prstGeom prst="rect">
+            <a:avLst/>
+          </a:prstGeom>
+          <a:noFill/>
+          <a:ln/>
+        </p:spPr>
+        <p:txBody>
+          <a:bodyPr wrap="square" lIns="0" tIns="0" rIns="0" bIns="0" rtlCol="0" anchor="ctr"/>
+          <a:lstStyle/>
+          <a:p>
+            <a:pPr indent="0" marL="0">
+              <a:lnSpc>
+                <a:spcPct val="115000"/>
+              </a:lnSpc>
+              <a:buNone/>
+            </a:pPr>
+            <a:r>
+              <a:rPr lang="en-US" sz="1300" dirty="0">
+                <a:solidFill>
+                  <a:srgbClr val="16262E"/>
+                </a:solidFill>
+                <a:latin typeface="Calibri" pitchFamily="34" charset="0"/>
+                <a:ea typeface="Calibri" pitchFamily="34" charset="-122"/>
+                <a:cs typeface="Calibri" pitchFamily="34" charset="-120"/>
+              </a:rPr>
+              <a:t>측정 중 depth 근접 사각지대 리스크를 발견해 해결책 없이 넘기지 않고 문서화</a:t>
+            </a:r>
+            <a:endParaRPr lang="en-US" sz="1300" dirty="0"/>
+          </a:p>
+        </p:txBody>
+      </p:sp>
+      <p:sp>
+        <p:nvSpPr>
+          <p:cNvPr id="16" name="Shape 14"/>
+          <p:cNvSpPr/>
+          <p:nvPr/>
+        </p:nvSpPr>
+        <p:spPr>
+          <a:xfrm>
+            <a:off x="640080" y="4261104"/>
+            <a:ext cx="10908792" cy="731520"/>
+          </a:xfrm>
+          <a:prstGeom prst="roundRect">
+            <a:avLst>
+              <a:gd name="adj" fmla="val 12500"/>
+            </a:avLst>
+          </a:prstGeom>
+          <a:solidFill>
+            <a:srgbClr val="FFFFFF"/>
+          </a:solidFill>
+          <a:ln/>
+        </p:spPr>
+      </p:sp>
+      <p:sp>
+        <p:nvSpPr>
+          <p:cNvPr id="17" name="Shape 15"/>
+          <p:cNvSpPr/>
+          <p:nvPr/>
+        </p:nvSpPr>
+        <p:spPr>
+          <a:xfrm>
+            <a:off x="822960" y="4443984"/>
+            <a:ext cx="457200" cy="365760"/>
+          </a:xfrm>
+          <a:prstGeom prst="roundRect">
+            <a:avLst>
+              <a:gd name="adj" fmla="val 20000"/>
+            </a:avLst>
+          </a:prstGeom>
+          <a:solidFill>
+            <a:srgbClr val="E9FBF7"/>
+          </a:solidFill>
+          <a:ln/>
+        </p:spPr>
+      </p:sp>
+      <p:sp>
+        <p:nvSpPr>
+          <p:cNvPr id="18" name="Text 16"/>
+          <p:cNvSpPr txBox="1"/>
+          <p:nvPr/>
+        </p:nvSpPr>
+        <p:spPr>
+          <a:xfrm>
+            <a:off x="822960" y="4443984"/>
+            <a:ext cx="457200" cy="365760"/>
+          </a:xfrm>
+          <a:prstGeom prst="rect">
+            <a:avLst/>
+          </a:prstGeom>
+          <a:noFill/>
+          <a:ln/>
+        </p:spPr>
+        <p:txBody>
+          <a:bodyPr wrap="square" lIns="0" tIns="0" rIns="0" bIns="0" rtlCol="0" anchor="ctr"/>
+          <a:lstStyle/>
+          <a:p>
+            <a:pPr algn="ctr" indent="0" marL="0">
+              <a:buNone/>
+            </a:pPr>
+            <a:r>
+              <a:rPr lang="en-US" sz="1500" b="1" dirty="0">
+                <a:solidFill>
+                  <a:srgbClr val="12655A"/>
+                </a:solidFill>
+                <a:latin typeface="Calibri" pitchFamily="34" charset="0"/>
+                <a:ea typeface="Calibri" pitchFamily="34" charset="-122"/>
+                <a:cs typeface="Calibri" pitchFamily="34" charset="-120"/>
+              </a:rPr>
+              <a:t>✓</a:t>
+            </a:r>
+            <a:endParaRPr lang="en-US" sz="1500" dirty="0"/>
+          </a:p>
+        </p:txBody>
+      </p:sp>
+      <p:sp>
+        <p:nvSpPr>
+          <p:cNvPr id="19" name="Text 17"/>
+          <p:cNvSpPr txBox="1"/>
+          <p:nvPr/>
+        </p:nvSpPr>
+        <p:spPr>
+          <a:xfrm>
+            <a:off x="1417320" y="4261104"/>
+            <a:ext cx="9875520" cy="731520"/>
+          </a:xfrm>
+          <a:prstGeom prst="rect">
+            <a:avLst/>
+          </a:prstGeom>
+          <a:noFill/>
+          <a:ln/>
+        </p:spPr>
+        <p:txBody>
+          <a:bodyPr wrap="square" lIns="0" tIns="0" rIns="0" bIns="0" rtlCol="0" anchor="ctr"/>
+          <a:lstStyle/>
+          <a:p>
+            <a:pPr indent="0" marL="0">
+              <a:lnSpc>
+                <a:spcPct val="115000"/>
+              </a:lnSpc>
+              <a:buNone/>
+            </a:pPr>
+            <a:r>
+              <a:rPr lang="en-US" sz="1300" dirty="0">
+                <a:solidFill>
+                  <a:srgbClr val="16262E"/>
+                </a:solidFill>
+                <a:latin typeface="Calibri" pitchFamily="34" charset="0"/>
+                <a:ea typeface="Calibri" pitchFamily="34" charset="-122"/>
+                <a:cs typeface="Calibri" pitchFamily="34" charset="-120"/>
+              </a:rPr>
+              <a:t>실데이터 없이도 RF/WRF 학습 파이프라인이 정상 동작함을 미리 검증</a:t>
+            </a:r>
+            <a:endParaRPr lang="en-US" sz="1300" dirty="0"/>
+          </a:p>
+        </p:txBody>
+      </p:sp>
+      <p:sp>
+        <p:nvSpPr>
+          <p:cNvPr id="20" name="Shape 18"/>
+          <p:cNvSpPr/>
+          <p:nvPr/>
+        </p:nvSpPr>
+        <p:spPr>
+          <a:xfrm>
+            <a:off x="640080" y="5102352"/>
+            <a:ext cx="10908792" cy="731520"/>
+          </a:xfrm>
+          <a:prstGeom prst="roundRect">
+            <a:avLst>
+              <a:gd name="adj" fmla="val 12500"/>
+            </a:avLst>
+          </a:prstGeom>
+          <a:solidFill>
+            <a:srgbClr val="12655A"/>
+          </a:solidFill>
+          <a:ln/>
+        </p:spPr>
+      </p:sp>
+      <p:sp>
+        <p:nvSpPr>
+          <p:cNvPr id="21" name="Shape 19"/>
+          <p:cNvSpPr/>
+          <p:nvPr/>
+        </p:nvSpPr>
+        <p:spPr>
+          <a:xfrm>
+            <a:off x="822960" y="5285232"/>
+            <a:ext cx="457200" cy="365760"/>
+          </a:xfrm>
+          <a:prstGeom prst="roundRect">
+            <a:avLst>
+              <a:gd name="adj" fmla="val 20000"/>
+            </a:avLst>
+          </a:prstGeom>
+          <a:solidFill>
+            <a:srgbClr val="0E5348"/>
+          </a:solidFill>
+          <a:ln/>
+        </p:spPr>
+      </p:sp>
+      <p:sp>
+        <p:nvSpPr>
+          <p:cNvPr id="22" name="Text 20"/>
+          <p:cNvSpPr txBox="1"/>
+          <p:nvPr/>
+        </p:nvSpPr>
+        <p:spPr>
+          <a:xfrm>
+            <a:off x="822960" y="5285232"/>
+            <a:ext cx="457200" cy="365760"/>
+          </a:xfrm>
+          <a:prstGeom prst="rect">
+            <a:avLst/>
+          </a:prstGeom>
+          <a:noFill/>
+          <a:ln/>
+        </p:spPr>
+        <p:txBody>
+          <a:bodyPr wrap="square" lIns="0" tIns="0" rIns="0" bIns="0" rtlCol="0" anchor="ctr"/>
+          <a:lstStyle/>
+          <a:p>
+            <a:pPr algn="ctr" indent="0" marL="0">
+              <a:buNone/>
+            </a:pPr>
+            <a:r>
+              <a:rPr lang="en-US" sz="900" b="1" dirty="0">
+                <a:solidFill>
+                  <a:srgbClr val="2FE0C4"/>
+                </a:solidFill>
+                <a:latin typeface="Calibri" pitchFamily="34" charset="0"/>
+                <a:ea typeface="Calibri" pitchFamily="34" charset="-122"/>
+                <a:cs typeface="Calibri" pitchFamily="34" charset="-120"/>
+              </a:rPr>
+              <a:t>남음</a:t>
+            </a:r>
+            <a:endParaRPr lang="en-US" sz="900" dirty="0"/>
+          </a:p>
+        </p:txBody>
+      </p:sp>
+      <p:sp>
+        <p:nvSpPr>
+          <p:cNvPr id="23" name="Text 21"/>
+          <p:cNvSpPr txBox="1"/>
+          <p:nvPr/>
+        </p:nvSpPr>
+        <p:spPr>
+          <a:xfrm>
+            <a:off x="1417320" y="5102352"/>
+            <a:ext cx="9875520" cy="731520"/>
+          </a:xfrm>
+          <a:prstGeom prst="rect">
+            <a:avLst/>
+          </a:prstGeom>
+          <a:noFill/>
+          <a:ln/>
+        </p:spPr>
+        <p:txBody>
+          <a:bodyPr wrap="square" lIns="0" tIns="0" rIns="0" bIns="0" rtlCol="0" anchor="ctr"/>
+          <a:lstStyle/>
+          <a:p>
+            <a:pPr indent="0" marL="0">
+              <a:lnSpc>
+                <a:spcPct val="115000"/>
+              </a:lnSpc>
+              <a:buNone/>
+            </a:pPr>
+            <a:r>
+              <a:rPr lang="en-US" sz="1300" dirty="0">
+                <a:solidFill>
+                  <a:srgbClr val="EAF3F1"/>
+                </a:solidFill>
+                <a:latin typeface="Calibri" pitchFamily="34" charset="0"/>
+                <a:ea typeface="Calibri" pitchFamily="34" charset="-122"/>
+                <a:cs typeface="Calibri" pitchFamily="34" charset="-120"/>
+              </a:rPr>
+              <a:t>거리 정밀 오차 측정, 근접 사각지대 실제 구현, 논문 Introduction/Related Work 초안</a:t>
+            </a:r>
+            <a:endParaRPr lang="en-US" sz="1300" dirty="0"/>
+          </a:p>
+        </p:txBody>
+      </p:sp>
+      <p:sp>
+        <p:nvSpPr>
+          <p:cNvPr id="24" name="Text 22"/>
+          <p:cNvSpPr txBox="1"/>
+          <p:nvPr/>
+        </p:nvSpPr>
+        <p:spPr>
+          <a:xfrm>
+            <a:off x="11365992" y="6355080"/>
+            <a:ext cx="548640" cy="320040"/>
+          </a:xfrm>
+          <a:prstGeom prst="rect">
+            <a:avLst/>
+          </a:prstGeom>
+          <a:noFill/>
+          <a:ln/>
+        </p:spPr>
+        <p:txBody>
+          <a:bodyPr wrap="square" lIns="0" tIns="0" rIns="0" bIns="0" rtlCol="0" anchor="ctr"/>
+          <a:lstStyle/>
+          <a:p>
+            <a:pPr algn="r" indent="0" marL="0">
+              <a:buNone/>
+            </a:pPr>
+            <a:r>
+              <a:rPr lang="en-US" sz="1100" dirty="0">
+                <a:solidFill>
+                  <a:srgbClr val="9FB6BC"/>
+                </a:solidFill>
+                <a:latin typeface="Calibri" pitchFamily="34" charset="0"/>
+                <a:ea typeface="Calibri" pitchFamily="34" charset="-122"/>
+                <a:cs typeface="Calibri" pitchFamily="34" charset="-120"/>
+              </a:rPr>
               <a:t>07</a:t>
             </a:r>
             <a:endParaRPr lang="en-US" sz="1100" dirty="0"/>
@@ -7624,7 +7535,7 @@
                 <a:ea typeface="Calibri" pitchFamily="34" charset="-122"/>
                 <a:cs typeface="Calibri" pitchFamily="34" charset="-120"/>
               </a:rPr>
-              <a:t>CONCLUSION</a:t>
+              <a:t>NEXT WEEK</a:t>
             </a:r>
             <a:endParaRPr lang="en-US" sz="1200" dirty="0"/>
           </a:p>
@@ -7663,7 +7574,7 @@
                 <a:ea typeface="Arial" pitchFamily="34" charset="-122"/>
                 <a:cs typeface="Arial" pitchFamily="34" charset="-120"/>
               </a:rPr>
-              <a:t>마무리</a:t>
+              <a:t>다음 주(5주차) 계획</a:t>
             </a:r>
             <a:endParaRPr lang="en-US" sz="2700" dirty="0"/>
           </a:p>
@@ -7738,7 +7649,7 @@
               <a:buNone/>
             </a:pPr>
             <a:r>
-              <a:rPr lang="en-US" sz="1500" b="1" dirty="0">
+              <a:rPr lang="en-US" sz="1300" b="1" dirty="0">
                 <a:solidFill>
                   <a:srgbClr val="12655A"/>
                 </a:solidFill>
@@ -7746,9 +7657,9 @@
                 <a:ea typeface="Calibri" pitchFamily="34" charset="-122"/>
                 <a:cs typeface="Calibri" pitchFamily="34" charset="-120"/>
               </a:rPr>
-              <a:t>✓</a:t>
-            </a:r>
-            <a:endParaRPr lang="en-US" sz="1500" dirty="0"/>
+              <a:t>1</a:t>
+            </a:r>
+            <a:endParaRPr lang="en-US" sz="1300" dirty="0"/>
           </a:p>
         </p:txBody>
       </p:sp>
@@ -7780,7 +7691,7 @@
               <a:buNone/>
             </a:pPr>
             <a:r>
-              <a:rPr lang="en-US" sz="1300" dirty="0">
+              <a:rPr lang="en-US" sz="1350" dirty="0">
                 <a:solidFill>
                   <a:srgbClr val="16262E"/>
                 </a:solidFill>
@@ -7788,9 +7699,9 @@
                 <a:ea typeface="Calibri" pitchFamily="34" charset="-122"/>
                 <a:cs typeface="Calibri" pitchFamily="34" charset="-120"/>
               </a:rPr>
-              <a:t>4주차 게이트 통과 — 평균 29.43fps, 스파이크 0회, 목표치(최소 5fps) 대폭 상회</a:t>
-            </a:r>
-            <a:endParaRPr lang="en-US" sz="1300" dirty="0"/>
+              <a:t>RealSense depth 프리셋·필터 튜닝, 줄자 확보해 거리 정확도 정밀 재검증</a:t>
+            </a:r>
+            <a:endParaRPr lang="en-US" sz="1350" dirty="0"/>
           </a:p>
         </p:txBody>
       </p:sp>
@@ -7863,7 +7774,7 @@
               <a:buNone/>
             </a:pPr>
             <a:r>
-              <a:rPr lang="en-US" sz="1500" b="1" dirty="0">
+              <a:rPr lang="en-US" sz="1300" b="1" dirty="0">
                 <a:solidFill>
                   <a:srgbClr val="12655A"/>
                 </a:solidFill>
@@ -7871,9 +7782,9 @@
                 <a:ea typeface="Calibri" pitchFamily="34" charset="-122"/>
                 <a:cs typeface="Calibri" pitchFamily="34" charset="-120"/>
               </a:rPr>
-              <a:t>✓</a:t>
-            </a:r>
-            <a:endParaRPr lang="en-US" sz="1500" dirty="0"/>
+              <a:t>2</a:t>
+            </a:r>
+            <a:endParaRPr lang="en-US" sz="1300" dirty="0"/>
           </a:p>
         </p:txBody>
       </p:sp>
@@ -7905,7 +7816,7 @@
               <a:buNone/>
             </a:pPr>
             <a:r>
-              <a:rPr lang="en-US" sz="1300" dirty="0">
+              <a:rPr lang="en-US" sz="1350" dirty="0">
                 <a:solidFill>
                   <a:srgbClr val="16262E"/>
                 </a:solidFill>
@@ -7913,9 +7824,9 @@
                 <a:ea typeface="Calibri" pitchFamily="34" charset="-122"/>
                 <a:cs typeface="Calibri" pitchFamily="34" charset="-120"/>
               </a:rPr>
-              <a:t>계획(oCamS)과 실제(D455)가 다르다는 걸 발견 즉시 문서 전체를 바로잡음</a:t>
-            </a:r>
-            <a:endParaRPr lang="en-US" sz="1300" dirty="0"/>
+              <a:t>근접 사각지대 보완 — 얼굴·어깨 면적비 기반 근접 판정 실제 구현</a:t>
+            </a:r>
+            <a:endParaRPr lang="en-US" sz="1350" dirty="0"/>
           </a:p>
         </p:txBody>
       </p:sp>
@@ -7988,7 +7899,7 @@
               <a:buNone/>
             </a:pPr>
             <a:r>
-              <a:rPr lang="en-US" sz="1500" b="1" dirty="0">
+              <a:rPr lang="en-US" sz="1300" b="1" dirty="0">
                 <a:solidFill>
                   <a:srgbClr val="12655A"/>
                 </a:solidFill>
@@ -7996,9 +7907,9 @@
                 <a:ea typeface="Calibri" pitchFamily="34" charset="-122"/>
                 <a:cs typeface="Calibri" pitchFamily="34" charset="-120"/>
               </a:rPr>
-              <a:t>✓</a:t>
-            </a:r>
-            <a:endParaRPr lang="en-US" sz="1500" dirty="0"/>
+              <a:t>3</a:t>
+            </a:r>
+            <a:endParaRPr lang="en-US" sz="1300" dirty="0"/>
           </a:p>
         </p:txBody>
       </p:sp>
@@ -8030,7 +7941,7 @@
               <a:buNone/>
             </a:pPr>
             <a:r>
-              <a:rPr lang="en-US" sz="1300" dirty="0">
+              <a:rPr lang="en-US" sz="1350" dirty="0">
                 <a:solidFill>
                   <a:srgbClr val="16262E"/>
                 </a:solidFill>
@@ -8038,9 +7949,9 @@
                 <a:ea typeface="Calibri" pitchFamily="34" charset="-122"/>
                 <a:cs typeface="Calibri" pitchFamily="34" charset="-120"/>
               </a:rPr>
-              <a:t>측정 중 depth 근접 사각지대 리스크를 발견해 해결책 없이 넘기지 않고 문서화</a:t>
-            </a:r>
-            <a:endParaRPr lang="en-US" sz="1300" dirty="0"/>
+              <a:t>판정 로직과 스테레오+포즈 파이프라인 1차 통합</a:t>
+            </a:r>
+            <a:endParaRPr lang="en-US" sz="1350" dirty="0"/>
           </a:p>
         </p:txBody>
       </p:sp>
@@ -8113,7 +8024,7 @@
               <a:buNone/>
             </a:pPr>
             <a:r>
-              <a:rPr lang="en-US" sz="1500" b="1" dirty="0">
+              <a:rPr lang="en-US" sz="1300" b="1" dirty="0">
                 <a:solidFill>
                   <a:srgbClr val="12655A"/>
                 </a:solidFill>
@@ -8121,9 +8032,9 @@
                 <a:ea typeface="Calibri" pitchFamily="34" charset="-122"/>
                 <a:cs typeface="Calibri" pitchFamily="34" charset="-120"/>
               </a:rPr>
-              <a:t>✓</a:t>
-            </a:r>
-            <a:endParaRPr lang="en-US" sz="1500" dirty="0"/>
+              <a:t>4</a:t>
+            </a:r>
+            <a:endParaRPr lang="en-US" sz="1300" dirty="0"/>
           </a:p>
         </p:txBody>
       </p:sp>
@@ -8155,7 +8066,7 @@
               <a:buNone/>
             </a:pPr>
             <a:r>
-              <a:rPr lang="en-US" sz="1300" dirty="0">
+              <a:rPr lang="en-US" sz="1350" dirty="0">
                 <a:solidFill>
                   <a:srgbClr val="16262E"/>
                 </a:solidFill>
@@ -8163,9 +8074,9 @@
                 <a:ea typeface="Calibri" pitchFamily="34" charset="-122"/>
                 <a:cs typeface="Calibri" pitchFamily="34" charset="-120"/>
               </a:rPr>
-              <a:t>실데이터 없이도 RF/WRF 학습 파이프라인이 정상 동작함을 미리 검증</a:t>
-            </a:r>
-            <a:endParaRPr lang="en-US" sz="1300" dirty="0"/>
+              <a:t>데이터 수집 프로토콜에 따라 실제 촬영 착수</a:t>
+            </a:r>
+            <a:endParaRPr lang="en-US" sz="1350" dirty="0"/>
           </a:p>
         </p:txBody>
       </p:sp>
@@ -8186,7 +8097,7 @@
             </a:avLst>
           </a:prstGeom>
           <a:solidFill>
-            <a:srgbClr val="12655A"/>
+            <a:srgbClr val="FFFFFF"/>
           </a:solidFill>
           <a:ln/>
         </p:spPr>
@@ -8208,7 +8119,7 @@
             </a:avLst>
           </a:prstGeom>
           <a:solidFill>
-            <a:srgbClr val="0E5348"/>
+            <a:srgbClr val="E9FBF7"/>
           </a:solidFill>
           <a:ln/>
         </p:spPr>
@@ -8238,17 +8149,17 @@
               <a:buNone/>
             </a:pPr>
             <a:r>
-              <a:rPr lang="en-US" sz="900" b="1" dirty="0">
-                <a:solidFill>
-                  <a:srgbClr val="2FE0C4"/>
+              <a:rPr lang="en-US" sz="1300" b="1" dirty="0">
+                <a:solidFill>
+                  <a:srgbClr val="12655A"/>
                 </a:solidFill>
                 <a:latin typeface="Calibri" pitchFamily="34" charset="0"/>
                 <a:ea typeface="Calibri" pitchFamily="34" charset="-122"/>
                 <a:cs typeface="Calibri" pitchFamily="34" charset="-120"/>
               </a:rPr>
-              <a:t>남음</a:t>
-            </a:r>
-            <a:endParaRPr lang="en-US" sz="900" dirty="0"/>
+              <a:t>5</a:t>
+            </a:r>
+            <a:endParaRPr lang="en-US" sz="1300" dirty="0"/>
           </a:p>
         </p:txBody>
       </p:sp>
@@ -8280,17 +8191,17 @@
               <a:buNone/>
             </a:pPr>
             <a:r>
-              <a:rPr lang="en-US" sz="1300" dirty="0">
-                <a:solidFill>
-                  <a:srgbClr val="EAF3F1"/>
+              <a:rPr lang="en-US" sz="1350" dirty="0">
+                <a:solidFill>
+                  <a:srgbClr val="16262E"/>
                 </a:solidFill>
                 <a:latin typeface="Calibri" pitchFamily="34" charset="0"/>
                 <a:ea typeface="Calibri" pitchFamily="34" charset="-122"/>
                 <a:cs typeface="Calibri" pitchFamily="34" charset="-120"/>
               </a:rPr>
-              <a:t>거리 정밀 오차 측정, 근접 사각지대 실제 구현, 논문 Introduction/Related Work 초안</a:t>
-            </a:r>
-            <a:endParaRPr lang="en-US" sz="1300" dirty="0"/>
+              <a:t>논문 Introduction · Related Work 초안 (이번 주 이월분)</a:t>
+            </a:r>
+            <a:endParaRPr lang="en-US" sz="1350" dirty="0"/>
           </a:p>
         </p:txBody>
       </p:sp>
@@ -8302,8 +8213,8 @@
         </p:nvSpPr>
         <p:spPr>
           <a:xfrm>
-            <a:off x="11365992" y="6355080"/>
-            <a:ext cx="548640" cy="320040"/>
+            <a:off x="640080" y="6080760"/>
+            <a:ext cx="10908792" cy="411480"/>
           </a:xfrm>
           <a:prstGeom prst="rect">
             <a:avLst/>
@@ -8315,11 +8226,11 @@
           <a:bodyPr wrap="square" lIns="0" tIns="0" rIns="0" bIns="0" rtlCol="0" anchor="ctr"/>
           <a:lstStyle/>
           <a:p>
-            <a:pPr algn="r" indent="0" marL="0">
-              <a:buNone/>
-            </a:pPr>
-            <a:r>
-              <a:rPr lang="en-US" sz="1100" dirty="0">
+            <a:pPr algn="ctr" indent="0" marL="0">
+              <a:buNone/>
+            </a:pPr>
+            <a:r>
+              <a:rPr lang="en-US" sz="1350" i="1" dirty="0">
                 <a:solidFill>
                   <a:srgbClr val="9FB6BC"/>
                 </a:solidFill>
@@ -8327,61 +8238,22 @@
                 <a:ea typeface="Calibri" pitchFamily="34" charset="-122"/>
                 <a:cs typeface="Calibri" pitchFamily="34" charset="-120"/>
               </a:rPr>
-              <a:t>08</a:t>
-            </a:r>
-            <a:endParaRPr lang="en-US" sz="1100" dirty="0"/>
-          </a:p>
-        </p:txBody>
-      </p:sp>
-    </p:spTree>
-  </p:cSld>
-  <p:clrMapOvr>
-    <a:masterClrMapping/>
-  </p:clrMapOvr>
-</p:sld>
-</file>
-
-<file path=ppt/slides/slide9.xml><?xml version="1.0" encoding="utf-8"?>
-<p:sld xmlns:a="http://schemas.openxmlformats.org/drawingml/2006/main" xmlns:r="http://schemas.openxmlformats.org/officeDocument/2006/relationships" xmlns:p="http://schemas.openxmlformats.org/presentationml/2006/main">
-  <p:cSld name="Slide 9">
-    <p:bg>
-      <p:bgPr>
-        <a:blipFill dpi="0" rotWithShape="1">
-          <a:blip r:embed="rId1">
-            <a:lum/>
-          </a:blip>
-          <a:srcRect/>
-          <a:stretch>
-            <a:fillRect/>
-          </a:stretch>
-        </a:blipFill>
-        <a:effectLst/>
-      </p:bgPr>
-    </p:bg>
-    <p:spTree>
-      <p:nvGrpSpPr>
-        <p:cNvPr id="1" name=""/>
-        <p:cNvGrpSpPr/>
-        <p:nvPr/>
-      </p:nvGrpSpPr>
-      <p:grpSpPr>
-        <a:xfrm>
-          <a:off x="0" y="0"/>
-          <a:ext cx="0" cy="0"/>
-          <a:chOff x="0" y="0"/>
-          <a:chExt cx="0" cy="0"/>
-        </a:xfrm>
-      </p:grpSpPr>
-      <p:sp>
-        <p:nvSpPr>
-          <p:cNvPr id="2" name="Text 0"/>
+              <a:t>질문 받겠습니다</a:t>
+            </a:r>
+            <a:endParaRPr lang="en-US" sz="1350" dirty="0"/>
+          </a:p>
+        </p:txBody>
+      </p:sp>
+      <p:sp>
+        <p:nvSpPr>
+          <p:cNvPr id="25" name="Text 23"/>
           <p:cNvSpPr txBox="1"/>
           <p:nvPr/>
         </p:nvSpPr>
         <p:spPr>
           <a:xfrm>
-            <a:off x="640080" y="384048"/>
-            <a:ext cx="8229600" cy="320040"/>
+            <a:off x="11365992" y="6355080"/>
+            <a:ext cx="548640" cy="320040"/>
           </a:xfrm>
           <a:prstGeom prst="rect">
             <a:avLst/>
@@ -8393,868 +8265,19 @@
           <a:bodyPr wrap="square" lIns="0" tIns="0" rIns="0" bIns="0" rtlCol="0" anchor="ctr"/>
           <a:lstStyle/>
           <a:p>
-            <a:pPr indent="0" marL="0">
-              <a:buNone/>
-            </a:pPr>
-            <a:r>
-              <a:rPr lang="en-US" sz="1200" b="1" spc="200" kern="0" dirty="0">
-                <a:solidFill>
-                  <a:srgbClr val="2FE0C4"/>
+            <a:pPr algn="r" indent="0" marL="0">
+              <a:buNone/>
+            </a:pPr>
+            <a:r>
+              <a:rPr lang="en-US" sz="1100" dirty="0">
+                <a:solidFill>
+                  <a:srgbClr val="9FB6BC"/>
                 </a:solidFill>
                 <a:latin typeface="Calibri" pitchFamily="34" charset="0"/>
                 <a:ea typeface="Calibri" pitchFamily="34" charset="-122"/>
                 <a:cs typeface="Calibri" pitchFamily="34" charset="-120"/>
               </a:rPr>
-              <a:t>SOURCES</a:t>
-            </a:r>
-            <a:endParaRPr lang="en-US" sz="1200" dirty="0"/>
-          </a:p>
-        </p:txBody>
-      </p:sp>
-      <p:sp>
-        <p:nvSpPr>
-          <p:cNvPr id="3" name="Text 1"/>
-          <p:cNvSpPr txBox="1"/>
-          <p:nvPr/>
-        </p:nvSpPr>
-        <p:spPr>
-          <a:xfrm>
-            <a:off x="640080" y="685800"/>
-            <a:ext cx="10881360" cy="822960"/>
-          </a:xfrm>
-          <a:prstGeom prst="rect">
-            <a:avLst/>
-          </a:prstGeom>
-          <a:noFill/>
-          <a:ln/>
-        </p:spPr>
-        <p:txBody>
-          <a:bodyPr wrap="square" lIns="0" tIns="0" rIns="0" bIns="0" rtlCol="0" anchor="ctr"/>
-          <a:lstStyle/>
-          <a:p>
-            <a:pPr indent="0" marL="0">
-              <a:buNone/>
-            </a:pPr>
-            <a:r>
-              <a:rPr lang="en-US" sz="2700" b="1" dirty="0">
-                <a:solidFill>
-                  <a:srgbClr val="EAF3F1"/>
-                </a:solidFill>
-                <a:latin typeface="Arial" pitchFamily="34" charset="0"/>
-                <a:ea typeface="Arial" pitchFamily="34" charset="-122"/>
-                <a:cs typeface="Arial" pitchFamily="34" charset="-120"/>
-              </a:rPr>
-              <a:t>참고 자료</a:t>
-            </a:r>
-            <a:endParaRPr lang="en-US" sz="2700" dirty="0"/>
-          </a:p>
-        </p:txBody>
-      </p:sp>
-      <p:sp>
-        <p:nvSpPr>
-          <p:cNvPr id="4" name="Shape 2"/>
-          <p:cNvSpPr/>
-          <p:nvPr/>
-        </p:nvSpPr>
-        <p:spPr>
-          <a:xfrm>
-            <a:off x="640080" y="1600200"/>
-            <a:ext cx="10908792" cy="594360"/>
-          </a:xfrm>
-          <a:prstGeom prst="roundRect">
-            <a:avLst>
-              <a:gd name="adj" fmla="val 12308"/>
-            </a:avLst>
-          </a:prstGeom>
-          <a:solidFill>
-            <a:srgbClr val="FFFFFF"/>
-          </a:solidFill>
-          <a:ln/>
-        </p:spPr>
-      </p:sp>
-      <p:sp>
-        <p:nvSpPr>
-          <p:cNvPr id="5" name="Shape 3"/>
-          <p:cNvSpPr/>
-          <p:nvPr/>
-        </p:nvSpPr>
-        <p:spPr>
-          <a:xfrm>
-            <a:off x="777240" y="1719072"/>
-            <a:ext cx="384048" cy="365760"/>
-          </a:xfrm>
-          <a:prstGeom prst="roundRect">
-            <a:avLst>
-              <a:gd name="adj" fmla="val 17500"/>
-            </a:avLst>
-          </a:prstGeom>
-          <a:solidFill>
-            <a:srgbClr val="E9FBF7"/>
-          </a:solidFill>
-          <a:ln/>
-        </p:spPr>
-      </p:sp>
-      <p:sp>
-        <p:nvSpPr>
-          <p:cNvPr id="6" name="Text 4"/>
-          <p:cNvSpPr txBox="1"/>
-          <p:nvPr/>
-        </p:nvSpPr>
-        <p:spPr>
-          <a:xfrm>
-            <a:off x="777240" y="1719072"/>
-            <a:ext cx="384048" cy="365760"/>
-          </a:xfrm>
-          <a:prstGeom prst="rect">
-            <a:avLst/>
-          </a:prstGeom>
-          <a:noFill/>
-          <a:ln/>
-        </p:spPr>
-        <p:txBody>
-          <a:bodyPr wrap="square" lIns="0" tIns="0" rIns="0" bIns="0" rtlCol="0" anchor="ctr"/>
-          <a:lstStyle/>
-          <a:p>
-            <a:pPr algn="ctr" indent="0" marL="0">
-              <a:buNone/>
-            </a:pPr>
-            <a:r>
-              <a:rPr lang="en-US" sz="1150" b="1" dirty="0">
-                <a:solidFill>
-                  <a:srgbClr val="12655A"/>
-                </a:solidFill>
-                <a:latin typeface="Calibri" pitchFamily="34" charset="0"/>
-                <a:ea typeface="Calibri" pitchFamily="34" charset="-122"/>
-                <a:cs typeface="Calibri" pitchFamily="34" charset="-120"/>
-              </a:rPr>
-              <a:t>01</a:t>
-            </a:r>
-            <a:endParaRPr lang="en-US" sz="1150" dirty="0"/>
-          </a:p>
-        </p:txBody>
-      </p:sp>
-      <p:sp>
-        <p:nvSpPr>
-          <p:cNvPr id="7" name="Text 5"/>
-          <p:cNvSpPr txBox="1"/>
-          <p:nvPr/>
-        </p:nvSpPr>
-        <p:spPr>
-          <a:xfrm>
-            <a:off x="1325880" y="1600200"/>
-            <a:ext cx="9966960" cy="594360"/>
-          </a:xfrm>
-          <a:prstGeom prst="rect">
-            <a:avLst/>
-          </a:prstGeom>
-          <a:noFill/>
-          <a:ln/>
-        </p:spPr>
-        <p:txBody>
-          <a:bodyPr wrap="square" lIns="0" tIns="0" rIns="0" bIns="0" rtlCol="0" anchor="ctr"/>
-          <a:lstStyle/>
-          <a:p>
-            <a:pPr indent="0" marL="0">
-              <a:buNone/>
-            </a:pPr>
-            <a:r>
-              <a:rPr lang="en-US" sz="1200" dirty="0">
-                <a:solidFill>
-                  <a:srgbClr val="16262E"/>
-                </a:solidFill>
-                <a:latin typeface="Calibri" pitchFamily="34" charset="0"/>
-                <a:ea typeface="Calibri" pitchFamily="34" charset="-122"/>
-                <a:cs typeface="Calibri" pitchFamily="34" charset="-120"/>
-              </a:rPr>
-              <a:t>project.md — 전체 프로젝트 계획 (이번 주 업데이트 반영 최신본)</a:t>
-            </a:r>
-            <a:endParaRPr lang="en-US" sz="1200" dirty="0"/>
-          </a:p>
-        </p:txBody>
-      </p:sp>
-      <p:sp>
-        <p:nvSpPr>
-          <p:cNvPr id="8" name="Shape 6"/>
-          <p:cNvSpPr/>
-          <p:nvPr/>
-        </p:nvSpPr>
-        <p:spPr>
-          <a:xfrm>
-            <a:off x="640080" y="2313432"/>
-            <a:ext cx="10908792" cy="594360"/>
-          </a:xfrm>
-          <a:prstGeom prst="roundRect">
-            <a:avLst>
-              <a:gd name="adj" fmla="val 12308"/>
-            </a:avLst>
-          </a:prstGeom>
-          <a:solidFill>
-            <a:srgbClr val="FFFFFF"/>
-          </a:solidFill>
-          <a:ln/>
-        </p:spPr>
-      </p:sp>
-      <p:sp>
-        <p:nvSpPr>
-          <p:cNvPr id="9" name="Shape 7"/>
-          <p:cNvSpPr/>
-          <p:nvPr/>
-        </p:nvSpPr>
-        <p:spPr>
-          <a:xfrm>
-            <a:off x="777240" y="2432304"/>
-            <a:ext cx="384048" cy="365760"/>
-          </a:xfrm>
-          <a:prstGeom prst="roundRect">
-            <a:avLst>
-              <a:gd name="adj" fmla="val 17500"/>
-            </a:avLst>
-          </a:prstGeom>
-          <a:solidFill>
-            <a:srgbClr val="E9FBF7"/>
-          </a:solidFill>
-          <a:ln/>
-        </p:spPr>
-      </p:sp>
-      <p:sp>
-        <p:nvSpPr>
-          <p:cNvPr id="10" name="Text 8"/>
-          <p:cNvSpPr txBox="1"/>
-          <p:nvPr/>
-        </p:nvSpPr>
-        <p:spPr>
-          <a:xfrm>
-            <a:off x="777240" y="2432304"/>
-            <a:ext cx="384048" cy="365760"/>
-          </a:xfrm>
-          <a:prstGeom prst="rect">
-            <a:avLst/>
-          </a:prstGeom>
-          <a:noFill/>
-          <a:ln/>
-        </p:spPr>
-        <p:txBody>
-          <a:bodyPr wrap="square" lIns="0" tIns="0" rIns="0" bIns="0" rtlCol="0" anchor="ctr"/>
-          <a:lstStyle/>
-          <a:p>
-            <a:pPr algn="ctr" indent="0" marL="0">
-              <a:buNone/>
-            </a:pPr>
-            <a:r>
-              <a:rPr lang="en-US" sz="1150" b="1" dirty="0">
-                <a:solidFill>
-                  <a:srgbClr val="12655A"/>
-                </a:solidFill>
-                <a:latin typeface="Calibri" pitchFamily="34" charset="0"/>
-                <a:ea typeface="Calibri" pitchFamily="34" charset="-122"/>
-                <a:cs typeface="Calibri" pitchFamily="34" charset="-120"/>
-              </a:rPr>
-              <a:t>02</a:t>
-            </a:r>
-            <a:endParaRPr lang="en-US" sz="1150" dirty="0"/>
-          </a:p>
-        </p:txBody>
-      </p:sp>
-      <p:sp>
-        <p:nvSpPr>
-          <p:cNvPr id="11" name="Text 9"/>
-          <p:cNvSpPr txBox="1"/>
-          <p:nvPr/>
-        </p:nvSpPr>
-        <p:spPr>
-          <a:xfrm>
-            <a:off x="1325880" y="2313432"/>
-            <a:ext cx="9966960" cy="594360"/>
-          </a:xfrm>
-          <a:prstGeom prst="rect">
-            <a:avLst/>
-          </a:prstGeom>
-          <a:noFill/>
-          <a:ln/>
-        </p:spPr>
-        <p:txBody>
-          <a:bodyPr wrap="square" lIns="0" tIns="0" rIns="0" bIns="0" rtlCol="0" anchor="ctr"/>
-          <a:lstStyle/>
-          <a:p>
-            <a:pPr indent="0" marL="0">
-              <a:buNone/>
-            </a:pPr>
-            <a:r>
-              <a:rPr lang="en-US" sz="1200" dirty="0">
-                <a:solidFill>
-                  <a:srgbClr val="16262E"/>
-                </a:solidFill>
-                <a:latin typeface="Calibri" pitchFamily="34" charset="0"/>
-                <a:ea typeface="Calibri" pitchFamily="34" charset="-122"/>
-                <a:cs typeface="Calibri" pitchFamily="34" charset="-120"/>
-              </a:rPr>
-              <a:t>data_collection_protocol.md — 자세 5종 정의·촬영/라벨링 절차</a:t>
-            </a:r>
-            <a:endParaRPr lang="en-US" sz="1200" dirty="0"/>
-          </a:p>
-        </p:txBody>
-      </p:sp>
-      <p:sp>
-        <p:nvSpPr>
-          <p:cNvPr id="12" name="Shape 10"/>
-          <p:cNvSpPr/>
-          <p:nvPr/>
-        </p:nvSpPr>
-        <p:spPr>
-          <a:xfrm>
-            <a:off x="640080" y="3026664"/>
-            <a:ext cx="10908792" cy="594360"/>
-          </a:xfrm>
-          <a:prstGeom prst="roundRect">
-            <a:avLst>
-              <a:gd name="adj" fmla="val 12308"/>
-            </a:avLst>
-          </a:prstGeom>
-          <a:solidFill>
-            <a:srgbClr val="FFFFFF"/>
-          </a:solidFill>
-          <a:ln/>
-        </p:spPr>
-      </p:sp>
-      <p:sp>
-        <p:nvSpPr>
-          <p:cNvPr id="13" name="Shape 11"/>
-          <p:cNvSpPr/>
-          <p:nvPr/>
-        </p:nvSpPr>
-        <p:spPr>
-          <a:xfrm>
-            <a:off x="777240" y="3145536"/>
-            <a:ext cx="384048" cy="365760"/>
-          </a:xfrm>
-          <a:prstGeom prst="roundRect">
-            <a:avLst>
-              <a:gd name="adj" fmla="val 17500"/>
-            </a:avLst>
-          </a:prstGeom>
-          <a:solidFill>
-            <a:srgbClr val="E9FBF7"/>
-          </a:solidFill>
-          <a:ln/>
-        </p:spPr>
-      </p:sp>
-      <p:sp>
-        <p:nvSpPr>
-          <p:cNvPr id="14" name="Text 12"/>
-          <p:cNvSpPr txBox="1"/>
-          <p:nvPr/>
-        </p:nvSpPr>
-        <p:spPr>
-          <a:xfrm>
-            <a:off x="777240" y="3145536"/>
-            <a:ext cx="384048" cy="365760"/>
-          </a:xfrm>
-          <a:prstGeom prst="rect">
-            <a:avLst/>
-          </a:prstGeom>
-          <a:noFill/>
-          <a:ln/>
-        </p:spPr>
-        <p:txBody>
-          <a:bodyPr wrap="square" lIns="0" tIns="0" rIns="0" bIns="0" rtlCol="0" anchor="ctr"/>
-          <a:lstStyle/>
-          <a:p>
-            <a:pPr algn="ctr" indent="0" marL="0">
-              <a:buNone/>
-            </a:pPr>
-            <a:r>
-              <a:rPr lang="en-US" sz="1150" b="1" dirty="0">
-                <a:solidFill>
-                  <a:srgbClr val="12655A"/>
-                </a:solidFill>
-                <a:latin typeface="Calibri" pitchFamily="34" charset="0"/>
-                <a:ea typeface="Calibri" pitchFamily="34" charset="-122"/>
-                <a:cs typeface="Calibri" pitchFamily="34" charset="-120"/>
-              </a:rPr>
-              <a:t>03</a:t>
-            </a:r>
-            <a:endParaRPr lang="en-US" sz="1150" dirty="0"/>
-          </a:p>
-        </p:txBody>
-      </p:sp>
-      <p:sp>
-        <p:nvSpPr>
-          <p:cNvPr id="15" name="Text 13"/>
-          <p:cNvSpPr txBox="1"/>
-          <p:nvPr/>
-        </p:nvSpPr>
-        <p:spPr>
-          <a:xfrm>
-            <a:off x="1325880" y="3026664"/>
-            <a:ext cx="9966960" cy="594360"/>
-          </a:xfrm>
-          <a:prstGeom prst="rect">
-            <a:avLst/>
-          </a:prstGeom>
-          <a:noFill/>
-          <a:ln/>
-        </p:spPr>
-        <p:txBody>
-          <a:bodyPr wrap="square" lIns="0" tIns="0" rIns="0" bIns="0" rtlCol="0" anchor="ctr"/>
-          <a:lstStyle/>
-          <a:p>
-            <a:pPr indent="0" marL="0">
-              <a:buNone/>
-            </a:pPr>
-            <a:r>
-              <a:rPr lang="en-US" sz="1200" dirty="0">
-                <a:solidFill>
-                  <a:srgbClr val="16262E"/>
-                </a:solidFill>
-                <a:latin typeface="Calibri" pitchFamily="34" charset="0"/>
-                <a:ea typeface="Calibri" pitchFamily="34" charset="-122"/>
-                <a:cs typeface="Calibri" pitchFamily="34" charset="-120"/>
-              </a:rPr>
-              <a:t>src/capture/realsense_capture.py — RealSense 캡처·게이트 측정 코드</a:t>
-            </a:r>
-            <a:endParaRPr lang="en-US" sz="1200" dirty="0"/>
-          </a:p>
-        </p:txBody>
-      </p:sp>
-      <p:sp>
-        <p:nvSpPr>
-          <p:cNvPr id="16" name="Shape 14"/>
-          <p:cNvSpPr/>
-          <p:nvPr/>
-        </p:nvSpPr>
-        <p:spPr>
-          <a:xfrm>
-            <a:off x="640080" y="3739896"/>
-            <a:ext cx="10908792" cy="594360"/>
-          </a:xfrm>
-          <a:prstGeom prst="roundRect">
-            <a:avLst>
-              <a:gd name="adj" fmla="val 12308"/>
-            </a:avLst>
-          </a:prstGeom>
-          <a:solidFill>
-            <a:srgbClr val="FFFFFF"/>
-          </a:solidFill>
-          <a:ln/>
-        </p:spPr>
-      </p:sp>
-      <p:sp>
-        <p:nvSpPr>
-          <p:cNvPr id="17" name="Shape 15"/>
-          <p:cNvSpPr/>
-          <p:nvPr/>
-        </p:nvSpPr>
-        <p:spPr>
-          <a:xfrm>
-            <a:off x="777240" y="3858768"/>
-            <a:ext cx="384048" cy="365760"/>
-          </a:xfrm>
-          <a:prstGeom prst="roundRect">
-            <a:avLst>
-              <a:gd name="adj" fmla="val 17500"/>
-            </a:avLst>
-          </a:prstGeom>
-          <a:solidFill>
-            <a:srgbClr val="E9FBF7"/>
-          </a:solidFill>
-          <a:ln/>
-        </p:spPr>
-      </p:sp>
-      <p:sp>
-        <p:nvSpPr>
-          <p:cNvPr id="18" name="Text 16"/>
-          <p:cNvSpPr txBox="1"/>
-          <p:nvPr/>
-        </p:nvSpPr>
-        <p:spPr>
-          <a:xfrm>
-            <a:off x="777240" y="3858768"/>
-            <a:ext cx="384048" cy="365760"/>
-          </a:xfrm>
-          <a:prstGeom prst="rect">
-            <a:avLst/>
-          </a:prstGeom>
-          <a:noFill/>
-          <a:ln/>
-        </p:spPr>
-        <p:txBody>
-          <a:bodyPr wrap="square" lIns="0" tIns="0" rIns="0" bIns="0" rtlCol="0" anchor="ctr"/>
-          <a:lstStyle/>
-          <a:p>
-            <a:pPr algn="ctr" indent="0" marL="0">
-              <a:buNone/>
-            </a:pPr>
-            <a:r>
-              <a:rPr lang="en-US" sz="1150" b="1" dirty="0">
-                <a:solidFill>
-                  <a:srgbClr val="12655A"/>
-                </a:solidFill>
-                <a:latin typeface="Calibri" pitchFamily="34" charset="0"/>
-                <a:ea typeface="Calibri" pitchFamily="34" charset="-122"/>
-                <a:cs typeface="Calibri" pitchFamily="34" charset="-120"/>
-              </a:rPr>
-              <a:t>04</a:t>
-            </a:r>
-            <a:endParaRPr lang="en-US" sz="1150" dirty="0"/>
-          </a:p>
-        </p:txBody>
-      </p:sp>
-      <p:sp>
-        <p:nvSpPr>
-          <p:cNvPr id="19" name="Text 17"/>
-          <p:cNvSpPr txBox="1"/>
-          <p:nvPr/>
-        </p:nvSpPr>
-        <p:spPr>
-          <a:xfrm>
-            <a:off x="1325880" y="3739896"/>
-            <a:ext cx="9966960" cy="594360"/>
-          </a:xfrm>
-          <a:prstGeom prst="rect">
-            <a:avLst/>
-          </a:prstGeom>
-          <a:noFill/>
-          <a:ln/>
-        </p:spPr>
-        <p:txBody>
-          <a:bodyPr wrap="square" lIns="0" tIns="0" rIns="0" bIns="0" rtlCol="0" anchor="ctr"/>
-          <a:lstStyle/>
-          <a:p>
-            <a:pPr indent="0" marL="0">
-              <a:buNone/>
-            </a:pPr>
-            <a:r>
-              <a:rPr lang="en-US" sz="1200" dirty="0">
-                <a:solidFill>
-                  <a:srgbClr val="16262E"/>
-                </a:solidFill>
-                <a:latin typeface="Calibri" pitchFamily="34" charset="0"/>
-                <a:ea typeface="Calibri" pitchFamily="34" charset="-122"/>
-                <a:cs typeface="Calibri" pitchFamily="34" charset="-120"/>
-              </a:rPr>
-              <a:t>src/logic/rf_baseline.py, tests/test_rf_baseline.py — RF 기준모델 스켈레톤</a:t>
-            </a:r>
-            <a:endParaRPr lang="en-US" sz="1200" dirty="0"/>
-          </a:p>
-        </p:txBody>
-      </p:sp>
-      <p:sp>
-        <p:nvSpPr>
-          <p:cNvPr id="20" name="Shape 18"/>
-          <p:cNvSpPr/>
-          <p:nvPr/>
-        </p:nvSpPr>
-        <p:spPr>
-          <a:xfrm>
-            <a:off x="640080" y="4453128"/>
-            <a:ext cx="10908792" cy="594360"/>
-          </a:xfrm>
-          <a:prstGeom prst="roundRect">
-            <a:avLst>
-              <a:gd name="adj" fmla="val 12308"/>
-            </a:avLst>
-          </a:prstGeom>
-          <a:solidFill>
-            <a:srgbClr val="FFFFFF"/>
-          </a:solidFill>
-          <a:ln/>
-        </p:spPr>
-      </p:sp>
-      <p:sp>
-        <p:nvSpPr>
-          <p:cNvPr id="21" name="Shape 19"/>
-          <p:cNvSpPr/>
-          <p:nvPr/>
-        </p:nvSpPr>
-        <p:spPr>
-          <a:xfrm>
-            <a:off x="777240" y="4572000"/>
-            <a:ext cx="384048" cy="365760"/>
-          </a:xfrm>
-          <a:prstGeom prst="roundRect">
-            <a:avLst>
-              <a:gd name="adj" fmla="val 17500"/>
-            </a:avLst>
-          </a:prstGeom>
-          <a:solidFill>
-            <a:srgbClr val="E9FBF7"/>
-          </a:solidFill>
-          <a:ln/>
-        </p:spPr>
-      </p:sp>
-      <p:sp>
-        <p:nvSpPr>
-          <p:cNvPr id="22" name="Text 20"/>
-          <p:cNvSpPr txBox="1"/>
-          <p:nvPr/>
-        </p:nvSpPr>
-        <p:spPr>
-          <a:xfrm>
-            <a:off x="777240" y="4572000"/>
-            <a:ext cx="384048" cy="365760"/>
-          </a:xfrm>
-          <a:prstGeom prst="rect">
-            <a:avLst/>
-          </a:prstGeom>
-          <a:noFill/>
-          <a:ln/>
-        </p:spPr>
-        <p:txBody>
-          <a:bodyPr wrap="square" lIns="0" tIns="0" rIns="0" bIns="0" rtlCol="0" anchor="ctr"/>
-          <a:lstStyle/>
-          <a:p>
-            <a:pPr algn="ctr" indent="0" marL="0">
-              <a:buNone/>
-            </a:pPr>
-            <a:r>
-              <a:rPr lang="en-US" sz="1150" b="1" dirty="0">
-                <a:solidFill>
-                  <a:srgbClr val="12655A"/>
-                </a:solidFill>
-                <a:latin typeface="Calibri" pitchFamily="34" charset="0"/>
-                <a:ea typeface="Calibri" pitchFamily="34" charset="-122"/>
-                <a:cs typeface="Calibri" pitchFamily="34" charset="-120"/>
-              </a:rPr>
-              <a:t>05</a:t>
-            </a:r>
-            <a:endParaRPr lang="en-US" sz="1150" dirty="0"/>
-          </a:p>
-        </p:txBody>
-      </p:sp>
-      <p:sp>
-        <p:nvSpPr>
-          <p:cNvPr id="23" name="Text 21"/>
-          <p:cNvSpPr txBox="1"/>
-          <p:nvPr/>
-        </p:nvSpPr>
-        <p:spPr>
-          <a:xfrm>
-            <a:off x="1325880" y="4453128"/>
-            <a:ext cx="9966960" cy="594360"/>
-          </a:xfrm>
-          <a:prstGeom prst="rect">
-            <a:avLst/>
-          </a:prstGeom>
-          <a:noFill/>
-          <a:ln/>
-        </p:spPr>
-        <p:txBody>
-          <a:bodyPr wrap="square" lIns="0" tIns="0" rIns="0" bIns="0" rtlCol="0" anchor="ctr"/>
-          <a:lstStyle/>
-          <a:p>
-            <a:pPr indent="0" marL="0">
-              <a:buNone/>
-            </a:pPr>
-            <a:r>
-              <a:rPr lang="en-US" sz="1200" dirty="0">
-                <a:solidFill>
-                  <a:srgbClr val="16262E"/>
-                </a:solidFill>
-                <a:latin typeface="Calibri" pitchFamily="34" charset="0"/>
-                <a:ea typeface="Calibri" pitchFamily="34" charset="-122"/>
-                <a:cs typeface="Calibri" pitchFamily="34" charset="-120"/>
-              </a:rPr>
-              <a:t>experiments/wrf_paper_replication.py — WRF 논문 데이터 파이프라인 검증</a:t>
-            </a:r>
-            <a:endParaRPr lang="en-US" sz="1200" dirty="0"/>
-          </a:p>
-        </p:txBody>
-      </p:sp>
-      <p:sp>
-        <p:nvSpPr>
-          <p:cNvPr id="24" name="Shape 22"/>
-          <p:cNvSpPr/>
-          <p:nvPr/>
-        </p:nvSpPr>
-        <p:spPr>
-          <a:xfrm>
-            <a:off x="640080" y="5166360"/>
-            <a:ext cx="10908792" cy="594360"/>
-          </a:xfrm>
-          <a:prstGeom prst="roundRect">
-            <a:avLst>
-              <a:gd name="adj" fmla="val 12308"/>
-            </a:avLst>
-          </a:prstGeom>
-          <a:solidFill>
-            <a:srgbClr val="FFFFFF"/>
-          </a:solidFill>
-          <a:ln/>
-        </p:spPr>
-      </p:sp>
-      <p:sp>
-        <p:nvSpPr>
-          <p:cNvPr id="25" name="Shape 23"/>
-          <p:cNvSpPr/>
-          <p:nvPr/>
-        </p:nvSpPr>
-        <p:spPr>
-          <a:xfrm>
-            <a:off x="777240" y="5285232"/>
-            <a:ext cx="384048" cy="365760"/>
-          </a:xfrm>
-          <a:prstGeom prst="roundRect">
-            <a:avLst>
-              <a:gd name="adj" fmla="val 17500"/>
-            </a:avLst>
-          </a:prstGeom>
-          <a:solidFill>
-            <a:srgbClr val="E9FBF7"/>
-          </a:solidFill>
-          <a:ln/>
-        </p:spPr>
-      </p:sp>
-      <p:sp>
-        <p:nvSpPr>
-          <p:cNvPr id="26" name="Text 24"/>
-          <p:cNvSpPr txBox="1"/>
-          <p:nvPr/>
-        </p:nvSpPr>
-        <p:spPr>
-          <a:xfrm>
-            <a:off x="777240" y="5285232"/>
-            <a:ext cx="384048" cy="365760"/>
-          </a:xfrm>
-          <a:prstGeom prst="rect">
-            <a:avLst/>
-          </a:prstGeom>
-          <a:noFill/>
-          <a:ln/>
-        </p:spPr>
-        <p:txBody>
-          <a:bodyPr wrap="square" lIns="0" tIns="0" rIns="0" bIns="0" rtlCol="0" anchor="ctr"/>
-          <a:lstStyle/>
-          <a:p>
-            <a:pPr algn="ctr" indent="0" marL="0">
-              <a:buNone/>
-            </a:pPr>
-            <a:r>
-              <a:rPr lang="en-US" sz="1150" b="1" dirty="0">
-                <a:solidFill>
-                  <a:srgbClr val="12655A"/>
-                </a:solidFill>
-                <a:latin typeface="Calibri" pitchFamily="34" charset="0"/>
-                <a:ea typeface="Calibri" pitchFamily="34" charset="-122"/>
-                <a:cs typeface="Calibri" pitchFamily="34" charset="-120"/>
-              </a:rPr>
-              <a:t>06</a:t>
-            </a:r>
-            <a:endParaRPr lang="en-US" sz="1150" dirty="0"/>
-          </a:p>
-        </p:txBody>
-      </p:sp>
-      <p:sp>
-        <p:nvSpPr>
-          <p:cNvPr id="27" name="Text 25"/>
-          <p:cNvSpPr txBox="1"/>
-          <p:nvPr/>
-        </p:nvSpPr>
-        <p:spPr>
-          <a:xfrm>
-            <a:off x="1325880" y="5166360"/>
-            <a:ext cx="9966960" cy="594360"/>
-          </a:xfrm>
-          <a:prstGeom prst="rect">
-            <a:avLst/>
-          </a:prstGeom>
-          <a:noFill/>
-          <a:ln/>
-        </p:spPr>
-        <p:txBody>
-          <a:bodyPr wrap="square" lIns="0" tIns="0" rIns="0" bIns="0" rtlCol="0" anchor="ctr"/>
-          <a:lstStyle/>
-          <a:p>
-            <a:pPr indent="0" marL="0">
-              <a:buNone/>
-            </a:pPr>
-            <a:r>
-              <a:rPr lang="en-US" sz="1200" dirty="0">
-                <a:solidFill>
-                  <a:srgbClr val="16262E"/>
-                </a:solidFill>
-                <a:latin typeface="Calibri" pitchFamily="34" charset="0"/>
-                <a:ea typeface="Calibri" pitchFamily="34" charset="-122"/>
-                <a:cs typeface="Calibri" pitchFamily="34" charset="-120"/>
-              </a:rPr>
-              <a:t>weekly_report_week4.md — 4주차 상세 진행보고서</a:t>
-            </a:r>
-            <a:endParaRPr lang="en-US" sz="1200" dirty="0"/>
-          </a:p>
-        </p:txBody>
-      </p:sp>
-      <p:sp>
-        <p:nvSpPr>
-          <p:cNvPr id="28" name="Text 26"/>
-          <p:cNvSpPr txBox="1"/>
-          <p:nvPr/>
-        </p:nvSpPr>
-        <p:spPr>
-          <a:xfrm>
-            <a:off x="640080" y="6108192"/>
-            <a:ext cx="10908792" cy="411480"/>
-          </a:xfrm>
-          <a:prstGeom prst="rect">
-            <a:avLst/>
-          </a:prstGeom>
-          <a:noFill/>
-          <a:ln/>
-        </p:spPr>
-        <p:txBody>
-          <a:bodyPr wrap="square" lIns="0" tIns="0" rIns="0" bIns="0" rtlCol="0" anchor="ctr"/>
-          <a:lstStyle/>
-          <a:p>
-            <a:pPr algn="ctr" indent="0" marL="0">
-              <a:buNone/>
-            </a:pPr>
-            <a:r>
-              <a:rPr lang="en-US" sz="1350" i="1" dirty="0">
-                <a:solidFill>
-                  <a:srgbClr val="9FB6BC"/>
-                </a:solidFill>
-                <a:latin typeface="Calibri" pitchFamily="34" charset="0"/>
-                <a:ea typeface="Calibri" pitchFamily="34" charset="-122"/>
-                <a:cs typeface="Calibri" pitchFamily="34" charset="-120"/>
-              </a:rPr>
-              <a:t>질문 받겠습니다</a:t>
-            </a:r>
-            <a:endParaRPr lang="en-US" sz="1350" dirty="0"/>
-          </a:p>
-        </p:txBody>
-      </p:sp>
-      <p:sp>
-        <p:nvSpPr>
-          <p:cNvPr id="29" name="Text 27"/>
-          <p:cNvSpPr txBox="1"/>
-          <p:nvPr/>
-        </p:nvSpPr>
-        <p:spPr>
-          <a:xfrm>
-            <a:off x="11365992" y="6355080"/>
-            <a:ext cx="548640" cy="320040"/>
-          </a:xfrm>
-          <a:prstGeom prst="rect">
-            <a:avLst/>
-          </a:prstGeom>
-          <a:noFill/>
-          <a:ln/>
-        </p:spPr>
-        <p:txBody>
-          <a:bodyPr wrap="square" lIns="0" tIns="0" rIns="0" bIns="0" rtlCol="0" anchor="ctr"/>
-          <a:lstStyle/>
-          <a:p>
-            <a:pPr algn="r" indent="0" marL="0">
-              <a:buNone/>
-            </a:pPr>
-            <a:r>
-              <a:rPr lang="en-US" sz="1100" dirty="0">
-                <a:solidFill>
-                  <a:srgbClr val="9FB6BC"/>
-                </a:solidFill>
-                <a:latin typeface="Calibri" pitchFamily="34" charset="0"/>
-                <a:ea typeface="Calibri" pitchFamily="34" charset="-122"/>
-                <a:cs typeface="Calibri" pitchFamily="34" charset="-120"/>
-              </a:rPr>
-              <a:t>09</a:t>
+              <a:t>08</a:t>
             </a:r>
             <a:endParaRPr lang="en-US" sz="1100" dirty="0"/>
           </a:p>

--- a/barunjase_week4.pptx
+++ b/barunjase_week4.pptx
@@ -13,9 +13,11 @@
     <p:sldId id="261" r:id="rId7"/>
     <p:sldId id="262" r:id="rId8"/>
     <p:sldId id="263" r:id="rId9"/>
+    <p:sldId id="264" r:id="rId10"/>
+    <p:sldId id="265" r:id="rId11"/>
   </p:sldIdLst>
   <p:notesMasterIdLst>
-    <p:notesMasterId r:id="rId10"/>
+    <p:notesMasterId r:id="rId12"/>
   </p:notesMasterIdLst>
   <p:sldSz cx="12192000" cy="6858000"/>
   <p:notesSz cx="6858000" cy="12192000"/>
@@ -551,6 +553,94 @@
 </p:notes>
 </file>
 
+<file path=ppt/notesSlides/notesSlide10.xml><?xml version="1.0" encoding="utf-8"?>
+<p:notes xmlns:a="http://schemas.openxmlformats.org/drawingml/2006/main" xmlns:r="http://schemas.openxmlformats.org/officeDocument/2006/relationships" xmlns:p="http://schemas.openxmlformats.org/presentationml/2006/main">
+  <p:cSld>
+    <p:spTree>
+      <p:nvGrpSpPr>
+        <p:cNvPr id="1" name=""/>
+        <p:cNvGrpSpPr/>
+        <p:nvPr/>
+      </p:nvGrpSpPr>
+      <p:grpSpPr>
+        <a:xfrm>
+          <a:off x="0" y="0"/>
+          <a:ext cx="0" cy="0"/>
+          <a:chOff x="0" y="0"/>
+          <a:chExt cx="0" cy="0"/>
+        </a:xfrm>
+      </p:grpSpPr>
+      <p:sp>
+        <p:nvSpPr>
+          <p:cNvPr id="2" name="Slide Image Placeholder 1"/>
+          <p:cNvSpPr>
+            <a:spLocks noGrp="1" noRot="1" noChangeAspect="1"/>
+          </p:cNvSpPr>
+          <p:nvPr>
+            <p:ph type="sldImg"/>
+          </p:nvPr>
+        </p:nvSpPr>
+        <p:spPr/>
+      </p:sp>
+      <p:sp>
+        <p:nvSpPr>
+          <p:cNvPr id="3" name="Notes Placeholder 2"/>
+          <p:cNvSpPr>
+            <a:spLocks noGrp="1"/>
+          </p:cNvSpPr>
+          <p:nvPr>
+            <p:ph type="body" idx="1"/>
+          </p:nvPr>
+        </p:nvSpPr>
+        <p:spPr/>
+        <p:txBody>
+          <a:bodyPr/>
+          <a:lstStyle/>
+          <a:p>
+            <a:r>
+              <a:rPr lang="en-US" dirty="0"/>
+              <a:t/>
+            </a:r>
+            <a:endParaRPr lang="en-US" dirty="0"/>
+          </a:p>
+        </p:txBody>
+      </p:sp>
+      <p:sp>
+        <p:nvSpPr>
+          <p:cNvPr id="4" name="Slide Number Placeholder 3"/>
+          <p:cNvSpPr>
+            <a:spLocks noGrp="1"/>
+          </p:cNvSpPr>
+          <p:nvPr>
+            <p:ph type="sldNum" sz="quarter" idx="10"/>
+          </p:nvPr>
+        </p:nvSpPr>
+        <p:spPr/>
+        <p:txBody>
+          <a:bodyPr/>
+          <a:lstStyle/>
+          <a:p>
+            <a:fld id="{F7021451-1387-4CA6-816F-3879F97B5CBC}" type="slidenum">
+              <a:rPr lang="en-US"/>
+              <a:t>10</a:t>
+            </a:fld>
+            <a:endParaRPr lang="en-US"/>
+          </a:p>
+        </p:txBody>
+      </p:sp>
+    </p:spTree>
+    <p:extLst>
+      <p:ext uri="{BB962C8B-B14F-4D97-AF65-F5344CB8AC3E}">
+        <p14:creationId xmlns:p14="http://schemas.microsoft.com/office/powerpoint/2010/main" val="1024086991"/>
+      </p:ext>
+    </p:extLst>
+  </p:cSld>
+  <p:clrMapOvr>
+    <a:masterClrMapping/>
+  </p:clrMapOvr>
+</p:notes>
+</file>
+
 <file path=ppt/notesSlides/notesSlide2.xml><?xml version="1.0" encoding="utf-8"?>
 <p:notes xmlns:a="http://schemas.openxmlformats.org/drawingml/2006/main" xmlns:r="http://schemas.openxmlformats.org/officeDocument/2006/relationships" xmlns:p="http://schemas.openxmlformats.org/presentationml/2006/main">
   <p:cSld>
@@ -1149,6 +1239,94 @@
             <a:fld id="{F7021451-1387-4CA6-816F-3879F97B5CBC}" type="slidenum">
               <a:rPr lang="en-US"/>
               <a:t>8</a:t>
+            </a:fld>
+            <a:endParaRPr lang="en-US"/>
+          </a:p>
+        </p:txBody>
+      </p:sp>
+    </p:spTree>
+    <p:extLst>
+      <p:ext uri="{BB962C8B-B14F-4D97-AF65-F5344CB8AC3E}">
+        <p14:creationId xmlns:p14="http://schemas.microsoft.com/office/powerpoint/2010/main" val="1024086991"/>
+      </p:ext>
+    </p:extLst>
+  </p:cSld>
+  <p:clrMapOvr>
+    <a:masterClrMapping/>
+  </p:clrMapOvr>
+</p:notes>
+</file>
+
+<file path=ppt/notesSlides/notesSlide9.xml><?xml version="1.0" encoding="utf-8"?>
+<p:notes xmlns:a="http://schemas.openxmlformats.org/drawingml/2006/main" xmlns:r="http://schemas.openxmlformats.org/officeDocument/2006/relationships" xmlns:p="http://schemas.openxmlformats.org/presentationml/2006/main">
+  <p:cSld>
+    <p:spTree>
+      <p:nvGrpSpPr>
+        <p:cNvPr id="1" name=""/>
+        <p:cNvGrpSpPr/>
+        <p:nvPr/>
+      </p:nvGrpSpPr>
+      <p:grpSpPr>
+        <a:xfrm>
+          <a:off x="0" y="0"/>
+          <a:ext cx="0" cy="0"/>
+          <a:chOff x="0" y="0"/>
+          <a:chExt cx="0" cy="0"/>
+        </a:xfrm>
+      </p:grpSpPr>
+      <p:sp>
+        <p:nvSpPr>
+          <p:cNvPr id="2" name="Slide Image Placeholder 1"/>
+          <p:cNvSpPr>
+            <a:spLocks noGrp="1" noRot="1" noChangeAspect="1"/>
+          </p:cNvSpPr>
+          <p:nvPr>
+            <p:ph type="sldImg"/>
+          </p:nvPr>
+        </p:nvSpPr>
+        <p:spPr/>
+      </p:sp>
+      <p:sp>
+        <p:nvSpPr>
+          <p:cNvPr id="3" name="Notes Placeholder 2"/>
+          <p:cNvSpPr>
+            <a:spLocks noGrp="1"/>
+          </p:cNvSpPr>
+          <p:nvPr>
+            <p:ph type="body" idx="1"/>
+          </p:nvPr>
+        </p:nvSpPr>
+        <p:spPr/>
+        <p:txBody>
+          <a:bodyPr/>
+          <a:lstStyle/>
+          <a:p>
+            <a:r>
+              <a:rPr lang="en-US" dirty="0"/>
+              <a:t/>
+            </a:r>
+            <a:endParaRPr lang="en-US" dirty="0"/>
+          </a:p>
+        </p:txBody>
+      </p:sp>
+      <p:sp>
+        <p:nvSpPr>
+          <p:cNvPr id="4" name="Slide Number Placeholder 3"/>
+          <p:cNvSpPr>
+            <a:spLocks noGrp="1"/>
+          </p:cNvSpPr>
+          <p:nvPr>
+            <p:ph type="sldNum" sz="quarter" idx="10"/>
+          </p:nvPr>
+        </p:nvSpPr>
+        <p:spPr/>
+        <p:txBody>
+          <a:bodyPr/>
+          <a:lstStyle/>
+          <a:p>
+            <a:fld id="{F7021451-1387-4CA6-816F-3879F97B5CBC}" type="slidenum">
+              <a:rPr lang="en-US"/>
+              <a:t>9</a:t>
             </a:fld>
             <a:endParaRPr lang="en-US"/>
           </a:p>
@@ -1813,6 +1991,826 @@
 </p:sld>
 </file>
 
+<file path=ppt/slides/slide10.xml><?xml version="1.0" encoding="utf-8"?>
+<p:sld xmlns:a="http://schemas.openxmlformats.org/drawingml/2006/main" xmlns:r="http://schemas.openxmlformats.org/officeDocument/2006/relationships" xmlns:p="http://schemas.openxmlformats.org/presentationml/2006/main">
+  <p:cSld name="Slide 10">
+    <p:bg>
+      <p:bgPr>
+        <a:blipFill dpi="0" rotWithShape="1">
+          <a:blip r:embed="rId1">
+            <a:lum/>
+          </a:blip>
+          <a:srcRect/>
+          <a:stretch>
+            <a:fillRect/>
+          </a:stretch>
+        </a:blipFill>
+        <a:effectLst/>
+      </p:bgPr>
+    </p:bg>
+    <p:spTree>
+      <p:nvGrpSpPr>
+        <p:cNvPr id="1" name=""/>
+        <p:cNvGrpSpPr/>
+        <p:nvPr/>
+      </p:nvGrpSpPr>
+      <p:grpSpPr>
+        <a:xfrm>
+          <a:off x="0" y="0"/>
+          <a:ext cx="0" cy="0"/>
+          <a:chOff x="0" y="0"/>
+          <a:chExt cx="0" cy="0"/>
+        </a:xfrm>
+      </p:grpSpPr>
+      <p:sp>
+        <p:nvSpPr>
+          <p:cNvPr id="2" name="Text 0"/>
+          <p:cNvSpPr txBox="1"/>
+          <p:nvPr/>
+        </p:nvSpPr>
+        <p:spPr>
+          <a:xfrm>
+            <a:off x="640080" y="384048"/>
+            <a:ext cx="8229600" cy="320040"/>
+          </a:xfrm>
+          <a:prstGeom prst="rect">
+            <a:avLst/>
+          </a:prstGeom>
+          <a:noFill/>
+          <a:ln/>
+        </p:spPr>
+        <p:txBody>
+          <a:bodyPr wrap="square" lIns="0" tIns="0" rIns="0" bIns="0" rtlCol="0" anchor="ctr"/>
+          <a:lstStyle/>
+          <a:p>
+            <a:pPr indent="0" marL="0">
+              <a:buNone/>
+            </a:pPr>
+            <a:r>
+              <a:rPr lang="en-US" sz="1200" b="1" spc="200" kern="0" dirty="0">
+                <a:solidFill>
+                  <a:srgbClr val="2FE0C4"/>
+                </a:solidFill>
+                <a:latin typeface="Calibri" pitchFamily="34" charset="0"/>
+                <a:ea typeface="Calibri" pitchFamily="34" charset="-122"/>
+                <a:cs typeface="Calibri" pitchFamily="34" charset="-120"/>
+              </a:rPr>
+              <a:t>ROADMAP: WEEKS 11-15</a:t>
+            </a:r>
+            <a:endParaRPr lang="en-US" sz="1200" dirty="0"/>
+          </a:p>
+        </p:txBody>
+      </p:sp>
+      <p:sp>
+        <p:nvSpPr>
+          <p:cNvPr id="3" name="Text 1"/>
+          <p:cNvSpPr txBox="1"/>
+          <p:nvPr/>
+        </p:nvSpPr>
+        <p:spPr>
+          <a:xfrm>
+            <a:off x="640080" y="685800"/>
+            <a:ext cx="10881360" cy="822960"/>
+          </a:xfrm>
+          <a:prstGeom prst="rect">
+            <a:avLst/>
+          </a:prstGeom>
+          <a:noFill/>
+          <a:ln/>
+        </p:spPr>
+        <p:txBody>
+          <a:bodyPr wrap="square" lIns="0" tIns="0" rIns="0" bIns="0" rtlCol="0" anchor="ctr"/>
+          <a:lstStyle/>
+          <a:p>
+            <a:pPr indent="0" marL="0">
+              <a:buNone/>
+            </a:pPr>
+            <a:r>
+              <a:rPr lang="en-US" sz="2700" b="1" dirty="0">
+                <a:solidFill>
+                  <a:srgbClr val="EAF3F1"/>
+                </a:solidFill>
+                <a:latin typeface="Arial" pitchFamily="34" charset="0"/>
+                <a:ea typeface="Arial" pitchFamily="34" charset="-122"/>
+                <a:cs typeface="Arial" pitchFamily="34" charset="-120"/>
+              </a:rPr>
+              <a:t>11~15주차 논문·발표 마무리</a:t>
+            </a:r>
+            <a:endParaRPr lang="en-US" sz="2700" dirty="0"/>
+          </a:p>
+        </p:txBody>
+      </p:sp>
+      <p:sp>
+        <p:nvSpPr>
+          <p:cNvPr id="4" name="Shape 2"/>
+          <p:cNvSpPr/>
+          <p:nvPr/>
+        </p:nvSpPr>
+        <p:spPr>
+          <a:xfrm>
+            <a:off x="640080" y="1737360"/>
+            <a:ext cx="10908792" cy="731520"/>
+          </a:xfrm>
+          <a:prstGeom prst="roundRect">
+            <a:avLst>
+              <a:gd name="adj" fmla="val 12500"/>
+            </a:avLst>
+          </a:prstGeom>
+          <a:solidFill>
+            <a:srgbClr val="FFFFFF"/>
+          </a:solidFill>
+          <a:ln/>
+        </p:spPr>
+      </p:sp>
+      <p:sp>
+        <p:nvSpPr>
+          <p:cNvPr id="5" name="Shape 3"/>
+          <p:cNvSpPr/>
+          <p:nvPr/>
+        </p:nvSpPr>
+        <p:spPr>
+          <a:xfrm>
+            <a:off x="822960" y="1920240"/>
+            <a:ext cx="457200" cy="365760"/>
+          </a:xfrm>
+          <a:prstGeom prst="roundRect">
+            <a:avLst>
+              <a:gd name="adj" fmla="val 20000"/>
+            </a:avLst>
+          </a:prstGeom>
+          <a:solidFill>
+            <a:srgbClr val="E9FBF7"/>
+          </a:solidFill>
+          <a:ln/>
+        </p:spPr>
+      </p:sp>
+      <p:sp>
+        <p:nvSpPr>
+          <p:cNvPr id="6" name="Text 4"/>
+          <p:cNvSpPr txBox="1"/>
+          <p:nvPr/>
+        </p:nvSpPr>
+        <p:spPr>
+          <a:xfrm>
+            <a:off x="822960" y="1920240"/>
+            <a:ext cx="457200" cy="365760"/>
+          </a:xfrm>
+          <a:prstGeom prst="rect">
+            <a:avLst/>
+          </a:prstGeom>
+          <a:noFill/>
+          <a:ln/>
+        </p:spPr>
+        <p:txBody>
+          <a:bodyPr wrap="square" lIns="0" tIns="0" rIns="0" bIns="0" rtlCol="0" anchor="ctr"/>
+          <a:lstStyle/>
+          <a:p>
+            <a:pPr algn="ctr" indent="0" marL="0">
+              <a:buNone/>
+            </a:pPr>
+            <a:r>
+              <a:rPr lang="en-US" sz="1300" b="1" dirty="0">
+                <a:solidFill>
+                  <a:srgbClr val="12655A"/>
+                </a:solidFill>
+                <a:latin typeface="Calibri" pitchFamily="34" charset="0"/>
+                <a:ea typeface="Calibri" pitchFamily="34" charset="-122"/>
+                <a:cs typeface="Calibri" pitchFamily="34" charset="-120"/>
+              </a:rPr>
+              <a:t>11</a:t>
+            </a:r>
+            <a:endParaRPr lang="en-US" sz="1300" dirty="0"/>
+          </a:p>
+        </p:txBody>
+      </p:sp>
+      <p:sp>
+        <p:nvSpPr>
+          <p:cNvPr id="7" name="Text 5"/>
+          <p:cNvSpPr txBox="1"/>
+          <p:nvPr/>
+        </p:nvSpPr>
+        <p:spPr>
+          <a:xfrm>
+            <a:off x="1417320" y="1737360"/>
+            <a:ext cx="9875520" cy="731520"/>
+          </a:xfrm>
+          <a:prstGeom prst="rect">
+            <a:avLst/>
+          </a:prstGeom>
+          <a:noFill/>
+          <a:ln/>
+        </p:spPr>
+        <p:txBody>
+          <a:bodyPr wrap="square" lIns="0" tIns="0" rIns="0" bIns="0" rtlCol="0" anchor="ctr"/>
+          <a:lstStyle/>
+          <a:p>
+            <a:pPr indent="0" marL="0">
+              <a:lnSpc>
+                <a:spcPct val="115000"/>
+              </a:lnSpc>
+              <a:buNone/>
+            </a:pPr>
+            <a:r>
+              <a:rPr lang="en-US" sz="1300" dirty="0">
+                <a:solidFill>
+                  <a:srgbClr val="16262E"/>
+                </a:solidFill>
+                <a:latin typeface="Calibri" pitchFamily="34" charset="0"/>
+                <a:ea typeface="Calibri" pitchFamily="34" charset="-122"/>
+                <a:cs typeface="Calibri" pitchFamily="34" charset="-120"/>
+              </a:rPr>
+              <a:t>4주차부터 병행 작성해온 논문 구조 확정, 전체 초안 리비전 착수</a:t>
+            </a:r>
+            <a:endParaRPr lang="en-US" sz="1300" dirty="0"/>
+          </a:p>
+        </p:txBody>
+      </p:sp>
+      <p:sp>
+        <p:nvSpPr>
+          <p:cNvPr id="8" name="Shape 6"/>
+          <p:cNvSpPr/>
+          <p:nvPr/>
+        </p:nvSpPr>
+        <p:spPr>
+          <a:xfrm>
+            <a:off x="640080" y="2578608"/>
+            <a:ext cx="10908792" cy="731520"/>
+          </a:xfrm>
+          <a:prstGeom prst="roundRect">
+            <a:avLst>
+              <a:gd name="adj" fmla="val 12500"/>
+            </a:avLst>
+          </a:prstGeom>
+          <a:solidFill>
+            <a:srgbClr val="FFFFFF"/>
+          </a:solidFill>
+          <a:ln/>
+        </p:spPr>
+      </p:sp>
+      <p:sp>
+        <p:nvSpPr>
+          <p:cNvPr id="9" name="Shape 7"/>
+          <p:cNvSpPr/>
+          <p:nvPr/>
+        </p:nvSpPr>
+        <p:spPr>
+          <a:xfrm>
+            <a:off x="822960" y="2761488"/>
+            <a:ext cx="457200" cy="365760"/>
+          </a:xfrm>
+          <a:prstGeom prst="roundRect">
+            <a:avLst>
+              <a:gd name="adj" fmla="val 20000"/>
+            </a:avLst>
+          </a:prstGeom>
+          <a:solidFill>
+            <a:srgbClr val="E9FBF7"/>
+          </a:solidFill>
+          <a:ln/>
+        </p:spPr>
+      </p:sp>
+      <p:sp>
+        <p:nvSpPr>
+          <p:cNvPr id="10" name="Text 8"/>
+          <p:cNvSpPr txBox="1"/>
+          <p:nvPr/>
+        </p:nvSpPr>
+        <p:spPr>
+          <a:xfrm>
+            <a:off x="822960" y="2761488"/>
+            <a:ext cx="457200" cy="365760"/>
+          </a:xfrm>
+          <a:prstGeom prst="rect">
+            <a:avLst/>
+          </a:prstGeom>
+          <a:noFill/>
+          <a:ln/>
+        </p:spPr>
+        <p:txBody>
+          <a:bodyPr wrap="square" lIns="0" tIns="0" rIns="0" bIns="0" rtlCol="0" anchor="ctr"/>
+          <a:lstStyle/>
+          <a:p>
+            <a:pPr algn="ctr" indent="0" marL="0">
+              <a:buNone/>
+            </a:pPr>
+            <a:r>
+              <a:rPr lang="en-US" sz="1300" b="1" dirty="0">
+                <a:solidFill>
+                  <a:srgbClr val="12655A"/>
+                </a:solidFill>
+                <a:latin typeface="Calibri" pitchFamily="34" charset="0"/>
+                <a:ea typeface="Calibri" pitchFamily="34" charset="-122"/>
+                <a:cs typeface="Calibri" pitchFamily="34" charset="-120"/>
+              </a:rPr>
+              <a:t>12</a:t>
+            </a:r>
+            <a:endParaRPr lang="en-US" sz="1300" dirty="0"/>
+          </a:p>
+        </p:txBody>
+      </p:sp>
+      <p:sp>
+        <p:nvSpPr>
+          <p:cNvPr id="11" name="Text 9"/>
+          <p:cNvSpPr txBox="1"/>
+          <p:nvPr/>
+        </p:nvSpPr>
+        <p:spPr>
+          <a:xfrm>
+            <a:off x="1417320" y="2578608"/>
+            <a:ext cx="9875520" cy="731520"/>
+          </a:xfrm>
+          <a:prstGeom prst="rect">
+            <a:avLst/>
+          </a:prstGeom>
+          <a:noFill/>
+          <a:ln/>
+        </p:spPr>
+        <p:txBody>
+          <a:bodyPr wrap="square" lIns="0" tIns="0" rIns="0" bIns="0" rtlCol="0" anchor="ctr"/>
+          <a:lstStyle/>
+          <a:p>
+            <a:pPr indent="0" marL="0">
+              <a:lnSpc>
+                <a:spcPct val="115000"/>
+              </a:lnSpc>
+              <a:buNone/>
+            </a:pPr>
+            <a:r>
+              <a:rPr lang="en-US" sz="1300" dirty="0">
+                <a:solidFill>
+                  <a:srgbClr val="16262E"/>
+                </a:solidFill>
+                <a:latin typeface="Calibri" pitchFamily="34" charset="0"/>
+                <a:ea typeface="Calibri" pitchFamily="34" charset="-122"/>
+                <a:cs typeface="Calibri" pitchFamily="34" charset="-120"/>
+              </a:rPr>
+              <a:t>리비전 계속, 팀원 간 교차검토(결과 섹션 중심)</a:t>
+            </a:r>
+            <a:endParaRPr lang="en-US" sz="1300" dirty="0"/>
+          </a:p>
+        </p:txBody>
+      </p:sp>
+      <p:sp>
+        <p:nvSpPr>
+          <p:cNvPr id="12" name="Shape 10"/>
+          <p:cNvSpPr/>
+          <p:nvPr/>
+        </p:nvSpPr>
+        <p:spPr>
+          <a:xfrm>
+            <a:off x="640080" y="3419856"/>
+            <a:ext cx="10908792" cy="731520"/>
+          </a:xfrm>
+          <a:prstGeom prst="roundRect">
+            <a:avLst>
+              <a:gd name="adj" fmla="val 12500"/>
+            </a:avLst>
+          </a:prstGeom>
+          <a:solidFill>
+            <a:srgbClr val="FFFFFF"/>
+          </a:solidFill>
+          <a:ln/>
+        </p:spPr>
+      </p:sp>
+      <p:sp>
+        <p:nvSpPr>
+          <p:cNvPr id="13" name="Shape 11"/>
+          <p:cNvSpPr/>
+          <p:nvPr/>
+        </p:nvSpPr>
+        <p:spPr>
+          <a:xfrm>
+            <a:off x="822960" y="3602736"/>
+            <a:ext cx="457200" cy="365760"/>
+          </a:xfrm>
+          <a:prstGeom prst="roundRect">
+            <a:avLst>
+              <a:gd name="adj" fmla="val 20000"/>
+            </a:avLst>
+          </a:prstGeom>
+          <a:solidFill>
+            <a:srgbClr val="E9FBF7"/>
+          </a:solidFill>
+          <a:ln/>
+        </p:spPr>
+      </p:sp>
+      <p:sp>
+        <p:nvSpPr>
+          <p:cNvPr id="14" name="Text 12"/>
+          <p:cNvSpPr txBox="1"/>
+          <p:nvPr/>
+        </p:nvSpPr>
+        <p:spPr>
+          <a:xfrm>
+            <a:off x="822960" y="3602736"/>
+            <a:ext cx="457200" cy="365760"/>
+          </a:xfrm>
+          <a:prstGeom prst="rect">
+            <a:avLst/>
+          </a:prstGeom>
+          <a:noFill/>
+          <a:ln/>
+        </p:spPr>
+        <p:txBody>
+          <a:bodyPr wrap="square" lIns="0" tIns="0" rIns="0" bIns="0" rtlCol="0" anchor="ctr"/>
+          <a:lstStyle/>
+          <a:p>
+            <a:pPr algn="ctr" indent="0" marL="0">
+              <a:buNone/>
+            </a:pPr>
+            <a:r>
+              <a:rPr lang="en-US" sz="1300" b="1" dirty="0">
+                <a:solidFill>
+                  <a:srgbClr val="12655A"/>
+                </a:solidFill>
+                <a:latin typeface="Calibri" pitchFamily="34" charset="0"/>
+                <a:ea typeface="Calibri" pitchFamily="34" charset="-122"/>
+                <a:cs typeface="Calibri" pitchFamily="34" charset="-120"/>
+              </a:rPr>
+              <a:t>13</a:t>
+            </a:r>
+            <a:endParaRPr lang="en-US" sz="1300" dirty="0"/>
+          </a:p>
+        </p:txBody>
+      </p:sp>
+      <p:sp>
+        <p:nvSpPr>
+          <p:cNvPr id="15" name="Text 13"/>
+          <p:cNvSpPr txBox="1"/>
+          <p:nvPr/>
+        </p:nvSpPr>
+        <p:spPr>
+          <a:xfrm>
+            <a:off x="1417320" y="3419856"/>
+            <a:ext cx="9875520" cy="731520"/>
+          </a:xfrm>
+          <a:prstGeom prst="rect">
+            <a:avLst/>
+          </a:prstGeom>
+          <a:noFill/>
+          <a:ln/>
+        </p:spPr>
+        <p:txBody>
+          <a:bodyPr wrap="square" lIns="0" tIns="0" rIns="0" bIns="0" rtlCol="0" anchor="ctr"/>
+          <a:lstStyle/>
+          <a:p>
+            <a:pPr indent="0" marL="0">
+              <a:lnSpc>
+                <a:spcPct val="115000"/>
+              </a:lnSpc>
+              <a:buNone/>
+            </a:pPr>
+            <a:r>
+              <a:rPr lang="en-US" sz="1300" dirty="0">
+                <a:solidFill>
+                  <a:srgbClr val="16262E"/>
+                </a:solidFill>
+                <a:latin typeface="Calibri" pitchFamily="34" charset="0"/>
+                <a:ea typeface="Calibri" pitchFamily="34" charset="-122"/>
+                <a:cs typeface="Calibri" pitchFamily="34" charset="-120"/>
+              </a:rPr>
+              <a:t>최종 리비전, Multimedia Systems 저널 포맷팅, 논문 전체 리허설 발표</a:t>
+            </a:r>
+            <a:endParaRPr lang="en-US" sz="1300" dirty="0"/>
+          </a:p>
+        </p:txBody>
+      </p:sp>
+      <p:sp>
+        <p:nvSpPr>
+          <p:cNvPr id="16" name="Shape 14"/>
+          <p:cNvSpPr/>
+          <p:nvPr/>
+        </p:nvSpPr>
+        <p:spPr>
+          <a:xfrm>
+            <a:off x="640080" y="4261104"/>
+            <a:ext cx="10908792" cy="731520"/>
+          </a:xfrm>
+          <a:prstGeom prst="roundRect">
+            <a:avLst>
+              <a:gd name="adj" fmla="val 12500"/>
+            </a:avLst>
+          </a:prstGeom>
+          <a:solidFill>
+            <a:srgbClr val="FFFFFF"/>
+          </a:solidFill>
+          <a:ln/>
+        </p:spPr>
+      </p:sp>
+      <p:sp>
+        <p:nvSpPr>
+          <p:cNvPr id="17" name="Shape 15"/>
+          <p:cNvSpPr/>
+          <p:nvPr/>
+        </p:nvSpPr>
+        <p:spPr>
+          <a:xfrm>
+            <a:off x="822960" y="4443984"/>
+            <a:ext cx="457200" cy="365760"/>
+          </a:xfrm>
+          <a:prstGeom prst="roundRect">
+            <a:avLst>
+              <a:gd name="adj" fmla="val 20000"/>
+            </a:avLst>
+          </a:prstGeom>
+          <a:solidFill>
+            <a:srgbClr val="E9FBF7"/>
+          </a:solidFill>
+          <a:ln/>
+        </p:spPr>
+      </p:sp>
+      <p:sp>
+        <p:nvSpPr>
+          <p:cNvPr id="18" name="Text 16"/>
+          <p:cNvSpPr txBox="1"/>
+          <p:nvPr/>
+        </p:nvSpPr>
+        <p:spPr>
+          <a:xfrm>
+            <a:off x="822960" y="4443984"/>
+            <a:ext cx="457200" cy="365760"/>
+          </a:xfrm>
+          <a:prstGeom prst="rect">
+            <a:avLst/>
+          </a:prstGeom>
+          <a:noFill/>
+          <a:ln/>
+        </p:spPr>
+        <p:txBody>
+          <a:bodyPr wrap="square" lIns="0" tIns="0" rIns="0" bIns="0" rtlCol="0" anchor="ctr"/>
+          <a:lstStyle/>
+          <a:p>
+            <a:pPr algn="ctr" indent="0" marL="0">
+              <a:buNone/>
+            </a:pPr>
+            <a:r>
+              <a:rPr lang="en-US" sz="1300" b="1" dirty="0">
+                <a:solidFill>
+                  <a:srgbClr val="12655A"/>
+                </a:solidFill>
+                <a:latin typeface="Calibri" pitchFamily="34" charset="0"/>
+                <a:ea typeface="Calibri" pitchFamily="34" charset="-122"/>
+                <a:cs typeface="Calibri" pitchFamily="34" charset="-120"/>
+              </a:rPr>
+              <a:t>14</a:t>
+            </a:r>
+            <a:endParaRPr lang="en-US" sz="1300" dirty="0"/>
+          </a:p>
+        </p:txBody>
+      </p:sp>
+      <p:sp>
+        <p:nvSpPr>
+          <p:cNvPr id="19" name="Text 17"/>
+          <p:cNvSpPr txBox="1"/>
+          <p:nvPr/>
+        </p:nvSpPr>
+        <p:spPr>
+          <a:xfrm>
+            <a:off x="1417320" y="4261104"/>
+            <a:ext cx="9875520" cy="731520"/>
+          </a:xfrm>
+          <a:prstGeom prst="rect">
+            <a:avLst/>
+          </a:prstGeom>
+          <a:noFill/>
+          <a:ln/>
+        </p:spPr>
+        <p:txBody>
+          <a:bodyPr wrap="square" lIns="0" tIns="0" rIns="0" bIns="0" rtlCol="0" anchor="ctr"/>
+          <a:lstStyle/>
+          <a:p>
+            <a:pPr indent="0" marL="0">
+              <a:lnSpc>
+                <a:spcPct val="115000"/>
+              </a:lnSpc>
+              <a:buNone/>
+            </a:pPr>
+            <a:r>
+              <a:rPr lang="en-US" sz="1300" dirty="0">
+                <a:solidFill>
+                  <a:srgbClr val="16262E"/>
+                </a:solidFill>
+                <a:latin typeface="Calibri" pitchFamily="34" charset="0"/>
+                <a:ea typeface="Calibri" pitchFamily="34" charset="-122"/>
+                <a:cs typeface="Calibri" pitchFamily="34" charset="-120"/>
+              </a:rPr>
+              <a:t>논문 드래프트 제출(12/2 마감), 제출 후 정리</a:t>
+            </a:r>
+            <a:endParaRPr lang="en-US" sz="1300" dirty="0"/>
+          </a:p>
+        </p:txBody>
+      </p:sp>
+      <p:sp>
+        <p:nvSpPr>
+          <p:cNvPr id="20" name="Shape 18"/>
+          <p:cNvSpPr/>
+          <p:nvPr/>
+        </p:nvSpPr>
+        <p:spPr>
+          <a:xfrm>
+            <a:off x="640080" y="5102352"/>
+            <a:ext cx="10908792" cy="731520"/>
+          </a:xfrm>
+          <a:prstGeom prst="roundRect">
+            <a:avLst>
+              <a:gd name="adj" fmla="val 12500"/>
+            </a:avLst>
+          </a:prstGeom>
+          <a:solidFill>
+            <a:srgbClr val="FFFFFF"/>
+          </a:solidFill>
+          <a:ln/>
+        </p:spPr>
+      </p:sp>
+      <p:sp>
+        <p:nvSpPr>
+          <p:cNvPr id="21" name="Shape 19"/>
+          <p:cNvSpPr/>
+          <p:nvPr/>
+        </p:nvSpPr>
+        <p:spPr>
+          <a:xfrm>
+            <a:off x="822960" y="5285232"/>
+            <a:ext cx="457200" cy="365760"/>
+          </a:xfrm>
+          <a:prstGeom prst="roundRect">
+            <a:avLst>
+              <a:gd name="adj" fmla="val 20000"/>
+            </a:avLst>
+          </a:prstGeom>
+          <a:solidFill>
+            <a:srgbClr val="E9FBF7"/>
+          </a:solidFill>
+          <a:ln/>
+        </p:spPr>
+      </p:sp>
+      <p:sp>
+        <p:nvSpPr>
+          <p:cNvPr id="22" name="Text 20"/>
+          <p:cNvSpPr txBox="1"/>
+          <p:nvPr/>
+        </p:nvSpPr>
+        <p:spPr>
+          <a:xfrm>
+            <a:off x="822960" y="5285232"/>
+            <a:ext cx="457200" cy="365760"/>
+          </a:xfrm>
+          <a:prstGeom prst="rect">
+            <a:avLst/>
+          </a:prstGeom>
+          <a:noFill/>
+          <a:ln/>
+        </p:spPr>
+        <p:txBody>
+          <a:bodyPr wrap="square" lIns="0" tIns="0" rIns="0" bIns="0" rtlCol="0" anchor="ctr"/>
+          <a:lstStyle/>
+          <a:p>
+            <a:pPr algn="ctr" indent="0" marL="0">
+              <a:buNone/>
+            </a:pPr>
+            <a:r>
+              <a:rPr lang="en-US" sz="1300" b="1" dirty="0">
+                <a:solidFill>
+                  <a:srgbClr val="12655A"/>
+                </a:solidFill>
+                <a:latin typeface="Calibri" pitchFamily="34" charset="0"/>
+                <a:ea typeface="Calibri" pitchFamily="34" charset="-122"/>
+                <a:cs typeface="Calibri" pitchFamily="34" charset="-120"/>
+              </a:rPr>
+              <a:t>15</a:t>
+            </a:r>
+            <a:endParaRPr lang="en-US" sz="1300" dirty="0"/>
+          </a:p>
+        </p:txBody>
+      </p:sp>
+      <p:sp>
+        <p:nvSpPr>
+          <p:cNvPr id="23" name="Text 21"/>
+          <p:cNvSpPr txBox="1"/>
+          <p:nvPr/>
+        </p:nvSpPr>
+        <p:spPr>
+          <a:xfrm>
+            <a:off x="1417320" y="5102352"/>
+            <a:ext cx="9875520" cy="731520"/>
+          </a:xfrm>
+          <a:prstGeom prst="rect">
+            <a:avLst/>
+          </a:prstGeom>
+          <a:noFill/>
+          <a:ln/>
+        </p:spPr>
+        <p:txBody>
+          <a:bodyPr wrap="square" lIns="0" tIns="0" rIns="0" bIns="0" rtlCol="0" anchor="ctr"/>
+          <a:lstStyle/>
+          <a:p>
+            <a:pPr indent="0" marL="0">
+              <a:lnSpc>
+                <a:spcPct val="115000"/>
+              </a:lnSpc>
+              <a:buNone/>
+            </a:pPr>
+            <a:r>
+              <a:rPr lang="en-US" sz="1300" dirty="0">
+                <a:solidFill>
+                  <a:srgbClr val="16262E"/>
+                </a:solidFill>
+                <a:latin typeface="Calibri" pitchFamily="34" charset="0"/>
+                <a:ea typeface="Calibri" pitchFamily="34" charset="-122"/>
+                <a:cs typeface="Calibri" pitchFamily="34" charset="-120"/>
+              </a:rPr>
+              <a:t>캡스톤 최종 발표 — 제출한 논문 내용을 발표용으로 재구성</a:t>
+            </a:r>
+            <a:endParaRPr lang="en-US" sz="1300" dirty="0"/>
+          </a:p>
+        </p:txBody>
+      </p:sp>
+      <p:sp>
+        <p:nvSpPr>
+          <p:cNvPr id="24" name="Text 22"/>
+          <p:cNvSpPr txBox="1"/>
+          <p:nvPr/>
+        </p:nvSpPr>
+        <p:spPr>
+          <a:xfrm>
+            <a:off x="640080" y="6080760"/>
+            <a:ext cx="10908792" cy="411480"/>
+          </a:xfrm>
+          <a:prstGeom prst="rect">
+            <a:avLst/>
+          </a:prstGeom>
+          <a:noFill/>
+          <a:ln/>
+        </p:spPr>
+        <p:txBody>
+          <a:bodyPr wrap="square" lIns="0" tIns="0" rIns="0" bIns="0" rtlCol="0" anchor="ctr"/>
+          <a:lstStyle/>
+          <a:p>
+            <a:pPr algn="ctr" indent="0" marL="0">
+              <a:buNone/>
+            </a:pPr>
+            <a:r>
+              <a:rPr lang="en-US" sz="1350" i="1" dirty="0">
+                <a:solidFill>
+                  <a:srgbClr val="9FB6BC"/>
+                </a:solidFill>
+                <a:latin typeface="Calibri" pitchFamily="34" charset="0"/>
+                <a:ea typeface="Calibri" pitchFamily="34" charset="-122"/>
+                <a:cs typeface="Calibri" pitchFamily="34" charset="-120"/>
+              </a:rPr>
+              <a:t>이상으로 4주차 발표를 마치겠습니다. 질문 받겠습니다.</a:t>
+            </a:r>
+            <a:endParaRPr lang="en-US" sz="1350" dirty="0"/>
+          </a:p>
+        </p:txBody>
+      </p:sp>
+      <p:sp>
+        <p:nvSpPr>
+          <p:cNvPr id="25" name="Text 23"/>
+          <p:cNvSpPr txBox="1"/>
+          <p:nvPr/>
+        </p:nvSpPr>
+        <p:spPr>
+          <a:xfrm>
+            <a:off x="11365992" y="6355080"/>
+            <a:ext cx="548640" cy="320040"/>
+          </a:xfrm>
+          <a:prstGeom prst="rect">
+            <a:avLst/>
+          </a:prstGeom>
+          <a:noFill/>
+          <a:ln/>
+        </p:spPr>
+        <p:txBody>
+          <a:bodyPr wrap="square" lIns="0" tIns="0" rIns="0" bIns="0" rtlCol="0" anchor="ctr"/>
+          <a:lstStyle/>
+          <a:p>
+            <a:pPr algn="r" indent="0" marL="0">
+              <a:buNone/>
+            </a:pPr>
+            <a:r>
+              <a:rPr lang="en-US" sz="1100" dirty="0">
+                <a:solidFill>
+                  <a:srgbClr val="9FB6BC"/>
+                </a:solidFill>
+                <a:latin typeface="Calibri" pitchFamily="34" charset="0"/>
+                <a:ea typeface="Calibri" pitchFamily="34" charset="-122"/>
+                <a:cs typeface="Calibri" pitchFamily="34" charset="-120"/>
+              </a:rPr>
+              <a:t>10</a:t>
+            </a:r>
+            <a:endParaRPr lang="en-US" sz="1100" dirty="0"/>
+          </a:p>
+        </p:txBody>
+      </p:sp>
+    </p:spTree>
+  </p:cSld>
+  <p:clrMapOvr>
+    <a:masterClrMapping/>
+  </p:clrMapOvr>
+</p:sld>
+</file>
+
 <file path=ppt/slides/slide2.xml><?xml version="1.0" encoding="utf-8"?>
 <p:sld xmlns:a="http://schemas.openxmlformats.org/drawingml/2006/main" xmlns:r="http://schemas.openxmlformats.org/officeDocument/2006/relationships" xmlns:p="http://schemas.openxmlformats.org/presentationml/2006/main">
   <p:cSld name="Slide 2">
@@ -2113,7 +3111,7 @@
         </p:nvSpPr>
         <p:spPr>
           <a:xfrm>
-            <a:off x="6172200" y="1920240"/>
+            <a:off x="640080" y="4389120"/>
             <a:ext cx="5074920" cy="603504"/>
           </a:xfrm>
           <a:prstGeom prst="roundRect">
@@ -2135,7 +3133,7 @@
         </p:nvSpPr>
         <p:spPr>
           <a:xfrm>
-            <a:off x="6400800" y="1920240"/>
+            <a:off x="868680" y="4389120"/>
             <a:ext cx="4709160" cy="603504"/>
           </a:xfrm>
           <a:prstGeom prst="rect">
@@ -2174,7 +3172,7 @@
         </p:nvSpPr>
         <p:spPr>
           <a:xfrm>
-            <a:off x="6172200" y="2743200"/>
+            <a:off x="6172200" y="1920240"/>
             <a:ext cx="5074920" cy="603504"/>
           </a:xfrm>
           <a:prstGeom prst="roundRect">
@@ -2196,7 +3194,7 @@
         </p:nvSpPr>
         <p:spPr>
           <a:xfrm>
-            <a:off x="6400800" y="2743200"/>
+            <a:off x="6400800" y="1920240"/>
             <a:ext cx="4709160" cy="603504"/>
           </a:xfrm>
           <a:prstGeom prst="rect">
@@ -2229,14 +3227,36 @@
       </p:sp>
       <p:sp>
         <p:nvSpPr>
-          <p:cNvPr id="14" name="Text 12"/>
-          <p:cNvSpPr txBox="1"/>
-          <p:nvPr/>
-        </p:nvSpPr>
-        <p:spPr>
-          <a:xfrm>
-            <a:off x="640080" y="4617720"/>
-            <a:ext cx="10908792" cy="457200"/>
+          <p:cNvPr id="14" name="Shape 12"/>
+          <p:cNvSpPr/>
+          <p:nvPr/>
+        </p:nvSpPr>
+        <p:spPr>
+          <a:xfrm>
+            <a:off x="6172200" y="2743200"/>
+            <a:ext cx="5074920" cy="603504"/>
+          </a:xfrm>
+          <a:prstGeom prst="roundRect">
+            <a:avLst>
+              <a:gd name="adj" fmla="val 15152"/>
+            </a:avLst>
+          </a:prstGeom>
+          <a:solidFill>
+            <a:srgbClr val="12655A"/>
+          </a:solidFill>
+          <a:ln/>
+        </p:spPr>
+      </p:sp>
+      <p:sp>
+        <p:nvSpPr>
+          <p:cNvPr id="15" name="Text 13"/>
+          <p:cNvSpPr txBox="1"/>
+          <p:nvPr/>
+        </p:nvSpPr>
+        <p:spPr>
+          <a:xfrm>
+            <a:off x="6400800" y="2743200"/>
+            <a:ext cx="4709160" cy="603504"/>
           </a:xfrm>
           <a:prstGeom prst="rect">
             <a:avLst/>
@@ -2252,14 +3272,114 @@
               <a:buNone/>
             </a:pPr>
             <a:r>
-              <a:rPr lang="en-US" sz="1200" i="1" dirty="0">
-                <a:solidFill>
-                  <a:srgbClr val="9FB6BC"/>
+              <a:rPr lang="en-US" sz="1350" b="1" dirty="0">
+                <a:solidFill>
+                  <a:srgbClr val="EAF3F1"/>
                 </a:solidFill>
                 <a:latin typeface="Calibri" pitchFamily="34" charset="0"/>
                 <a:ea typeface="Calibri" pitchFamily="34" charset="-122"/>
                 <a:cs typeface="Calibri" pitchFamily="34" charset="-120"/>
               </a:rPr>
+              <a:t>06   6~10주차 구현 로드맵</a:t>
+            </a:r>
+            <a:endParaRPr lang="en-US" sz="1350" dirty="0"/>
+          </a:p>
+        </p:txBody>
+      </p:sp>
+      <p:sp>
+        <p:nvSpPr>
+          <p:cNvPr id="16" name="Shape 14"/>
+          <p:cNvSpPr/>
+          <p:nvPr/>
+        </p:nvSpPr>
+        <p:spPr>
+          <a:xfrm>
+            <a:off x="6172200" y="3566160"/>
+            <a:ext cx="5074920" cy="603504"/>
+          </a:xfrm>
+          <a:prstGeom prst="roundRect">
+            <a:avLst>
+              <a:gd name="adj" fmla="val 15152"/>
+            </a:avLst>
+          </a:prstGeom>
+          <a:solidFill>
+            <a:srgbClr val="12655A"/>
+          </a:solidFill>
+          <a:ln/>
+        </p:spPr>
+      </p:sp>
+      <p:sp>
+        <p:nvSpPr>
+          <p:cNvPr id="17" name="Text 15"/>
+          <p:cNvSpPr txBox="1"/>
+          <p:nvPr/>
+        </p:nvSpPr>
+        <p:spPr>
+          <a:xfrm>
+            <a:off x="6400800" y="3566160"/>
+            <a:ext cx="4709160" cy="603504"/>
+          </a:xfrm>
+          <a:prstGeom prst="rect">
+            <a:avLst/>
+          </a:prstGeom>
+          <a:noFill/>
+          <a:ln/>
+        </p:spPr>
+        <p:txBody>
+          <a:bodyPr wrap="square" lIns="0" tIns="0" rIns="0" bIns="0" rtlCol="0" anchor="ctr"/>
+          <a:lstStyle/>
+          <a:p>
+            <a:pPr indent="0" marL="0">
+              <a:buNone/>
+            </a:pPr>
+            <a:r>
+              <a:rPr lang="en-US" sz="1350" b="1" dirty="0">
+                <a:solidFill>
+                  <a:srgbClr val="EAF3F1"/>
+                </a:solidFill>
+                <a:latin typeface="Calibri" pitchFamily="34" charset="0"/>
+                <a:ea typeface="Calibri" pitchFamily="34" charset="-122"/>
+                <a:cs typeface="Calibri" pitchFamily="34" charset="-120"/>
+              </a:rPr>
+              <a:t>07   11~15주차 논문·발표 마무리</a:t>
+            </a:r>
+            <a:endParaRPr lang="en-US" sz="1350" dirty="0"/>
+          </a:p>
+        </p:txBody>
+      </p:sp>
+      <p:sp>
+        <p:nvSpPr>
+          <p:cNvPr id="18" name="Text 16"/>
+          <p:cNvSpPr txBox="1"/>
+          <p:nvPr/>
+        </p:nvSpPr>
+        <p:spPr>
+          <a:xfrm>
+            <a:off x="640080" y="5440680"/>
+            <a:ext cx="10908792" cy="457200"/>
+          </a:xfrm>
+          <a:prstGeom prst="rect">
+            <a:avLst/>
+          </a:prstGeom>
+          <a:noFill/>
+          <a:ln/>
+        </p:spPr>
+        <p:txBody>
+          <a:bodyPr wrap="square" lIns="0" tIns="0" rIns="0" bIns="0" rtlCol="0" anchor="ctr"/>
+          <a:lstStyle/>
+          <a:p>
+            <a:pPr indent="0" marL="0">
+              <a:buNone/>
+            </a:pPr>
+            <a:r>
+              <a:rPr lang="en-US" sz="1200" i="1" dirty="0">
+                <a:solidFill>
+                  <a:srgbClr val="9FB6BC"/>
+                </a:solidFill>
+                <a:latin typeface="Calibri" pitchFamily="34" charset="0"/>
+                <a:ea typeface="Calibri" pitchFamily="34" charset="-122"/>
+                <a:cs typeface="Calibri" pitchFamily="34" charset="-120"/>
+              </a:rPr>
               <a:t>지난주(3주차)는 알고리즘 비교 연구조사로 대체 진행 — 그만큼 밀린 캘리브레이션·게이트가 이번 주로 이월됐습니다.</a:t>
             </a:r>
             <a:endParaRPr lang="en-US" sz="1200" dirty="0"/>
@@ -2268,7 +3388,7 @@
       </p:sp>
       <p:sp>
         <p:nvSpPr>
-          <p:cNvPr id="15" name="Text 13"/>
+          <p:cNvPr id="19" name="Text 17"/>
           <p:cNvSpPr txBox="1"/>
           <p:nvPr/>
         </p:nvSpPr>
@@ -8213,24 +9333,24 @@
         </p:nvSpPr>
         <p:spPr>
           <a:xfrm>
-            <a:off x="640080" y="6080760"/>
-            <a:ext cx="10908792" cy="411480"/>
-          </a:xfrm>
-          <a:prstGeom prst="rect">
-            <a:avLst/>
-          </a:prstGeom>
-          <a:noFill/>
-          <a:ln/>
-        </p:spPr>
-        <p:txBody>
-          <a:bodyPr wrap="square" lIns="0" tIns="0" rIns="0" bIns="0" rtlCol="0" anchor="ctr"/>
-          <a:lstStyle/>
-          <a:p>
-            <a:pPr algn="ctr" indent="0" marL="0">
-              <a:buNone/>
-            </a:pPr>
-            <a:r>
-              <a:rPr lang="en-US" sz="1350" i="1" dirty="0">
+            <a:off x="11365992" y="6355080"/>
+            <a:ext cx="548640" cy="320040"/>
+          </a:xfrm>
+          <a:prstGeom prst="rect">
+            <a:avLst/>
+          </a:prstGeom>
+          <a:noFill/>
+          <a:ln/>
+        </p:spPr>
+        <p:txBody>
+          <a:bodyPr wrap="square" lIns="0" tIns="0" rIns="0" bIns="0" rtlCol="0" anchor="ctr"/>
+          <a:lstStyle/>
+          <a:p>
+            <a:pPr algn="r" indent="0" marL="0">
+              <a:buNone/>
+            </a:pPr>
+            <a:r>
+              <a:rPr lang="en-US" sz="1100" dirty="0">
                 <a:solidFill>
                   <a:srgbClr val="9FB6BC"/>
                 </a:solidFill>
@@ -8238,46 +9358,827 @@
                 <a:ea typeface="Calibri" pitchFamily="34" charset="-122"/>
                 <a:cs typeface="Calibri" pitchFamily="34" charset="-120"/>
               </a:rPr>
-              <a:t>질문 받겠습니다</a:t>
-            </a:r>
-            <a:endParaRPr lang="en-US" sz="1350" dirty="0"/>
-          </a:p>
-        </p:txBody>
-      </p:sp>
-      <p:sp>
-        <p:nvSpPr>
-          <p:cNvPr id="25" name="Text 23"/>
-          <p:cNvSpPr txBox="1"/>
-          <p:nvPr/>
-        </p:nvSpPr>
-        <p:spPr>
-          <a:xfrm>
-            <a:off x="11365992" y="6355080"/>
-            <a:ext cx="548640" cy="320040"/>
-          </a:xfrm>
-          <a:prstGeom prst="rect">
-            <a:avLst/>
-          </a:prstGeom>
-          <a:noFill/>
-          <a:ln/>
-        </p:spPr>
-        <p:txBody>
-          <a:bodyPr wrap="square" lIns="0" tIns="0" rIns="0" bIns="0" rtlCol="0" anchor="ctr"/>
-          <a:lstStyle/>
-          <a:p>
-            <a:pPr algn="r" indent="0" marL="0">
-              <a:buNone/>
-            </a:pPr>
-            <a:r>
-              <a:rPr lang="en-US" sz="1100" dirty="0">
-                <a:solidFill>
-                  <a:srgbClr val="9FB6BC"/>
+              <a:t>08</a:t>
+            </a:r>
+            <a:endParaRPr lang="en-US" sz="1100" dirty="0"/>
+          </a:p>
+        </p:txBody>
+      </p:sp>
+    </p:spTree>
+  </p:cSld>
+  <p:clrMapOvr>
+    <a:masterClrMapping/>
+  </p:clrMapOvr>
+</p:sld>
+</file>
+
+<file path=ppt/slides/slide9.xml><?xml version="1.0" encoding="utf-8"?>
+<p:sld xmlns:a="http://schemas.openxmlformats.org/drawingml/2006/main" xmlns:r="http://schemas.openxmlformats.org/officeDocument/2006/relationships" xmlns:p="http://schemas.openxmlformats.org/presentationml/2006/main">
+  <p:cSld name="Slide 9">
+    <p:bg>
+      <p:bgPr>
+        <a:blipFill dpi="0" rotWithShape="1">
+          <a:blip r:embed="rId1">
+            <a:lum/>
+          </a:blip>
+          <a:srcRect/>
+          <a:stretch>
+            <a:fillRect/>
+          </a:stretch>
+        </a:blipFill>
+        <a:effectLst/>
+      </p:bgPr>
+    </p:bg>
+    <p:spTree>
+      <p:nvGrpSpPr>
+        <p:cNvPr id="1" name=""/>
+        <p:cNvGrpSpPr/>
+        <p:nvPr/>
+      </p:nvGrpSpPr>
+      <p:grpSpPr>
+        <a:xfrm>
+          <a:off x="0" y="0"/>
+          <a:ext cx="0" cy="0"/>
+          <a:chOff x="0" y="0"/>
+          <a:chExt cx="0" cy="0"/>
+        </a:xfrm>
+      </p:grpSpPr>
+      <p:sp>
+        <p:nvSpPr>
+          <p:cNvPr id="2" name="Text 0"/>
+          <p:cNvSpPr txBox="1"/>
+          <p:nvPr/>
+        </p:nvSpPr>
+        <p:spPr>
+          <a:xfrm>
+            <a:off x="640080" y="384048"/>
+            <a:ext cx="8229600" cy="320040"/>
+          </a:xfrm>
+          <a:prstGeom prst="rect">
+            <a:avLst/>
+          </a:prstGeom>
+          <a:noFill/>
+          <a:ln/>
+        </p:spPr>
+        <p:txBody>
+          <a:bodyPr wrap="square" lIns="0" tIns="0" rIns="0" bIns="0" rtlCol="0" anchor="ctr"/>
+          <a:lstStyle/>
+          <a:p>
+            <a:pPr indent="0" marL="0">
+              <a:buNone/>
+            </a:pPr>
+            <a:r>
+              <a:rPr lang="en-US" sz="1200" b="1" spc="200" kern="0" dirty="0">
+                <a:solidFill>
+                  <a:srgbClr val="2FE0C4"/>
                 </a:solidFill>
                 <a:latin typeface="Calibri" pitchFamily="34" charset="0"/>
                 <a:ea typeface="Calibri" pitchFamily="34" charset="-122"/>
                 <a:cs typeface="Calibri" pitchFamily="34" charset="-120"/>
               </a:rPr>
-              <a:t>08</a:t>
+              <a:t>ROADMAP: WEEKS 6-10</a:t>
+            </a:r>
+            <a:endParaRPr lang="en-US" sz="1200" dirty="0"/>
+          </a:p>
+        </p:txBody>
+      </p:sp>
+      <p:sp>
+        <p:nvSpPr>
+          <p:cNvPr id="3" name="Text 1"/>
+          <p:cNvSpPr txBox="1"/>
+          <p:nvPr/>
+        </p:nvSpPr>
+        <p:spPr>
+          <a:xfrm>
+            <a:off x="640080" y="685800"/>
+            <a:ext cx="10881360" cy="822960"/>
+          </a:xfrm>
+          <a:prstGeom prst="rect">
+            <a:avLst/>
+          </a:prstGeom>
+          <a:noFill/>
+          <a:ln/>
+        </p:spPr>
+        <p:txBody>
+          <a:bodyPr wrap="square" lIns="0" tIns="0" rIns="0" bIns="0" rtlCol="0" anchor="ctr"/>
+          <a:lstStyle/>
+          <a:p>
+            <a:pPr indent="0" marL="0">
+              <a:buNone/>
+            </a:pPr>
+            <a:r>
+              <a:rPr lang="en-US" sz="2700" b="1" dirty="0">
+                <a:solidFill>
+                  <a:srgbClr val="EAF3F1"/>
+                </a:solidFill>
+                <a:latin typeface="Arial" pitchFamily="34" charset="0"/>
+                <a:ea typeface="Arial" pitchFamily="34" charset="-122"/>
+                <a:cs typeface="Arial" pitchFamily="34" charset="-120"/>
+              </a:rPr>
+              <a:t>6~10주차 구현 로드맵</a:t>
+            </a:r>
+            <a:endParaRPr lang="en-US" sz="2700" dirty="0"/>
+          </a:p>
+        </p:txBody>
+      </p:sp>
+      <p:sp>
+        <p:nvSpPr>
+          <p:cNvPr id="4" name="Shape 2"/>
+          <p:cNvSpPr/>
+          <p:nvPr/>
+        </p:nvSpPr>
+        <p:spPr>
+          <a:xfrm>
+            <a:off x="640080" y="1737360"/>
+            <a:ext cx="10908792" cy="731520"/>
+          </a:xfrm>
+          <a:prstGeom prst="roundRect">
+            <a:avLst>
+              <a:gd name="adj" fmla="val 12500"/>
+            </a:avLst>
+          </a:prstGeom>
+          <a:solidFill>
+            <a:srgbClr val="FFFFFF"/>
+          </a:solidFill>
+          <a:ln/>
+        </p:spPr>
+      </p:sp>
+      <p:sp>
+        <p:nvSpPr>
+          <p:cNvPr id="5" name="Shape 3"/>
+          <p:cNvSpPr/>
+          <p:nvPr/>
+        </p:nvSpPr>
+        <p:spPr>
+          <a:xfrm>
+            <a:off x="822960" y="1920240"/>
+            <a:ext cx="457200" cy="365760"/>
+          </a:xfrm>
+          <a:prstGeom prst="roundRect">
+            <a:avLst>
+              <a:gd name="adj" fmla="val 20000"/>
+            </a:avLst>
+          </a:prstGeom>
+          <a:solidFill>
+            <a:srgbClr val="E9FBF7"/>
+          </a:solidFill>
+          <a:ln/>
+        </p:spPr>
+      </p:sp>
+      <p:sp>
+        <p:nvSpPr>
+          <p:cNvPr id="6" name="Text 4"/>
+          <p:cNvSpPr txBox="1"/>
+          <p:nvPr/>
+        </p:nvSpPr>
+        <p:spPr>
+          <a:xfrm>
+            <a:off x="822960" y="1920240"/>
+            <a:ext cx="457200" cy="365760"/>
+          </a:xfrm>
+          <a:prstGeom prst="rect">
+            <a:avLst/>
+          </a:prstGeom>
+          <a:noFill/>
+          <a:ln/>
+        </p:spPr>
+        <p:txBody>
+          <a:bodyPr wrap="square" lIns="0" tIns="0" rIns="0" bIns="0" rtlCol="0" anchor="ctr"/>
+          <a:lstStyle/>
+          <a:p>
+            <a:pPr algn="ctr" indent="0" marL="0">
+              <a:buNone/>
+            </a:pPr>
+            <a:r>
+              <a:rPr lang="en-US" sz="1300" b="1" dirty="0">
+                <a:solidFill>
+                  <a:srgbClr val="12655A"/>
+                </a:solidFill>
+                <a:latin typeface="Calibri" pitchFamily="34" charset="0"/>
+                <a:ea typeface="Calibri" pitchFamily="34" charset="-122"/>
+                <a:cs typeface="Calibri" pitchFamily="34" charset="-120"/>
+              </a:rPr>
+              <a:t>6</a:t>
+            </a:r>
+            <a:endParaRPr lang="en-US" sz="1300" dirty="0"/>
+          </a:p>
+        </p:txBody>
+      </p:sp>
+      <p:sp>
+        <p:nvSpPr>
+          <p:cNvPr id="7" name="Text 5"/>
+          <p:cNvSpPr txBox="1"/>
+          <p:nvPr/>
+        </p:nvSpPr>
+        <p:spPr>
+          <a:xfrm>
+            <a:off x="1417320" y="1737360"/>
+            <a:ext cx="9875520" cy="731520"/>
+          </a:xfrm>
+          <a:prstGeom prst="rect">
+            <a:avLst/>
+          </a:prstGeom>
+          <a:noFill/>
+          <a:ln/>
+        </p:spPr>
+        <p:txBody>
+          <a:bodyPr wrap="square" lIns="0" tIns="0" rIns="0" bIns="0" rtlCol="0" anchor="ctr"/>
+          <a:lstStyle/>
+          <a:p>
+            <a:pPr indent="0" marL="0">
+              <a:lnSpc>
+                <a:spcPct val="115000"/>
+              </a:lnSpc>
+              <a:buNone/>
+            </a:pPr>
+            <a:r>
+              <a:rPr lang="en-US" sz="1300" dirty="0">
+                <a:solidFill>
+                  <a:srgbClr val="16262E"/>
+                </a:solidFill>
+                <a:latin typeface="Calibri" pitchFamily="34" charset="0"/>
+                <a:ea typeface="Calibri" pitchFamily="34" charset="-122"/>
+                <a:cs typeface="Calibri" pitchFamily="34" charset="-120"/>
+              </a:rPr>
+              <a:t>데이터 수집·라벨링 마무리, SQLite 저장 계층 구현, RF 기준모델 학습(Feature Selection·Weighting)</a:t>
+            </a:r>
+            <a:endParaRPr lang="en-US" sz="1300" dirty="0"/>
+          </a:p>
+        </p:txBody>
+      </p:sp>
+      <p:sp>
+        <p:nvSpPr>
+          <p:cNvPr id="8" name="Shape 6"/>
+          <p:cNvSpPr/>
+          <p:nvPr/>
+        </p:nvSpPr>
+        <p:spPr>
+          <a:xfrm>
+            <a:off x="640080" y="2578608"/>
+            <a:ext cx="10908792" cy="731520"/>
+          </a:xfrm>
+          <a:prstGeom prst="roundRect">
+            <a:avLst>
+              <a:gd name="adj" fmla="val 12500"/>
+            </a:avLst>
+          </a:prstGeom>
+          <a:solidFill>
+            <a:srgbClr val="FFFFFF"/>
+          </a:solidFill>
+          <a:ln/>
+        </p:spPr>
+      </p:sp>
+      <p:sp>
+        <p:nvSpPr>
+          <p:cNvPr id="9" name="Shape 7"/>
+          <p:cNvSpPr/>
+          <p:nvPr/>
+        </p:nvSpPr>
+        <p:spPr>
+          <a:xfrm>
+            <a:off x="822960" y="2761488"/>
+            <a:ext cx="457200" cy="365760"/>
+          </a:xfrm>
+          <a:prstGeom prst="roundRect">
+            <a:avLst>
+              <a:gd name="adj" fmla="val 20000"/>
+            </a:avLst>
+          </a:prstGeom>
+          <a:solidFill>
+            <a:srgbClr val="E9FBF7"/>
+          </a:solidFill>
+          <a:ln/>
+        </p:spPr>
+      </p:sp>
+      <p:sp>
+        <p:nvSpPr>
+          <p:cNvPr id="10" name="Text 8"/>
+          <p:cNvSpPr txBox="1"/>
+          <p:nvPr/>
+        </p:nvSpPr>
+        <p:spPr>
+          <a:xfrm>
+            <a:off x="822960" y="2761488"/>
+            <a:ext cx="457200" cy="365760"/>
+          </a:xfrm>
+          <a:prstGeom prst="rect">
+            <a:avLst/>
+          </a:prstGeom>
+          <a:noFill/>
+          <a:ln/>
+        </p:spPr>
+        <p:txBody>
+          <a:bodyPr wrap="square" lIns="0" tIns="0" rIns="0" bIns="0" rtlCol="0" anchor="ctr"/>
+          <a:lstStyle/>
+          <a:p>
+            <a:pPr algn="ctr" indent="0" marL="0">
+              <a:buNone/>
+            </a:pPr>
+            <a:r>
+              <a:rPr lang="en-US" sz="1300" b="1" dirty="0">
+                <a:solidFill>
+                  <a:srgbClr val="12655A"/>
+                </a:solidFill>
+                <a:latin typeface="Calibri" pitchFamily="34" charset="0"/>
+                <a:ea typeface="Calibri" pitchFamily="34" charset="-122"/>
+                <a:cs typeface="Calibri" pitchFamily="34" charset="-120"/>
+              </a:rPr>
+              <a:t>7</a:t>
+            </a:r>
+            <a:endParaRPr lang="en-US" sz="1300" dirty="0"/>
+          </a:p>
+        </p:txBody>
+      </p:sp>
+      <p:sp>
+        <p:nvSpPr>
+          <p:cNvPr id="11" name="Text 9"/>
+          <p:cNvSpPr txBox="1"/>
+          <p:nvPr/>
+        </p:nvSpPr>
+        <p:spPr>
+          <a:xfrm>
+            <a:off x="1417320" y="2578608"/>
+            <a:ext cx="9875520" cy="731520"/>
+          </a:xfrm>
+          <a:prstGeom prst="rect">
+            <a:avLst/>
+          </a:prstGeom>
+          <a:noFill/>
+          <a:ln/>
+        </p:spPr>
+        <p:txBody>
+          <a:bodyPr wrap="square" lIns="0" tIns="0" rIns="0" bIns="0" rtlCol="0" anchor="ctr"/>
+          <a:lstStyle/>
+          <a:p>
+            <a:pPr indent="0" marL="0">
+              <a:lnSpc>
+                <a:spcPct val="115000"/>
+              </a:lnSpc>
+              <a:buNone/>
+            </a:pPr>
+            <a:r>
+              <a:rPr lang="en-US" sz="1300" dirty="0">
+                <a:solidFill>
+                  <a:srgbClr val="16262E"/>
+                </a:solidFill>
+                <a:latin typeface="Calibri" pitchFamily="34" charset="0"/>
+                <a:ea typeface="Calibri" pitchFamily="34" charset="-122"/>
+                <a:cs typeface="Calibri" pitchFamily="34" charset="-120"/>
+              </a:rPr>
+              <a:t>XGBoost·LightGBM을 RF와 동일 데이터·특징으로 공정 비교해 최종 분류기 선정, PyInstaller 패키징 사전 점검</a:t>
+            </a:r>
+            <a:endParaRPr lang="en-US" sz="1300" dirty="0"/>
+          </a:p>
+        </p:txBody>
+      </p:sp>
+      <p:sp>
+        <p:nvSpPr>
+          <p:cNvPr id="12" name="Shape 10"/>
+          <p:cNvSpPr/>
+          <p:nvPr/>
+        </p:nvSpPr>
+        <p:spPr>
+          <a:xfrm>
+            <a:off x="640080" y="3419856"/>
+            <a:ext cx="10908792" cy="731520"/>
+          </a:xfrm>
+          <a:prstGeom prst="roundRect">
+            <a:avLst>
+              <a:gd name="adj" fmla="val 12500"/>
+            </a:avLst>
+          </a:prstGeom>
+          <a:solidFill>
+            <a:srgbClr val="FFFFFF"/>
+          </a:solidFill>
+          <a:ln/>
+        </p:spPr>
+      </p:sp>
+      <p:sp>
+        <p:nvSpPr>
+          <p:cNvPr id="13" name="Shape 11"/>
+          <p:cNvSpPr/>
+          <p:nvPr/>
+        </p:nvSpPr>
+        <p:spPr>
+          <a:xfrm>
+            <a:off x="822960" y="3602736"/>
+            <a:ext cx="457200" cy="365760"/>
+          </a:xfrm>
+          <a:prstGeom prst="roundRect">
+            <a:avLst>
+              <a:gd name="adj" fmla="val 20000"/>
+            </a:avLst>
+          </a:prstGeom>
+          <a:solidFill>
+            <a:srgbClr val="E9FBF7"/>
+          </a:solidFill>
+          <a:ln/>
+        </p:spPr>
+      </p:sp>
+      <p:sp>
+        <p:nvSpPr>
+          <p:cNvPr id="14" name="Text 12"/>
+          <p:cNvSpPr txBox="1"/>
+          <p:nvPr/>
+        </p:nvSpPr>
+        <p:spPr>
+          <a:xfrm>
+            <a:off x="822960" y="3602736"/>
+            <a:ext cx="457200" cy="365760"/>
+          </a:xfrm>
+          <a:prstGeom prst="rect">
+            <a:avLst/>
+          </a:prstGeom>
+          <a:noFill/>
+          <a:ln/>
+        </p:spPr>
+        <p:txBody>
+          <a:bodyPr wrap="square" lIns="0" tIns="0" rIns="0" bIns="0" rtlCol="0" anchor="ctr"/>
+          <a:lstStyle/>
+          <a:p>
+            <a:pPr algn="ctr" indent="0" marL="0">
+              <a:buNone/>
+            </a:pPr>
+            <a:r>
+              <a:rPr lang="en-US" sz="1300" b="1" dirty="0">
+                <a:solidFill>
+                  <a:srgbClr val="12655A"/>
+                </a:solidFill>
+                <a:latin typeface="Calibri" pitchFamily="34" charset="0"/>
+                <a:ea typeface="Calibri" pitchFamily="34" charset="-122"/>
+                <a:cs typeface="Calibri" pitchFamily="34" charset="-120"/>
+              </a:rPr>
+              <a:t>8</a:t>
+            </a:r>
+            <a:endParaRPr lang="en-US" sz="1300" dirty="0"/>
+          </a:p>
+        </p:txBody>
+      </p:sp>
+      <p:sp>
+        <p:nvSpPr>
+          <p:cNvPr id="15" name="Text 13"/>
+          <p:cNvSpPr txBox="1"/>
+          <p:nvPr/>
+        </p:nvSpPr>
+        <p:spPr>
+          <a:xfrm>
+            <a:off x="1417320" y="3419856"/>
+            <a:ext cx="9875520" cy="731520"/>
+          </a:xfrm>
+          <a:prstGeom prst="rect">
+            <a:avLst/>
+          </a:prstGeom>
+          <a:noFill/>
+          <a:ln/>
+        </p:spPr>
+        <p:txBody>
+          <a:bodyPr wrap="square" lIns="0" tIns="0" rIns="0" bIns="0" rtlCol="0" anchor="ctr"/>
+          <a:lstStyle/>
+          <a:p>
+            <a:pPr indent="0" marL="0">
+              <a:lnSpc>
+                <a:spcPct val="115000"/>
+              </a:lnSpc>
+              <a:buNone/>
+            </a:pPr>
+            <a:r>
+              <a:rPr lang="en-US" sz="1300" dirty="0">
+                <a:solidFill>
+                  <a:srgbClr val="16262E"/>
+                </a:solidFill>
+                <a:latin typeface="Calibri" pitchFamily="34" charset="0"/>
+                <a:ea typeface="Calibri" pitchFamily="34" charset="-122"/>
+                <a:cs typeface="Calibri" pitchFamily="34" charset="-120"/>
+              </a:rPr>
+              <a:t>최종 분류기를 판정 로직에 통합, TTS 알림 연동, 백그라운드 경량화(TFLite 스레드 제한·우선순위 조정)</a:t>
+            </a:r>
+            <a:endParaRPr lang="en-US" sz="1300" dirty="0"/>
+          </a:p>
+        </p:txBody>
+      </p:sp>
+      <p:sp>
+        <p:nvSpPr>
+          <p:cNvPr id="16" name="Shape 14"/>
+          <p:cNvSpPr/>
+          <p:nvPr/>
+        </p:nvSpPr>
+        <p:spPr>
+          <a:xfrm>
+            <a:off x="640080" y="4261104"/>
+            <a:ext cx="10908792" cy="731520"/>
+          </a:xfrm>
+          <a:prstGeom prst="roundRect">
+            <a:avLst>
+              <a:gd name="adj" fmla="val 12500"/>
+            </a:avLst>
+          </a:prstGeom>
+          <a:solidFill>
+            <a:srgbClr val="FFFFFF"/>
+          </a:solidFill>
+          <a:ln/>
+        </p:spPr>
+      </p:sp>
+      <p:sp>
+        <p:nvSpPr>
+          <p:cNvPr id="17" name="Shape 15"/>
+          <p:cNvSpPr/>
+          <p:nvPr/>
+        </p:nvSpPr>
+        <p:spPr>
+          <a:xfrm>
+            <a:off x="822960" y="4443984"/>
+            <a:ext cx="457200" cy="365760"/>
+          </a:xfrm>
+          <a:prstGeom prst="roundRect">
+            <a:avLst>
+              <a:gd name="adj" fmla="val 20000"/>
+            </a:avLst>
+          </a:prstGeom>
+          <a:solidFill>
+            <a:srgbClr val="E9FBF7"/>
+          </a:solidFill>
+          <a:ln/>
+        </p:spPr>
+      </p:sp>
+      <p:sp>
+        <p:nvSpPr>
+          <p:cNvPr id="18" name="Text 16"/>
+          <p:cNvSpPr txBox="1"/>
+          <p:nvPr/>
+        </p:nvSpPr>
+        <p:spPr>
+          <a:xfrm>
+            <a:off x="822960" y="4443984"/>
+            <a:ext cx="457200" cy="365760"/>
+          </a:xfrm>
+          <a:prstGeom prst="rect">
+            <a:avLst/>
+          </a:prstGeom>
+          <a:noFill/>
+          <a:ln/>
+        </p:spPr>
+        <p:txBody>
+          <a:bodyPr wrap="square" lIns="0" tIns="0" rIns="0" bIns="0" rtlCol="0" anchor="ctr"/>
+          <a:lstStyle/>
+          <a:p>
+            <a:pPr algn="ctr" indent="0" marL="0">
+              <a:buNone/>
+            </a:pPr>
+            <a:r>
+              <a:rPr lang="en-US" sz="1300" b="1" dirty="0">
+                <a:solidFill>
+                  <a:srgbClr val="12655A"/>
+                </a:solidFill>
+                <a:latin typeface="Calibri" pitchFamily="34" charset="0"/>
+                <a:ea typeface="Calibri" pitchFamily="34" charset="-122"/>
+                <a:cs typeface="Calibri" pitchFamily="34" charset="-120"/>
+              </a:rPr>
+              <a:t>9</a:t>
+            </a:r>
+            <a:endParaRPr lang="en-US" sz="1300" dirty="0"/>
+          </a:p>
+        </p:txBody>
+      </p:sp>
+      <p:sp>
+        <p:nvSpPr>
+          <p:cNvPr id="19" name="Text 17"/>
+          <p:cNvSpPr txBox="1"/>
+          <p:nvPr/>
+        </p:nvSpPr>
+        <p:spPr>
+          <a:xfrm>
+            <a:off x="1417320" y="4261104"/>
+            <a:ext cx="9875520" cy="731520"/>
+          </a:xfrm>
+          <a:prstGeom prst="rect">
+            <a:avLst/>
+          </a:prstGeom>
+          <a:noFill/>
+          <a:ln/>
+        </p:spPr>
+        <p:txBody>
+          <a:bodyPr wrap="square" lIns="0" tIns="0" rIns="0" bIns="0" rtlCol="0" anchor="ctr"/>
+          <a:lstStyle/>
+          <a:p>
+            <a:pPr indent="0" marL="0">
+              <a:lnSpc>
+                <a:spcPct val="115000"/>
+              </a:lnSpc>
+              <a:buNone/>
+            </a:pPr>
+            <a:r>
+              <a:rPr lang="en-US" sz="1300" dirty="0">
+                <a:solidFill>
+                  <a:srgbClr val="16262E"/>
+                </a:solidFill>
+                <a:latin typeface="Calibri" pitchFamily="34" charset="0"/>
+                <a:ea typeface="Calibri" pitchFamily="34" charset="-122"/>
+                <a:cs typeface="Calibri" pitchFamily="34" charset="-120"/>
+              </a:rPr>
+              <a:t>백그라운드 최적화 마무리, 일간·주간 리포트 집계 + 이메일 전송 구현</a:t>
+            </a:r>
+            <a:endParaRPr lang="en-US" sz="1300" dirty="0"/>
+          </a:p>
+        </p:txBody>
+      </p:sp>
+      <p:sp>
+        <p:nvSpPr>
+          <p:cNvPr id="20" name="Shape 18"/>
+          <p:cNvSpPr/>
+          <p:nvPr/>
+        </p:nvSpPr>
+        <p:spPr>
+          <a:xfrm>
+            <a:off x="640080" y="5102352"/>
+            <a:ext cx="10908792" cy="731520"/>
+          </a:xfrm>
+          <a:prstGeom prst="roundRect">
+            <a:avLst>
+              <a:gd name="adj" fmla="val 12500"/>
+            </a:avLst>
+          </a:prstGeom>
+          <a:solidFill>
+            <a:srgbClr val="FFFFFF"/>
+          </a:solidFill>
+          <a:ln/>
+        </p:spPr>
+      </p:sp>
+      <p:sp>
+        <p:nvSpPr>
+          <p:cNvPr id="21" name="Shape 19"/>
+          <p:cNvSpPr/>
+          <p:nvPr/>
+        </p:nvSpPr>
+        <p:spPr>
+          <a:xfrm>
+            <a:off x="822960" y="5285232"/>
+            <a:ext cx="457200" cy="365760"/>
+          </a:xfrm>
+          <a:prstGeom prst="roundRect">
+            <a:avLst>
+              <a:gd name="adj" fmla="val 20000"/>
+            </a:avLst>
+          </a:prstGeom>
+          <a:solidFill>
+            <a:srgbClr val="E9FBF7"/>
+          </a:solidFill>
+          <a:ln/>
+        </p:spPr>
+      </p:sp>
+      <p:sp>
+        <p:nvSpPr>
+          <p:cNvPr id="22" name="Text 20"/>
+          <p:cNvSpPr txBox="1"/>
+          <p:nvPr/>
+        </p:nvSpPr>
+        <p:spPr>
+          <a:xfrm>
+            <a:off x="822960" y="5285232"/>
+            <a:ext cx="457200" cy="365760"/>
+          </a:xfrm>
+          <a:prstGeom prst="rect">
+            <a:avLst/>
+          </a:prstGeom>
+          <a:noFill/>
+          <a:ln/>
+        </p:spPr>
+        <p:txBody>
+          <a:bodyPr wrap="square" lIns="0" tIns="0" rIns="0" bIns="0" rtlCol="0" anchor="ctr"/>
+          <a:lstStyle/>
+          <a:p>
+            <a:pPr algn="ctr" indent="0" marL="0">
+              <a:buNone/>
+            </a:pPr>
+            <a:r>
+              <a:rPr lang="en-US" sz="1300" b="1" dirty="0">
+                <a:solidFill>
+                  <a:srgbClr val="12655A"/>
+                </a:solidFill>
+                <a:latin typeface="Calibri" pitchFamily="34" charset="0"/>
+                <a:ea typeface="Calibri" pitchFamily="34" charset="-122"/>
+                <a:cs typeface="Calibri" pitchFamily="34" charset="-120"/>
+              </a:rPr>
+              <a:t>10</a:t>
+            </a:r>
+            <a:endParaRPr lang="en-US" sz="1300" dirty="0"/>
+          </a:p>
+        </p:txBody>
+      </p:sp>
+      <p:sp>
+        <p:nvSpPr>
+          <p:cNvPr id="23" name="Text 21"/>
+          <p:cNvSpPr txBox="1"/>
+          <p:nvPr/>
+        </p:nvSpPr>
+        <p:spPr>
+          <a:xfrm>
+            <a:off x="1417320" y="5102352"/>
+            <a:ext cx="9875520" cy="731520"/>
+          </a:xfrm>
+          <a:prstGeom prst="rect">
+            <a:avLst/>
+          </a:prstGeom>
+          <a:noFill/>
+          <a:ln/>
+        </p:spPr>
+        <p:txBody>
+          <a:bodyPr wrap="square" lIns="0" tIns="0" rIns="0" bIns="0" rtlCol="0" anchor="ctr"/>
+          <a:lstStyle/>
+          <a:p>
+            <a:pPr indent="0" marL="0">
+              <a:lnSpc>
+                <a:spcPct val="115000"/>
+              </a:lnSpc>
+              <a:buNone/>
+            </a:pPr>
+            <a:r>
+              <a:rPr lang="en-US" sz="1300" dirty="0">
+                <a:solidFill>
+                  <a:srgbClr val="16262E"/>
+                </a:solidFill>
+                <a:latin typeface="Calibri" pitchFamily="34" charset="0"/>
+                <a:ea typeface="Calibri" pitchFamily="34" charset="-122"/>
+                <a:cs typeface="Calibri" pitchFamily="34" charset="-120"/>
+              </a:rPr>
+              <a:t>최종 통합, 종합 성능 평가, (여유 시) 트레이 아이콘·설정창 포함 exe 패키징 완성</a:t>
+            </a:r>
+            <a:endParaRPr lang="en-US" sz="1300" dirty="0"/>
+          </a:p>
+        </p:txBody>
+      </p:sp>
+      <p:sp>
+        <p:nvSpPr>
+          <p:cNvPr id="24" name="Text 22"/>
+          <p:cNvSpPr txBox="1"/>
+          <p:nvPr/>
+        </p:nvSpPr>
+        <p:spPr>
+          <a:xfrm>
+            <a:off x="640080" y="6035040"/>
+            <a:ext cx="10908792" cy="411480"/>
+          </a:xfrm>
+          <a:prstGeom prst="rect">
+            <a:avLst/>
+          </a:prstGeom>
+          <a:noFill/>
+          <a:ln/>
+        </p:spPr>
+        <p:txBody>
+          <a:bodyPr wrap="square" lIns="0" tIns="0" rIns="0" bIns="0" rtlCol="0" anchor="ctr"/>
+          <a:lstStyle/>
+          <a:p>
+            <a:pPr indent="0" marL="0">
+              <a:buNone/>
+            </a:pPr>
+            <a:r>
+              <a:rPr lang="en-US" sz="1150" i="1" dirty="0">
+                <a:solidFill>
+                  <a:srgbClr val="9FB6BC"/>
+                </a:solidFill>
+                <a:latin typeface="Calibri" pitchFamily="34" charset="0"/>
+                <a:ea typeface="Calibri" pitchFamily="34" charset="-122"/>
+                <a:cs typeface="Calibri" pitchFamily="34" charset="-120"/>
+              </a:rPr>
+              <a:t>논문 초안은 4주차부터 구현과 병행 작성 중 — 이 기간 동안 Methodology·Results 섹션을 함께 채워나갑니다(다음 슬라이드 참고).</a:t>
+            </a:r>
+            <a:endParaRPr lang="en-US" sz="1150" dirty="0"/>
+          </a:p>
+        </p:txBody>
+      </p:sp>
+      <p:sp>
+        <p:nvSpPr>
+          <p:cNvPr id="25" name="Text 23"/>
+          <p:cNvSpPr txBox="1"/>
+          <p:nvPr/>
+        </p:nvSpPr>
+        <p:spPr>
+          <a:xfrm>
+            <a:off x="11365992" y="6355080"/>
+            <a:ext cx="548640" cy="320040"/>
+          </a:xfrm>
+          <a:prstGeom prst="rect">
+            <a:avLst/>
+          </a:prstGeom>
+          <a:noFill/>
+          <a:ln/>
+        </p:spPr>
+        <p:txBody>
+          <a:bodyPr wrap="square" lIns="0" tIns="0" rIns="0" bIns="0" rtlCol="0" anchor="ctr"/>
+          <a:lstStyle/>
+          <a:p>
+            <a:pPr algn="r" indent="0" marL="0">
+              <a:buNone/>
+            </a:pPr>
+            <a:r>
+              <a:rPr lang="en-US" sz="1100" dirty="0">
+                <a:solidFill>
+                  <a:srgbClr val="9FB6BC"/>
+                </a:solidFill>
+                <a:latin typeface="Calibri" pitchFamily="34" charset="0"/>
+                <a:ea typeface="Calibri" pitchFamily="34" charset="-122"/>
+                <a:cs typeface="Calibri" pitchFamily="34" charset="-120"/>
+              </a:rPr>
+              <a:t>09</a:t>
             </a:r>
             <a:endParaRPr lang="en-US" sz="1100" dirty="0"/>
           </a:p>

--- a/barunjase_week4.pptx
+++ b/barunjase_week4.pptx
@@ -2055,7 +2055,7 @@
                 <a:ea typeface="Calibri" pitchFamily="34" charset="-122"/>
                 <a:cs typeface="Calibri" pitchFamily="34" charset="-120"/>
               </a:rPr>
-              <a:t>ROADMAP: WEEKS 11-15</a:t>
+              <a:t>ROADMAP: WEEKS 11-13</a:t>
             </a:r>
             <a:endParaRPr lang="en-US" sz="1200" dirty="0"/>
           </a:p>
@@ -2094,7 +2094,7 @@
                 <a:ea typeface="Arial" pitchFamily="34" charset="-122"/>
                 <a:cs typeface="Arial" pitchFamily="34" charset="-120"/>
               </a:rPr>
-              <a:t>11~15주차 논문·발표 마무리</a:t>
+              <a:t>11~13주차 구현 심화 · 논문 마무리</a:t>
             </a:r>
             <a:endParaRPr lang="en-US" sz="2700" dirty="0"/>
           </a:p>
@@ -2108,12 +2108,12 @@
         </p:nvSpPr>
         <p:spPr>
           <a:xfrm>
-            <a:off x="640080" y="1737360"/>
-            <a:ext cx="10908792" cy="731520"/>
+            <a:off x="640080" y="2103120"/>
+            <a:ext cx="10908792" cy="914400"/>
           </a:xfrm>
           <a:prstGeom prst="roundRect">
             <a:avLst>
-              <a:gd name="adj" fmla="val 12500"/>
+              <a:gd name="adj" fmla="val 10000"/>
             </a:avLst>
           </a:prstGeom>
           <a:solidFill>
@@ -2130,7 +2130,7 @@
         </p:nvSpPr>
         <p:spPr>
           <a:xfrm>
-            <a:off x="822960" y="1920240"/>
+            <a:off x="822960" y="2377440"/>
             <a:ext cx="457200" cy="365760"/>
           </a:xfrm>
           <a:prstGeom prst="roundRect">
@@ -2152,7 +2152,7 @@
         </p:nvSpPr>
         <p:spPr>
           <a:xfrm>
-            <a:off x="822960" y="1920240"/>
+            <a:off x="822960" y="2377440"/>
             <a:ext cx="457200" cy="365760"/>
           </a:xfrm>
           <a:prstGeom prst="rect">
@@ -2191,8 +2191,8 @@
         </p:nvSpPr>
         <p:spPr>
           <a:xfrm>
-            <a:off x="1417320" y="1737360"/>
-            <a:ext cx="9875520" cy="731520"/>
+            <a:off x="1417320" y="2103120"/>
+            <a:ext cx="9875520" cy="914400"/>
           </a:xfrm>
           <a:prstGeom prst="rect">
             <a:avLst/>
@@ -2219,7 +2219,7 @@
                 <a:ea typeface="Calibri" pitchFamily="34" charset="-122"/>
                 <a:cs typeface="Calibri" pitchFamily="34" charset="-120"/>
               </a:rPr>
-              <a:t>4주차부터 병행 작성해온 논문 구조 확정, 전체 초안 리비전 착수</a:t>
+              <a:t>구현 심화·보강 — 10주차까지 완료한 항목 중 미흡했던 부분 보완, 추가 검증 (논문: 전체 드래프트 리비전, 팀원 교차검토)</a:t>
             </a:r>
             <a:endParaRPr lang="en-US" sz="1300" dirty="0"/>
           </a:p>
@@ -2233,12 +2233,12 @@
         </p:nvSpPr>
         <p:spPr>
           <a:xfrm>
-            <a:off x="640080" y="2578608"/>
-            <a:ext cx="10908792" cy="731520"/>
+            <a:off x="640080" y="3154680"/>
+            <a:ext cx="10908792" cy="914400"/>
           </a:xfrm>
           <a:prstGeom prst="roundRect">
             <a:avLst>
-              <a:gd name="adj" fmla="val 12500"/>
+              <a:gd name="adj" fmla="val 10000"/>
             </a:avLst>
           </a:prstGeom>
           <a:solidFill>
@@ -2255,7 +2255,7 @@
         </p:nvSpPr>
         <p:spPr>
           <a:xfrm>
-            <a:off x="822960" y="2761488"/>
+            <a:off x="822960" y="3429000"/>
             <a:ext cx="457200" cy="365760"/>
           </a:xfrm>
           <a:prstGeom prst="roundRect">
@@ -2277,7 +2277,7 @@
         </p:nvSpPr>
         <p:spPr>
           <a:xfrm>
-            <a:off x="822960" y="2761488"/>
+            <a:off x="822960" y="3429000"/>
             <a:ext cx="457200" cy="365760"/>
           </a:xfrm>
           <a:prstGeom prst="rect">
@@ -2316,8 +2316,8 @@
         </p:nvSpPr>
         <p:spPr>
           <a:xfrm>
-            <a:off x="1417320" y="2578608"/>
-            <a:ext cx="9875520" cy="731520"/>
+            <a:off x="1417320" y="3154680"/>
+            <a:ext cx="9875520" cy="914400"/>
           </a:xfrm>
           <a:prstGeom prst="rect">
             <a:avLst/>
@@ -2344,7 +2344,7 @@
                 <a:ea typeface="Calibri" pitchFamily="34" charset="-122"/>
                 <a:cs typeface="Calibri" pitchFamily="34" charset="-120"/>
               </a:rPr>
-              <a:t>리비전 계속, 팀원 간 교차검토(결과 섹션 중심)</a:t>
+              <a:t>구현 심화·보강 계속, 종합 테스트 (논문: 최종 리비전, Multimedia Systems 저널 포맷팅)</a:t>
             </a:r>
             <a:endParaRPr lang="en-US" sz="1300" dirty="0"/>
           </a:p>
@@ -2358,12 +2358,12 @@
         </p:nvSpPr>
         <p:spPr>
           <a:xfrm>
-            <a:off x="640080" y="3419856"/>
-            <a:ext cx="10908792" cy="731520"/>
+            <a:off x="640080" y="4206240"/>
+            <a:ext cx="10908792" cy="914400"/>
           </a:xfrm>
           <a:prstGeom prst="roundRect">
             <a:avLst>
-              <a:gd name="adj" fmla="val 12500"/>
+              <a:gd name="adj" fmla="val 10000"/>
             </a:avLst>
           </a:prstGeom>
           <a:solidFill>
@@ -2380,7 +2380,7 @@
         </p:nvSpPr>
         <p:spPr>
           <a:xfrm>
-            <a:off x="822960" y="3602736"/>
+            <a:off x="822960" y="4480560"/>
             <a:ext cx="457200" cy="365760"/>
           </a:xfrm>
           <a:prstGeom prst="roundRect">
@@ -2402,7 +2402,7 @@
         </p:nvSpPr>
         <p:spPr>
           <a:xfrm>
-            <a:off x="822960" y="3602736"/>
+            <a:off x="822960" y="4480560"/>
             <a:ext cx="457200" cy="365760"/>
           </a:xfrm>
           <a:prstGeom prst="rect">
@@ -2441,8 +2441,8 @@
         </p:nvSpPr>
         <p:spPr>
           <a:xfrm>
-            <a:off x="1417320" y="3419856"/>
-            <a:ext cx="9875520" cy="731520"/>
+            <a:off x="1417320" y="4206240"/>
+            <a:ext cx="9875520" cy="914400"/>
           </a:xfrm>
           <a:prstGeom prst="rect">
             <a:avLst/>
@@ -2469,7 +2469,7 @@
                 <a:ea typeface="Calibri" pitchFamily="34" charset="-122"/>
                 <a:cs typeface="Calibri" pitchFamily="34" charset="-120"/>
               </a:rPr>
-              <a:t>최종 리비전, Multimedia Systems 저널 포맷팅, 논문 전체 리허설 발표</a:t>
+              <a:t>최종 구현 마무리, 최종 수치를 논문 Results·Discussion에 반영 → 논문 드래프트 제출(12/2 마감)</a:t>
             </a:r>
             <a:endParaRPr lang="en-US" sz="1300" dirty="0"/>
           </a:p>
@@ -2477,124 +2477,80 @@
       </p:sp>
       <p:sp>
         <p:nvSpPr>
-          <p:cNvPr id="16" name="Shape 14"/>
-          <p:cNvSpPr/>
-          <p:nvPr/>
-        </p:nvSpPr>
-        <p:spPr>
-          <a:xfrm>
-            <a:off x="640080" y="4261104"/>
-            <a:ext cx="10908792" cy="731520"/>
-          </a:xfrm>
-          <a:prstGeom prst="roundRect">
-            <a:avLst>
-              <a:gd name="adj" fmla="val 12500"/>
-            </a:avLst>
-          </a:prstGeom>
-          <a:solidFill>
-            <a:srgbClr val="FFFFFF"/>
-          </a:solidFill>
-          <a:ln/>
-        </p:spPr>
-      </p:sp>
-      <p:sp>
-        <p:nvSpPr>
-          <p:cNvPr id="17" name="Shape 15"/>
-          <p:cNvSpPr/>
-          <p:nvPr/>
-        </p:nvSpPr>
-        <p:spPr>
-          <a:xfrm>
-            <a:off x="822960" y="4443984"/>
-            <a:ext cx="457200" cy="365760"/>
-          </a:xfrm>
-          <a:prstGeom prst="roundRect">
-            <a:avLst>
-              <a:gd name="adj" fmla="val 20000"/>
-            </a:avLst>
-          </a:prstGeom>
-          <a:solidFill>
-            <a:srgbClr val="E9FBF7"/>
-          </a:solidFill>
-          <a:ln/>
-        </p:spPr>
-      </p:sp>
-      <p:sp>
-        <p:nvSpPr>
-          <p:cNvPr id="18" name="Text 16"/>
-          <p:cNvSpPr txBox="1"/>
-          <p:nvPr/>
-        </p:nvSpPr>
-        <p:spPr>
-          <a:xfrm>
-            <a:off x="822960" y="4443984"/>
-            <a:ext cx="457200" cy="365760"/>
-          </a:xfrm>
-          <a:prstGeom prst="rect">
-            <a:avLst/>
-          </a:prstGeom>
-          <a:noFill/>
-          <a:ln/>
-        </p:spPr>
-        <p:txBody>
-          <a:bodyPr wrap="square" lIns="0" tIns="0" rIns="0" bIns="0" rtlCol="0" anchor="ctr"/>
-          <a:lstStyle/>
-          <a:p>
-            <a:pPr algn="ctr" indent="0" marL="0">
-              <a:buNone/>
-            </a:pPr>
-            <a:r>
-              <a:rPr lang="en-US" sz="1300" b="1" dirty="0">
-                <a:solidFill>
-                  <a:srgbClr val="12655A"/>
+          <p:cNvPr id="16" name="Text 14"/>
+          <p:cNvSpPr txBox="1"/>
+          <p:nvPr/>
+        </p:nvSpPr>
+        <p:spPr>
+          <a:xfrm>
+            <a:off x="640080" y="5623560"/>
+            <a:ext cx="10908792" cy="457200"/>
+          </a:xfrm>
+          <a:prstGeom prst="rect">
+            <a:avLst/>
+          </a:prstGeom>
+          <a:noFill/>
+          <a:ln/>
+        </p:spPr>
+        <p:txBody>
+          <a:bodyPr wrap="square" lIns="0" tIns="0" rIns="0" bIns="0" rtlCol="0" anchor="ctr"/>
+          <a:lstStyle/>
+          <a:p>
+            <a:pPr indent="0" marL="0">
+              <a:lnSpc>
+                <a:spcPct val="120000"/>
+              </a:lnSpc>
+              <a:buNone/>
+            </a:pPr>
+            <a:r>
+              <a:rPr lang="en-US" sz="1100" i="1" dirty="0">
+                <a:solidFill>
+                  <a:srgbClr val="9FB6BC"/>
                 </a:solidFill>
                 <a:latin typeface="Calibri" pitchFamily="34" charset="0"/>
                 <a:ea typeface="Calibri" pitchFamily="34" charset="-122"/>
                 <a:cs typeface="Calibri" pitchFamily="34" charset="-120"/>
               </a:rPr>
-              <a:t>14</a:t>
-            </a:r>
-            <a:endParaRPr lang="en-US" sz="1300" dirty="0"/>
-          </a:p>
-        </p:txBody>
-      </p:sp>
-      <p:sp>
-        <p:nvSpPr>
-          <p:cNvPr id="19" name="Text 17"/>
-          <p:cNvSpPr txBox="1"/>
-          <p:nvPr/>
-        </p:nvSpPr>
-        <p:spPr>
-          <a:xfrm>
-            <a:off x="1417320" y="4261104"/>
-            <a:ext cx="9875520" cy="731520"/>
-          </a:xfrm>
-          <a:prstGeom prst="rect">
-            <a:avLst/>
-          </a:prstGeom>
-          <a:noFill/>
-          <a:ln/>
-        </p:spPr>
-        <p:txBody>
-          <a:bodyPr wrap="square" lIns="0" tIns="0" rIns="0" bIns="0" rtlCol="0" anchor="ctr"/>
-          <a:lstStyle/>
-          <a:p>
-            <a:pPr indent="0" marL="0">
-              <a:lnSpc>
-                <a:spcPct val="115000"/>
-              </a:lnSpc>
-              <a:buNone/>
-            </a:pPr>
-            <a:r>
-              <a:rPr lang="en-US" sz="1300" dirty="0">
-                <a:solidFill>
-                  <a:srgbClr val="16262E"/>
+              <a:t>논문은 4주차부터 계속 병행 작성해온 방식 그대로입니다. 11~13주차를 논문 전용 기간으로 따로 빼지 않고, 남는 시간을 구현 심화에 씁니다. 계획은 12/2 드래프트 제출까지입니다.</a:t>
+            </a:r>
+            <a:endParaRPr lang="en-US" sz="1100" dirty="0"/>
+          </a:p>
+        </p:txBody>
+      </p:sp>
+      <p:sp>
+        <p:nvSpPr>
+          <p:cNvPr id="17" name="Text 15"/>
+          <p:cNvSpPr txBox="1"/>
+          <p:nvPr/>
+        </p:nvSpPr>
+        <p:spPr>
+          <a:xfrm>
+            <a:off x="640080" y="6172200"/>
+            <a:ext cx="10908792" cy="365760"/>
+          </a:xfrm>
+          <a:prstGeom prst="rect">
+            <a:avLst/>
+          </a:prstGeom>
+          <a:noFill/>
+          <a:ln/>
+        </p:spPr>
+        <p:txBody>
+          <a:bodyPr wrap="square" lIns="0" tIns="0" rIns="0" bIns="0" rtlCol="0" anchor="ctr"/>
+          <a:lstStyle/>
+          <a:p>
+            <a:pPr algn="ctr" indent="0" marL="0">
+              <a:buNone/>
+            </a:pPr>
+            <a:r>
+              <a:rPr lang="en-US" sz="1300" i="1" dirty="0">
+                <a:solidFill>
+                  <a:srgbClr val="9FB6BC"/>
                 </a:solidFill>
                 <a:latin typeface="Calibri" pitchFamily="34" charset="0"/>
                 <a:ea typeface="Calibri" pitchFamily="34" charset="-122"/>
                 <a:cs typeface="Calibri" pitchFamily="34" charset="-120"/>
               </a:rPr>
-              <a:t>논문 드래프트 제출(12/2 마감), 제출 후 정리</a:t>
+              <a:t>이상으로 4주차 발표를 마치겠습니다. 질문 받겠습니다.</a:t>
             </a:r>
             <a:endParaRPr lang="en-US" sz="1300" dirty="0"/>
           </a:p>
@@ -2602,171 +2558,7 @@
       </p:sp>
       <p:sp>
         <p:nvSpPr>
-          <p:cNvPr id="20" name="Shape 18"/>
-          <p:cNvSpPr/>
-          <p:nvPr/>
-        </p:nvSpPr>
-        <p:spPr>
-          <a:xfrm>
-            <a:off x="640080" y="5102352"/>
-            <a:ext cx="10908792" cy="731520"/>
-          </a:xfrm>
-          <a:prstGeom prst="roundRect">
-            <a:avLst>
-              <a:gd name="adj" fmla="val 12500"/>
-            </a:avLst>
-          </a:prstGeom>
-          <a:solidFill>
-            <a:srgbClr val="FFFFFF"/>
-          </a:solidFill>
-          <a:ln/>
-        </p:spPr>
-      </p:sp>
-      <p:sp>
-        <p:nvSpPr>
-          <p:cNvPr id="21" name="Shape 19"/>
-          <p:cNvSpPr/>
-          <p:nvPr/>
-        </p:nvSpPr>
-        <p:spPr>
-          <a:xfrm>
-            <a:off x="822960" y="5285232"/>
-            <a:ext cx="457200" cy="365760"/>
-          </a:xfrm>
-          <a:prstGeom prst="roundRect">
-            <a:avLst>
-              <a:gd name="adj" fmla="val 20000"/>
-            </a:avLst>
-          </a:prstGeom>
-          <a:solidFill>
-            <a:srgbClr val="E9FBF7"/>
-          </a:solidFill>
-          <a:ln/>
-        </p:spPr>
-      </p:sp>
-      <p:sp>
-        <p:nvSpPr>
-          <p:cNvPr id="22" name="Text 20"/>
-          <p:cNvSpPr txBox="1"/>
-          <p:nvPr/>
-        </p:nvSpPr>
-        <p:spPr>
-          <a:xfrm>
-            <a:off x="822960" y="5285232"/>
-            <a:ext cx="457200" cy="365760"/>
-          </a:xfrm>
-          <a:prstGeom prst="rect">
-            <a:avLst/>
-          </a:prstGeom>
-          <a:noFill/>
-          <a:ln/>
-        </p:spPr>
-        <p:txBody>
-          <a:bodyPr wrap="square" lIns="0" tIns="0" rIns="0" bIns="0" rtlCol="0" anchor="ctr"/>
-          <a:lstStyle/>
-          <a:p>
-            <a:pPr algn="ctr" indent="0" marL="0">
-              <a:buNone/>
-            </a:pPr>
-            <a:r>
-              <a:rPr lang="en-US" sz="1300" b="1" dirty="0">
-                <a:solidFill>
-                  <a:srgbClr val="12655A"/>
-                </a:solidFill>
-                <a:latin typeface="Calibri" pitchFamily="34" charset="0"/>
-                <a:ea typeface="Calibri" pitchFamily="34" charset="-122"/>
-                <a:cs typeface="Calibri" pitchFamily="34" charset="-120"/>
-              </a:rPr>
-              <a:t>15</a:t>
-            </a:r>
-            <a:endParaRPr lang="en-US" sz="1300" dirty="0"/>
-          </a:p>
-        </p:txBody>
-      </p:sp>
-      <p:sp>
-        <p:nvSpPr>
-          <p:cNvPr id="23" name="Text 21"/>
-          <p:cNvSpPr txBox="1"/>
-          <p:nvPr/>
-        </p:nvSpPr>
-        <p:spPr>
-          <a:xfrm>
-            <a:off x="1417320" y="5102352"/>
-            <a:ext cx="9875520" cy="731520"/>
-          </a:xfrm>
-          <a:prstGeom prst="rect">
-            <a:avLst/>
-          </a:prstGeom>
-          <a:noFill/>
-          <a:ln/>
-        </p:spPr>
-        <p:txBody>
-          <a:bodyPr wrap="square" lIns="0" tIns="0" rIns="0" bIns="0" rtlCol="0" anchor="ctr"/>
-          <a:lstStyle/>
-          <a:p>
-            <a:pPr indent="0" marL="0">
-              <a:lnSpc>
-                <a:spcPct val="115000"/>
-              </a:lnSpc>
-              <a:buNone/>
-            </a:pPr>
-            <a:r>
-              <a:rPr lang="en-US" sz="1300" dirty="0">
-                <a:solidFill>
-                  <a:srgbClr val="16262E"/>
-                </a:solidFill>
-                <a:latin typeface="Calibri" pitchFamily="34" charset="0"/>
-                <a:ea typeface="Calibri" pitchFamily="34" charset="-122"/>
-                <a:cs typeface="Calibri" pitchFamily="34" charset="-120"/>
-              </a:rPr>
-              <a:t>캡스톤 최종 발표 — 제출한 논문 내용을 발표용으로 재구성</a:t>
-            </a:r>
-            <a:endParaRPr lang="en-US" sz="1300" dirty="0"/>
-          </a:p>
-        </p:txBody>
-      </p:sp>
-      <p:sp>
-        <p:nvSpPr>
-          <p:cNvPr id="24" name="Text 22"/>
-          <p:cNvSpPr txBox="1"/>
-          <p:nvPr/>
-        </p:nvSpPr>
-        <p:spPr>
-          <a:xfrm>
-            <a:off x="640080" y="6080760"/>
-            <a:ext cx="10908792" cy="411480"/>
-          </a:xfrm>
-          <a:prstGeom prst="rect">
-            <a:avLst/>
-          </a:prstGeom>
-          <a:noFill/>
-          <a:ln/>
-        </p:spPr>
-        <p:txBody>
-          <a:bodyPr wrap="square" lIns="0" tIns="0" rIns="0" bIns="0" rtlCol="0" anchor="ctr"/>
-          <a:lstStyle/>
-          <a:p>
-            <a:pPr algn="ctr" indent="0" marL="0">
-              <a:buNone/>
-            </a:pPr>
-            <a:r>
-              <a:rPr lang="en-US" sz="1350" i="1" dirty="0">
-                <a:solidFill>
-                  <a:srgbClr val="9FB6BC"/>
-                </a:solidFill>
-                <a:latin typeface="Calibri" pitchFamily="34" charset="0"/>
-                <a:ea typeface="Calibri" pitchFamily="34" charset="-122"/>
-                <a:cs typeface="Calibri" pitchFamily="34" charset="-120"/>
-              </a:rPr>
-              <a:t>이상으로 4주차 발표를 마치겠습니다. 질문 받겠습니다.</a:t>
-            </a:r>
-            <a:endParaRPr lang="en-US" sz="1350" dirty="0"/>
-          </a:p>
-        </p:txBody>
-      </p:sp>
-      <p:sp>
-        <p:nvSpPr>
-          <p:cNvPr id="25" name="Text 23"/>
+          <p:cNvPr id="18" name="Text 16"/>
           <p:cNvSpPr txBox="1"/>
           <p:nvPr/>
         </p:nvSpPr>
@@ -3341,7 +3133,7 @@
                 <a:ea typeface="Calibri" pitchFamily="34" charset="-122"/>
                 <a:cs typeface="Calibri" pitchFamily="34" charset="-120"/>
               </a:rPr>
-              <a:t>07   11~15주차 논문·발표 마무리</a:t>
+              <a:t>07   11~13주차 구현 심화 · 논문 마무리</a:t>
             </a:r>
             <a:endParaRPr lang="en-US" sz="1350" dirty="0"/>
           </a:p>
